--- a/slides/model_layer_mock_1024.pptx
+++ b/slides/model_layer_mock_1024.pptx
@@ -3231,7 +3231,7 @@
                 <a:ea typeface="Microsoft YaHei"/>
                 <a:cs typeface="Microsoft YaHei"/>
               </a:rPr>
-              <a:t>__ 模型：__ 个候选，__ 个过三道门，交付收益 +__%</a:t>
+              <a:t>30B-A3B 单卡：10 个候选，5 个过三道门，峰值吞吐 +37%</a:t>
             </a:r>
           </a:p>
         </p:txBody>
@@ -3278,7 +3278,7 @@
                 <a:ea typeface="Microsoft YaHei"/>
                 <a:cs typeface="Microsoft YaHei"/>
               </a:rPr>
-              <a:t>候选都从基线分叉、收益不叠加——交付的是 D 阶段独立复验后最好的那一个</a:t>
+              <a:t>判定全部来自 M100 真机——数值不对、更慢的当场挡掉，占比太小的不接线</a:t>
             </a:r>
           </a:p>
         </p:txBody>
@@ -3365,62 +3365,29 @@
                 <a:ea typeface="Microsoft YaHei"/>
                 <a:cs typeface="Microsoft YaHei"/>
               </a:rPr>
-              <a:t>__ · __ 精度 · TP__ · 并发 __ · 输入 __ / 输出 __</a:t>
+              <a:t>Qwen3-VL-30B-A3B-Instruct-channel-fp8</a:t>
+            </a:r>
+            <a:r>
+              <a:rPr sz="950" b="0">
+                <a:solidFill>
+                  <a:srgbClr val="1B4D69"/>
+                </a:solidFill>
+                <a:latin typeface="Microsoft YaHei"/>
+                <a:ea typeface="Microsoft YaHei"/>
+                <a:cs typeface="Microsoft YaHei"/>
+              </a:rPr>
+              <a:t>　128 专家 / top-8 · 48 层 · M100 单卡 TP1 · qsx8_lever2 env · 1K/1K · CG-on + overlap-on</a:t>
             </a:r>
             <a:r>
               <a:rPr sz="1000" b="0">
                 <a:solidFill>
-                  <a:srgbClr val="1B4D69"/>
+                  <a:srgbClr val="40708B"/>
                 </a:solidFill>
                 <a:latin typeface="Microsoft YaHei"/>
                 <a:ea typeface="Microsoft YaHei"/>
                 <a:cs typeface="Microsoft YaHei"/>
               </a:rPr>
-              <a:t>　主指标 </a:t>
-            </a:r>
-            <a:r>
-              <a:rPr sz="950" b="1">
-                <a:solidFill>
-                  <a:srgbClr val="0A2B45"/>
-                </a:solidFill>
-                <a:latin typeface="Consolas"/>
-                <a:ea typeface="Microsoft YaHei"/>
-                <a:cs typeface="Microsoft YaHei"/>
-              </a:rPr>
-              <a:t>__</a:t>
-            </a:r>
-            <a:r>
-              <a:rPr sz="1000" b="0">
-                <a:solidFill>
-                  <a:srgbClr val="1B4D69"/>
-                </a:solidFill>
-                <a:latin typeface="Microsoft YaHei"/>
-                <a:ea typeface="Microsoft YaHei"/>
-                <a:cs typeface="Microsoft YaHei"/>
-              </a:rPr>
-              <a:t>　基线 </a:t>
-            </a:r>
-            <a:r>
-              <a:rPr sz="950" b="1">
-                <a:solidFill>
-                  <a:srgbClr val="0A2B45"/>
-                </a:solidFill>
-                <a:latin typeface="Consolas"/>
-                <a:ea typeface="Microsoft YaHei"/>
-                <a:cs typeface="Microsoft YaHei"/>
-              </a:rPr>
-              <a:t>A 阶段 __ → D 阶段重测 __</a:t>
-            </a:r>
-            <a:r>
-              <a:rPr sz="1000" b="0">
-                <a:solidFill>
-                  <a:srgbClr val="40708B"/>
-                </a:solidFill>
-                <a:latin typeface="Microsoft YaHei"/>
-                <a:ea typeface="Microsoft YaHei"/>
-                <a:cs typeface="Microsoft YaHei"/>
-              </a:rPr>
-              <a:t>　两者之差即设备漂移</a:t>
+              <a:t>　主指标 持续输出 tok/s</a:t>
             </a:r>
           </a:p>
         </p:txBody>
@@ -3434,7 +3401,7 @@
         <p:spPr>
           <a:xfrm>
             <a:off x="548640" y="1975104"/>
-            <a:ext cx="6537960" cy="3017520"/>
+            <a:ext cx="2743200" cy="3017520"/>
           </a:xfrm>
           <a:prstGeom prst="rect">
             <a:avLst/>
@@ -3462,8 +3429,8 @@
         </p:nvSpPr>
         <p:spPr>
           <a:xfrm>
-            <a:off x="749808" y="2029968"/>
-            <a:ext cx="2606040" cy="237744"/>
+            <a:off x="749808" y="2048256"/>
+            <a:ext cx="2340864" cy="256032"/>
           </a:xfrm>
           <a:prstGeom prst="rect">
             <a:avLst/>
@@ -3488,7 +3455,7 @@
               </a:spcAft>
             </a:pPr>
             <a:r>
-              <a:rPr sz="1000" b="1">
+              <a:rPr sz="1250" b="1">
                 <a:solidFill>
                   <a:srgbClr val="0A2B45"/>
                 </a:solidFill>
@@ -3496,554 +3463,325 @@
                 <a:ea typeface="Microsoft YaHei"/>
                 <a:cs typeface="Microsoft YaHei"/>
               </a:rPr>
-              <a:t>收益</a:t>
+              <a:t>峰值吞吐</a:t>
             </a:r>
             <a:r>
               <a:rPr sz="1000" b="0">
                 <a:solidFill>
+                  <a:srgbClr val="40708B"/>
+                </a:solidFill>
+                <a:latin typeface="Microsoft YaHei"/>
+                <a:ea typeface="Microsoft YaHei"/>
+                <a:cs typeface="Microsoft YaHei"/>
+              </a:rPr>
+              <a:t>　持续输出 tok/s</a:t>
+            </a:r>
+          </a:p>
+        </p:txBody>
+      </p:sp>
+      <p:sp>
+        <p:nvSpPr>
+          <p:cNvPr id="11" name="TextBox 10"/>
+          <p:cNvSpPr txBox="1"/>
+          <p:nvPr/>
+        </p:nvSpPr>
+        <p:spPr>
+          <a:xfrm>
+            <a:off x="749808" y="2340864"/>
+            <a:ext cx="2340864" cy="475488"/>
+          </a:xfrm>
+          <a:prstGeom prst="rect">
+            <a:avLst/>
+          </a:prstGeom>
+          <a:noFill/>
+        </p:spPr>
+        <p:txBody>
+          <a:bodyPr wrap="square" anchor="ctr" lIns="0" tIns="0" rIns="0" bIns="0">
+            <a:noAutofit/>
+          </a:bodyPr>
+          <a:lstStyle/>
+          <a:p>
+            <a:pPr algn="l" latinLnBrk="0">
+              <a:lnSpc>
+                <a:spcPct val="100000"/>
+              </a:lnSpc>
+              <a:spcBef>
+                <a:spcPts val="0"/>
+              </a:spcBef>
+              <a:spcAft>
+                <a:spcPts val="0"/>
+              </a:spcAft>
+            </a:pPr>
+            <a:r>
+              <a:rPr sz="2800" b="1">
+                <a:solidFill>
+                  <a:srgbClr val="0F62CE"/>
+                </a:solidFill>
+                <a:latin typeface="Arial"/>
+                <a:ea typeface="Microsoft YaHei"/>
+                <a:cs typeface="Microsoft YaHei"/>
+              </a:rPr>
+              <a:t>+37%</a:t>
+            </a:r>
+          </a:p>
+        </p:txBody>
+      </p:sp>
+      <p:sp>
+        <p:nvSpPr>
+          <p:cNvPr id="12" name="Rectangle 11"/>
+          <p:cNvSpPr/>
+          <p:nvPr/>
+        </p:nvSpPr>
+        <p:spPr>
+          <a:xfrm>
+            <a:off x="1005840" y="3416165"/>
+            <a:ext cx="640080" cy="918090"/>
+          </a:xfrm>
+          <a:prstGeom prst="rect">
+            <a:avLst/>
+          </a:prstGeom>
+          <a:solidFill>
+            <a:srgbClr val="AFCEE1"/>
+          </a:solidFill>
+          <a:ln>
+            <a:noFill/>
+          </a:ln>
+        </p:spPr>
+        <p:txBody>
+          <a:bodyPr rtlCol="0" anchor="ctr"/>
+          <a:lstStyle/>
+          <a:p>
+            <a:pPr algn="ctr"/>
+          </a:p>
+        </p:txBody>
+      </p:sp>
+      <p:sp>
+        <p:nvSpPr>
+          <p:cNvPr id="13" name="TextBox 12"/>
+          <p:cNvSpPr txBox="1"/>
+          <p:nvPr/>
+        </p:nvSpPr>
+        <p:spPr>
+          <a:xfrm>
+            <a:off x="777240" y="3160133"/>
+            <a:ext cx="1097280" cy="219456"/>
+          </a:xfrm>
+          <a:prstGeom prst="rect">
+            <a:avLst/>
+          </a:prstGeom>
+          <a:noFill/>
+        </p:spPr>
+        <p:txBody>
+          <a:bodyPr wrap="square" anchor="ctr" lIns="0" tIns="0" rIns="0" bIns="0">
+            <a:noAutofit/>
+          </a:bodyPr>
+          <a:lstStyle/>
+          <a:p>
+            <a:pPr algn="ctr" latinLnBrk="0">
+              <a:lnSpc>
+                <a:spcPct val="100000"/>
+              </a:lnSpc>
+              <a:spcBef>
+                <a:spcPts val="0"/>
+              </a:spcBef>
+              <a:spcAft>
+                <a:spcPts val="0"/>
+              </a:spcAft>
+            </a:pPr>
+            <a:r>
+              <a:rPr sz="1150" b="1">
+                <a:solidFill>
+                  <a:srgbClr val="0A2B45"/>
+                </a:solidFill>
+                <a:latin typeface="Arial"/>
+                <a:ea typeface="Microsoft YaHei"/>
+                <a:cs typeface="Microsoft YaHei"/>
+              </a:rPr>
+              <a:t>1370</a:t>
+            </a:r>
+          </a:p>
+        </p:txBody>
+      </p:sp>
+      <p:sp>
+        <p:nvSpPr>
+          <p:cNvPr id="14" name="TextBox 13"/>
+          <p:cNvSpPr txBox="1"/>
+          <p:nvPr/>
+        </p:nvSpPr>
+        <p:spPr>
+          <a:xfrm>
+            <a:off x="777240" y="4398264"/>
+            <a:ext cx="1097280" cy="201168"/>
+          </a:xfrm>
+          <a:prstGeom prst="rect">
+            <a:avLst/>
+          </a:prstGeom>
+          <a:noFill/>
+        </p:spPr>
+        <p:txBody>
+          <a:bodyPr wrap="square" anchor="ctr" lIns="0" tIns="0" rIns="0" bIns="0">
+            <a:noAutofit/>
+          </a:bodyPr>
+          <a:lstStyle/>
+          <a:p>
+            <a:pPr algn="ctr" latinLnBrk="0">
+              <a:lnSpc>
+                <a:spcPct val="100000"/>
+              </a:lnSpc>
+              <a:spcBef>
+                <a:spcPts val="0"/>
+              </a:spcBef>
+              <a:spcAft>
+                <a:spcPts val="0"/>
+              </a:spcAft>
+            </a:pPr>
+            <a:r>
+              <a:rPr sz="950" b="0">
+                <a:solidFill>
                   <a:srgbClr val="1B4D69"/>
                 </a:solidFill>
                 <a:latin typeface="Microsoft YaHei"/>
                 <a:ea typeface="Microsoft YaHei"/>
                 <a:cs typeface="Microsoft YaHei"/>
               </a:rPr>
-              <a:t> = 候选 ÷ 基线 − 1　重复压测取中位</a:t>
+              <a:t>基线</a:t>
+            </a:r>
+          </a:p>
+        </p:txBody>
+      </p:sp>
+      <p:sp>
+        <p:nvSpPr>
+          <p:cNvPr id="15" name="Rectangle 14"/>
+          <p:cNvSpPr/>
+          <p:nvPr/>
+        </p:nvSpPr>
+        <p:spPr>
+          <a:xfrm>
+            <a:off x="2194560" y="3072384"/>
+            <a:ext cx="640080" cy="1261872"/>
+          </a:xfrm>
+          <a:prstGeom prst="rect">
+            <a:avLst/>
+          </a:prstGeom>
+          <a:solidFill>
+            <a:srgbClr val="0F62CE"/>
+          </a:solidFill>
+          <a:ln>
+            <a:noFill/>
+          </a:ln>
+        </p:spPr>
+        <p:txBody>
+          <a:bodyPr rtlCol="0" anchor="ctr"/>
+          <a:lstStyle/>
+          <a:p>
+            <a:pPr algn="ctr"/>
+          </a:p>
+        </p:txBody>
+      </p:sp>
+      <p:sp>
+        <p:nvSpPr>
+          <p:cNvPr id="16" name="TextBox 15"/>
+          <p:cNvSpPr txBox="1"/>
+          <p:nvPr/>
+        </p:nvSpPr>
+        <p:spPr>
+          <a:xfrm>
+            <a:off x="1965960" y="2816352"/>
+            <a:ext cx="1097280" cy="219456"/>
+          </a:xfrm>
+          <a:prstGeom prst="rect">
+            <a:avLst/>
+          </a:prstGeom>
+          <a:noFill/>
+        </p:spPr>
+        <p:txBody>
+          <a:bodyPr wrap="square" anchor="ctr" lIns="0" tIns="0" rIns="0" bIns="0">
+            <a:noAutofit/>
+          </a:bodyPr>
+          <a:lstStyle/>
+          <a:p>
+            <a:pPr algn="ctr" latinLnBrk="0">
+              <a:lnSpc>
+                <a:spcPct val="100000"/>
+              </a:lnSpc>
+              <a:spcBef>
+                <a:spcPts val="0"/>
+              </a:spcBef>
+              <a:spcAft>
+                <a:spcPts val="0"/>
+              </a:spcAft>
+            </a:pPr>
+            <a:r>
+              <a:rPr sz="1150" b="1">
+                <a:solidFill>
+                  <a:srgbClr val="0A2B45"/>
+                </a:solidFill>
+                <a:latin typeface="Arial"/>
+                <a:ea typeface="Microsoft YaHei"/>
+                <a:cs typeface="Microsoft YaHei"/>
+              </a:rPr>
+              <a:t>1883</a:t>
+            </a:r>
+          </a:p>
+        </p:txBody>
+      </p:sp>
+      <p:sp>
+        <p:nvSpPr>
+          <p:cNvPr id="17" name="TextBox 16"/>
+          <p:cNvSpPr txBox="1"/>
+          <p:nvPr/>
+        </p:nvSpPr>
+        <p:spPr>
+          <a:xfrm>
+            <a:off x="1965960" y="4398264"/>
+            <a:ext cx="1097280" cy="201168"/>
+          </a:xfrm>
+          <a:prstGeom prst="rect">
+            <a:avLst/>
+          </a:prstGeom>
+          <a:noFill/>
+        </p:spPr>
+        <p:txBody>
+          <a:bodyPr wrap="square" anchor="ctr" lIns="0" tIns="0" rIns="0" bIns="0">
+            <a:noAutofit/>
+          </a:bodyPr>
+          <a:lstStyle/>
+          <a:p>
+            <a:pPr algn="ctr" latinLnBrk="0">
+              <a:lnSpc>
+                <a:spcPct val="100000"/>
+              </a:lnSpc>
+              <a:spcBef>
+                <a:spcPts val="0"/>
+              </a:spcBef>
+              <a:spcAft>
+                <a:spcPts val="0"/>
+              </a:spcAft>
+            </a:pPr>
+            <a:r>
+              <a:rPr sz="950" b="0">
+                <a:solidFill>
+                  <a:srgbClr val="1B4D69"/>
+                </a:solidFill>
+                <a:latin typeface="Microsoft YaHei"/>
+                <a:ea typeface="Microsoft YaHei"/>
+                <a:cs typeface="Microsoft YaHei"/>
+              </a:rPr>
+              <a:t>交付</a:t>
             </a:r>
           </a:p>
         </p:txBody>
       </p:sp>
       <p:cxnSp>
         <p:nvCxnSpPr>
-          <p:cNvPr id="11" name="Connector 10"/>
+          <p:cNvPr id="18" name="Connector 17"/>
           <p:cNvCxnSpPr/>
           <p:nvPr/>
         </p:nvCxnSpPr>
         <p:spPr>
           <a:xfrm>
-            <a:off x="3447288" y="2148840"/>
-            <a:ext cx="237744" cy="0"/>
-          </a:xfrm>
-          <a:prstGeom prst="line">
-            <a:avLst/>
-          </a:prstGeom>
-          <a:ln w="15875">
-            <a:solidFill>
-              <a:srgbClr val="0F62CE"/>
-            </a:solidFill>
-            <a:prstDash val="dash"/>
-          </a:ln>
-        </p:spPr>
-      </p:cxnSp>
-      <p:sp>
-        <p:nvSpPr>
-          <p:cNvPr id="12" name="TextBox 11"/>
-          <p:cNvSpPr txBox="1"/>
-          <p:nvPr/>
-        </p:nvSpPr>
-        <p:spPr>
-          <a:xfrm>
-            <a:off x="3739896" y="2011680"/>
-            <a:ext cx="1078992" cy="274320"/>
-          </a:xfrm>
-          <a:prstGeom prst="rect">
-            <a:avLst/>
-          </a:prstGeom>
-          <a:noFill/>
-        </p:spPr>
-        <p:txBody>
-          <a:bodyPr wrap="square" anchor="ctr" lIns="0" tIns="0" rIns="0" bIns="0">
-            <a:noAutofit/>
-          </a:bodyPr>
-          <a:lstStyle/>
-          <a:p>
-            <a:pPr algn="l" latinLnBrk="0">
-              <a:lnSpc>
-                <a:spcPct val="100000"/>
-              </a:lnSpc>
-              <a:spcBef>
-                <a:spcPts val="0"/>
-              </a:spcBef>
-              <a:spcAft>
-                <a:spcPts val="0"/>
-              </a:spcAft>
-            </a:pPr>
-            <a:r>
-              <a:rPr sz="900" b="0">
-                <a:solidFill>
-                  <a:srgbClr val="40708B"/>
-                </a:solidFill>
-                <a:latin typeface="Microsoft YaHei"/>
-                <a:ea typeface="Microsoft YaHei"/>
-                <a:cs typeface="Microsoft YaHei"/>
-              </a:rPr>
-              <a:t>性能门 +3%</a:t>
-            </a:r>
-          </a:p>
-        </p:txBody>
-      </p:sp>
-      <p:cxnSp>
-        <p:nvCxnSpPr>
-          <p:cNvPr id="13" name="Connector 12"/>
-          <p:cNvCxnSpPr/>
-          <p:nvPr/>
-        </p:nvCxnSpPr>
-        <p:spPr>
-          <a:xfrm>
-            <a:off x="4937759" y="2148840"/>
-            <a:ext cx="237744" cy="0"/>
-          </a:xfrm>
-          <a:prstGeom prst="line">
-            <a:avLst/>
-          </a:prstGeom>
-          <a:ln w="15875">
-            <a:solidFill>
-              <a:srgbClr val="D4147A"/>
-            </a:solidFill>
-            <a:prstDash val="dash"/>
-          </a:ln>
-        </p:spPr>
-      </p:cxnSp>
-      <p:sp>
-        <p:nvSpPr>
-          <p:cNvPr id="14" name="TextBox 13"/>
-          <p:cNvSpPr txBox="1"/>
-          <p:nvPr/>
-        </p:nvSpPr>
-        <p:spPr>
-          <a:xfrm>
-            <a:off x="5230368" y="2011680"/>
-            <a:ext cx="1353312" cy="274320"/>
-          </a:xfrm>
-          <a:prstGeom prst="rect">
-            <a:avLst/>
-          </a:prstGeom>
-          <a:noFill/>
-        </p:spPr>
-        <p:txBody>
-          <a:bodyPr wrap="square" anchor="ctr" lIns="0" tIns="0" rIns="0" bIns="0">
-            <a:noAutofit/>
-          </a:bodyPr>
-          <a:lstStyle/>
-          <a:p>
-            <a:pPr algn="l" latinLnBrk="0">
-              <a:lnSpc>
-                <a:spcPct val="100000"/>
-              </a:lnSpc>
-              <a:spcBef>
-                <a:spcPts val="0"/>
-              </a:spcBef>
-              <a:spcAft>
-                <a:spcPts val="0"/>
-              </a:spcAft>
-            </a:pPr>
-            <a:r>
-              <a:rPr sz="900" b="0">
-                <a:solidFill>
-                  <a:srgbClr val="40708B"/>
-                </a:solidFill>
-                <a:latin typeface="Microsoft YaHei"/>
-                <a:ea typeface="Microsoft YaHei"/>
-                <a:cs typeface="Microsoft YaHei"/>
-              </a:rPr>
-              <a:t>噪声极差 __%</a:t>
-            </a:r>
-          </a:p>
-        </p:txBody>
-      </p:sp>
-      <p:cxnSp>
-        <p:nvCxnSpPr>
-          <p:cNvPr id="15" name="Connector 14"/>
-          <p:cNvCxnSpPr/>
-          <p:nvPr/>
-        </p:nvCxnSpPr>
-        <p:spPr>
-          <a:xfrm>
-            <a:off x="1188720" y="4197577"/>
-            <a:ext cx="5349240" cy="0"/>
-          </a:xfrm>
-          <a:prstGeom prst="line">
-            <a:avLst/>
-          </a:prstGeom>
-          <a:ln w="9525">
-            <a:solidFill>
-              <a:srgbClr val="CFE3F0"/>
-            </a:solidFill>
-          </a:ln>
-        </p:spPr>
-      </p:cxnSp>
-      <p:sp>
-        <p:nvSpPr>
-          <p:cNvPr id="16" name="TextBox 15"/>
-          <p:cNvSpPr txBox="1"/>
-          <p:nvPr/>
-        </p:nvSpPr>
-        <p:spPr>
-          <a:xfrm>
-            <a:off x="621792" y="4096993"/>
-            <a:ext cx="457200" cy="201168"/>
-          </a:xfrm>
-          <a:prstGeom prst="rect">
-            <a:avLst/>
-          </a:prstGeom>
-          <a:noFill/>
-        </p:spPr>
-        <p:txBody>
-          <a:bodyPr wrap="square" anchor="ctr" lIns="0" tIns="0" rIns="0" bIns="0">
-            <a:noAutofit/>
-          </a:bodyPr>
-          <a:lstStyle/>
-          <a:p>
-            <a:pPr algn="r" latinLnBrk="0">
-              <a:lnSpc>
-                <a:spcPct val="100000"/>
-              </a:lnSpc>
-              <a:spcBef>
-                <a:spcPts val="0"/>
-              </a:spcBef>
-              <a:spcAft>
-                <a:spcPts val="0"/>
-              </a:spcAft>
-            </a:pPr>
-            <a:r>
-              <a:rPr sz="900" b="0">
-                <a:solidFill>
-                  <a:srgbClr val="7FA4BA"/>
-                </a:solidFill>
-                <a:latin typeface="Consolas"/>
-                <a:ea typeface="Microsoft YaHei"/>
-                <a:cs typeface="Microsoft YaHei"/>
-              </a:rPr>
-              <a:t>__</a:t>
-            </a:r>
-          </a:p>
-        </p:txBody>
-      </p:sp>
-      <p:cxnSp>
-        <p:nvCxnSpPr>
-          <p:cNvPr id="17" name="Connector 16"/>
-          <p:cNvCxnSpPr/>
-          <p:nvPr/>
-        </p:nvCxnSpPr>
-        <p:spPr>
-          <a:xfrm>
-            <a:off x="1188720" y="3797166"/>
-            <a:ext cx="5349240" cy="0"/>
-          </a:xfrm>
-          <a:prstGeom prst="line">
-            <a:avLst/>
-          </a:prstGeom>
-          <a:ln w="12700">
-            <a:solidFill>
-              <a:srgbClr val="7FA4BA"/>
-            </a:solidFill>
-          </a:ln>
-        </p:spPr>
-      </p:cxnSp>
-      <p:sp>
-        <p:nvSpPr>
-          <p:cNvPr id="18" name="TextBox 17"/>
-          <p:cNvSpPr txBox="1"/>
-          <p:nvPr/>
-        </p:nvSpPr>
-        <p:spPr>
-          <a:xfrm>
-            <a:off x="621792" y="3696582"/>
-            <a:ext cx="457200" cy="201168"/>
-          </a:xfrm>
-          <a:prstGeom prst="rect">
-            <a:avLst/>
-          </a:prstGeom>
-          <a:noFill/>
-        </p:spPr>
-        <p:txBody>
-          <a:bodyPr wrap="square" anchor="ctr" lIns="0" tIns="0" rIns="0" bIns="0">
-            <a:noAutofit/>
-          </a:bodyPr>
-          <a:lstStyle/>
-          <a:p>
-            <a:pPr algn="r" latinLnBrk="0">
-              <a:lnSpc>
-                <a:spcPct val="100000"/>
-              </a:lnSpc>
-              <a:spcBef>
-                <a:spcPts val="0"/>
-              </a:spcBef>
-              <a:spcAft>
-                <a:spcPts val="0"/>
-              </a:spcAft>
-            </a:pPr>
-            <a:r>
-              <a:rPr sz="900" b="0">
-                <a:solidFill>
-                  <a:srgbClr val="40708B"/>
-                </a:solidFill>
-                <a:latin typeface="Microsoft YaHei"/>
-                <a:ea typeface="Microsoft YaHei"/>
-                <a:cs typeface="Microsoft YaHei"/>
-              </a:rPr>
-              <a:t>基线</a:t>
-            </a:r>
-          </a:p>
-        </p:txBody>
-      </p:sp>
-      <p:cxnSp>
-        <p:nvCxnSpPr>
-          <p:cNvPr id="19" name="Connector 18"/>
-          <p:cNvCxnSpPr/>
-          <p:nvPr/>
-        </p:nvCxnSpPr>
-        <p:spPr>
-          <a:xfrm>
-            <a:off x="1188720" y="3396755"/>
-            <a:ext cx="5349240" cy="0"/>
-          </a:xfrm>
-          <a:prstGeom prst="line">
-            <a:avLst/>
-          </a:prstGeom>
-          <a:ln w="9525">
-            <a:solidFill>
-              <a:srgbClr val="CFE3F0"/>
-            </a:solidFill>
-          </a:ln>
-        </p:spPr>
-      </p:cxnSp>
-      <p:sp>
-        <p:nvSpPr>
-          <p:cNvPr id="20" name="TextBox 19"/>
-          <p:cNvSpPr txBox="1"/>
-          <p:nvPr/>
-        </p:nvSpPr>
-        <p:spPr>
-          <a:xfrm>
-            <a:off x="621792" y="3296171"/>
-            <a:ext cx="457200" cy="201168"/>
-          </a:xfrm>
-          <a:prstGeom prst="rect">
-            <a:avLst/>
-          </a:prstGeom>
-          <a:noFill/>
-        </p:spPr>
-        <p:txBody>
-          <a:bodyPr wrap="square" anchor="ctr" lIns="0" tIns="0" rIns="0" bIns="0">
-            <a:noAutofit/>
-          </a:bodyPr>
-          <a:lstStyle/>
-          <a:p>
-            <a:pPr algn="r" latinLnBrk="0">
-              <a:lnSpc>
-                <a:spcPct val="100000"/>
-              </a:lnSpc>
-              <a:spcBef>
-                <a:spcPts val="0"/>
-              </a:spcBef>
-              <a:spcAft>
-                <a:spcPts val="0"/>
-              </a:spcAft>
-            </a:pPr>
-            <a:r>
-              <a:rPr sz="900" b="0">
-                <a:solidFill>
-                  <a:srgbClr val="7FA4BA"/>
-                </a:solidFill>
-                <a:latin typeface="Consolas"/>
-                <a:ea typeface="Microsoft YaHei"/>
-                <a:cs typeface="Microsoft YaHei"/>
-              </a:rPr>
-              <a:t>__</a:t>
-            </a:r>
-          </a:p>
-        </p:txBody>
-      </p:sp>
-      <p:cxnSp>
-        <p:nvCxnSpPr>
-          <p:cNvPr id="21" name="Connector 20"/>
-          <p:cNvCxnSpPr/>
-          <p:nvPr/>
-        </p:nvCxnSpPr>
-        <p:spPr>
-          <a:xfrm>
-            <a:off x="1188720" y="2996344"/>
-            <a:ext cx="5349240" cy="0"/>
-          </a:xfrm>
-          <a:prstGeom prst="line">
-            <a:avLst/>
-          </a:prstGeom>
-          <a:ln w="9525">
-            <a:solidFill>
-              <a:srgbClr val="CFE3F0"/>
-            </a:solidFill>
-          </a:ln>
-        </p:spPr>
-      </p:cxnSp>
-      <p:sp>
-        <p:nvSpPr>
-          <p:cNvPr id="22" name="TextBox 21"/>
-          <p:cNvSpPr txBox="1"/>
-          <p:nvPr/>
-        </p:nvSpPr>
-        <p:spPr>
-          <a:xfrm>
-            <a:off x="621792" y="2895760"/>
-            <a:ext cx="457200" cy="201168"/>
-          </a:xfrm>
-          <a:prstGeom prst="rect">
-            <a:avLst/>
-          </a:prstGeom>
-          <a:noFill/>
-        </p:spPr>
-        <p:txBody>
-          <a:bodyPr wrap="square" anchor="ctr" lIns="0" tIns="0" rIns="0" bIns="0">
-            <a:noAutofit/>
-          </a:bodyPr>
-          <a:lstStyle/>
-          <a:p>
-            <a:pPr algn="r" latinLnBrk="0">
-              <a:lnSpc>
-                <a:spcPct val="100000"/>
-              </a:lnSpc>
-              <a:spcBef>
-                <a:spcPts val="0"/>
-              </a:spcBef>
-              <a:spcAft>
-                <a:spcPts val="0"/>
-              </a:spcAft>
-            </a:pPr>
-            <a:r>
-              <a:rPr sz="900" b="0">
-                <a:solidFill>
-                  <a:srgbClr val="7FA4BA"/>
-                </a:solidFill>
-                <a:latin typeface="Consolas"/>
-                <a:ea typeface="Microsoft YaHei"/>
-                <a:cs typeface="Microsoft YaHei"/>
-              </a:rPr>
-              <a:t>__</a:t>
-            </a:r>
-          </a:p>
-        </p:txBody>
-      </p:sp>
-      <p:cxnSp>
-        <p:nvCxnSpPr>
-          <p:cNvPr id="23" name="Connector 22"/>
-          <p:cNvCxnSpPr/>
-          <p:nvPr/>
-        </p:nvCxnSpPr>
-        <p:spPr>
-          <a:xfrm>
-            <a:off x="1188720" y="2595933"/>
-            <a:ext cx="5349240" cy="0"/>
-          </a:xfrm>
-          <a:prstGeom prst="line">
-            <a:avLst/>
-          </a:prstGeom>
-          <a:ln w="9525">
-            <a:solidFill>
-              <a:srgbClr val="CFE3F0"/>
-            </a:solidFill>
-          </a:ln>
-        </p:spPr>
-      </p:cxnSp>
-      <p:sp>
-        <p:nvSpPr>
-          <p:cNvPr id="24" name="TextBox 23"/>
-          <p:cNvSpPr txBox="1"/>
-          <p:nvPr/>
-        </p:nvSpPr>
-        <p:spPr>
-          <a:xfrm>
-            <a:off x="621792" y="2495349"/>
-            <a:ext cx="457200" cy="201168"/>
-          </a:xfrm>
-          <a:prstGeom prst="rect">
-            <a:avLst/>
-          </a:prstGeom>
-          <a:noFill/>
-        </p:spPr>
-        <p:txBody>
-          <a:bodyPr wrap="square" anchor="ctr" lIns="0" tIns="0" rIns="0" bIns="0">
-            <a:noAutofit/>
-          </a:bodyPr>
-          <a:lstStyle/>
-          <a:p>
-            <a:pPr algn="r" latinLnBrk="0">
-              <a:lnSpc>
-                <a:spcPct val="100000"/>
-              </a:lnSpc>
-              <a:spcBef>
-                <a:spcPts val="0"/>
-              </a:spcBef>
-              <a:spcAft>
-                <a:spcPts val="0"/>
-              </a:spcAft>
-            </a:pPr>
-            <a:r>
-              <a:rPr sz="900" b="0">
-                <a:solidFill>
-                  <a:srgbClr val="7FA4BA"/>
-                </a:solidFill>
-                <a:latin typeface="Consolas"/>
-                <a:ea typeface="Microsoft YaHei"/>
-                <a:cs typeface="Microsoft YaHei"/>
-              </a:rPr>
-              <a:t>__</a:t>
-            </a:r>
-          </a:p>
-        </p:txBody>
-      </p:sp>
-      <p:cxnSp>
-        <p:nvCxnSpPr>
-          <p:cNvPr id="25" name="Connector 24"/>
-          <p:cNvCxnSpPr/>
-          <p:nvPr/>
-        </p:nvCxnSpPr>
-        <p:spPr>
-          <a:xfrm>
-            <a:off x="1188720" y="3496858"/>
-            <a:ext cx="5349240" cy="0"/>
-          </a:xfrm>
-          <a:prstGeom prst="line">
-            <a:avLst/>
-          </a:prstGeom>
-          <a:ln w="12700">
-            <a:solidFill>
-              <a:srgbClr val="0F62CE"/>
-            </a:solidFill>
-            <a:prstDash val="dash"/>
-          </a:ln>
-        </p:spPr>
-      </p:cxnSp>
-      <p:cxnSp>
-        <p:nvCxnSpPr>
-          <p:cNvPr id="26" name="Connector 25"/>
-          <p:cNvCxnSpPr/>
-          <p:nvPr/>
-        </p:nvCxnSpPr>
-        <p:spPr>
-          <a:xfrm>
-            <a:off x="1188720" y="3616981"/>
-            <a:ext cx="5349240" cy="0"/>
-          </a:xfrm>
-          <a:prstGeom prst="line">
-            <a:avLst/>
-          </a:prstGeom>
-          <a:ln w="12700">
-            <a:solidFill>
-              <a:srgbClr val="D4147A"/>
-            </a:solidFill>
-            <a:prstDash val="dash"/>
-          </a:ln>
-        </p:spPr>
-      </p:cxnSp>
-      <p:cxnSp>
-        <p:nvCxnSpPr>
-          <p:cNvPr id="27" name="Connector 26"/>
-          <p:cNvCxnSpPr/>
-          <p:nvPr/>
-        </p:nvCxnSpPr>
-        <p:spPr>
-          <a:xfrm>
-            <a:off x="1188720" y="4297680"/>
-            <a:ext cx="5349240" cy="0"/>
+            <a:off x="822959" y="4334256"/>
+            <a:ext cx="2194561" cy="0"/>
           </a:xfrm>
           <a:prstGeom prst="line">
             <a:avLst/>
@@ -4057,979 +3795,61 @@
       </p:cxnSp>
       <p:sp>
         <p:nvSpPr>
-          <p:cNvPr id="28" name="TextBox 27"/>
-          <p:cNvSpPr txBox="1"/>
-          <p:nvPr/>
-        </p:nvSpPr>
-        <p:spPr>
-          <a:xfrm>
-            <a:off x="1389888" y="4334256"/>
-            <a:ext cx="603504" cy="201168"/>
-          </a:xfrm>
-          <a:prstGeom prst="rect">
-            <a:avLst/>
-          </a:prstGeom>
-          <a:noFill/>
-        </p:spPr>
-        <p:txBody>
-          <a:bodyPr wrap="square" anchor="ctr" lIns="0" tIns="0" rIns="0" bIns="0">
-            <a:noAutofit/>
-          </a:bodyPr>
-          <a:lstStyle/>
-          <a:p>
-            <a:pPr algn="ctr" latinLnBrk="0">
-              <a:lnSpc>
-                <a:spcPct val="100000"/>
-              </a:lnSpc>
-              <a:spcBef>
-                <a:spcPts val="0"/>
-              </a:spcBef>
-              <a:spcAft>
-                <a:spcPts val="0"/>
-              </a:spcAft>
-            </a:pPr>
-            <a:r>
-              <a:rPr sz="950" b="0">
+          <p:cNvPr id="19" name="TextBox 18"/>
+          <p:cNvSpPr txBox="1"/>
+          <p:nvPr/>
+        </p:nvSpPr>
+        <p:spPr>
+          <a:xfrm>
+            <a:off x="749808" y="4681728"/>
+            <a:ext cx="2340864" cy="219456"/>
+          </a:xfrm>
+          <a:prstGeom prst="rect">
+            <a:avLst/>
+          </a:prstGeom>
+          <a:noFill/>
+        </p:spPr>
+        <p:txBody>
+          <a:bodyPr wrap="square" anchor="ctr" lIns="0" tIns="0" rIns="0" bIns="0">
+            <a:noAutofit/>
+          </a:bodyPr>
+          <a:lstStyle/>
+          <a:p>
+            <a:pPr algn="l" latinLnBrk="0">
+              <a:lnSpc>
+                <a:spcPct val="100000"/>
+              </a:lnSpc>
+              <a:spcBef>
+                <a:spcPts val="0"/>
+              </a:spcBef>
+              <a:spcAft>
+                <a:spcPts val="0"/>
+              </a:spcAft>
+            </a:pPr>
+            <a:r>
+              <a:rPr sz="900" b="0">
                 <a:solidFill>
                   <a:srgbClr val="40708B"/>
                 </a:solidFill>
-                <a:latin typeface="Consolas"/>
-                <a:ea typeface="Microsoft YaHei"/>
-                <a:cs typeface="Microsoft YaHei"/>
-              </a:rPr>
-              <a:t>C1</a:t>
-            </a:r>
-          </a:p>
-        </p:txBody>
-      </p:sp>
-      <p:sp>
-        <p:nvSpPr>
-          <p:cNvPr id="29" name="Oval 28"/>
+                <a:latin typeface="Microsoft YaHei"/>
+                <a:ea typeface="Microsoft YaHei"/>
+                <a:cs typeface="Microsoft YaHei"/>
+              </a:rPr>
+              <a:t>基线峰值在 c128，1K/1K</a:t>
+            </a:r>
+          </a:p>
+        </p:txBody>
+      </p:sp>
+      <p:sp>
+        <p:nvSpPr>
+          <p:cNvPr id="20" name="Rectangle 19"/>
           <p:cNvSpPr/>
           <p:nvPr/>
         </p:nvSpPr>
         <p:spPr>
           <a:xfrm>
-            <a:off x="1627632" y="3653076"/>
-            <a:ext cx="128016" cy="128016"/>
-          </a:xfrm>
-          <a:prstGeom prst="ellipse">
-            <a:avLst/>
-          </a:prstGeom>
-          <a:solidFill>
-            <a:srgbClr val="AFCEE1"/>
-          </a:solidFill>
-          <a:ln w="15875">
-            <a:solidFill>
-              <a:srgbClr val="FFFFFF"/>
-            </a:solidFill>
-          </a:ln>
-        </p:spPr>
-        <p:txBody>
-          <a:bodyPr rtlCol="0" anchor="ctr"/>
-          <a:lstStyle/>
-          <a:p>
-            <a:pPr algn="ctr"/>
-          </a:p>
-        </p:txBody>
-      </p:sp>
-      <p:sp>
-        <p:nvSpPr>
-          <p:cNvPr id="30" name="TextBox 29"/>
-          <p:cNvSpPr txBox="1"/>
-          <p:nvPr/>
-        </p:nvSpPr>
-        <p:spPr>
-          <a:xfrm>
-            <a:off x="1801368" y="3616500"/>
-            <a:ext cx="457200" cy="201168"/>
-          </a:xfrm>
-          <a:prstGeom prst="rect">
-            <a:avLst/>
-          </a:prstGeom>
-          <a:noFill/>
-        </p:spPr>
-        <p:txBody>
-          <a:bodyPr wrap="square" anchor="ctr" lIns="0" tIns="0" rIns="0" bIns="0">
-            <a:noAutofit/>
-          </a:bodyPr>
-          <a:lstStyle/>
-          <a:p>
-            <a:pPr algn="l" latinLnBrk="0">
-              <a:lnSpc>
-                <a:spcPct val="100000"/>
-              </a:lnSpc>
-              <a:spcBef>
-                <a:spcPts val="0"/>
-              </a:spcBef>
-              <a:spcAft>
-                <a:spcPts val="0"/>
-              </a:spcAft>
-            </a:pPr>
-            <a:r>
-              <a:rPr sz="950" b="1">
-                <a:solidFill>
-                  <a:srgbClr val="7FA4BA"/>
-                </a:solidFill>
-                <a:latin typeface="Consolas"/>
-                <a:ea typeface="Microsoft YaHei"/>
-                <a:cs typeface="Microsoft YaHei"/>
-              </a:rPr>
-              <a:t>__</a:t>
-            </a:r>
-          </a:p>
-        </p:txBody>
-      </p:sp>
-      <p:sp>
-        <p:nvSpPr>
-          <p:cNvPr id="31" name="TextBox 30"/>
-          <p:cNvSpPr txBox="1"/>
-          <p:nvPr/>
-        </p:nvSpPr>
-        <p:spPr>
-          <a:xfrm>
-            <a:off x="2510028" y="4334256"/>
-            <a:ext cx="603504" cy="201168"/>
-          </a:xfrm>
-          <a:prstGeom prst="rect">
-            <a:avLst/>
-          </a:prstGeom>
-          <a:noFill/>
-        </p:spPr>
-        <p:txBody>
-          <a:bodyPr wrap="square" anchor="ctr" lIns="0" tIns="0" rIns="0" bIns="0">
-            <a:noAutofit/>
-          </a:bodyPr>
-          <a:lstStyle/>
-          <a:p>
-            <a:pPr algn="ctr" latinLnBrk="0">
-              <a:lnSpc>
-                <a:spcPct val="100000"/>
-              </a:lnSpc>
-              <a:spcBef>
-                <a:spcPts val="0"/>
-              </a:spcBef>
-              <a:spcAft>
-                <a:spcPts val="0"/>
-              </a:spcAft>
-            </a:pPr>
-            <a:r>
-              <a:rPr sz="950" b="0">
-                <a:solidFill>
-                  <a:srgbClr val="40708B"/>
-                </a:solidFill>
-                <a:latin typeface="Consolas"/>
-                <a:ea typeface="Microsoft YaHei"/>
-                <a:cs typeface="Microsoft YaHei"/>
-              </a:rPr>
-              <a:t>C2</a:t>
-            </a:r>
-          </a:p>
-        </p:txBody>
-      </p:sp>
-      <p:cxnSp>
-        <p:nvCxnSpPr>
-          <p:cNvPr id="32" name="Connector 31"/>
-          <p:cNvCxnSpPr/>
-          <p:nvPr/>
-        </p:nvCxnSpPr>
-        <p:spPr>
-          <a:xfrm>
-            <a:off x="2702052" y="3146498"/>
-            <a:ext cx="219456" cy="150154"/>
-          </a:xfrm>
-          <a:prstGeom prst="line">
-            <a:avLst/>
-          </a:prstGeom>
-          <a:ln w="15875">
-            <a:solidFill>
-              <a:srgbClr val="AFCEE1"/>
-            </a:solidFill>
-          </a:ln>
-        </p:spPr>
-      </p:cxnSp>
-      <p:sp>
-        <p:nvSpPr>
-          <p:cNvPr id="33" name="Oval 32"/>
-          <p:cNvSpPr/>
-          <p:nvPr/>
-        </p:nvSpPr>
-        <p:spPr>
-          <a:xfrm>
-            <a:off x="2638044" y="3082490"/>
-            <a:ext cx="128016" cy="128016"/>
-          </a:xfrm>
-          <a:prstGeom prst="ellipse">
-            <a:avLst/>
-          </a:prstGeom>
-          <a:solidFill>
-            <a:srgbClr val="AFCEE1"/>
-          </a:solidFill>
-          <a:ln w="15875">
-            <a:solidFill>
-              <a:srgbClr val="FFFFFF"/>
-            </a:solidFill>
-          </a:ln>
-        </p:spPr>
-        <p:txBody>
-          <a:bodyPr rtlCol="0" anchor="ctr"/>
-          <a:lstStyle/>
-          <a:p>
-            <a:pPr algn="ctr"/>
-          </a:p>
-        </p:txBody>
-      </p:sp>
-      <p:sp>
-        <p:nvSpPr>
-          <p:cNvPr id="34" name="Oval 33"/>
-          <p:cNvSpPr/>
-          <p:nvPr/>
-        </p:nvSpPr>
-        <p:spPr>
-          <a:xfrm>
-            <a:off x="2848356" y="3223500"/>
-            <a:ext cx="146304" cy="146304"/>
-          </a:xfrm>
-          <a:prstGeom prst="ellipse">
-            <a:avLst/>
-          </a:prstGeom>
-          <a:solidFill>
-            <a:srgbClr val="FFFFFF"/>
-          </a:solidFill>
-          <a:ln w="22225">
-            <a:solidFill>
-              <a:srgbClr val="AFCEE1"/>
-            </a:solidFill>
-          </a:ln>
-        </p:spPr>
-        <p:txBody>
-          <a:bodyPr rtlCol="0" anchor="ctr"/>
-          <a:lstStyle/>
-          <a:p>
-            <a:pPr algn="ctr"/>
-          </a:p>
-        </p:txBody>
-      </p:sp>
-      <p:sp>
-        <p:nvSpPr>
-          <p:cNvPr id="35" name="TextBox 34"/>
-          <p:cNvSpPr txBox="1"/>
-          <p:nvPr/>
-        </p:nvSpPr>
-        <p:spPr>
-          <a:xfrm>
-            <a:off x="2308860" y="2844746"/>
-            <a:ext cx="1005840" cy="201168"/>
-          </a:xfrm>
-          <a:prstGeom prst="rect">
-            <a:avLst/>
-          </a:prstGeom>
-          <a:noFill/>
-        </p:spPr>
-        <p:txBody>
-          <a:bodyPr wrap="square" anchor="ctr" lIns="0" tIns="0" rIns="0" bIns="0">
-            <a:noAutofit/>
-          </a:bodyPr>
-          <a:lstStyle/>
-          <a:p>
-            <a:pPr algn="ctr" latinLnBrk="0">
-              <a:lnSpc>
-                <a:spcPct val="100000"/>
-              </a:lnSpc>
-              <a:spcBef>
-                <a:spcPts val="0"/>
-              </a:spcBef>
-              <a:spcAft>
-                <a:spcPts val="0"/>
-              </a:spcAft>
-            </a:pPr>
-            <a:r>
-              <a:rPr sz="950" b="1">
-                <a:solidFill>
-                  <a:srgbClr val="7FA4BA"/>
-                </a:solidFill>
-                <a:latin typeface="Consolas"/>
-                <a:ea typeface="Microsoft YaHei"/>
-                <a:cs typeface="Microsoft YaHei"/>
-              </a:rPr>
-              <a:t>__ → __</a:t>
-            </a:r>
-          </a:p>
-        </p:txBody>
-      </p:sp>
-      <p:sp>
-        <p:nvSpPr>
-          <p:cNvPr id="36" name="TextBox 35"/>
-          <p:cNvSpPr txBox="1"/>
-          <p:nvPr/>
-        </p:nvSpPr>
-        <p:spPr>
-          <a:xfrm>
-            <a:off x="3630168" y="4334256"/>
-            <a:ext cx="603504" cy="201168"/>
-          </a:xfrm>
-          <a:prstGeom prst="rect">
-            <a:avLst/>
-          </a:prstGeom>
-          <a:noFill/>
-        </p:spPr>
-        <p:txBody>
-          <a:bodyPr wrap="square" anchor="ctr" lIns="0" tIns="0" rIns="0" bIns="0">
-            <a:noAutofit/>
-          </a:bodyPr>
-          <a:lstStyle/>
-          <a:p>
-            <a:pPr algn="ctr" latinLnBrk="0">
-              <a:lnSpc>
-                <a:spcPct val="100000"/>
-              </a:lnSpc>
-              <a:spcBef>
-                <a:spcPts val="0"/>
-              </a:spcBef>
-              <a:spcAft>
-                <a:spcPts val="0"/>
-              </a:spcAft>
-            </a:pPr>
-            <a:r>
-              <a:rPr sz="950" b="0">
-                <a:solidFill>
-                  <a:srgbClr val="40708B"/>
-                </a:solidFill>
-                <a:latin typeface="Consolas"/>
-                <a:ea typeface="Microsoft YaHei"/>
-                <a:cs typeface="Microsoft YaHei"/>
-              </a:rPr>
-              <a:t>C3</a:t>
-            </a:r>
-          </a:p>
-        </p:txBody>
-      </p:sp>
-      <p:cxnSp>
-        <p:nvCxnSpPr>
-          <p:cNvPr id="37" name="Connector 36"/>
-          <p:cNvCxnSpPr/>
-          <p:nvPr/>
-        </p:nvCxnSpPr>
-        <p:spPr>
-          <a:xfrm>
-            <a:off x="3877056" y="4242816"/>
-            <a:ext cx="109728" cy="109728"/>
-          </a:xfrm>
-          <a:prstGeom prst="line">
-            <a:avLst/>
-          </a:prstGeom>
-          <a:ln w="19050">
-            <a:solidFill>
-              <a:srgbClr val="7FA4BA"/>
-            </a:solidFill>
-          </a:ln>
-        </p:spPr>
-      </p:cxnSp>
-      <p:cxnSp>
-        <p:nvCxnSpPr>
-          <p:cNvPr id="38" name="Connector 37"/>
-          <p:cNvCxnSpPr/>
-          <p:nvPr/>
-        </p:nvCxnSpPr>
-        <p:spPr>
-          <a:xfrm flipV="1">
-            <a:off x="3877056" y="4242816"/>
-            <a:ext cx="109728" cy="109728"/>
-          </a:xfrm>
-          <a:prstGeom prst="line">
-            <a:avLst/>
-          </a:prstGeom>
-          <a:ln w="19050">
-            <a:solidFill>
-              <a:srgbClr val="7FA4BA"/>
-            </a:solidFill>
-          </a:ln>
-        </p:spPr>
-      </p:cxnSp>
-      <p:sp>
-        <p:nvSpPr>
-          <p:cNvPr id="39" name="TextBox 38"/>
-          <p:cNvSpPr txBox="1"/>
-          <p:nvPr/>
-        </p:nvSpPr>
-        <p:spPr>
-          <a:xfrm>
-            <a:off x="3520440" y="3986784"/>
-            <a:ext cx="822960" cy="201168"/>
-          </a:xfrm>
-          <a:prstGeom prst="rect">
-            <a:avLst/>
-          </a:prstGeom>
-          <a:noFill/>
-        </p:spPr>
-        <p:txBody>
-          <a:bodyPr wrap="square" anchor="ctr" lIns="0" tIns="0" rIns="0" bIns="0">
-            <a:noAutofit/>
-          </a:bodyPr>
-          <a:lstStyle/>
-          <a:p>
-            <a:pPr algn="ctr" latinLnBrk="0">
-              <a:lnSpc>
-                <a:spcPct val="100000"/>
-              </a:lnSpc>
-              <a:spcBef>
-                <a:spcPts val="0"/>
-              </a:spcBef>
-              <a:spcAft>
-                <a:spcPts val="0"/>
-              </a:spcAft>
-            </a:pPr>
-            <a:r>
-              <a:rPr sz="900" b="0">
-                <a:solidFill>
-                  <a:srgbClr val="7FA4BA"/>
-                </a:solidFill>
-                <a:latin typeface="Microsoft YaHei"/>
-                <a:ea typeface="Microsoft YaHei"/>
-                <a:cs typeface="Microsoft YaHei"/>
-              </a:rPr>
-              <a:t>停在 __</a:t>
-            </a:r>
-          </a:p>
-        </p:txBody>
-      </p:sp>
-      <p:sp>
-        <p:nvSpPr>
-          <p:cNvPr id="40" name="TextBox 39"/>
-          <p:cNvSpPr txBox="1"/>
-          <p:nvPr/>
-        </p:nvSpPr>
-        <p:spPr>
-          <a:xfrm>
-            <a:off x="4750308" y="4334256"/>
-            <a:ext cx="603504" cy="201168"/>
-          </a:xfrm>
-          <a:prstGeom prst="rect">
-            <a:avLst/>
-          </a:prstGeom>
-          <a:noFill/>
-        </p:spPr>
-        <p:txBody>
-          <a:bodyPr wrap="square" anchor="ctr" lIns="0" tIns="0" rIns="0" bIns="0">
-            <a:noAutofit/>
-          </a:bodyPr>
-          <a:lstStyle/>
-          <a:p>
-            <a:pPr algn="ctr" latinLnBrk="0">
-              <a:lnSpc>
-                <a:spcPct val="100000"/>
-              </a:lnSpc>
-              <a:spcBef>
-                <a:spcPts val="0"/>
-              </a:spcBef>
-              <a:spcAft>
-                <a:spcPts val="0"/>
-              </a:spcAft>
-            </a:pPr>
-            <a:r>
-              <a:rPr sz="950" b="0">
-                <a:solidFill>
-                  <a:srgbClr val="40708B"/>
-                </a:solidFill>
-                <a:latin typeface="Consolas"/>
-                <a:ea typeface="Microsoft YaHei"/>
-                <a:cs typeface="Microsoft YaHei"/>
-              </a:rPr>
-              <a:t>C4</a:t>
-            </a:r>
-          </a:p>
-        </p:txBody>
-      </p:sp>
-      <p:cxnSp>
-        <p:nvCxnSpPr>
-          <p:cNvPr id="41" name="Connector 40"/>
-          <p:cNvCxnSpPr/>
-          <p:nvPr/>
-        </p:nvCxnSpPr>
-        <p:spPr>
-          <a:xfrm>
-            <a:off x="4942332" y="2746087"/>
-            <a:ext cx="219456" cy="190195"/>
-          </a:xfrm>
-          <a:prstGeom prst="line">
-            <a:avLst/>
-          </a:prstGeom>
-          <a:ln w="15875">
-            <a:solidFill>
-              <a:srgbClr val="AFCEE1"/>
-            </a:solidFill>
-          </a:ln>
-        </p:spPr>
-      </p:cxnSp>
-      <p:sp>
-        <p:nvSpPr>
-          <p:cNvPr id="42" name="Oval 41"/>
-          <p:cNvSpPr/>
-          <p:nvPr/>
-        </p:nvSpPr>
-        <p:spPr>
-          <a:xfrm>
-            <a:off x="4878324" y="2682079"/>
-            <a:ext cx="128016" cy="128016"/>
-          </a:xfrm>
-          <a:prstGeom prst="ellipse">
-            <a:avLst/>
-          </a:prstGeom>
-          <a:solidFill>
-            <a:srgbClr val="AFCEE1"/>
-          </a:solidFill>
-          <a:ln w="15875">
-            <a:solidFill>
-              <a:srgbClr val="FFFFFF"/>
-            </a:solidFill>
-          </a:ln>
-        </p:spPr>
-        <p:txBody>
-          <a:bodyPr rtlCol="0" anchor="ctr"/>
-          <a:lstStyle/>
-          <a:p>
-            <a:pPr algn="ctr"/>
-          </a:p>
-        </p:txBody>
-      </p:sp>
-      <p:sp>
-        <p:nvSpPr>
-          <p:cNvPr id="43" name="Oval 42"/>
-          <p:cNvSpPr/>
-          <p:nvPr/>
-        </p:nvSpPr>
-        <p:spPr>
-          <a:xfrm>
-            <a:off x="5070348" y="2844842"/>
-            <a:ext cx="182880" cy="182880"/>
-          </a:xfrm>
-          <a:prstGeom prst="ellipse">
-            <a:avLst/>
-          </a:prstGeom>
-          <a:solidFill>
-            <a:srgbClr val="FFFFFF"/>
-          </a:solidFill>
-          <a:ln w="22225">
-            <a:solidFill>
-              <a:srgbClr val="40708B"/>
-            </a:solidFill>
-          </a:ln>
-        </p:spPr>
-        <p:txBody>
-          <a:bodyPr rtlCol="0" anchor="ctr"/>
-          <a:lstStyle/>
-          <a:p>
-            <a:pPr algn="ctr"/>
-          </a:p>
-        </p:txBody>
-      </p:sp>
-      <p:sp>
-        <p:nvSpPr>
-          <p:cNvPr id="44" name="TextBox 43"/>
-          <p:cNvSpPr txBox="1"/>
-          <p:nvPr/>
-        </p:nvSpPr>
-        <p:spPr>
-          <a:xfrm>
-            <a:off x="4549140" y="2444335"/>
-            <a:ext cx="1005840" cy="201168"/>
-          </a:xfrm>
-          <a:prstGeom prst="rect">
-            <a:avLst/>
-          </a:prstGeom>
-          <a:noFill/>
-        </p:spPr>
-        <p:txBody>
-          <a:bodyPr wrap="square" anchor="ctr" lIns="0" tIns="0" rIns="0" bIns="0">
-            <a:noAutofit/>
-          </a:bodyPr>
-          <a:lstStyle/>
-          <a:p>
-            <a:pPr algn="ctr" latinLnBrk="0">
-              <a:lnSpc>
-                <a:spcPct val="100000"/>
-              </a:lnSpc>
-              <a:spcBef>
-                <a:spcPts val="0"/>
-              </a:spcBef>
-              <a:spcAft>
-                <a:spcPts val="0"/>
-              </a:spcAft>
-            </a:pPr>
-            <a:r>
-              <a:rPr sz="950" b="1">
-                <a:solidFill>
-                  <a:srgbClr val="7FA4BA"/>
-                </a:solidFill>
-                <a:latin typeface="Consolas"/>
-                <a:ea typeface="Microsoft YaHei"/>
-                <a:cs typeface="Microsoft YaHei"/>
-              </a:rPr>
-              <a:t>__ → __</a:t>
-            </a:r>
-          </a:p>
-        </p:txBody>
-      </p:sp>
-      <p:sp>
-        <p:nvSpPr>
-          <p:cNvPr id="45" name="TextBox 44"/>
-          <p:cNvSpPr txBox="1"/>
-          <p:nvPr/>
-        </p:nvSpPr>
-        <p:spPr>
-          <a:xfrm>
-            <a:off x="4887468" y="3055154"/>
-            <a:ext cx="548640" cy="201168"/>
-          </a:xfrm>
-          <a:prstGeom prst="rect">
-            <a:avLst/>
-          </a:prstGeom>
-          <a:noFill/>
-        </p:spPr>
-        <p:txBody>
-          <a:bodyPr wrap="square" anchor="ctr" lIns="0" tIns="0" rIns="0" bIns="0">
-            <a:noAutofit/>
-          </a:bodyPr>
-          <a:lstStyle/>
-          <a:p>
-            <a:pPr algn="ctr" latinLnBrk="0">
-              <a:lnSpc>
-                <a:spcPct val="100000"/>
-              </a:lnSpc>
-              <a:spcBef>
-                <a:spcPts val="0"/>
-              </a:spcBef>
-              <a:spcAft>
-                <a:spcPts val="0"/>
-              </a:spcAft>
-            </a:pPr>
-            <a:r>
-              <a:rPr sz="950" b="1">
-                <a:solidFill>
-                  <a:srgbClr val="1B4D69"/>
-                </a:solidFill>
-                <a:latin typeface="Microsoft YaHei"/>
-                <a:ea typeface="Microsoft YaHei"/>
-                <a:cs typeface="Microsoft YaHei"/>
-              </a:rPr>
-              <a:t>交付</a:t>
-            </a:r>
-          </a:p>
-        </p:txBody>
-      </p:sp>
-      <p:sp>
-        <p:nvSpPr>
-          <p:cNvPr id="46" name="TextBox 45"/>
-          <p:cNvSpPr txBox="1"/>
-          <p:nvPr/>
-        </p:nvSpPr>
-        <p:spPr>
-          <a:xfrm>
-            <a:off x="5870448" y="4334256"/>
-            <a:ext cx="603504" cy="201168"/>
-          </a:xfrm>
-          <a:prstGeom prst="rect">
-            <a:avLst/>
-          </a:prstGeom>
-          <a:noFill/>
-        </p:spPr>
-        <p:txBody>
-          <a:bodyPr wrap="square" anchor="ctr" lIns="0" tIns="0" rIns="0" bIns="0">
-            <a:noAutofit/>
-          </a:bodyPr>
-          <a:lstStyle/>
-          <a:p>
-            <a:pPr algn="ctr" latinLnBrk="0">
-              <a:lnSpc>
-                <a:spcPct val="100000"/>
-              </a:lnSpc>
-              <a:spcBef>
-                <a:spcPts val="0"/>
-              </a:spcBef>
-              <a:spcAft>
-                <a:spcPts val="0"/>
-              </a:spcAft>
-            </a:pPr>
-            <a:r>
-              <a:rPr sz="950" b="0">
-                <a:solidFill>
-                  <a:srgbClr val="40708B"/>
-                </a:solidFill>
-                <a:latin typeface="Consolas"/>
-                <a:ea typeface="Microsoft YaHei"/>
-                <a:cs typeface="Microsoft YaHei"/>
-              </a:rPr>
-              <a:t>C5</a:t>
-            </a:r>
-          </a:p>
-        </p:txBody>
-      </p:sp>
-      <p:sp>
-        <p:nvSpPr>
-          <p:cNvPr id="47" name="Oval 46"/>
-          <p:cNvSpPr/>
-          <p:nvPr/>
-        </p:nvSpPr>
-        <p:spPr>
-          <a:xfrm>
-            <a:off x="6108192" y="3983415"/>
-            <a:ext cx="128016" cy="128016"/>
-          </a:xfrm>
-          <a:prstGeom prst="ellipse">
-            <a:avLst/>
-          </a:prstGeom>
-          <a:solidFill>
-            <a:srgbClr val="AFCEE1"/>
-          </a:solidFill>
-          <a:ln w="15875">
-            <a:solidFill>
-              <a:srgbClr val="FFFFFF"/>
-            </a:solidFill>
-          </a:ln>
-        </p:spPr>
-        <p:txBody>
-          <a:bodyPr rtlCol="0" anchor="ctr"/>
-          <a:lstStyle/>
-          <a:p>
-            <a:pPr algn="ctr"/>
-          </a:p>
-        </p:txBody>
-      </p:sp>
-      <p:sp>
-        <p:nvSpPr>
-          <p:cNvPr id="48" name="TextBox 47"/>
-          <p:cNvSpPr txBox="1"/>
-          <p:nvPr/>
-        </p:nvSpPr>
-        <p:spPr>
-          <a:xfrm>
-            <a:off x="6281928" y="3946839"/>
-            <a:ext cx="457200" cy="201168"/>
-          </a:xfrm>
-          <a:prstGeom prst="rect">
-            <a:avLst/>
-          </a:prstGeom>
-          <a:noFill/>
-        </p:spPr>
-        <p:txBody>
-          <a:bodyPr wrap="square" anchor="ctr" lIns="0" tIns="0" rIns="0" bIns="0">
-            <a:noAutofit/>
-          </a:bodyPr>
-          <a:lstStyle/>
-          <a:p>
-            <a:pPr algn="l" latinLnBrk="0">
-              <a:lnSpc>
-                <a:spcPct val="100000"/>
-              </a:lnSpc>
-              <a:spcBef>
-                <a:spcPts val="0"/>
-              </a:spcBef>
-              <a:spcAft>
-                <a:spcPts val="0"/>
-              </a:spcAft>
-            </a:pPr>
-            <a:r>
-              <a:rPr sz="950" b="1">
-                <a:solidFill>
-                  <a:srgbClr val="7FA4BA"/>
-                </a:solidFill>
-                <a:latin typeface="Consolas"/>
-                <a:ea typeface="Microsoft YaHei"/>
-                <a:cs typeface="Microsoft YaHei"/>
-              </a:rPr>
-              <a:t>__</a:t>
-            </a:r>
-          </a:p>
-        </p:txBody>
-      </p:sp>
-      <p:sp>
-        <p:nvSpPr>
-          <p:cNvPr id="49" name="Rectangle 48"/>
-          <p:cNvSpPr/>
-          <p:nvPr/>
-        </p:nvSpPr>
-        <p:spPr>
-          <a:xfrm>
-            <a:off x="5806440" y="4681728"/>
-            <a:ext cx="1078992" cy="219456"/>
-          </a:xfrm>
-          <a:prstGeom prst="rect">
-            <a:avLst/>
-          </a:prstGeom>
-          <a:solidFill>
-            <a:srgbClr val="FBD9E9"/>
-          </a:solidFill>
-          <a:ln>
-            <a:noFill/>
-          </a:ln>
-        </p:spPr>
-        <p:txBody>
-          <a:bodyPr rtlCol="0" anchor="ctr"/>
-          <a:lstStyle/>
-          <a:p>
-            <a:pPr algn="ctr"/>
-          </a:p>
-        </p:txBody>
-      </p:sp>
-      <p:sp>
-        <p:nvSpPr>
-          <p:cNvPr id="50" name="TextBox 49"/>
-          <p:cNvSpPr txBox="1"/>
-          <p:nvPr/>
-        </p:nvSpPr>
-        <p:spPr>
-          <a:xfrm>
-            <a:off x="5806440" y="4681728"/>
-            <a:ext cx="1078992" cy="219456"/>
-          </a:xfrm>
-          <a:prstGeom prst="rect">
-            <a:avLst/>
-          </a:prstGeom>
-          <a:noFill/>
-        </p:spPr>
-        <p:txBody>
-          <a:bodyPr wrap="square" anchor="ctr" lIns="0" tIns="0" rIns="0" bIns="0">
-            <a:noAutofit/>
-          </a:bodyPr>
-          <a:lstStyle/>
-          <a:p>
-            <a:pPr algn="ctr" latinLnBrk="0">
-              <a:lnSpc>
-                <a:spcPct val="100000"/>
-              </a:lnSpc>
-              <a:spcBef>
-                <a:spcPts val="0"/>
-              </a:spcBef>
-              <a:spcAft>
-                <a:spcPts val="0"/>
-              </a:spcAft>
-            </a:pPr>
-            <a:r>
-              <a:rPr sz="850" b="1">
-                <a:solidFill>
-                  <a:srgbClr val="D4147A"/>
-                </a:solidFill>
-                <a:latin typeface="Microsoft YaHei"/>
-                <a:ea typeface="Microsoft YaHei"/>
-                <a:cs typeface="Microsoft YaHei"/>
-              </a:rPr>
-              <a:t>示意　非数据</a:t>
-            </a:r>
-          </a:p>
-        </p:txBody>
-      </p:sp>
-      <p:sp>
-        <p:nvSpPr>
-          <p:cNvPr id="51" name="TextBox 50"/>
-          <p:cNvSpPr txBox="1"/>
-          <p:nvPr/>
-        </p:nvSpPr>
-        <p:spPr>
-          <a:xfrm>
-            <a:off x="749808" y="4681728"/>
-            <a:ext cx="4983480" cy="219456"/>
-          </a:xfrm>
-          <a:prstGeom prst="rect">
-            <a:avLst/>
-          </a:prstGeom>
-          <a:noFill/>
-        </p:spPr>
-        <p:txBody>
-          <a:bodyPr wrap="square" anchor="ctr" lIns="0" tIns="0" rIns="0" bIns="0">
-            <a:noAutofit/>
-          </a:bodyPr>
-          <a:lstStyle/>
-          <a:p>
-            <a:pPr algn="l" latinLnBrk="0">
-              <a:lnSpc>
-                <a:spcPct val="100000"/>
-              </a:lnSpc>
-              <a:spcBef>
-                <a:spcPts val="0"/>
-              </a:spcBef>
-              <a:spcAft>
-                <a:spcPts val="0"/>
-              </a:spcAft>
-            </a:pPr>
-            <a:r>
-              <a:rPr sz="900" b="0">
-                <a:solidFill>
-                  <a:srgbClr val="7FA4BA"/>
-                </a:solidFill>
-                <a:latin typeface="Microsoft YaHei"/>
-                <a:ea typeface="Microsoft YaHei"/>
-                <a:cs typeface="Microsoft YaHei"/>
-              </a:rPr>
-              <a:t>●</a:t>
-            </a:r>
-            <a:r>
-              <a:rPr sz="900" b="0">
-                <a:solidFill>
-                  <a:srgbClr val="40708B"/>
-                </a:solidFill>
-                <a:latin typeface="Microsoft YaHei"/>
-                <a:ea typeface="Microsoft YaHei"/>
-                <a:cs typeface="Microsoft YaHei"/>
-              </a:rPr>
-              <a:t> C 阶段筛选　</a:t>
-            </a:r>
-            <a:r>
-              <a:rPr sz="900" b="0">
-                <a:solidFill>
-                  <a:srgbClr val="7FA4BA"/>
-                </a:solidFill>
-                <a:latin typeface="Microsoft YaHei"/>
-                <a:ea typeface="Microsoft YaHei"/>
-                <a:cs typeface="Microsoft YaHei"/>
-              </a:rPr>
-              <a:t>○</a:t>
-            </a:r>
-            <a:r>
-              <a:rPr sz="900" b="0">
-                <a:solidFill>
-                  <a:srgbClr val="40708B"/>
-                </a:solidFill>
-                <a:latin typeface="Microsoft YaHei"/>
-                <a:ea typeface="Microsoft YaHei"/>
-                <a:cs typeface="Microsoft YaHei"/>
-              </a:rPr>
-              <a:t> D 阶段独立复验　</a:t>
-            </a:r>
-            <a:r>
-              <a:rPr sz="900" b="0">
-                <a:solidFill>
-                  <a:srgbClr val="7FA4BA"/>
-                </a:solidFill>
-                <a:latin typeface="Microsoft YaHei"/>
-                <a:ea typeface="Microsoft YaHei"/>
-                <a:cs typeface="Microsoft YaHei"/>
-              </a:rPr>
-              <a:t>×</a:t>
-            </a:r>
-            <a:r>
-              <a:rPr sz="900" b="0">
-                <a:solidFill>
-                  <a:srgbClr val="40708B"/>
-                </a:solidFill>
-                <a:latin typeface="Microsoft YaHei"/>
-                <a:ea typeface="Microsoft YaHei"/>
-                <a:cs typeface="Microsoft YaHei"/>
-              </a:rPr>
-              <a:t> 停在 ① 或 ②，未测性能</a:t>
-            </a:r>
-          </a:p>
-        </p:txBody>
-      </p:sp>
-      <p:sp>
-        <p:nvSpPr>
-          <p:cNvPr id="52" name="Rectangle 51"/>
-          <p:cNvSpPr/>
-          <p:nvPr/>
-        </p:nvSpPr>
-        <p:spPr>
-          <a:xfrm>
-            <a:off x="7269480" y="1975104"/>
-            <a:ext cx="4373575" cy="3017520"/>
+            <a:off x="3474720" y="1975104"/>
+            <a:ext cx="8168335" cy="3017520"/>
           </a:xfrm>
           <a:prstGeom prst="rect">
             <a:avLst/>
@@ -5051,14 +3871,14 @@
       </p:sp>
       <p:sp>
         <p:nvSpPr>
-          <p:cNvPr id="53" name="TextBox 52"/>
-          <p:cNvSpPr txBox="1"/>
-          <p:nvPr/>
-        </p:nvSpPr>
-        <p:spPr>
-          <a:xfrm>
-            <a:off x="7470648" y="2048256"/>
-            <a:ext cx="3971239" cy="256032"/>
+          <p:cNvPr id="21" name="TextBox 20"/>
+          <p:cNvSpPr txBox="1"/>
+          <p:nvPr/>
+        </p:nvSpPr>
+        <p:spPr>
+          <a:xfrm>
+            <a:off x="3675888" y="2048256"/>
+            <a:ext cx="7765999" cy="256032"/>
           </a:xfrm>
           <a:prstGeom prst="rect">
             <a:avLst/>
@@ -5091,7 +3911,7 @@
                 <a:ea typeface="Microsoft YaHei"/>
                 <a:cs typeface="Microsoft YaHei"/>
               </a:rPr>
-              <a:t>__ 个候选</a:t>
+              <a:t>候选明细</a:t>
             </a:r>
             <a:r>
               <a:rPr sz="1000" b="0">
@@ -5102,21 +3922,21 @@
                 <a:ea typeface="Microsoft YaHei"/>
                 <a:cs typeface="Microsoft YaHei"/>
               </a:rPr>
-              <a:t>　__ 个过三道门，复验后交付 1 个</a:t>
-            </a:r>
-          </a:p>
-        </p:txBody>
-      </p:sp>
-      <p:sp>
-        <p:nvSpPr>
-          <p:cNvPr id="54" name="TextBox 53"/>
-          <p:cNvSpPr txBox="1"/>
-          <p:nvPr/>
-        </p:nvSpPr>
-        <p:spPr>
-          <a:xfrm>
-            <a:off x="7872983" y="2377440"/>
-            <a:ext cx="1828800" cy="219456"/>
+              <a:t>　五组，全部为单卡 TP1 口径</a:t>
+            </a:r>
+          </a:p>
+        </p:txBody>
+      </p:sp>
+      <p:sp>
+        <p:nvSpPr>
+          <p:cNvPr id="22" name="TextBox 21"/>
+          <p:cNvSpPr txBox="1"/>
+          <p:nvPr/>
+        </p:nvSpPr>
+        <p:spPr>
+          <a:xfrm>
+            <a:off x="3675888" y="2340864"/>
+            <a:ext cx="2651760" cy="219456"/>
           </a:xfrm>
           <a:prstGeom prst="rect">
             <a:avLst/>
@@ -5156,27 +3976,27 @@
       </p:sp>
       <p:sp>
         <p:nvSpPr>
-          <p:cNvPr id="55" name="TextBox 54"/>
-          <p:cNvSpPr txBox="1"/>
-          <p:nvPr/>
-        </p:nvSpPr>
-        <p:spPr>
-          <a:xfrm>
-            <a:off x="9738360" y="2377440"/>
-            <a:ext cx="566928" cy="219456"/>
-          </a:xfrm>
-          <a:prstGeom prst="rect">
-            <a:avLst/>
-          </a:prstGeom>
-          <a:noFill/>
-        </p:spPr>
-        <p:txBody>
-          <a:bodyPr wrap="square" anchor="ctr" lIns="0" tIns="0" rIns="0" bIns="0">
-            <a:noAutofit/>
-          </a:bodyPr>
-          <a:lstStyle/>
-          <a:p>
-            <a:pPr algn="r" latinLnBrk="0">
+          <p:cNvPr id="23" name="TextBox 22"/>
+          <p:cNvSpPr txBox="1"/>
+          <p:nvPr/>
+        </p:nvSpPr>
+        <p:spPr>
+          <a:xfrm>
+            <a:off x="6419088" y="2340864"/>
+            <a:ext cx="2002536" cy="219456"/>
+          </a:xfrm>
+          <a:prstGeom prst="rect">
+            <a:avLst/>
+          </a:prstGeom>
+          <a:noFill/>
+        </p:spPr>
+        <p:txBody>
+          <a:bodyPr wrap="square" anchor="ctr" lIns="0" tIns="0" rIns="0" bIns="0">
+            <a:noAutofit/>
+          </a:bodyPr>
+          <a:lstStyle/>
+          <a:p>
+            <a:pPr algn="l" latinLnBrk="0">
               <a:lnSpc>
                 <a:spcPct val="100000"/>
               </a:lnSpc>
@@ -5203,27 +4023,27 @@
       </p:sp>
       <p:sp>
         <p:nvSpPr>
-          <p:cNvPr id="56" name="TextBox 55"/>
-          <p:cNvSpPr txBox="1"/>
-          <p:nvPr/>
-        </p:nvSpPr>
-        <p:spPr>
-          <a:xfrm>
-            <a:off x="10360152" y="2377440"/>
-            <a:ext cx="566928" cy="219456"/>
-          </a:xfrm>
-          <a:prstGeom prst="rect">
-            <a:avLst/>
-          </a:prstGeom>
-          <a:noFill/>
-        </p:spPr>
-        <p:txBody>
-          <a:bodyPr wrap="square" anchor="ctr" lIns="0" tIns="0" rIns="0" bIns="0">
-            <a:noAutofit/>
-          </a:bodyPr>
-          <a:lstStyle/>
-          <a:p>
-            <a:pPr algn="r" latinLnBrk="0">
+          <p:cNvPr id="24" name="TextBox 23"/>
+          <p:cNvSpPr txBox="1"/>
+          <p:nvPr/>
+        </p:nvSpPr>
+        <p:spPr>
+          <a:xfrm>
+            <a:off x="8513064" y="2340864"/>
+            <a:ext cx="1280160" cy="219456"/>
+          </a:xfrm>
+          <a:prstGeom prst="rect">
+            <a:avLst/>
+          </a:prstGeom>
+          <a:noFill/>
+        </p:spPr>
+        <p:txBody>
+          <a:bodyPr wrap="square" anchor="ctr" lIns="0" tIns="0" rIns="0" bIns="0">
+            <a:noAutofit/>
+          </a:bodyPr>
+          <a:lstStyle/>
+          <a:p>
+            <a:pPr algn="l" latinLnBrk="0">
               <a:lnSpc>
                 <a:spcPct val="100000"/>
               </a:lnSpc>
@@ -5250,14 +4070,14 @@
       </p:sp>
       <p:sp>
         <p:nvSpPr>
-          <p:cNvPr id="57" name="TextBox 56"/>
-          <p:cNvSpPr txBox="1"/>
-          <p:nvPr/>
-        </p:nvSpPr>
-        <p:spPr>
-          <a:xfrm>
-            <a:off x="11018520" y="2377440"/>
-            <a:ext cx="512064" cy="219456"/>
+          <p:cNvPr id="25" name="TextBox 24"/>
+          <p:cNvSpPr txBox="1"/>
+          <p:nvPr/>
+        </p:nvSpPr>
+        <p:spPr>
+          <a:xfrm>
+            <a:off x="9884664" y="2340864"/>
+            <a:ext cx="1554480" cy="219456"/>
           </a:xfrm>
           <a:prstGeom prst="rect">
             <a:avLst/>
@@ -5297,14 +4117,14 @@
       </p:sp>
       <p:cxnSp>
         <p:nvCxnSpPr>
-          <p:cNvPr id="58" name="Connector 57"/>
+          <p:cNvPr id="26" name="Connector 25"/>
           <p:cNvCxnSpPr/>
           <p:nvPr/>
         </p:nvCxnSpPr>
         <p:spPr>
           <a:xfrm>
-            <a:off x="7470648" y="2615184"/>
-            <a:ext cx="3971239" cy="0"/>
+            <a:off x="3675888" y="2578608"/>
+            <a:ext cx="7765999" cy="0"/>
           </a:xfrm>
           <a:prstGeom prst="line">
             <a:avLst/>
@@ -5318,983 +4138,14 @@
       </p:cxnSp>
       <p:sp>
         <p:nvSpPr>
-          <p:cNvPr id="59" name="Rectangle 58"/>
+          <p:cNvPr id="27" name="Rectangle 26"/>
           <p:cNvSpPr/>
           <p:nvPr/>
         </p:nvSpPr>
         <p:spPr>
           <a:xfrm>
-            <a:off x="7397496" y="2670048"/>
-            <a:ext cx="4117543" cy="329184"/>
-          </a:xfrm>
-          <a:prstGeom prst="rect">
-            <a:avLst/>
-          </a:prstGeom>
-          <a:solidFill>
-            <a:srgbClr val="DEEDFA"/>
-          </a:solidFill>
-          <a:ln>
-            <a:noFill/>
-          </a:ln>
-        </p:spPr>
-        <p:txBody>
-          <a:bodyPr rtlCol="0" anchor="ctr"/>
-          <a:lstStyle/>
-          <a:p>
-            <a:pPr algn="ctr"/>
-          </a:p>
-        </p:txBody>
-      </p:sp>
-      <p:sp>
-        <p:nvSpPr>
-          <p:cNvPr id="60" name="TextBox 59"/>
-          <p:cNvSpPr txBox="1"/>
-          <p:nvPr/>
-        </p:nvSpPr>
-        <p:spPr>
-          <a:xfrm>
-            <a:off x="7470648" y="2670048"/>
-            <a:ext cx="402336" cy="329184"/>
-          </a:xfrm>
-          <a:prstGeom prst="rect">
-            <a:avLst/>
-          </a:prstGeom>
-          <a:noFill/>
-        </p:spPr>
-        <p:txBody>
-          <a:bodyPr wrap="square" anchor="ctr" lIns="0" tIns="0" rIns="0" bIns="0">
-            <a:noAutofit/>
-          </a:bodyPr>
-          <a:lstStyle/>
-          <a:p>
-            <a:pPr algn="l" latinLnBrk="0">
-              <a:lnSpc>
-                <a:spcPct val="100000"/>
-              </a:lnSpc>
-              <a:spcBef>
-                <a:spcPts val="0"/>
-              </a:spcBef>
-              <a:spcAft>
-                <a:spcPts val="0"/>
-              </a:spcAft>
-            </a:pPr>
-            <a:r>
-              <a:rPr sz="950" b="1">
-                <a:solidFill>
-                  <a:srgbClr val="40708B"/>
-                </a:solidFill>
-                <a:latin typeface="Consolas"/>
-                <a:ea typeface="Microsoft YaHei"/>
-                <a:cs typeface="Microsoft YaHei"/>
-              </a:rPr>
-              <a:t>基线</a:t>
-            </a:r>
-          </a:p>
-        </p:txBody>
-      </p:sp>
-      <p:sp>
-        <p:nvSpPr>
-          <p:cNvPr id="61" name="TextBox 60"/>
-          <p:cNvSpPr txBox="1"/>
-          <p:nvPr/>
-        </p:nvSpPr>
-        <p:spPr>
-          <a:xfrm>
-            <a:off x="7872983" y="2670048"/>
-            <a:ext cx="1828800" cy="329184"/>
-          </a:xfrm>
-          <a:prstGeom prst="rect">
-            <a:avLst/>
-          </a:prstGeom>
-          <a:noFill/>
-        </p:spPr>
-        <p:txBody>
-          <a:bodyPr wrap="square" anchor="ctr" lIns="0" tIns="0" rIns="0" bIns="0">
-            <a:noAutofit/>
-          </a:bodyPr>
-          <a:lstStyle/>
-          <a:p>
-            <a:pPr algn="l" latinLnBrk="0">
-              <a:lnSpc>
-                <a:spcPct val="100000"/>
-              </a:lnSpc>
-              <a:spcBef>
-                <a:spcPts val="0"/>
-              </a:spcBef>
-              <a:spcAft>
-                <a:spcPts val="0"/>
-              </a:spcAft>
-            </a:pPr>
-            <a:r>
-              <a:rPr sz="950" b="0">
-                <a:solidFill>
-                  <a:srgbClr val="1B4D69"/>
-                </a:solidFill>
-                <a:latin typeface="Microsoft YaHei"/>
-                <a:ea typeface="Microsoft YaHei"/>
-                <a:cs typeface="Microsoft YaHei"/>
-              </a:rPr>
-              <a:t>A 阶段建立，D 阶段重测</a:t>
-            </a:r>
-          </a:p>
-        </p:txBody>
-      </p:sp>
-      <p:sp>
-        <p:nvSpPr>
-          <p:cNvPr id="62" name="TextBox 61"/>
-          <p:cNvSpPr txBox="1"/>
-          <p:nvPr/>
-        </p:nvSpPr>
-        <p:spPr>
-          <a:xfrm>
-            <a:off x="9738360" y="2670048"/>
-            <a:ext cx="566928" cy="329184"/>
-          </a:xfrm>
-          <a:prstGeom prst="rect">
-            <a:avLst/>
-          </a:prstGeom>
-          <a:noFill/>
-        </p:spPr>
-        <p:txBody>
-          <a:bodyPr wrap="square" anchor="ctr" lIns="0" tIns="0" rIns="0" bIns="0">
-            <a:noAutofit/>
-          </a:bodyPr>
-          <a:lstStyle/>
-          <a:p>
-            <a:pPr algn="r" latinLnBrk="0">
-              <a:lnSpc>
-                <a:spcPct val="100000"/>
-              </a:lnSpc>
-              <a:spcBef>
-                <a:spcPts val="0"/>
-              </a:spcBef>
-              <a:spcAft>
-                <a:spcPts val="0"/>
-              </a:spcAft>
-            </a:pPr>
-            <a:r>
-              <a:rPr sz="950" b="0">
-                <a:solidFill>
-                  <a:srgbClr val="7FA4BA"/>
-                </a:solidFill>
-                <a:latin typeface="Consolas"/>
-                <a:ea typeface="Microsoft YaHei"/>
-                <a:cs typeface="Microsoft YaHei"/>
-              </a:rPr>
-              <a:t>__</a:t>
-            </a:r>
-          </a:p>
-        </p:txBody>
-      </p:sp>
-      <p:sp>
-        <p:nvSpPr>
-          <p:cNvPr id="63" name="TextBox 62"/>
-          <p:cNvSpPr txBox="1"/>
-          <p:nvPr/>
-        </p:nvSpPr>
-        <p:spPr>
-          <a:xfrm>
-            <a:off x="10360152" y="2670048"/>
-            <a:ext cx="566928" cy="329184"/>
-          </a:xfrm>
-          <a:prstGeom prst="rect">
-            <a:avLst/>
-          </a:prstGeom>
-          <a:noFill/>
-        </p:spPr>
-        <p:txBody>
-          <a:bodyPr wrap="square" anchor="ctr" lIns="0" tIns="0" rIns="0" bIns="0">
-            <a:noAutofit/>
-          </a:bodyPr>
-          <a:lstStyle/>
-          <a:p>
-            <a:pPr algn="r" latinLnBrk="0">
-              <a:lnSpc>
-                <a:spcPct val="100000"/>
-              </a:lnSpc>
-              <a:spcBef>
-                <a:spcPts val="0"/>
-              </a:spcBef>
-              <a:spcAft>
-                <a:spcPts val="0"/>
-              </a:spcAft>
-            </a:pPr>
-            <a:r>
-              <a:rPr sz="950" b="0">
-                <a:solidFill>
-                  <a:srgbClr val="7FA4BA"/>
-                </a:solidFill>
-                <a:latin typeface="Consolas"/>
-                <a:ea typeface="Microsoft YaHei"/>
-                <a:cs typeface="Microsoft YaHei"/>
-              </a:rPr>
-              <a:t>__</a:t>
-            </a:r>
-          </a:p>
-        </p:txBody>
-      </p:sp>
-      <p:sp>
-        <p:nvSpPr>
-          <p:cNvPr id="64" name="TextBox 63"/>
-          <p:cNvSpPr txBox="1"/>
-          <p:nvPr/>
-        </p:nvSpPr>
-        <p:spPr>
-          <a:xfrm>
-            <a:off x="11018520" y="2670048"/>
-            <a:ext cx="512064" cy="329184"/>
-          </a:xfrm>
-          <a:prstGeom prst="rect">
-            <a:avLst/>
-          </a:prstGeom>
-          <a:noFill/>
-        </p:spPr>
-        <p:txBody>
-          <a:bodyPr wrap="square" anchor="ctr" lIns="0" tIns="0" rIns="0" bIns="0">
-            <a:noAutofit/>
-          </a:bodyPr>
-          <a:lstStyle/>
-          <a:p>
-            <a:pPr algn="l" latinLnBrk="0">
-              <a:lnSpc>
-                <a:spcPct val="100000"/>
-              </a:lnSpc>
-              <a:spcBef>
-                <a:spcPts val="0"/>
-              </a:spcBef>
-              <a:spcAft>
-                <a:spcPts val="0"/>
-              </a:spcAft>
-            </a:pPr>
-            <a:r>
-              <a:rPr sz="950" b="0">
-                <a:solidFill>
-                  <a:srgbClr val="7FA4BA"/>
-                </a:solidFill>
-                <a:latin typeface="Microsoft YaHei"/>
-                <a:ea typeface="Microsoft YaHei"/>
-                <a:cs typeface="Microsoft YaHei"/>
-              </a:rPr>
-              <a:t>—</a:t>
-            </a:r>
-          </a:p>
-        </p:txBody>
-      </p:sp>
-      <p:sp>
-        <p:nvSpPr>
-          <p:cNvPr id="65" name="TextBox 64"/>
-          <p:cNvSpPr txBox="1"/>
-          <p:nvPr/>
-        </p:nvSpPr>
-        <p:spPr>
-          <a:xfrm>
-            <a:off x="7470648" y="3035808"/>
-            <a:ext cx="402336" cy="329184"/>
-          </a:xfrm>
-          <a:prstGeom prst="rect">
-            <a:avLst/>
-          </a:prstGeom>
-          <a:noFill/>
-        </p:spPr>
-        <p:txBody>
-          <a:bodyPr wrap="square" anchor="ctr" lIns="0" tIns="0" rIns="0" bIns="0">
-            <a:noAutofit/>
-          </a:bodyPr>
-          <a:lstStyle/>
-          <a:p>
-            <a:pPr algn="l" latinLnBrk="0">
-              <a:lnSpc>
-                <a:spcPct val="100000"/>
-              </a:lnSpc>
-              <a:spcBef>
-                <a:spcPts val="0"/>
-              </a:spcBef>
-              <a:spcAft>
-                <a:spcPts val="0"/>
-              </a:spcAft>
-            </a:pPr>
-            <a:r>
-              <a:rPr sz="950" b="1">
-                <a:solidFill>
-                  <a:srgbClr val="40708B"/>
-                </a:solidFill>
-                <a:latin typeface="Consolas"/>
-                <a:ea typeface="Microsoft YaHei"/>
-                <a:cs typeface="Microsoft YaHei"/>
-              </a:rPr>
-              <a:t>C1</a:t>
-            </a:r>
-          </a:p>
-        </p:txBody>
-      </p:sp>
-      <p:sp>
-        <p:nvSpPr>
-          <p:cNvPr id="66" name="TextBox 65"/>
-          <p:cNvSpPr txBox="1"/>
-          <p:nvPr/>
-        </p:nvSpPr>
-        <p:spPr>
-          <a:xfrm>
-            <a:off x="7872983" y="3035808"/>
-            <a:ext cx="1828800" cy="329184"/>
-          </a:xfrm>
-          <a:prstGeom prst="rect">
-            <a:avLst/>
-          </a:prstGeom>
-          <a:noFill/>
-        </p:spPr>
-        <p:txBody>
-          <a:bodyPr wrap="square" anchor="ctr" lIns="0" tIns="0" rIns="0" bIns="0">
-            <a:noAutofit/>
-          </a:bodyPr>
-          <a:lstStyle/>
-          <a:p>
-            <a:pPr algn="l" latinLnBrk="0">
-              <a:lnSpc>
-                <a:spcPct val="100000"/>
-              </a:lnSpc>
-              <a:spcBef>
-                <a:spcPts val="0"/>
-              </a:spcBef>
-              <a:spcAft>
-                <a:spcPts val="0"/>
-              </a:spcAft>
-            </a:pPr>
-            <a:r>
-              <a:rPr sz="950" b="0">
-                <a:solidFill>
-                  <a:srgbClr val="1B4D69"/>
-                </a:solidFill>
-                <a:latin typeface="Microsoft YaHei"/>
-                <a:ea typeface="Microsoft YaHei"/>
-                <a:cs typeface="Microsoft YaHei"/>
-              </a:rPr>
-              <a:t>例：调大 batch 上限</a:t>
-            </a:r>
-          </a:p>
-        </p:txBody>
-      </p:sp>
-      <p:sp>
-        <p:nvSpPr>
-          <p:cNvPr id="67" name="TextBox 66"/>
-          <p:cNvSpPr txBox="1"/>
-          <p:nvPr/>
-        </p:nvSpPr>
-        <p:spPr>
-          <a:xfrm>
-            <a:off x="9738360" y="3035808"/>
-            <a:ext cx="566928" cy="329184"/>
-          </a:xfrm>
-          <a:prstGeom prst="rect">
-            <a:avLst/>
-          </a:prstGeom>
-          <a:noFill/>
-        </p:spPr>
-        <p:txBody>
-          <a:bodyPr wrap="square" anchor="ctr" lIns="0" tIns="0" rIns="0" bIns="0">
-            <a:noAutofit/>
-          </a:bodyPr>
-          <a:lstStyle/>
-          <a:p>
-            <a:pPr algn="r" latinLnBrk="0">
-              <a:lnSpc>
-                <a:spcPct val="100000"/>
-              </a:lnSpc>
-              <a:spcBef>
-                <a:spcPts val="0"/>
-              </a:spcBef>
-              <a:spcAft>
-                <a:spcPts val="0"/>
-              </a:spcAft>
-            </a:pPr>
-            <a:r>
-              <a:rPr sz="950" b="0">
-                <a:solidFill>
-                  <a:srgbClr val="7FA4BA"/>
-                </a:solidFill>
-                <a:latin typeface="Consolas"/>
-                <a:ea typeface="Microsoft YaHei"/>
-                <a:cs typeface="Microsoft YaHei"/>
-              </a:rPr>
-              <a:t>__</a:t>
-            </a:r>
-          </a:p>
-        </p:txBody>
-      </p:sp>
-      <p:sp>
-        <p:nvSpPr>
-          <p:cNvPr id="68" name="TextBox 67"/>
-          <p:cNvSpPr txBox="1"/>
-          <p:nvPr/>
-        </p:nvSpPr>
-        <p:spPr>
-          <a:xfrm>
-            <a:off x="10360152" y="3035808"/>
-            <a:ext cx="566928" cy="329184"/>
-          </a:xfrm>
-          <a:prstGeom prst="rect">
-            <a:avLst/>
-          </a:prstGeom>
-          <a:noFill/>
-        </p:spPr>
-        <p:txBody>
-          <a:bodyPr wrap="square" anchor="ctr" lIns="0" tIns="0" rIns="0" bIns="0">
-            <a:noAutofit/>
-          </a:bodyPr>
-          <a:lstStyle/>
-          <a:p>
-            <a:pPr algn="r" latinLnBrk="0">
-              <a:lnSpc>
-                <a:spcPct val="100000"/>
-              </a:lnSpc>
-              <a:spcBef>
-                <a:spcPts val="0"/>
-              </a:spcBef>
-              <a:spcAft>
-                <a:spcPts val="0"/>
-              </a:spcAft>
-            </a:pPr>
-            <a:r>
-              <a:rPr sz="950" b="0">
-                <a:solidFill>
-                  <a:srgbClr val="7FA4BA"/>
-                </a:solidFill>
-                <a:latin typeface="Consolas"/>
-                <a:ea typeface="Microsoft YaHei"/>
-                <a:cs typeface="Microsoft YaHei"/>
-              </a:rPr>
-              <a:t>—</a:t>
-            </a:r>
-          </a:p>
-        </p:txBody>
-      </p:sp>
-      <p:sp>
-        <p:nvSpPr>
-          <p:cNvPr id="69" name="TextBox 68"/>
-          <p:cNvSpPr txBox="1"/>
-          <p:nvPr/>
-        </p:nvSpPr>
-        <p:spPr>
-          <a:xfrm>
-            <a:off x="11018520" y="3035808"/>
-            <a:ext cx="512064" cy="329184"/>
-          </a:xfrm>
-          <a:prstGeom prst="rect">
-            <a:avLst/>
-          </a:prstGeom>
-          <a:noFill/>
-        </p:spPr>
-        <p:txBody>
-          <a:bodyPr wrap="square" anchor="ctr" lIns="0" tIns="0" rIns="0" bIns="0">
-            <a:noAutofit/>
-          </a:bodyPr>
-          <a:lstStyle/>
-          <a:p>
-            <a:pPr algn="l" latinLnBrk="0">
-              <a:lnSpc>
-                <a:spcPct val="100000"/>
-              </a:lnSpc>
-              <a:spcBef>
-                <a:spcPts val="0"/>
-              </a:spcBef>
-              <a:spcAft>
-                <a:spcPts val="0"/>
-              </a:spcAft>
-            </a:pPr>
-            <a:r>
-              <a:rPr sz="950" b="0">
-                <a:solidFill>
-                  <a:srgbClr val="7FA4BA"/>
-                </a:solidFill>
-                <a:latin typeface="Microsoft YaHei"/>
-                <a:ea typeface="Microsoft YaHei"/>
-                <a:cs typeface="Microsoft YaHei"/>
-              </a:rPr>
-              <a:t>③ 未过</a:t>
-            </a:r>
-          </a:p>
-        </p:txBody>
-      </p:sp>
-      <p:sp>
-        <p:nvSpPr>
-          <p:cNvPr id="70" name="TextBox 69"/>
-          <p:cNvSpPr txBox="1"/>
-          <p:nvPr/>
-        </p:nvSpPr>
-        <p:spPr>
-          <a:xfrm>
-            <a:off x="7470648" y="3401568"/>
-            <a:ext cx="402336" cy="329184"/>
-          </a:xfrm>
-          <a:prstGeom prst="rect">
-            <a:avLst/>
-          </a:prstGeom>
-          <a:noFill/>
-        </p:spPr>
-        <p:txBody>
-          <a:bodyPr wrap="square" anchor="ctr" lIns="0" tIns="0" rIns="0" bIns="0">
-            <a:noAutofit/>
-          </a:bodyPr>
-          <a:lstStyle/>
-          <a:p>
-            <a:pPr algn="l" latinLnBrk="0">
-              <a:lnSpc>
-                <a:spcPct val="100000"/>
-              </a:lnSpc>
-              <a:spcBef>
-                <a:spcPts val="0"/>
-              </a:spcBef>
-              <a:spcAft>
-                <a:spcPts val="0"/>
-              </a:spcAft>
-            </a:pPr>
-            <a:r>
-              <a:rPr sz="950" b="1">
-                <a:solidFill>
-                  <a:srgbClr val="40708B"/>
-                </a:solidFill>
-                <a:latin typeface="Consolas"/>
-                <a:ea typeface="Microsoft YaHei"/>
-                <a:cs typeface="Microsoft YaHei"/>
-              </a:rPr>
-              <a:t>C2</a:t>
-            </a:r>
-          </a:p>
-        </p:txBody>
-      </p:sp>
-      <p:sp>
-        <p:nvSpPr>
-          <p:cNvPr id="71" name="TextBox 70"/>
-          <p:cNvSpPr txBox="1"/>
-          <p:nvPr/>
-        </p:nvSpPr>
-        <p:spPr>
-          <a:xfrm>
-            <a:off x="7872983" y="3401568"/>
-            <a:ext cx="1828800" cy="329184"/>
-          </a:xfrm>
-          <a:prstGeom prst="rect">
-            <a:avLst/>
-          </a:prstGeom>
-          <a:noFill/>
-        </p:spPr>
-        <p:txBody>
-          <a:bodyPr wrap="square" anchor="ctr" lIns="0" tIns="0" rIns="0" bIns="0">
-            <a:noAutofit/>
-          </a:bodyPr>
-          <a:lstStyle/>
-          <a:p>
-            <a:pPr algn="l" latinLnBrk="0">
-              <a:lnSpc>
-                <a:spcPct val="100000"/>
-              </a:lnSpc>
-              <a:spcBef>
-                <a:spcPts val="0"/>
-              </a:spcBef>
-              <a:spcAft>
-                <a:spcPts val="0"/>
-              </a:spcAft>
-            </a:pPr>
-            <a:r>
-              <a:rPr sz="950" b="0">
-                <a:solidFill>
-                  <a:srgbClr val="1B4D69"/>
-                </a:solidFill>
-                <a:latin typeface="Microsoft YaHei"/>
-                <a:ea typeface="Microsoft YaHei"/>
-                <a:cs typeface="Microsoft YaHei"/>
-              </a:rPr>
-              <a:t>例：换 attention 后端</a:t>
-            </a:r>
-          </a:p>
-        </p:txBody>
-      </p:sp>
-      <p:sp>
-        <p:nvSpPr>
-          <p:cNvPr id="72" name="TextBox 71"/>
-          <p:cNvSpPr txBox="1"/>
-          <p:nvPr/>
-        </p:nvSpPr>
-        <p:spPr>
-          <a:xfrm>
-            <a:off x="9738360" y="3401568"/>
-            <a:ext cx="566928" cy="329184"/>
-          </a:xfrm>
-          <a:prstGeom prst="rect">
-            <a:avLst/>
-          </a:prstGeom>
-          <a:noFill/>
-        </p:spPr>
-        <p:txBody>
-          <a:bodyPr wrap="square" anchor="ctr" lIns="0" tIns="0" rIns="0" bIns="0">
-            <a:noAutofit/>
-          </a:bodyPr>
-          <a:lstStyle/>
-          <a:p>
-            <a:pPr algn="r" latinLnBrk="0">
-              <a:lnSpc>
-                <a:spcPct val="100000"/>
-              </a:lnSpc>
-              <a:spcBef>
-                <a:spcPts val="0"/>
-              </a:spcBef>
-              <a:spcAft>
-                <a:spcPts val="0"/>
-              </a:spcAft>
-            </a:pPr>
-            <a:r>
-              <a:rPr sz="950" b="0">
-                <a:solidFill>
-                  <a:srgbClr val="7FA4BA"/>
-                </a:solidFill>
-                <a:latin typeface="Consolas"/>
-                <a:ea typeface="Microsoft YaHei"/>
-                <a:cs typeface="Microsoft YaHei"/>
-              </a:rPr>
-              <a:t>__</a:t>
-            </a:r>
-          </a:p>
-        </p:txBody>
-      </p:sp>
-      <p:sp>
-        <p:nvSpPr>
-          <p:cNvPr id="73" name="TextBox 72"/>
-          <p:cNvSpPr txBox="1"/>
-          <p:nvPr/>
-        </p:nvSpPr>
-        <p:spPr>
-          <a:xfrm>
-            <a:off x="10360152" y="3401568"/>
-            <a:ext cx="566928" cy="329184"/>
-          </a:xfrm>
-          <a:prstGeom prst="rect">
-            <a:avLst/>
-          </a:prstGeom>
-          <a:noFill/>
-        </p:spPr>
-        <p:txBody>
-          <a:bodyPr wrap="square" anchor="ctr" lIns="0" tIns="0" rIns="0" bIns="0">
-            <a:noAutofit/>
-          </a:bodyPr>
-          <a:lstStyle/>
-          <a:p>
-            <a:pPr algn="r" latinLnBrk="0">
-              <a:lnSpc>
-                <a:spcPct val="100000"/>
-              </a:lnSpc>
-              <a:spcBef>
-                <a:spcPts val="0"/>
-              </a:spcBef>
-              <a:spcAft>
-                <a:spcPts val="0"/>
-              </a:spcAft>
-            </a:pPr>
-            <a:r>
-              <a:rPr sz="950" b="0">
-                <a:solidFill>
-                  <a:srgbClr val="7FA4BA"/>
-                </a:solidFill>
-                <a:latin typeface="Consolas"/>
-                <a:ea typeface="Microsoft YaHei"/>
-                <a:cs typeface="Microsoft YaHei"/>
-              </a:rPr>
-              <a:t>__</a:t>
-            </a:r>
-          </a:p>
-        </p:txBody>
-      </p:sp>
-      <p:sp>
-        <p:nvSpPr>
-          <p:cNvPr id="74" name="TextBox 73"/>
-          <p:cNvSpPr txBox="1"/>
-          <p:nvPr/>
-        </p:nvSpPr>
-        <p:spPr>
-          <a:xfrm>
-            <a:off x="11018520" y="3401568"/>
-            <a:ext cx="512064" cy="329184"/>
-          </a:xfrm>
-          <a:prstGeom prst="rect">
-            <a:avLst/>
-          </a:prstGeom>
-          <a:noFill/>
-        </p:spPr>
-        <p:txBody>
-          <a:bodyPr wrap="square" anchor="ctr" lIns="0" tIns="0" rIns="0" bIns="0">
-            <a:noAutofit/>
-          </a:bodyPr>
-          <a:lstStyle/>
-          <a:p>
-            <a:pPr algn="l" latinLnBrk="0">
-              <a:lnSpc>
-                <a:spcPct val="100000"/>
-              </a:lnSpc>
-              <a:spcBef>
-                <a:spcPts val="0"/>
-              </a:spcBef>
-              <a:spcAft>
-                <a:spcPts val="0"/>
-              </a:spcAft>
-            </a:pPr>
-            <a:r>
-              <a:rPr sz="950" b="0">
-                <a:solidFill>
-                  <a:srgbClr val="7FA4BA"/>
-                </a:solidFill>
-                <a:latin typeface="Microsoft YaHei"/>
-                <a:ea typeface="Microsoft YaHei"/>
-                <a:cs typeface="Microsoft YaHei"/>
-              </a:rPr>
-              <a:t>通过</a:t>
-            </a:r>
-          </a:p>
-        </p:txBody>
-      </p:sp>
-      <p:sp>
-        <p:nvSpPr>
-          <p:cNvPr id="75" name="TextBox 74"/>
-          <p:cNvSpPr txBox="1"/>
-          <p:nvPr/>
-        </p:nvSpPr>
-        <p:spPr>
-          <a:xfrm>
-            <a:off x="7470648" y="3767328"/>
-            <a:ext cx="402336" cy="329184"/>
-          </a:xfrm>
-          <a:prstGeom prst="rect">
-            <a:avLst/>
-          </a:prstGeom>
-          <a:noFill/>
-        </p:spPr>
-        <p:txBody>
-          <a:bodyPr wrap="square" anchor="ctr" lIns="0" tIns="0" rIns="0" bIns="0">
-            <a:noAutofit/>
-          </a:bodyPr>
-          <a:lstStyle/>
-          <a:p>
-            <a:pPr algn="l" latinLnBrk="0">
-              <a:lnSpc>
-                <a:spcPct val="100000"/>
-              </a:lnSpc>
-              <a:spcBef>
-                <a:spcPts val="0"/>
-              </a:spcBef>
-              <a:spcAft>
-                <a:spcPts val="0"/>
-              </a:spcAft>
-            </a:pPr>
-            <a:r>
-              <a:rPr sz="950" b="1">
-                <a:solidFill>
-                  <a:srgbClr val="40708B"/>
-                </a:solidFill>
-                <a:latin typeface="Consolas"/>
-                <a:ea typeface="Microsoft YaHei"/>
-                <a:cs typeface="Microsoft YaHei"/>
-              </a:rPr>
-              <a:t>C3</a:t>
-            </a:r>
-          </a:p>
-        </p:txBody>
-      </p:sp>
-      <p:sp>
-        <p:nvSpPr>
-          <p:cNvPr id="76" name="TextBox 75"/>
-          <p:cNvSpPr txBox="1"/>
-          <p:nvPr/>
-        </p:nvSpPr>
-        <p:spPr>
-          <a:xfrm>
-            <a:off x="7872983" y="3767328"/>
-            <a:ext cx="1828800" cy="329184"/>
-          </a:xfrm>
-          <a:prstGeom prst="rect">
-            <a:avLst/>
-          </a:prstGeom>
-          <a:noFill/>
-        </p:spPr>
-        <p:txBody>
-          <a:bodyPr wrap="square" anchor="ctr" lIns="0" tIns="0" rIns="0" bIns="0">
-            <a:noAutofit/>
-          </a:bodyPr>
-          <a:lstStyle/>
-          <a:p>
-            <a:pPr algn="l" latinLnBrk="0">
-              <a:lnSpc>
-                <a:spcPct val="100000"/>
-              </a:lnSpc>
-              <a:spcBef>
-                <a:spcPts val="0"/>
-              </a:spcBef>
-              <a:spcAft>
-                <a:spcPts val="0"/>
-              </a:spcAft>
-            </a:pPr>
-            <a:r>
-              <a:rPr sz="950" b="0">
-                <a:solidFill>
-                  <a:srgbClr val="1B4D69"/>
-                </a:solidFill>
-                <a:latin typeface="Microsoft YaHei"/>
-                <a:ea typeface="Microsoft YaHei"/>
-                <a:cs typeface="Microsoft YaHei"/>
-              </a:rPr>
-              <a:t>例：接入算子层新内核</a:t>
-            </a:r>
-          </a:p>
-        </p:txBody>
-      </p:sp>
-      <p:sp>
-        <p:nvSpPr>
-          <p:cNvPr id="77" name="TextBox 76"/>
-          <p:cNvSpPr txBox="1"/>
-          <p:nvPr/>
-        </p:nvSpPr>
-        <p:spPr>
-          <a:xfrm>
-            <a:off x="9738360" y="3767328"/>
-            <a:ext cx="566928" cy="329184"/>
-          </a:xfrm>
-          <a:prstGeom prst="rect">
-            <a:avLst/>
-          </a:prstGeom>
-          <a:noFill/>
-        </p:spPr>
-        <p:txBody>
-          <a:bodyPr wrap="square" anchor="ctr" lIns="0" tIns="0" rIns="0" bIns="0">
-            <a:noAutofit/>
-          </a:bodyPr>
-          <a:lstStyle/>
-          <a:p>
-            <a:pPr algn="r" latinLnBrk="0">
-              <a:lnSpc>
-                <a:spcPct val="100000"/>
-              </a:lnSpc>
-              <a:spcBef>
-                <a:spcPts val="0"/>
-              </a:spcBef>
-              <a:spcAft>
-                <a:spcPts val="0"/>
-              </a:spcAft>
-            </a:pPr>
-            <a:r>
-              <a:rPr sz="950" b="0">
-                <a:solidFill>
-                  <a:srgbClr val="7FA4BA"/>
-                </a:solidFill>
-                <a:latin typeface="Consolas"/>
-                <a:ea typeface="Microsoft YaHei"/>
-                <a:cs typeface="Microsoft YaHei"/>
-              </a:rPr>
-              <a:t>—</a:t>
-            </a:r>
-          </a:p>
-        </p:txBody>
-      </p:sp>
-      <p:sp>
-        <p:nvSpPr>
-          <p:cNvPr id="78" name="TextBox 77"/>
-          <p:cNvSpPr txBox="1"/>
-          <p:nvPr/>
-        </p:nvSpPr>
-        <p:spPr>
-          <a:xfrm>
-            <a:off x="10360152" y="3767328"/>
-            <a:ext cx="566928" cy="329184"/>
-          </a:xfrm>
-          <a:prstGeom prst="rect">
-            <a:avLst/>
-          </a:prstGeom>
-          <a:noFill/>
-        </p:spPr>
-        <p:txBody>
-          <a:bodyPr wrap="square" anchor="ctr" lIns="0" tIns="0" rIns="0" bIns="0">
-            <a:noAutofit/>
-          </a:bodyPr>
-          <a:lstStyle/>
-          <a:p>
-            <a:pPr algn="r" latinLnBrk="0">
-              <a:lnSpc>
-                <a:spcPct val="100000"/>
-              </a:lnSpc>
-              <a:spcBef>
-                <a:spcPts val="0"/>
-              </a:spcBef>
-              <a:spcAft>
-                <a:spcPts val="0"/>
-              </a:spcAft>
-            </a:pPr>
-            <a:r>
-              <a:rPr sz="950" b="0">
-                <a:solidFill>
-                  <a:srgbClr val="7FA4BA"/>
-                </a:solidFill>
-                <a:latin typeface="Consolas"/>
-                <a:ea typeface="Microsoft YaHei"/>
-                <a:cs typeface="Microsoft YaHei"/>
-              </a:rPr>
-              <a:t>—</a:t>
-            </a:r>
-          </a:p>
-        </p:txBody>
-      </p:sp>
-      <p:sp>
-        <p:nvSpPr>
-          <p:cNvPr id="79" name="TextBox 78"/>
-          <p:cNvSpPr txBox="1"/>
-          <p:nvPr/>
-        </p:nvSpPr>
-        <p:spPr>
-          <a:xfrm>
-            <a:off x="11018520" y="3767328"/>
-            <a:ext cx="512064" cy="329184"/>
-          </a:xfrm>
-          <a:prstGeom prst="rect">
-            <a:avLst/>
-          </a:prstGeom>
-          <a:noFill/>
-        </p:spPr>
-        <p:txBody>
-          <a:bodyPr wrap="square" anchor="ctr" lIns="0" tIns="0" rIns="0" bIns="0">
-            <a:noAutofit/>
-          </a:bodyPr>
-          <a:lstStyle/>
-          <a:p>
-            <a:pPr algn="l" latinLnBrk="0">
-              <a:lnSpc>
-                <a:spcPct val="100000"/>
-              </a:lnSpc>
-              <a:spcBef>
-                <a:spcPts val="0"/>
-              </a:spcBef>
-              <a:spcAft>
-                <a:spcPts val="0"/>
-              </a:spcAft>
-            </a:pPr>
-            <a:r>
-              <a:rPr sz="950" b="0">
-                <a:solidFill>
-                  <a:srgbClr val="7FA4BA"/>
-                </a:solidFill>
-                <a:latin typeface="Microsoft YaHei"/>
-                <a:ea typeface="Microsoft YaHei"/>
-                <a:cs typeface="Microsoft YaHei"/>
-              </a:rPr>
-              <a:t>① 未过</a:t>
-            </a:r>
-          </a:p>
-        </p:txBody>
-      </p:sp>
-      <p:sp>
-        <p:nvSpPr>
-          <p:cNvPr id="80" name="Rectangle 79"/>
-          <p:cNvSpPr/>
-          <p:nvPr/>
-        </p:nvSpPr>
-        <p:spPr>
-          <a:xfrm>
-            <a:off x="7397496" y="4133087"/>
-            <a:ext cx="4117543" cy="329184"/>
+            <a:off x="3602736" y="2633472"/>
+            <a:ext cx="7912303" cy="566928"/>
           </a:xfrm>
           <a:prstGeom prst="rect">
             <a:avLst/>
@@ -6316,14 +4167,14 @@
       </p:sp>
       <p:sp>
         <p:nvSpPr>
-          <p:cNvPr id="81" name="TextBox 80"/>
-          <p:cNvSpPr txBox="1"/>
-          <p:nvPr/>
-        </p:nvSpPr>
-        <p:spPr>
-          <a:xfrm>
-            <a:off x="7470648" y="4133087"/>
-            <a:ext cx="402336" cy="329184"/>
+          <p:cNvPr id="28" name="TextBox 27"/>
+          <p:cNvSpPr txBox="1"/>
+          <p:nvPr/>
+        </p:nvSpPr>
+        <p:spPr>
+          <a:xfrm>
+            <a:off x="3675888" y="2633472"/>
+            <a:ext cx="2651760" cy="566928"/>
           </a:xfrm>
           <a:prstGeom prst="rect">
             <a:avLst/>
@@ -6348,445 +4199,1136 @@
               </a:spcAft>
             </a:pPr>
             <a:r>
+              <a:rPr sz="950" b="0">
+                <a:solidFill>
+                  <a:srgbClr val="0A2B45"/>
+                </a:solidFill>
+                <a:latin typeface="Microsoft YaHei"/>
+                <a:ea typeface="Microsoft YaHei"/>
+                <a:cs typeface="Microsoft YaHei"/>
+              </a:rPr>
+              <a:t>融合 swiglu + 动态量化</a:t>
+            </a:r>
+          </a:p>
+          <a:p>
+            <a:pPr algn="l" latinLnBrk="0">
+              <a:lnSpc>
+                <a:spcPct val="100000"/>
+              </a:lnSpc>
+              <a:spcBef>
+                <a:spcPts val="0"/>
+              </a:spcBef>
+              <a:spcAft>
+                <a:spcPts val="0"/>
+              </a:spcAft>
+            </a:pPr>
+            <a:r>
+              <a:rPr sz="950" b="0">
+                <a:solidFill>
+                  <a:srgbClr val="0A2B45"/>
+                </a:solidFill>
+                <a:latin typeface="Microsoft YaHei"/>
+                <a:ea typeface="Microsoft YaHei"/>
+                <a:cs typeface="Microsoft YaHei"/>
+              </a:rPr>
+              <a:t>替掉散点 elementwise 3.08 ms</a:t>
+            </a:r>
+          </a:p>
+          <a:p>
+            <a:pPr algn="l" latinLnBrk="0">
+              <a:lnSpc>
+                <a:spcPct val="100000"/>
+              </a:lnSpc>
+              <a:spcBef>
+                <a:spcPts val="0"/>
+              </a:spcBef>
+              <a:spcAft>
+                <a:spcPts val="0"/>
+              </a:spcAft>
+            </a:pPr>
+            <a:r>
+              <a:rPr sz="950" b="0">
+                <a:solidFill>
+                  <a:srgbClr val="0A2B45"/>
+                </a:solidFill>
+                <a:latin typeface="Microsoft YaHei"/>
+                <a:ea typeface="Microsoft YaHei"/>
+                <a:cs typeface="Microsoft YaHei"/>
+              </a:rPr>
+              <a:t>+ per-token quant 0.43 ms</a:t>
+            </a:r>
+          </a:p>
+        </p:txBody>
+      </p:sp>
+      <p:sp>
+        <p:nvSpPr>
+          <p:cNvPr id="29" name="TextBox 28"/>
+          <p:cNvSpPr txBox="1"/>
+          <p:nvPr/>
+        </p:nvSpPr>
+        <p:spPr>
+          <a:xfrm>
+            <a:off x="6419088" y="2633472"/>
+            <a:ext cx="2002536" cy="566928"/>
+          </a:xfrm>
+          <a:prstGeom prst="rect">
+            <a:avLst/>
+          </a:prstGeom>
+          <a:noFill/>
+        </p:spPr>
+        <p:txBody>
+          <a:bodyPr wrap="square" anchor="ctr" lIns="0" tIns="0" rIns="0" bIns="0">
+            <a:noAutofit/>
+          </a:bodyPr>
+          <a:lstStyle/>
+          <a:p>
+            <a:pPr algn="l" latinLnBrk="0">
+              <a:lnSpc>
+                <a:spcPct val="100000"/>
+              </a:lnSpc>
+              <a:spcBef>
+                <a:spcPts val="0"/>
+              </a:spcBef>
+              <a:spcAft>
+                <a:spcPts val="0"/>
+              </a:spcAft>
+            </a:pPr>
+            <a:r>
+              <a:rPr sz="950" b="0">
+                <a:solidFill>
+                  <a:srgbClr val="1B4D69"/>
+                </a:solidFill>
+                <a:latin typeface="Microsoft YaHei"/>
+                <a:ea typeface="Microsoft YaHei"/>
+                <a:cs typeface="Microsoft YaHei"/>
+              </a:rPr>
+              <a:t>单核 1.75 ms/步</a:t>
+            </a:r>
+          </a:p>
+        </p:txBody>
+      </p:sp>
+      <p:sp>
+        <p:nvSpPr>
+          <p:cNvPr id="30" name="TextBox 29"/>
+          <p:cNvSpPr txBox="1"/>
+          <p:nvPr/>
+        </p:nvSpPr>
+        <p:spPr>
+          <a:xfrm>
+            <a:off x="8513064" y="2633472"/>
+            <a:ext cx="1280160" cy="566928"/>
+          </a:xfrm>
+          <a:prstGeom prst="rect">
+            <a:avLst/>
+          </a:prstGeom>
+          <a:noFill/>
+        </p:spPr>
+        <p:txBody>
+          <a:bodyPr wrap="square" anchor="ctr" lIns="0" tIns="0" rIns="0" bIns="0">
+            <a:noAutofit/>
+          </a:bodyPr>
+          <a:lstStyle/>
+          <a:p>
+            <a:pPr algn="l" latinLnBrk="0">
+              <a:lnSpc>
+                <a:spcPct val="100000"/>
+              </a:lnSpc>
+              <a:spcBef>
+                <a:spcPts val="0"/>
+              </a:spcBef>
+              <a:spcAft>
+                <a:spcPts val="0"/>
+              </a:spcAft>
+            </a:pPr>
+            <a:r>
+              <a:rPr sz="950" b="0">
+                <a:solidFill>
+                  <a:srgbClr val="1B4D69"/>
+                </a:solidFill>
+                <a:latin typeface="Microsoft YaHei"/>
+                <a:ea typeface="Microsoft YaHei"/>
+                <a:cs typeface="Microsoft YaHei"/>
+              </a:rPr>
+              <a:t>device 单步时间</a:t>
+            </a:r>
+          </a:p>
+          <a:p>
+            <a:pPr algn="l" latinLnBrk="0">
+              <a:lnSpc>
+                <a:spcPct val="100000"/>
+              </a:lnSpc>
+              <a:spcBef>
+                <a:spcPts val="0"/>
+              </a:spcBef>
+              <a:spcAft>
+                <a:spcPts val="0"/>
+              </a:spcAft>
+            </a:pPr>
+            <a:r>
+              <a:rPr sz="950" b="0">
+                <a:solidFill>
+                  <a:srgbClr val="1B4D69"/>
+                </a:solidFill>
+                <a:latin typeface="Microsoft YaHei"/>
+                <a:ea typeface="Microsoft YaHei"/>
+                <a:cs typeface="Microsoft YaHei"/>
+              </a:rPr>
+              <a:t>24.7 → 22.2 ms</a:t>
+            </a:r>
+          </a:p>
+        </p:txBody>
+      </p:sp>
+      <p:sp>
+        <p:nvSpPr>
+          <p:cNvPr id="31" name="TextBox 30"/>
+          <p:cNvSpPr txBox="1"/>
+          <p:nvPr/>
+        </p:nvSpPr>
+        <p:spPr>
+          <a:xfrm>
+            <a:off x="9884664" y="2633472"/>
+            <a:ext cx="1554480" cy="566928"/>
+          </a:xfrm>
+          <a:prstGeom prst="rect">
+            <a:avLst/>
+          </a:prstGeom>
+          <a:noFill/>
+        </p:spPr>
+        <p:txBody>
+          <a:bodyPr wrap="square" anchor="ctr" lIns="0" tIns="0" rIns="0" bIns="0">
+            <a:noAutofit/>
+          </a:bodyPr>
+          <a:lstStyle/>
+          <a:p>
+            <a:pPr algn="l" latinLnBrk="0">
+              <a:lnSpc>
+                <a:spcPct val="100000"/>
+              </a:lnSpc>
+              <a:spcBef>
+                <a:spcPts val="0"/>
+              </a:spcBef>
+              <a:spcAft>
+                <a:spcPts val="0"/>
+              </a:spcAft>
+            </a:pPr>
+            <a:r>
               <a:rPr sz="950" b="1">
                 <a:solidFill>
+                  <a:srgbClr val="0F62CE"/>
+                </a:solidFill>
+                <a:latin typeface="Microsoft YaHei"/>
+                <a:ea typeface="Microsoft YaHei"/>
+                <a:cs typeface="Microsoft YaHei"/>
+              </a:rPr>
+              <a:t>交付，全矩阵 +22~38%</a:t>
+            </a:r>
+          </a:p>
+        </p:txBody>
+      </p:sp>
+      <p:sp>
+        <p:nvSpPr>
+          <p:cNvPr id="32" name="Rectangle 31"/>
+          <p:cNvSpPr/>
+          <p:nvPr/>
+        </p:nvSpPr>
+        <p:spPr>
+          <a:xfrm>
+            <a:off x="3602736" y="3236976"/>
+            <a:ext cx="7912303" cy="420624"/>
+          </a:xfrm>
+          <a:prstGeom prst="rect">
+            <a:avLst/>
+          </a:prstGeom>
+          <a:solidFill>
+            <a:srgbClr val="C9E1FC"/>
+          </a:solidFill>
+          <a:ln>
+            <a:noFill/>
+          </a:ln>
+        </p:spPr>
+        <p:txBody>
+          <a:bodyPr rtlCol="0" anchor="ctr"/>
+          <a:lstStyle/>
+          <a:p>
+            <a:pPr algn="ctr"/>
+          </a:p>
+        </p:txBody>
+      </p:sp>
+      <p:sp>
+        <p:nvSpPr>
+          <p:cNvPr id="33" name="TextBox 32"/>
+          <p:cNvSpPr txBox="1"/>
+          <p:nvPr/>
+        </p:nvSpPr>
+        <p:spPr>
+          <a:xfrm>
+            <a:off x="3675888" y="3236976"/>
+            <a:ext cx="2651760" cy="420624"/>
+          </a:xfrm>
+          <a:prstGeom prst="rect">
+            <a:avLst/>
+          </a:prstGeom>
+          <a:noFill/>
+        </p:spPr>
+        <p:txBody>
+          <a:bodyPr wrap="square" anchor="ctr" lIns="0" tIns="0" rIns="0" bIns="0">
+            <a:noAutofit/>
+          </a:bodyPr>
+          <a:lstStyle/>
+          <a:p>
+            <a:pPr algn="l" latinLnBrk="0">
+              <a:lnSpc>
+                <a:spcPct val="100000"/>
+              </a:lnSpc>
+              <a:spcBef>
+                <a:spcPts val="0"/>
+              </a:spcBef>
+              <a:spcAft>
+                <a:spcPts val="0"/>
+              </a:spcAft>
+            </a:pPr>
+            <a:r>
+              <a:rPr sz="950" b="0">
+                <a:solidFill>
+                  <a:srgbClr val="0A2B45"/>
+                </a:solidFill>
+                <a:latin typeface="Microsoft YaHei"/>
+                <a:ea typeface="Microsoft YaHei"/>
+                <a:cs typeface="Microsoft YaHei"/>
+              </a:rPr>
+              <a:t>量化 + shuffle 换 SDNN 恒定核</a:t>
+            </a:r>
+          </a:p>
+          <a:p>
+            <a:pPr algn="l" latinLnBrk="0">
+              <a:lnSpc>
+                <a:spcPct val="100000"/>
+              </a:lnSpc>
+              <a:spcBef>
+                <a:spcPts val="0"/>
+              </a:spcBef>
+              <a:spcAft>
+                <a:spcPts val="0"/>
+              </a:spcAft>
+            </a:pPr>
+            <a:r>
+              <a:rPr sz="950" b="0">
+                <a:solidFill>
+                  <a:srgbClr val="0A2B45"/>
+                </a:solidFill>
+                <a:latin typeface="Microsoft YaHei"/>
+                <a:ea typeface="Microsoft YaHei"/>
+                <a:cs typeface="Microsoft YaHei"/>
+              </a:rPr>
+              <a:t>现用核随 rows×hidden 从 20 涨到 141 µs</a:t>
+            </a:r>
+          </a:p>
+        </p:txBody>
+      </p:sp>
+      <p:sp>
+        <p:nvSpPr>
+          <p:cNvPr id="34" name="TextBox 33"/>
+          <p:cNvSpPr txBox="1"/>
+          <p:nvPr/>
+        </p:nvSpPr>
+        <p:spPr>
+          <a:xfrm>
+            <a:off x="6419088" y="3236976"/>
+            <a:ext cx="2002536" cy="420624"/>
+          </a:xfrm>
+          <a:prstGeom prst="rect">
+            <a:avLst/>
+          </a:prstGeom>
+          <a:noFill/>
+        </p:spPr>
+        <p:txBody>
+          <a:bodyPr wrap="square" anchor="ctr" lIns="0" tIns="0" rIns="0" bIns="0">
+            <a:noAutofit/>
+          </a:bodyPr>
+          <a:lstStyle/>
+          <a:p>
+            <a:pPr algn="l" latinLnBrk="0">
+              <a:lnSpc>
+                <a:spcPct val="100000"/>
+              </a:lnSpc>
+              <a:spcBef>
+                <a:spcPts val="0"/>
+              </a:spcBef>
+              <a:spcAft>
+                <a:spcPts val="0"/>
+              </a:spcAft>
+            </a:pPr>
+            <a:r>
+              <a:rPr sz="950" b="0">
+                <a:solidFill>
+                  <a:srgbClr val="1B4D69"/>
+                </a:solidFill>
+                <a:latin typeface="Microsoft YaHei"/>
+                <a:ea typeface="Microsoft YaHei"/>
+                <a:cs typeface="Microsoft YaHei"/>
+              </a:rPr>
+              <a:t>微基准 c128 5.43×，cos = 1.0</a:t>
+            </a:r>
+          </a:p>
+        </p:txBody>
+      </p:sp>
+      <p:sp>
+        <p:nvSpPr>
+          <p:cNvPr id="35" name="TextBox 34"/>
+          <p:cNvSpPr txBox="1"/>
+          <p:nvPr/>
+        </p:nvSpPr>
+        <p:spPr>
+          <a:xfrm>
+            <a:off x="8513064" y="3236976"/>
+            <a:ext cx="1280160" cy="420624"/>
+          </a:xfrm>
+          <a:prstGeom prst="rect">
+            <a:avLst/>
+          </a:prstGeom>
+          <a:noFill/>
+        </p:spPr>
+        <p:txBody>
+          <a:bodyPr wrap="square" anchor="ctr" lIns="0" tIns="0" rIns="0" bIns="0">
+            <a:noAutofit/>
+          </a:bodyPr>
+          <a:lstStyle/>
+          <a:p>
+            <a:pPr algn="l" latinLnBrk="0">
+              <a:lnSpc>
+                <a:spcPct val="100000"/>
+              </a:lnSpc>
+              <a:spcBef>
+                <a:spcPts val="0"/>
+              </a:spcBef>
+              <a:spcAft>
+                <a:spcPts val="0"/>
+              </a:spcAft>
+            </a:pPr>
+            <a:r>
+              <a:rPr sz="950" b="0">
+                <a:solidFill>
+                  <a:srgbClr val="1B4D69"/>
+                </a:solidFill>
+                <a:latin typeface="Microsoft YaHei"/>
+                <a:ea typeface="Microsoft YaHei"/>
+                <a:cs typeface="Microsoft YaHei"/>
+              </a:rPr>
+              <a:t>E2E 吞吐 +3%</a:t>
+            </a:r>
+          </a:p>
+          <a:p>
+            <a:pPr algn="l" latinLnBrk="0">
+              <a:lnSpc>
+                <a:spcPct val="100000"/>
+              </a:lnSpc>
+              <a:spcBef>
+                <a:spcPts val="0"/>
+              </a:spcBef>
+              <a:spcAft>
+                <a:spcPts val="0"/>
+              </a:spcAft>
+            </a:pPr>
+            <a:r>
+              <a:rPr sz="950" b="0">
+                <a:solidFill>
+                  <a:srgbClr val="1B4D69"/>
+                </a:solidFill>
+                <a:latin typeface="Microsoft YaHei"/>
+                <a:ea typeface="Microsoft YaHei"/>
+                <a:cs typeface="Microsoft YaHei"/>
+              </a:rPr>
+              <a:t>TPOT −3.4%</a:t>
+            </a:r>
+          </a:p>
+        </p:txBody>
+      </p:sp>
+      <p:sp>
+        <p:nvSpPr>
+          <p:cNvPr id="36" name="TextBox 35"/>
+          <p:cNvSpPr txBox="1"/>
+          <p:nvPr/>
+        </p:nvSpPr>
+        <p:spPr>
+          <a:xfrm>
+            <a:off x="9884664" y="3236976"/>
+            <a:ext cx="1554480" cy="420624"/>
+          </a:xfrm>
+          <a:prstGeom prst="rect">
+            <a:avLst/>
+          </a:prstGeom>
+          <a:noFill/>
+        </p:spPr>
+        <p:txBody>
+          <a:bodyPr wrap="square" anchor="ctr" lIns="0" tIns="0" rIns="0" bIns="0">
+            <a:noAutofit/>
+          </a:bodyPr>
+          <a:lstStyle/>
+          <a:p>
+            <a:pPr algn="l" latinLnBrk="0">
+              <a:lnSpc>
+                <a:spcPct val="100000"/>
+              </a:lnSpc>
+              <a:spcBef>
+                <a:spcPts val="0"/>
+              </a:spcBef>
+              <a:spcAft>
+                <a:spcPts val="0"/>
+              </a:spcAft>
+            </a:pPr>
+            <a:r>
+              <a:rPr sz="950" b="1">
+                <a:solidFill>
+                  <a:srgbClr val="0F62CE"/>
+                </a:solidFill>
+                <a:latin typeface="Microsoft YaHei"/>
+                <a:ea typeface="Microsoft YaHei"/>
+                <a:cs typeface="Microsoft YaHei"/>
+              </a:rPr>
+              <a:t>交付</a:t>
+            </a:r>
+          </a:p>
+        </p:txBody>
+      </p:sp>
+      <p:sp>
+        <p:nvSpPr>
+          <p:cNvPr id="37" name="TextBox 36"/>
+          <p:cNvSpPr txBox="1"/>
+          <p:nvPr/>
+        </p:nvSpPr>
+        <p:spPr>
+          <a:xfrm>
+            <a:off x="3675888" y="3694176"/>
+            <a:ext cx="2651760" cy="566928"/>
+          </a:xfrm>
+          <a:prstGeom prst="rect">
+            <a:avLst/>
+          </a:prstGeom>
+          <a:noFill/>
+        </p:spPr>
+        <p:txBody>
+          <a:bodyPr wrap="square" anchor="ctr" lIns="0" tIns="0" rIns="0" bIns="0">
+            <a:noAutofit/>
+          </a:bodyPr>
+          <a:lstStyle/>
+          <a:p>
+            <a:pPr algn="l" latinLnBrk="0">
+              <a:lnSpc>
+                <a:spcPct val="100000"/>
+              </a:lnSpc>
+              <a:spcBef>
+                <a:spcPts val="0"/>
+              </a:spcBef>
+              <a:spcAft>
+                <a:spcPts val="0"/>
+              </a:spcAft>
+            </a:pPr>
+            <a:r>
+              <a:rPr sz="950" b="0">
+                <a:solidFill>
+                  <a:srgbClr val="1B4D69"/>
+                </a:solidFill>
+                <a:latin typeface="Microsoft YaHei"/>
+                <a:ea typeface="Microsoft YaHei"/>
+                <a:cs typeface="Microsoft YaHei"/>
+              </a:rPr>
+              <a:t>grouped-GEMM group-mode 四个旋钮</a:t>
+            </a:r>
+          </a:p>
+        </p:txBody>
+      </p:sp>
+      <p:sp>
+        <p:nvSpPr>
+          <p:cNvPr id="38" name="TextBox 37"/>
+          <p:cNvSpPr txBox="1"/>
+          <p:nvPr/>
+        </p:nvSpPr>
+        <p:spPr>
+          <a:xfrm>
+            <a:off x="6419088" y="3694176"/>
+            <a:ext cx="2002536" cy="566928"/>
+          </a:xfrm>
+          <a:prstGeom prst="rect">
+            <a:avLst/>
+          </a:prstGeom>
+          <a:noFill/>
+        </p:spPr>
+        <p:txBody>
+          <a:bodyPr wrap="square" anchor="ctr" lIns="0" tIns="0" rIns="0" bIns="0">
+            <a:noAutofit/>
+          </a:bodyPr>
+          <a:lstStyle/>
+          <a:p>
+            <a:pPr algn="l" latinLnBrk="0">
+              <a:lnSpc>
+                <a:spcPct val="100000"/>
+              </a:lnSpc>
+              <a:spcBef>
+                <a:spcPts val="0"/>
+              </a:spcBef>
+              <a:spcAft>
+                <a:spcPts val="0"/>
+              </a:spcAft>
+            </a:pPr>
+            <a:r>
+              <a:rPr sz="950" b="0">
+                <a:solidFill>
+                  <a:srgbClr val="1B4D69"/>
+                </a:solidFill>
+                <a:latin typeface="Microsoft YaHei"/>
+                <a:ea typeface="Microsoft YaHei"/>
+                <a:cs typeface="Microsoft YaHei"/>
+              </a:rPr>
+              <a:t>四模式完全同速</a:t>
+            </a:r>
+          </a:p>
+          <a:p>
+            <a:pPr algn="l" latinLnBrk="0">
+              <a:lnSpc>
+                <a:spcPct val="100000"/>
+              </a:lnSpc>
+              <a:spcBef>
+                <a:spcPts val="0"/>
+              </a:spcBef>
+              <a:spcAft>
+                <a:spcPts val="0"/>
+              </a:spcAft>
+            </a:pPr>
+            <a:r>
+              <a:rPr sz="950" b="0">
+                <a:solidFill>
+                  <a:srgbClr val="1B4D69"/>
+                </a:solidFill>
+                <a:latin typeface="Microsoft YaHei"/>
+                <a:ea typeface="Microsoft YaHei"/>
+                <a:cs typeface="Microsoft YaHei"/>
+              </a:rPr>
+              <a:t>force_nogroup −20%</a:t>
+            </a:r>
+          </a:p>
+          <a:p>
+            <a:pPr algn="l" latinLnBrk="0">
+              <a:lnSpc>
+                <a:spcPct val="100000"/>
+              </a:lnSpc>
+              <a:spcBef>
+                <a:spcPts val="0"/>
+              </a:spcBef>
+              <a:spcAft>
+                <a:spcPts val="0"/>
+              </a:spcAft>
+            </a:pPr>
+            <a:r>
+              <a:rPr sz="950" b="0">
+                <a:solidFill>
+                  <a:srgbClr val="1B4D69"/>
+                </a:solidFill>
+                <a:latin typeface="Microsoft YaHei"/>
+                <a:ea typeface="Microsoft YaHei"/>
+                <a:cs typeface="Microsoft YaHei"/>
+              </a:rPr>
+              <a:t>no_group cos 0.000</a:t>
+            </a:r>
+          </a:p>
+        </p:txBody>
+      </p:sp>
+      <p:sp>
+        <p:nvSpPr>
+          <p:cNvPr id="39" name="TextBox 38"/>
+          <p:cNvSpPr txBox="1"/>
+          <p:nvPr/>
+        </p:nvSpPr>
+        <p:spPr>
+          <a:xfrm>
+            <a:off x="8513064" y="3694176"/>
+            <a:ext cx="1280160" cy="566928"/>
+          </a:xfrm>
+          <a:prstGeom prst="rect">
+            <a:avLst/>
+          </a:prstGeom>
+          <a:noFill/>
+        </p:spPr>
+        <p:txBody>
+          <a:bodyPr wrap="square" anchor="ctr" lIns="0" tIns="0" rIns="0" bIns="0">
+            <a:noAutofit/>
+          </a:bodyPr>
+          <a:lstStyle/>
+          <a:p>
+            <a:pPr algn="l" latinLnBrk="0">
+              <a:lnSpc>
+                <a:spcPct val="100000"/>
+              </a:lnSpc>
+              <a:spcBef>
+                <a:spcPts val="0"/>
+              </a:spcBef>
+              <a:spcAft>
+                <a:spcPts val="0"/>
+              </a:spcAft>
+            </a:pPr>
+            <a:r>
+              <a:rPr sz="950" b="0">
+                <a:solidFill>
+                  <a:srgbClr val="7FA4BA"/>
+                </a:solidFill>
+                <a:latin typeface="Microsoft YaHei"/>
+                <a:ea typeface="Microsoft YaHei"/>
+                <a:cs typeface="Microsoft YaHei"/>
+              </a:rPr>
+              <a:t>—</a:t>
+            </a:r>
+          </a:p>
+        </p:txBody>
+      </p:sp>
+      <p:sp>
+        <p:nvSpPr>
+          <p:cNvPr id="40" name="TextBox 39"/>
+          <p:cNvSpPr txBox="1"/>
+          <p:nvPr/>
+        </p:nvSpPr>
+        <p:spPr>
+          <a:xfrm>
+            <a:off x="9884664" y="3694176"/>
+            <a:ext cx="1554480" cy="566928"/>
+          </a:xfrm>
+          <a:prstGeom prst="rect">
+            <a:avLst/>
+          </a:prstGeom>
+          <a:noFill/>
+        </p:spPr>
+        <p:txBody>
+          <a:bodyPr wrap="square" anchor="ctr" lIns="0" tIns="0" rIns="0" bIns="0">
+            <a:noAutofit/>
+          </a:bodyPr>
+          <a:lstStyle/>
+          <a:p>
+            <a:pPr algn="l" latinLnBrk="0">
+              <a:lnSpc>
+                <a:spcPct val="100000"/>
+              </a:lnSpc>
+              <a:spcBef>
+                <a:spcPts val="0"/>
+              </a:spcBef>
+              <a:spcAft>
+                <a:spcPts val="0"/>
+              </a:spcAft>
+            </a:pPr>
+            <a:r>
+              <a:rPr sz="950" b="0">
+                <a:solidFill>
+                  <a:srgbClr val="D94A3D"/>
+                </a:solidFill>
+                <a:latin typeface="Microsoft YaHei"/>
+                <a:ea typeface="Microsoft YaHei"/>
+                <a:cs typeface="Microsoft YaHei"/>
+              </a:rPr>
+              <a:t>① 挡掉一个，③ 挡掉其余</a:t>
+            </a:r>
+          </a:p>
+          <a:p>
+            <a:pPr algn="l" latinLnBrk="0">
+              <a:lnSpc>
+                <a:spcPct val="100000"/>
+              </a:lnSpc>
+              <a:spcBef>
+                <a:spcPts val="0"/>
+              </a:spcBef>
+              <a:spcAft>
+                <a:spcPts val="0"/>
+              </a:spcAft>
+            </a:pPr>
+            <a:r>
+              <a:rPr sz="950" b="0">
+                <a:solidFill>
+                  <a:srgbClr val="D94A3D"/>
+                </a:solidFill>
+                <a:latin typeface="Microsoft YaHei"/>
+                <a:ea typeface="Microsoft YaHei"/>
+                <a:cs typeface="Microsoft YaHei"/>
+              </a:rPr>
+              <a:t>判定为闭源核内在开销</a:t>
+            </a:r>
+          </a:p>
+        </p:txBody>
+      </p:sp>
+      <p:sp>
+        <p:nvSpPr>
+          <p:cNvPr id="41" name="TextBox 40"/>
+          <p:cNvSpPr txBox="1"/>
+          <p:nvPr/>
+        </p:nvSpPr>
+        <p:spPr>
+          <a:xfrm>
+            <a:off x="3675888" y="4297680"/>
+            <a:ext cx="2651760" cy="274320"/>
+          </a:xfrm>
+          <a:prstGeom prst="rect">
+            <a:avLst/>
+          </a:prstGeom>
+          <a:noFill/>
+        </p:spPr>
+        <p:txBody>
+          <a:bodyPr wrap="square" anchor="ctr" lIns="0" tIns="0" rIns="0" bIns="0">
+            <a:noAutofit/>
+          </a:bodyPr>
+          <a:lstStyle/>
+          <a:p>
+            <a:pPr algn="l" latinLnBrk="0">
+              <a:lnSpc>
+                <a:spcPct val="100000"/>
+              </a:lnSpc>
+              <a:spcBef>
+                <a:spcPts val="0"/>
+              </a:spcBef>
+              <a:spcAft>
+                <a:spcPts val="0"/>
+              </a:spcAft>
+            </a:pPr>
+            <a:r>
+              <a:rPr sz="950" b="0">
+                <a:solidFill>
+                  <a:srgbClr val="1B4D69"/>
+                </a:solidFill>
+                <a:latin typeface="Microsoft YaHei"/>
+                <a:ea typeface="Microsoft YaHei"/>
+                <a:cs typeface="Microsoft YaHei"/>
+              </a:rPr>
+              <a:t>FFN 输出合并换 shuffle_mul_sum_sdnn</a:t>
+            </a:r>
+          </a:p>
+        </p:txBody>
+      </p:sp>
+      <p:sp>
+        <p:nvSpPr>
+          <p:cNvPr id="42" name="TextBox 41"/>
+          <p:cNvSpPr txBox="1"/>
+          <p:nvPr/>
+        </p:nvSpPr>
+        <p:spPr>
+          <a:xfrm>
+            <a:off x="6419088" y="4297680"/>
+            <a:ext cx="2002536" cy="274320"/>
+          </a:xfrm>
+          <a:prstGeom prst="rect">
+            <a:avLst/>
+          </a:prstGeom>
+          <a:noFill/>
+        </p:spPr>
+        <p:txBody>
+          <a:bodyPr wrap="square" anchor="ctr" lIns="0" tIns="0" rIns="0" bIns="0">
+            <a:noAutofit/>
+          </a:bodyPr>
+          <a:lstStyle/>
+          <a:p>
+            <a:pPr algn="l" latinLnBrk="0">
+              <a:lnSpc>
+                <a:spcPct val="100000"/>
+              </a:lnSpc>
+              <a:spcBef>
+                <a:spcPts val="0"/>
+              </a:spcBef>
+              <a:spcAft>
+                <a:spcPts val="0"/>
+              </a:spcAft>
+            </a:pPr>
+            <a:r>
+              <a:rPr sz="950" b="0">
+                <a:solidFill>
+                  <a:srgbClr val="1B4D69"/>
+                </a:solidFill>
+                <a:latin typeface="Microsoft YaHei"/>
+                <a:ea typeface="Microsoft YaHei"/>
+                <a:cs typeface="Microsoft YaHei"/>
+              </a:rPr>
+              <a:t>0.61×，更慢</a:t>
+            </a:r>
+          </a:p>
+        </p:txBody>
+      </p:sp>
+      <p:sp>
+        <p:nvSpPr>
+          <p:cNvPr id="43" name="TextBox 42"/>
+          <p:cNvSpPr txBox="1"/>
+          <p:nvPr/>
+        </p:nvSpPr>
+        <p:spPr>
+          <a:xfrm>
+            <a:off x="8513064" y="4297680"/>
+            <a:ext cx="1280160" cy="274320"/>
+          </a:xfrm>
+          <a:prstGeom prst="rect">
+            <a:avLst/>
+          </a:prstGeom>
+          <a:noFill/>
+        </p:spPr>
+        <p:txBody>
+          <a:bodyPr wrap="square" anchor="ctr" lIns="0" tIns="0" rIns="0" bIns="0">
+            <a:noAutofit/>
+          </a:bodyPr>
+          <a:lstStyle/>
+          <a:p>
+            <a:pPr algn="l" latinLnBrk="0">
+              <a:lnSpc>
+                <a:spcPct val="100000"/>
+              </a:lnSpc>
+              <a:spcBef>
+                <a:spcPts val="0"/>
+              </a:spcBef>
+              <a:spcAft>
+                <a:spcPts val="0"/>
+              </a:spcAft>
+            </a:pPr>
+            <a:r>
+              <a:rPr sz="950" b="0">
+                <a:solidFill>
+                  <a:srgbClr val="7FA4BA"/>
+                </a:solidFill>
+                <a:latin typeface="Microsoft YaHei"/>
+                <a:ea typeface="Microsoft YaHei"/>
+                <a:cs typeface="Microsoft YaHei"/>
+              </a:rPr>
+              <a:t>—</a:t>
+            </a:r>
+          </a:p>
+        </p:txBody>
+      </p:sp>
+      <p:sp>
+        <p:nvSpPr>
+          <p:cNvPr id="44" name="TextBox 43"/>
+          <p:cNvSpPr txBox="1"/>
+          <p:nvPr/>
+        </p:nvSpPr>
+        <p:spPr>
+          <a:xfrm>
+            <a:off x="9884664" y="4297680"/>
+            <a:ext cx="1554480" cy="274320"/>
+          </a:xfrm>
+          <a:prstGeom prst="rect">
+            <a:avLst/>
+          </a:prstGeom>
+          <a:noFill/>
+        </p:spPr>
+        <p:txBody>
+          <a:bodyPr wrap="square" anchor="ctr" lIns="0" tIns="0" rIns="0" bIns="0">
+            <a:noAutofit/>
+          </a:bodyPr>
+          <a:lstStyle/>
+          <a:p>
+            <a:pPr algn="l" latinLnBrk="0">
+              <a:lnSpc>
+                <a:spcPct val="100000"/>
+              </a:lnSpc>
+              <a:spcBef>
+                <a:spcPts val="0"/>
+              </a:spcBef>
+              <a:spcAft>
+                <a:spcPts val="0"/>
+              </a:spcAft>
+            </a:pPr>
+            <a:r>
+              <a:rPr sz="950" b="0">
+                <a:solidFill>
+                  <a:srgbClr val="D94A3D"/>
+                </a:solidFill>
+                <a:latin typeface="Microsoft YaHei"/>
+                <a:ea typeface="Microsoft YaHei"/>
+                <a:cs typeface="Microsoft YaHei"/>
+              </a:rPr>
+              <a:t>③ 未过</a:t>
+            </a:r>
+          </a:p>
+        </p:txBody>
+      </p:sp>
+      <p:sp>
+        <p:nvSpPr>
+          <p:cNvPr id="45" name="TextBox 44"/>
+          <p:cNvSpPr txBox="1"/>
+          <p:nvPr/>
+        </p:nvSpPr>
+        <p:spPr>
+          <a:xfrm>
+            <a:off x="3675888" y="4608576"/>
+            <a:ext cx="2651760" cy="274320"/>
+          </a:xfrm>
+          <a:prstGeom prst="rect">
+            <a:avLst/>
+          </a:prstGeom>
+          <a:noFill/>
+        </p:spPr>
+        <p:txBody>
+          <a:bodyPr wrap="square" anchor="ctr" lIns="0" tIns="0" rIns="0" bIns="0">
+            <a:noAutofit/>
+          </a:bodyPr>
+          <a:lstStyle/>
+          <a:p>
+            <a:pPr algn="l" latinLnBrk="0">
+              <a:lnSpc>
+                <a:spcPct val="100000"/>
+              </a:lnSpc>
+              <a:spcBef>
+                <a:spcPts val="0"/>
+              </a:spcBef>
+              <a:spcAft>
+                <a:spcPts val="0"/>
+              </a:spcAft>
+            </a:pPr>
+            <a:r>
+              <a:rPr sz="950" b="0">
+                <a:solidFill>
+                  <a:srgbClr val="1B4D69"/>
+                </a:solidFill>
+                <a:latin typeface="Microsoft YaHei"/>
+                <a:ea typeface="Microsoft YaHei"/>
+                <a:cs typeface="Microsoft YaHei"/>
+              </a:rPr>
+              <a:t>路由 softmax + topk + renorm 融合</a:t>
+            </a:r>
+          </a:p>
+        </p:txBody>
+      </p:sp>
+      <p:sp>
+        <p:nvSpPr>
+          <p:cNvPr id="46" name="TextBox 45"/>
+          <p:cNvSpPr txBox="1"/>
+          <p:nvPr/>
+        </p:nvSpPr>
+        <p:spPr>
+          <a:xfrm>
+            <a:off x="6419088" y="4608576"/>
+            <a:ext cx="2002536" cy="274320"/>
+          </a:xfrm>
+          <a:prstGeom prst="rect">
+            <a:avLst/>
+          </a:prstGeom>
+          <a:noFill/>
+        </p:spPr>
+        <p:txBody>
+          <a:bodyPr wrap="square" anchor="ctr" lIns="0" tIns="0" rIns="0" bIns="0">
+            <a:noAutofit/>
+          </a:bodyPr>
+          <a:lstStyle/>
+          <a:p>
+            <a:pPr algn="l" latinLnBrk="0">
+              <a:lnSpc>
+                <a:spcPct val="100000"/>
+              </a:lnSpc>
+              <a:spcBef>
+                <a:spcPts val="0"/>
+              </a:spcBef>
+              <a:spcAft>
+                <a:spcPts val="0"/>
+              </a:spcAft>
+            </a:pPr>
+            <a:r>
+              <a:rPr sz="950" b="0">
+                <a:solidFill>
+                  <a:srgbClr val="1B4D69"/>
+                </a:solidFill>
+                <a:latin typeface="Microsoft YaHei"/>
+                <a:ea typeface="Microsoft YaHei"/>
+                <a:cs typeface="Microsoft YaHei"/>
+              </a:rPr>
+              <a:t>内核 2×，数值对（Δ 3e-8）</a:t>
+            </a:r>
+          </a:p>
+        </p:txBody>
+      </p:sp>
+      <p:sp>
+        <p:nvSpPr>
+          <p:cNvPr id="47" name="TextBox 46"/>
+          <p:cNvSpPr txBox="1"/>
+          <p:nvPr/>
+        </p:nvSpPr>
+        <p:spPr>
+          <a:xfrm>
+            <a:off x="8513064" y="4608576"/>
+            <a:ext cx="1280160" cy="274320"/>
+          </a:xfrm>
+          <a:prstGeom prst="rect">
+            <a:avLst/>
+          </a:prstGeom>
+          <a:noFill/>
+        </p:spPr>
+        <p:txBody>
+          <a:bodyPr wrap="square" anchor="ctr" lIns="0" tIns="0" rIns="0" bIns="0">
+            <a:noAutofit/>
+          </a:bodyPr>
+          <a:lstStyle/>
+          <a:p>
+            <a:pPr algn="l" latinLnBrk="0">
+              <a:lnSpc>
+                <a:spcPct val="100000"/>
+              </a:lnSpc>
+              <a:spcBef>
+                <a:spcPts val="0"/>
+              </a:spcBef>
+              <a:spcAft>
+                <a:spcPts val="0"/>
+              </a:spcAft>
+            </a:pPr>
+            <a:r>
+              <a:rPr sz="950" b="0">
+                <a:solidFill>
+                  <a:srgbClr val="1B4D69"/>
+                </a:solidFill>
+                <a:latin typeface="Microsoft YaHei"/>
+                <a:ea typeface="Microsoft YaHei"/>
+                <a:cs typeface="Microsoft YaHei"/>
+              </a:rPr>
+              <a:t>只占 ~0.9% TPOT</a:t>
+            </a:r>
+          </a:p>
+        </p:txBody>
+      </p:sp>
+      <p:sp>
+        <p:nvSpPr>
+          <p:cNvPr id="48" name="TextBox 47"/>
+          <p:cNvSpPr txBox="1"/>
+          <p:nvPr/>
+        </p:nvSpPr>
+        <p:spPr>
+          <a:xfrm>
+            <a:off x="9884664" y="4608576"/>
+            <a:ext cx="1554480" cy="274320"/>
+          </a:xfrm>
+          <a:prstGeom prst="rect">
+            <a:avLst/>
+          </a:prstGeom>
+          <a:noFill/>
+        </p:spPr>
+        <p:txBody>
+          <a:bodyPr wrap="square" anchor="ctr" lIns="0" tIns="0" rIns="0" bIns="0">
+            <a:noAutofit/>
+          </a:bodyPr>
+          <a:lstStyle/>
+          <a:p>
+            <a:pPr algn="l" latinLnBrk="0">
+              <a:lnSpc>
+                <a:spcPct val="100000"/>
+              </a:lnSpc>
+              <a:spcBef>
+                <a:spcPts val="0"/>
+              </a:spcBef>
+              <a:spcAft>
+                <a:spcPts val="0"/>
+              </a:spcAft>
+            </a:pPr>
+            <a:r>
+              <a:rPr sz="950" b="0">
+                <a:solidFill>
                   <a:srgbClr val="40708B"/>
                 </a:solidFill>
-                <a:latin typeface="Consolas"/>
-                <a:ea typeface="Microsoft YaHei"/>
-                <a:cs typeface="Microsoft YaHei"/>
-              </a:rPr>
-              <a:t>C4</a:t>
-            </a:r>
-          </a:p>
-        </p:txBody>
-      </p:sp>
-      <p:sp>
-        <p:nvSpPr>
-          <p:cNvPr id="82" name="TextBox 81"/>
-          <p:cNvSpPr txBox="1"/>
-          <p:nvPr/>
-        </p:nvSpPr>
-        <p:spPr>
-          <a:xfrm>
-            <a:off x="7872983" y="4133087"/>
-            <a:ext cx="1828800" cy="329184"/>
-          </a:xfrm>
-          <a:prstGeom prst="rect">
-            <a:avLst/>
-          </a:prstGeom>
-          <a:noFill/>
-        </p:spPr>
-        <p:txBody>
-          <a:bodyPr wrap="square" anchor="ctr" lIns="0" tIns="0" rIns="0" bIns="0">
-            <a:noAutofit/>
-          </a:bodyPr>
-          <a:lstStyle/>
-          <a:p>
-            <a:pPr algn="l" latinLnBrk="0">
-              <a:lnSpc>
-                <a:spcPct val="100000"/>
-              </a:lnSpc>
-              <a:spcBef>
-                <a:spcPts val="0"/>
-              </a:spcBef>
-              <a:spcAft>
-                <a:spcPts val="0"/>
-              </a:spcAft>
-            </a:pPr>
-            <a:r>
-              <a:rPr sz="950" b="0">
-                <a:solidFill>
-                  <a:srgbClr val="0A2B45"/>
-                </a:solidFill>
                 <a:latin typeface="Microsoft YaHei"/>
                 <a:ea typeface="Microsoft YaHei"/>
                 <a:cs typeface="Microsoft YaHei"/>
               </a:rPr>
-              <a:t>例：KV 缓存与复用策略</a:t>
-            </a:r>
-          </a:p>
-        </p:txBody>
-      </p:sp>
-      <p:sp>
-        <p:nvSpPr>
-          <p:cNvPr id="83" name="TextBox 82"/>
-          <p:cNvSpPr txBox="1"/>
-          <p:nvPr/>
-        </p:nvSpPr>
-        <p:spPr>
-          <a:xfrm>
-            <a:off x="9738360" y="4133087"/>
-            <a:ext cx="566928" cy="329184"/>
-          </a:xfrm>
-          <a:prstGeom prst="rect">
-            <a:avLst/>
-          </a:prstGeom>
-          <a:noFill/>
-        </p:spPr>
-        <p:txBody>
-          <a:bodyPr wrap="square" anchor="ctr" lIns="0" tIns="0" rIns="0" bIns="0">
-            <a:noAutofit/>
-          </a:bodyPr>
-          <a:lstStyle/>
-          <a:p>
-            <a:pPr algn="r" latinLnBrk="0">
-              <a:lnSpc>
-                <a:spcPct val="100000"/>
-              </a:lnSpc>
-              <a:spcBef>
-                <a:spcPts val="0"/>
-              </a:spcBef>
-              <a:spcAft>
-                <a:spcPts val="0"/>
-              </a:spcAft>
-            </a:pPr>
-            <a:r>
-              <a:rPr sz="950" b="0">
-                <a:solidFill>
-                  <a:srgbClr val="7FA4BA"/>
-                </a:solidFill>
-                <a:latin typeface="Consolas"/>
-                <a:ea typeface="Microsoft YaHei"/>
-                <a:cs typeface="Microsoft YaHei"/>
-              </a:rPr>
-              <a:t>__</a:t>
-            </a:r>
-          </a:p>
-        </p:txBody>
-      </p:sp>
-      <p:sp>
-        <p:nvSpPr>
-          <p:cNvPr id="84" name="TextBox 83"/>
-          <p:cNvSpPr txBox="1"/>
-          <p:nvPr/>
-        </p:nvSpPr>
-        <p:spPr>
-          <a:xfrm>
-            <a:off x="10360152" y="4133087"/>
-            <a:ext cx="566928" cy="329184"/>
-          </a:xfrm>
-          <a:prstGeom prst="rect">
-            <a:avLst/>
-          </a:prstGeom>
-          <a:noFill/>
-        </p:spPr>
-        <p:txBody>
-          <a:bodyPr wrap="square" anchor="ctr" lIns="0" tIns="0" rIns="0" bIns="0">
-            <a:noAutofit/>
-          </a:bodyPr>
-          <a:lstStyle/>
-          <a:p>
-            <a:pPr algn="r" latinLnBrk="0">
-              <a:lnSpc>
-                <a:spcPct val="100000"/>
-              </a:lnSpc>
-              <a:spcBef>
-                <a:spcPts val="0"/>
-              </a:spcBef>
-              <a:spcAft>
-                <a:spcPts val="0"/>
-              </a:spcAft>
-            </a:pPr>
-            <a:r>
-              <a:rPr sz="950" b="0">
-                <a:solidFill>
-                  <a:srgbClr val="7FA4BA"/>
-                </a:solidFill>
-                <a:latin typeface="Consolas"/>
-                <a:ea typeface="Microsoft YaHei"/>
-                <a:cs typeface="Microsoft YaHei"/>
-              </a:rPr>
-              <a:t>__</a:t>
-            </a:r>
-          </a:p>
-        </p:txBody>
-      </p:sp>
-      <p:sp>
-        <p:nvSpPr>
-          <p:cNvPr id="85" name="TextBox 84"/>
-          <p:cNvSpPr txBox="1"/>
-          <p:nvPr/>
-        </p:nvSpPr>
-        <p:spPr>
-          <a:xfrm>
-            <a:off x="11018520" y="4133087"/>
-            <a:ext cx="512064" cy="329184"/>
-          </a:xfrm>
-          <a:prstGeom prst="rect">
-            <a:avLst/>
-          </a:prstGeom>
-          <a:noFill/>
-        </p:spPr>
-        <p:txBody>
-          <a:bodyPr wrap="square" anchor="ctr" lIns="0" tIns="0" rIns="0" bIns="0">
-            <a:noAutofit/>
-          </a:bodyPr>
-          <a:lstStyle/>
-          <a:p>
-            <a:pPr algn="l" latinLnBrk="0">
-              <a:lnSpc>
-                <a:spcPct val="100000"/>
-              </a:lnSpc>
-              <a:spcBef>
-                <a:spcPts val="0"/>
-              </a:spcBef>
-              <a:spcAft>
-                <a:spcPts val="0"/>
-              </a:spcAft>
-            </a:pPr>
-            <a:r>
-              <a:rPr sz="950" b="1">
-                <a:solidFill>
-                  <a:srgbClr val="1B4D69"/>
-                </a:solidFill>
-                <a:latin typeface="Microsoft YaHei"/>
-                <a:ea typeface="Microsoft YaHei"/>
-                <a:cs typeface="Microsoft YaHei"/>
-              </a:rPr>
-              <a:t>交付</a:t>
-            </a:r>
-          </a:p>
-        </p:txBody>
-      </p:sp>
-      <p:sp>
-        <p:nvSpPr>
-          <p:cNvPr id="86" name="TextBox 85"/>
-          <p:cNvSpPr txBox="1"/>
-          <p:nvPr/>
-        </p:nvSpPr>
-        <p:spPr>
-          <a:xfrm>
-            <a:off x="7470648" y="4498848"/>
-            <a:ext cx="402336" cy="329184"/>
-          </a:xfrm>
-          <a:prstGeom prst="rect">
-            <a:avLst/>
-          </a:prstGeom>
-          <a:noFill/>
-        </p:spPr>
-        <p:txBody>
-          <a:bodyPr wrap="square" anchor="ctr" lIns="0" tIns="0" rIns="0" bIns="0">
-            <a:noAutofit/>
-          </a:bodyPr>
-          <a:lstStyle/>
-          <a:p>
-            <a:pPr algn="l" latinLnBrk="0">
-              <a:lnSpc>
-                <a:spcPct val="100000"/>
-              </a:lnSpc>
-              <a:spcBef>
-                <a:spcPts val="0"/>
-              </a:spcBef>
-              <a:spcAft>
-                <a:spcPts val="0"/>
-              </a:spcAft>
-            </a:pPr>
-            <a:r>
-              <a:rPr sz="950" b="1">
-                <a:solidFill>
-                  <a:srgbClr val="40708B"/>
-                </a:solidFill>
-                <a:latin typeface="Consolas"/>
-                <a:ea typeface="Microsoft YaHei"/>
-                <a:cs typeface="Microsoft YaHei"/>
-              </a:rPr>
-              <a:t>C5</a:t>
-            </a:r>
-          </a:p>
-        </p:txBody>
-      </p:sp>
-      <p:sp>
-        <p:nvSpPr>
-          <p:cNvPr id="87" name="TextBox 86"/>
-          <p:cNvSpPr txBox="1"/>
-          <p:nvPr/>
-        </p:nvSpPr>
-        <p:spPr>
-          <a:xfrm>
-            <a:off x="7872983" y="4498848"/>
-            <a:ext cx="1828800" cy="329184"/>
-          </a:xfrm>
-          <a:prstGeom prst="rect">
-            <a:avLst/>
-          </a:prstGeom>
-          <a:noFill/>
-        </p:spPr>
-        <p:txBody>
-          <a:bodyPr wrap="square" anchor="ctr" lIns="0" tIns="0" rIns="0" bIns="0">
-            <a:noAutofit/>
-          </a:bodyPr>
-          <a:lstStyle/>
-          <a:p>
-            <a:pPr algn="l" latinLnBrk="0">
-              <a:lnSpc>
-                <a:spcPct val="100000"/>
-              </a:lnSpc>
-              <a:spcBef>
-                <a:spcPts val="0"/>
-              </a:spcBef>
-              <a:spcAft>
-                <a:spcPts val="0"/>
-              </a:spcAft>
-            </a:pPr>
-            <a:r>
-              <a:rPr sz="950" b="0">
-                <a:solidFill>
-                  <a:srgbClr val="1B4D69"/>
-                </a:solidFill>
-                <a:latin typeface="Microsoft YaHei"/>
-                <a:ea typeface="Microsoft YaHei"/>
-                <a:cs typeface="Microsoft YaHei"/>
-              </a:rPr>
-              <a:t>例：通信与计算重叠</a:t>
-            </a:r>
-          </a:p>
-        </p:txBody>
-      </p:sp>
-      <p:sp>
-        <p:nvSpPr>
-          <p:cNvPr id="88" name="TextBox 87"/>
-          <p:cNvSpPr txBox="1"/>
-          <p:nvPr/>
-        </p:nvSpPr>
-        <p:spPr>
-          <a:xfrm>
-            <a:off x="9738360" y="4498848"/>
-            <a:ext cx="566928" cy="329184"/>
-          </a:xfrm>
-          <a:prstGeom prst="rect">
-            <a:avLst/>
-          </a:prstGeom>
-          <a:noFill/>
-        </p:spPr>
-        <p:txBody>
-          <a:bodyPr wrap="square" anchor="ctr" lIns="0" tIns="0" rIns="0" bIns="0">
-            <a:noAutofit/>
-          </a:bodyPr>
-          <a:lstStyle/>
-          <a:p>
-            <a:pPr algn="r" latinLnBrk="0">
-              <a:lnSpc>
-                <a:spcPct val="100000"/>
-              </a:lnSpc>
-              <a:spcBef>
-                <a:spcPts val="0"/>
-              </a:spcBef>
-              <a:spcAft>
-                <a:spcPts val="0"/>
-              </a:spcAft>
-            </a:pPr>
-            <a:r>
-              <a:rPr sz="950" b="0">
-                <a:solidFill>
-                  <a:srgbClr val="7FA4BA"/>
-                </a:solidFill>
-                <a:latin typeface="Consolas"/>
-                <a:ea typeface="Microsoft YaHei"/>
-                <a:cs typeface="Microsoft YaHei"/>
-              </a:rPr>
-              <a:t>__</a:t>
-            </a:r>
-          </a:p>
-        </p:txBody>
-      </p:sp>
-      <p:sp>
-        <p:nvSpPr>
-          <p:cNvPr id="89" name="TextBox 88"/>
-          <p:cNvSpPr txBox="1"/>
-          <p:nvPr/>
-        </p:nvSpPr>
-        <p:spPr>
-          <a:xfrm>
-            <a:off x="10360152" y="4498848"/>
-            <a:ext cx="566928" cy="329184"/>
-          </a:xfrm>
-          <a:prstGeom prst="rect">
-            <a:avLst/>
-          </a:prstGeom>
-          <a:noFill/>
-        </p:spPr>
-        <p:txBody>
-          <a:bodyPr wrap="square" anchor="ctr" lIns="0" tIns="0" rIns="0" bIns="0">
-            <a:noAutofit/>
-          </a:bodyPr>
-          <a:lstStyle/>
-          <a:p>
-            <a:pPr algn="r" latinLnBrk="0">
-              <a:lnSpc>
-                <a:spcPct val="100000"/>
-              </a:lnSpc>
-              <a:spcBef>
-                <a:spcPts val="0"/>
-              </a:spcBef>
-              <a:spcAft>
-                <a:spcPts val="0"/>
-              </a:spcAft>
-            </a:pPr>
-            <a:r>
-              <a:rPr sz="950" b="0">
-                <a:solidFill>
-                  <a:srgbClr val="7FA4BA"/>
-                </a:solidFill>
-                <a:latin typeface="Consolas"/>
-                <a:ea typeface="Microsoft YaHei"/>
-                <a:cs typeface="Microsoft YaHei"/>
-              </a:rPr>
-              <a:t>—</a:t>
-            </a:r>
-          </a:p>
-        </p:txBody>
-      </p:sp>
-      <p:sp>
-        <p:nvSpPr>
-          <p:cNvPr id="90" name="TextBox 89"/>
-          <p:cNvSpPr txBox="1"/>
-          <p:nvPr/>
-        </p:nvSpPr>
-        <p:spPr>
-          <a:xfrm>
-            <a:off x="11018520" y="4498848"/>
-            <a:ext cx="512064" cy="329184"/>
-          </a:xfrm>
-          <a:prstGeom prst="rect">
-            <a:avLst/>
-          </a:prstGeom>
-          <a:noFill/>
-        </p:spPr>
-        <p:txBody>
-          <a:bodyPr wrap="square" anchor="ctr" lIns="0" tIns="0" rIns="0" bIns="0">
-            <a:noAutofit/>
-          </a:bodyPr>
-          <a:lstStyle/>
-          <a:p>
-            <a:pPr algn="l" latinLnBrk="0">
-              <a:lnSpc>
-                <a:spcPct val="100000"/>
-              </a:lnSpc>
-              <a:spcBef>
-                <a:spcPts val="0"/>
-              </a:spcBef>
-              <a:spcAft>
-                <a:spcPts val="0"/>
-              </a:spcAft>
-            </a:pPr>
-            <a:r>
-              <a:rPr sz="950" b="0">
-                <a:solidFill>
-                  <a:srgbClr val="7FA4BA"/>
-                </a:solidFill>
-                <a:latin typeface="Microsoft YaHei"/>
-                <a:ea typeface="Microsoft YaHei"/>
-                <a:cs typeface="Microsoft YaHei"/>
-              </a:rPr>
-              <a:t>③ 未过</a:t>
-            </a:r>
-          </a:p>
-        </p:txBody>
-      </p:sp>
-      <p:sp>
-        <p:nvSpPr>
-          <p:cNvPr id="91" name="TextBox 90"/>
+              <a:t>③ 过但不值当，未接线</a:t>
+            </a:r>
+          </a:p>
+        </p:txBody>
+      </p:sp>
+      <p:sp>
+        <p:nvSpPr>
+          <p:cNvPr id="49" name="TextBox 48"/>
           <p:cNvSpPr txBox="1"/>
           <p:nvPr/>
         </p:nvSpPr>
@@ -6874,21 +5416,21 @@
                 <a:ea typeface="Microsoft YaHei"/>
                 <a:cs typeface="Microsoft YaHei"/>
               </a:rPr>
-              <a:t>越靠前的门越省设备时间</a:t>
-            </a:r>
-          </a:p>
-        </p:txBody>
-      </p:sp>
-      <p:sp>
-        <p:nvSpPr>
-          <p:cNvPr id="92" name="Rectangle 91"/>
+              <a:t>数值不对、更慢的当场挡掉</a:t>
+            </a:r>
+          </a:p>
+        </p:txBody>
+      </p:sp>
+      <p:sp>
+        <p:nvSpPr>
+          <p:cNvPr id="50" name="Rectangle 49"/>
           <p:cNvSpPr/>
           <p:nvPr/>
         </p:nvSpPr>
         <p:spPr>
           <a:xfrm>
             <a:off x="3291840" y="5084064"/>
-            <a:ext cx="1553199" cy="621792"/>
+            <a:ext cx="2503322" cy="621792"/>
           </a:xfrm>
           <a:prstGeom prst="rect">
             <a:avLst/>
@@ -6912,14 +5454,14 @@
       </p:sp>
       <p:sp>
         <p:nvSpPr>
-          <p:cNvPr id="93" name="TextBox 92"/>
-          <p:cNvSpPr txBox="1"/>
-          <p:nvPr/>
-        </p:nvSpPr>
-        <p:spPr>
-          <a:xfrm>
-            <a:off x="3438144" y="5120640"/>
-            <a:ext cx="1260591" cy="182880"/>
+          <p:cNvPr id="51" name="TextBox 50"/>
+          <p:cNvSpPr txBox="1"/>
+          <p:nvPr/>
+        </p:nvSpPr>
+        <p:spPr>
+          <a:xfrm>
+            <a:off x="3474720" y="5157216"/>
+            <a:ext cx="2137562" cy="201168"/>
           </a:xfrm>
           <a:prstGeom prst="rect">
             <a:avLst/>
@@ -6959,14 +5501,14 @@
       </p:sp>
       <p:sp>
         <p:nvSpPr>
-          <p:cNvPr id="94" name="TextBox 93"/>
-          <p:cNvSpPr txBox="1"/>
-          <p:nvPr/>
-        </p:nvSpPr>
-        <p:spPr>
-          <a:xfrm>
-            <a:off x="3438144" y="5321807"/>
-            <a:ext cx="1260591" cy="201168"/>
+          <p:cNvPr id="52" name="TextBox 51"/>
+          <p:cNvSpPr txBox="1"/>
+          <p:nvPr/>
+        </p:nvSpPr>
+        <p:spPr>
+          <a:xfrm>
+            <a:off x="3474720" y="5376672"/>
+            <a:ext cx="2137562" cy="274320"/>
           </a:xfrm>
           <a:prstGeom prst="rect">
             <a:avLst/>
@@ -6991,76 +5533,29 @@
               </a:spcAft>
             </a:pPr>
             <a:r>
-              <a:rPr sz="1500" b="1">
-                <a:solidFill>
-                  <a:srgbClr val="7FA4BA"/>
-                </a:solidFill>
-                <a:latin typeface="Consolas"/>
-                <a:ea typeface="Microsoft YaHei"/>
-                <a:cs typeface="Microsoft YaHei"/>
-              </a:rPr>
-              <a:t>__</a:t>
-            </a:r>
-          </a:p>
-        </p:txBody>
-      </p:sp>
-      <p:sp>
-        <p:nvSpPr>
-          <p:cNvPr id="95" name="TextBox 94"/>
-          <p:cNvSpPr txBox="1"/>
-          <p:nvPr/>
-        </p:nvSpPr>
-        <p:spPr>
-          <a:xfrm>
-            <a:off x="3438144" y="5541264"/>
-            <a:ext cx="1260591" cy="164592"/>
-          </a:xfrm>
-          <a:prstGeom prst="rect">
-            <a:avLst/>
-          </a:prstGeom>
-          <a:noFill/>
-        </p:spPr>
-        <p:txBody>
-          <a:bodyPr wrap="square" anchor="ctr" lIns="0" tIns="0" rIns="0" bIns="0">
-            <a:noAutofit/>
-          </a:bodyPr>
-          <a:lstStyle/>
-          <a:p>
-            <a:pPr algn="l" latinLnBrk="0">
-              <a:lnSpc>
-                <a:spcPct val="100000"/>
-              </a:lnSpc>
-              <a:spcBef>
-                <a:spcPts val="0"/>
-              </a:spcBef>
-              <a:spcAft>
-                <a:spcPts val="0"/>
-              </a:spcAft>
-            </a:pPr>
-            <a:r>
-              <a:rPr sz="850" b="0">
-                <a:solidFill>
-                  <a:srgbClr val="7FA4BA"/>
-                </a:solidFill>
-                <a:latin typeface="Microsoft YaHei"/>
-                <a:ea typeface="Microsoft YaHei"/>
-                <a:cs typeface="Microsoft YaHei"/>
-              </a:rPr>
-              <a:t>设备时间 __</a:t>
-            </a:r>
-          </a:p>
-        </p:txBody>
-      </p:sp>
-      <p:sp>
-        <p:nvSpPr>
-          <p:cNvPr id="96" name="Rectangle 95"/>
+              <a:rPr sz="1600" b="1">
+                <a:solidFill>
+                  <a:srgbClr val="0A2B45"/>
+                </a:solidFill>
+                <a:latin typeface="Arial"/>
+                <a:ea typeface="Microsoft YaHei"/>
+                <a:cs typeface="Microsoft YaHei"/>
+              </a:rPr>
+              <a:t>10</a:t>
+            </a:r>
+          </a:p>
+        </p:txBody>
+      </p:sp>
+      <p:sp>
+        <p:nvSpPr>
+          <p:cNvPr id="53" name="Rectangle 52"/>
           <p:cNvSpPr/>
           <p:nvPr/>
         </p:nvSpPr>
         <p:spPr>
           <a:xfrm>
-            <a:off x="4991343" y="5084064"/>
-            <a:ext cx="1553199" cy="621792"/>
+            <a:off x="6215786" y="5084064"/>
+            <a:ext cx="2503322" cy="621792"/>
           </a:xfrm>
           <a:prstGeom prst="rect">
             <a:avLst/>
@@ -7084,14 +5579,14 @@
       </p:sp>
       <p:sp>
         <p:nvSpPr>
-          <p:cNvPr id="97" name="TextBox 96"/>
-          <p:cNvSpPr txBox="1"/>
-          <p:nvPr/>
-        </p:nvSpPr>
-        <p:spPr>
-          <a:xfrm>
-            <a:off x="5137647" y="5120640"/>
-            <a:ext cx="1260591" cy="182880"/>
+          <p:cNvPr id="54" name="TextBox 53"/>
+          <p:cNvSpPr txBox="1"/>
+          <p:nvPr/>
+        </p:nvSpPr>
+        <p:spPr>
+          <a:xfrm>
+            <a:off x="6398666" y="5157216"/>
+            <a:ext cx="2137562" cy="201168"/>
           </a:xfrm>
           <a:prstGeom prst="rect">
             <a:avLst/>
@@ -7124,21 +5619,21 @@
                 <a:ea typeface="Microsoft YaHei"/>
                 <a:cs typeface="Microsoft YaHei"/>
               </a:rPr>
-              <a:t>过 ① 输出未变</a:t>
-            </a:r>
-          </a:p>
-        </p:txBody>
-      </p:sp>
-      <p:sp>
-        <p:nvSpPr>
-          <p:cNvPr id="98" name="TextBox 97"/>
-          <p:cNvSpPr txBox="1"/>
-          <p:nvPr/>
-        </p:nvSpPr>
-        <p:spPr>
-          <a:xfrm>
-            <a:off x="5137647" y="5321807"/>
-            <a:ext cx="1260591" cy="201168"/>
+              <a:t>过三道门</a:t>
+            </a:r>
+          </a:p>
+        </p:txBody>
+      </p:sp>
+      <p:sp>
+        <p:nvSpPr>
+          <p:cNvPr id="55" name="TextBox 54"/>
+          <p:cNvSpPr txBox="1"/>
+          <p:nvPr/>
+        </p:nvSpPr>
+        <p:spPr>
+          <a:xfrm>
+            <a:off x="6398666" y="5376672"/>
+            <a:ext cx="2137562" cy="274320"/>
           </a:xfrm>
           <a:prstGeom prst="rect">
             <a:avLst/>
@@ -7163,592 +5658,51 @@
               </a:spcAft>
             </a:pPr>
             <a:r>
-              <a:rPr sz="1500" b="1">
-                <a:solidFill>
-                  <a:srgbClr val="7FA4BA"/>
-                </a:solidFill>
-                <a:latin typeface="Consolas"/>
-                <a:ea typeface="Microsoft YaHei"/>
-                <a:cs typeface="Microsoft YaHei"/>
-              </a:rPr>
-              <a:t>__</a:t>
-            </a:r>
-          </a:p>
-        </p:txBody>
-      </p:sp>
-      <p:sp>
-        <p:nvSpPr>
-          <p:cNvPr id="99" name="TextBox 98"/>
-          <p:cNvSpPr txBox="1"/>
-          <p:nvPr/>
-        </p:nvSpPr>
-        <p:spPr>
-          <a:xfrm>
-            <a:off x="5137647" y="5541264"/>
-            <a:ext cx="1260591" cy="164592"/>
-          </a:xfrm>
-          <a:prstGeom prst="rect">
-            <a:avLst/>
-          </a:prstGeom>
-          <a:noFill/>
-        </p:spPr>
-        <p:txBody>
-          <a:bodyPr wrap="square" anchor="ctr" lIns="0" tIns="0" rIns="0" bIns="0">
-            <a:noAutofit/>
-          </a:bodyPr>
-          <a:lstStyle/>
-          <a:p>
-            <a:pPr algn="l" latinLnBrk="0">
-              <a:lnSpc>
-                <a:spcPct val="100000"/>
-              </a:lnSpc>
-              <a:spcBef>
-                <a:spcPts val="0"/>
-              </a:spcBef>
-              <a:spcAft>
-                <a:spcPts val="0"/>
-              </a:spcAft>
-            </a:pPr>
-            <a:r>
-              <a:rPr sz="850" b="0">
-                <a:solidFill>
-                  <a:srgbClr val="7FA4BA"/>
-                </a:solidFill>
-                <a:latin typeface="Microsoft YaHei"/>
-                <a:ea typeface="Microsoft YaHei"/>
-                <a:cs typeface="Microsoft YaHei"/>
-              </a:rPr>
-              <a:t>设备时间 __</a:t>
-            </a:r>
-          </a:p>
-        </p:txBody>
-      </p:sp>
-      <p:sp>
-        <p:nvSpPr>
-          <p:cNvPr id="100" name="Rectangle 99"/>
+              <a:rPr sz="1600" b="1">
+                <a:solidFill>
+                  <a:srgbClr val="0A2B45"/>
+                </a:solidFill>
+                <a:latin typeface="Arial"/>
+                <a:ea typeface="Microsoft YaHei"/>
+                <a:cs typeface="Microsoft YaHei"/>
+              </a:rPr>
+              <a:t>5</a:t>
+            </a:r>
+          </a:p>
+        </p:txBody>
+      </p:sp>
+      <p:cxnSp>
+        <p:nvCxnSpPr>
+          <p:cNvPr id="56" name="Connector 55"/>
+          <p:cNvCxnSpPr/>
+          <p:nvPr/>
+        </p:nvCxnSpPr>
+        <p:spPr>
+          <a:xfrm>
+            <a:off x="5886602" y="5394959"/>
+            <a:ext cx="237744" cy="0"/>
+          </a:xfrm>
+          <a:prstGeom prst="line">
+            <a:avLst/>
+          </a:prstGeom>
+          <a:ln w="15875">
+            <a:solidFill>
+              <a:srgbClr val="7FA4BA"/>
+            </a:solidFill>
+            <a:tailEnd type="triangle" w="med" len="med"/>
+          </a:ln>
+        </p:spPr>
+      </p:cxnSp>
+      <p:sp>
+        <p:nvSpPr>
+          <p:cNvPr id="57" name="Rectangle 56"/>
           <p:cNvSpPr/>
           <p:nvPr/>
         </p:nvSpPr>
         <p:spPr>
           <a:xfrm>
-            <a:off x="6690847" y="5084064"/>
-            <a:ext cx="1553199" cy="621792"/>
-          </a:xfrm>
-          <a:prstGeom prst="rect">
-            <a:avLst/>
-          </a:prstGeom>
-          <a:solidFill>
-            <a:srgbClr val="FFFFFF"/>
-          </a:solidFill>
-          <a:ln w="9525">
-            <a:solidFill>
-              <a:srgbClr val="CFE3F0"/>
-            </a:solidFill>
-          </a:ln>
-        </p:spPr>
-        <p:txBody>
-          <a:bodyPr rtlCol="0" anchor="ctr"/>
-          <a:lstStyle/>
-          <a:p>
-            <a:pPr algn="ctr"/>
-          </a:p>
-        </p:txBody>
-      </p:sp>
-      <p:sp>
-        <p:nvSpPr>
-          <p:cNvPr id="101" name="TextBox 100"/>
-          <p:cNvSpPr txBox="1"/>
-          <p:nvPr/>
-        </p:nvSpPr>
-        <p:spPr>
-          <a:xfrm>
-            <a:off x="6837151" y="5120640"/>
-            <a:ext cx="1260591" cy="182880"/>
-          </a:xfrm>
-          <a:prstGeom prst="rect">
-            <a:avLst/>
-          </a:prstGeom>
-          <a:noFill/>
-        </p:spPr>
-        <p:txBody>
-          <a:bodyPr wrap="square" anchor="ctr" lIns="0" tIns="0" rIns="0" bIns="0">
-            <a:noAutofit/>
-          </a:bodyPr>
-          <a:lstStyle/>
-          <a:p>
-            <a:pPr algn="l" latinLnBrk="0">
-              <a:lnSpc>
-                <a:spcPct val="100000"/>
-              </a:lnSpc>
-              <a:spcBef>
-                <a:spcPts val="0"/>
-              </a:spcBef>
-              <a:spcAft>
-                <a:spcPts val="0"/>
-              </a:spcAft>
-            </a:pPr>
-            <a:r>
-              <a:rPr sz="950" b="0">
-                <a:solidFill>
-                  <a:srgbClr val="40708B"/>
-                </a:solidFill>
-                <a:latin typeface="Microsoft YaHei"/>
-                <a:ea typeface="Microsoft YaHei"/>
-                <a:cs typeface="Microsoft YaHei"/>
-              </a:rPr>
-              <a:t>过 ② 质量达标</a:t>
-            </a:r>
-          </a:p>
-        </p:txBody>
-      </p:sp>
-      <p:sp>
-        <p:nvSpPr>
-          <p:cNvPr id="102" name="TextBox 101"/>
-          <p:cNvSpPr txBox="1"/>
-          <p:nvPr/>
-        </p:nvSpPr>
-        <p:spPr>
-          <a:xfrm>
-            <a:off x="6837151" y="5321807"/>
-            <a:ext cx="1260591" cy="201168"/>
-          </a:xfrm>
-          <a:prstGeom prst="rect">
-            <a:avLst/>
-          </a:prstGeom>
-          <a:noFill/>
-        </p:spPr>
-        <p:txBody>
-          <a:bodyPr wrap="square" anchor="ctr" lIns="0" tIns="0" rIns="0" bIns="0">
-            <a:noAutofit/>
-          </a:bodyPr>
-          <a:lstStyle/>
-          <a:p>
-            <a:pPr algn="l" latinLnBrk="0">
-              <a:lnSpc>
-                <a:spcPct val="100000"/>
-              </a:lnSpc>
-              <a:spcBef>
-                <a:spcPts val="0"/>
-              </a:spcBef>
-              <a:spcAft>
-                <a:spcPts val="0"/>
-              </a:spcAft>
-            </a:pPr>
-            <a:r>
-              <a:rPr sz="1500" b="1">
-                <a:solidFill>
-                  <a:srgbClr val="7FA4BA"/>
-                </a:solidFill>
-                <a:latin typeface="Consolas"/>
-                <a:ea typeface="Microsoft YaHei"/>
-                <a:cs typeface="Microsoft YaHei"/>
-              </a:rPr>
-              <a:t>__</a:t>
-            </a:r>
-          </a:p>
-        </p:txBody>
-      </p:sp>
-      <p:sp>
-        <p:nvSpPr>
-          <p:cNvPr id="103" name="TextBox 102"/>
-          <p:cNvSpPr txBox="1"/>
-          <p:nvPr/>
-        </p:nvSpPr>
-        <p:spPr>
-          <a:xfrm>
-            <a:off x="6837151" y="5541264"/>
-            <a:ext cx="1260591" cy="164592"/>
-          </a:xfrm>
-          <a:prstGeom prst="rect">
-            <a:avLst/>
-          </a:prstGeom>
-          <a:noFill/>
-        </p:spPr>
-        <p:txBody>
-          <a:bodyPr wrap="square" anchor="ctr" lIns="0" tIns="0" rIns="0" bIns="0">
-            <a:noAutofit/>
-          </a:bodyPr>
-          <a:lstStyle/>
-          <a:p>
-            <a:pPr algn="l" latinLnBrk="0">
-              <a:lnSpc>
-                <a:spcPct val="100000"/>
-              </a:lnSpc>
-              <a:spcBef>
-                <a:spcPts val="0"/>
-              </a:spcBef>
-              <a:spcAft>
-                <a:spcPts val="0"/>
-              </a:spcAft>
-            </a:pPr>
-            <a:r>
-              <a:rPr sz="850" b="0">
-                <a:solidFill>
-                  <a:srgbClr val="7FA4BA"/>
-                </a:solidFill>
-                <a:latin typeface="Microsoft YaHei"/>
-                <a:ea typeface="Microsoft YaHei"/>
-                <a:cs typeface="Microsoft YaHei"/>
-              </a:rPr>
-              <a:t>设备时间 __</a:t>
-            </a:r>
-          </a:p>
-        </p:txBody>
-      </p:sp>
-      <p:sp>
-        <p:nvSpPr>
-          <p:cNvPr id="104" name="Rectangle 103"/>
-          <p:cNvSpPr/>
-          <p:nvPr/>
-        </p:nvSpPr>
-        <p:spPr>
-          <a:xfrm>
-            <a:off x="8390351" y="5084064"/>
-            <a:ext cx="1553199" cy="621792"/>
-          </a:xfrm>
-          <a:prstGeom prst="rect">
-            <a:avLst/>
-          </a:prstGeom>
-          <a:solidFill>
-            <a:srgbClr val="FFFFFF"/>
-          </a:solidFill>
-          <a:ln w="9525">
-            <a:solidFill>
-              <a:srgbClr val="CFE3F0"/>
-            </a:solidFill>
-          </a:ln>
-        </p:spPr>
-        <p:txBody>
-          <a:bodyPr rtlCol="0" anchor="ctr"/>
-          <a:lstStyle/>
-          <a:p>
-            <a:pPr algn="ctr"/>
-          </a:p>
-        </p:txBody>
-      </p:sp>
-      <p:sp>
-        <p:nvSpPr>
-          <p:cNvPr id="105" name="TextBox 104"/>
-          <p:cNvSpPr txBox="1"/>
-          <p:nvPr/>
-        </p:nvSpPr>
-        <p:spPr>
-          <a:xfrm>
-            <a:off x="8536655" y="5120640"/>
-            <a:ext cx="1260591" cy="182880"/>
-          </a:xfrm>
-          <a:prstGeom prst="rect">
-            <a:avLst/>
-          </a:prstGeom>
-          <a:noFill/>
-        </p:spPr>
-        <p:txBody>
-          <a:bodyPr wrap="square" anchor="ctr" lIns="0" tIns="0" rIns="0" bIns="0">
-            <a:noAutofit/>
-          </a:bodyPr>
-          <a:lstStyle/>
-          <a:p>
-            <a:pPr algn="l" latinLnBrk="0">
-              <a:lnSpc>
-                <a:spcPct val="100000"/>
-              </a:lnSpc>
-              <a:spcBef>
-                <a:spcPts val="0"/>
-              </a:spcBef>
-              <a:spcAft>
-                <a:spcPts val="0"/>
-              </a:spcAft>
-            </a:pPr>
-            <a:r>
-              <a:rPr sz="950" b="0">
-                <a:solidFill>
-                  <a:srgbClr val="40708B"/>
-                </a:solidFill>
-                <a:latin typeface="Microsoft YaHei"/>
-                <a:ea typeface="Microsoft YaHei"/>
-                <a:cs typeface="Microsoft YaHei"/>
-              </a:rPr>
-              <a:t>过 ③ 确实更快</a:t>
-            </a:r>
-          </a:p>
-        </p:txBody>
-      </p:sp>
-      <p:sp>
-        <p:nvSpPr>
-          <p:cNvPr id="106" name="TextBox 105"/>
-          <p:cNvSpPr txBox="1"/>
-          <p:nvPr/>
-        </p:nvSpPr>
-        <p:spPr>
-          <a:xfrm>
-            <a:off x="8536655" y="5321807"/>
-            <a:ext cx="1260591" cy="201168"/>
-          </a:xfrm>
-          <a:prstGeom prst="rect">
-            <a:avLst/>
-          </a:prstGeom>
-          <a:noFill/>
-        </p:spPr>
-        <p:txBody>
-          <a:bodyPr wrap="square" anchor="ctr" lIns="0" tIns="0" rIns="0" bIns="0">
-            <a:noAutofit/>
-          </a:bodyPr>
-          <a:lstStyle/>
-          <a:p>
-            <a:pPr algn="l" latinLnBrk="0">
-              <a:lnSpc>
-                <a:spcPct val="100000"/>
-              </a:lnSpc>
-              <a:spcBef>
-                <a:spcPts val="0"/>
-              </a:spcBef>
-              <a:spcAft>
-                <a:spcPts val="0"/>
-              </a:spcAft>
-            </a:pPr>
-            <a:r>
-              <a:rPr sz="1500" b="1">
-                <a:solidFill>
-                  <a:srgbClr val="7FA4BA"/>
-                </a:solidFill>
-                <a:latin typeface="Consolas"/>
-                <a:ea typeface="Microsoft YaHei"/>
-                <a:cs typeface="Microsoft YaHei"/>
-              </a:rPr>
-              <a:t>__</a:t>
-            </a:r>
-          </a:p>
-        </p:txBody>
-      </p:sp>
-      <p:sp>
-        <p:nvSpPr>
-          <p:cNvPr id="107" name="TextBox 106"/>
-          <p:cNvSpPr txBox="1"/>
-          <p:nvPr/>
-        </p:nvSpPr>
-        <p:spPr>
-          <a:xfrm>
-            <a:off x="8536655" y="5541264"/>
-            <a:ext cx="1260591" cy="164592"/>
-          </a:xfrm>
-          <a:prstGeom prst="rect">
-            <a:avLst/>
-          </a:prstGeom>
-          <a:noFill/>
-        </p:spPr>
-        <p:txBody>
-          <a:bodyPr wrap="square" anchor="ctr" lIns="0" tIns="0" rIns="0" bIns="0">
-            <a:noAutofit/>
-          </a:bodyPr>
-          <a:lstStyle/>
-          <a:p>
-            <a:pPr algn="l" latinLnBrk="0">
-              <a:lnSpc>
-                <a:spcPct val="100000"/>
-              </a:lnSpc>
-              <a:spcBef>
-                <a:spcPts val="0"/>
-              </a:spcBef>
-              <a:spcAft>
-                <a:spcPts val="0"/>
-              </a:spcAft>
-            </a:pPr>
-            <a:r>
-              <a:rPr sz="850" b="0">
-                <a:solidFill>
-                  <a:srgbClr val="7FA4BA"/>
-                </a:solidFill>
-                <a:latin typeface="Microsoft YaHei"/>
-                <a:ea typeface="Microsoft YaHei"/>
-                <a:cs typeface="Microsoft YaHei"/>
-              </a:rPr>
-              <a:t>设备时间 __</a:t>
-            </a:r>
-          </a:p>
-        </p:txBody>
-      </p:sp>
-      <p:sp>
-        <p:nvSpPr>
-          <p:cNvPr id="108" name="Rectangle 107"/>
-          <p:cNvSpPr/>
-          <p:nvPr/>
-        </p:nvSpPr>
-        <p:spPr>
-          <a:xfrm>
-            <a:off x="10089855" y="5084064"/>
-            <a:ext cx="1553199" cy="621792"/>
-          </a:xfrm>
-          <a:prstGeom prst="rect">
-            <a:avLst/>
-          </a:prstGeom>
-          <a:solidFill>
-            <a:srgbClr val="FFFFFF"/>
-          </a:solidFill>
-          <a:ln w="9525">
-            <a:solidFill>
-              <a:srgbClr val="CFE3F0"/>
-            </a:solidFill>
-          </a:ln>
-        </p:spPr>
-        <p:txBody>
-          <a:bodyPr rtlCol="0" anchor="ctr"/>
-          <a:lstStyle/>
-          <a:p>
-            <a:pPr algn="ctr"/>
-          </a:p>
-        </p:txBody>
-      </p:sp>
-      <p:sp>
-        <p:nvSpPr>
-          <p:cNvPr id="109" name="TextBox 108"/>
-          <p:cNvSpPr txBox="1"/>
-          <p:nvPr/>
-        </p:nvSpPr>
-        <p:spPr>
-          <a:xfrm>
-            <a:off x="10236159" y="5120640"/>
-            <a:ext cx="1260591" cy="182880"/>
-          </a:xfrm>
-          <a:prstGeom prst="rect">
-            <a:avLst/>
-          </a:prstGeom>
-          <a:noFill/>
-        </p:spPr>
-        <p:txBody>
-          <a:bodyPr wrap="square" anchor="ctr" lIns="0" tIns="0" rIns="0" bIns="0">
-            <a:noAutofit/>
-          </a:bodyPr>
-          <a:lstStyle/>
-          <a:p>
-            <a:pPr algn="l" latinLnBrk="0">
-              <a:lnSpc>
-                <a:spcPct val="100000"/>
-              </a:lnSpc>
-              <a:spcBef>
-                <a:spcPts val="0"/>
-              </a:spcBef>
-              <a:spcAft>
-                <a:spcPts val="0"/>
-              </a:spcAft>
-            </a:pPr>
-            <a:r>
-              <a:rPr sz="950" b="0">
-                <a:solidFill>
-                  <a:srgbClr val="40708B"/>
-                </a:solidFill>
-                <a:latin typeface="Microsoft YaHei"/>
-                <a:ea typeface="Microsoft YaHei"/>
-                <a:cs typeface="Microsoft YaHei"/>
-              </a:rPr>
-              <a:t>过 D 独立复验</a:t>
-            </a:r>
-          </a:p>
-        </p:txBody>
-      </p:sp>
-      <p:sp>
-        <p:nvSpPr>
-          <p:cNvPr id="110" name="TextBox 109"/>
-          <p:cNvSpPr txBox="1"/>
-          <p:nvPr/>
-        </p:nvSpPr>
-        <p:spPr>
-          <a:xfrm>
-            <a:off x="10236159" y="5321807"/>
-            <a:ext cx="1260591" cy="201168"/>
-          </a:xfrm>
-          <a:prstGeom prst="rect">
-            <a:avLst/>
-          </a:prstGeom>
-          <a:noFill/>
-        </p:spPr>
-        <p:txBody>
-          <a:bodyPr wrap="square" anchor="ctr" lIns="0" tIns="0" rIns="0" bIns="0">
-            <a:noAutofit/>
-          </a:bodyPr>
-          <a:lstStyle/>
-          <a:p>
-            <a:pPr algn="l" latinLnBrk="0">
-              <a:lnSpc>
-                <a:spcPct val="100000"/>
-              </a:lnSpc>
-              <a:spcBef>
-                <a:spcPts val="0"/>
-              </a:spcBef>
-              <a:spcAft>
-                <a:spcPts val="0"/>
-              </a:spcAft>
-            </a:pPr>
-            <a:r>
-              <a:rPr sz="1500" b="1">
-                <a:solidFill>
-                  <a:srgbClr val="7FA4BA"/>
-                </a:solidFill>
-                <a:latin typeface="Consolas"/>
-                <a:ea typeface="Microsoft YaHei"/>
-                <a:cs typeface="Microsoft YaHei"/>
-              </a:rPr>
-              <a:t>__</a:t>
-            </a:r>
-          </a:p>
-        </p:txBody>
-      </p:sp>
-      <p:sp>
-        <p:nvSpPr>
-          <p:cNvPr id="111" name="TextBox 110"/>
-          <p:cNvSpPr txBox="1"/>
-          <p:nvPr/>
-        </p:nvSpPr>
-        <p:spPr>
-          <a:xfrm>
-            <a:off x="10236159" y="5541264"/>
-            <a:ext cx="1260591" cy="164592"/>
-          </a:xfrm>
-          <a:prstGeom prst="rect">
-            <a:avLst/>
-          </a:prstGeom>
-          <a:noFill/>
-        </p:spPr>
-        <p:txBody>
-          <a:bodyPr wrap="square" anchor="ctr" lIns="0" tIns="0" rIns="0" bIns="0">
-            <a:noAutofit/>
-          </a:bodyPr>
-          <a:lstStyle/>
-          <a:p>
-            <a:pPr algn="l" latinLnBrk="0">
-              <a:lnSpc>
-                <a:spcPct val="100000"/>
-              </a:lnSpc>
-              <a:spcBef>
-                <a:spcPts val="0"/>
-              </a:spcBef>
-              <a:spcAft>
-                <a:spcPts val="0"/>
-              </a:spcAft>
-            </a:pPr>
-            <a:r>
-              <a:rPr sz="850" b="0">
-                <a:solidFill>
-                  <a:srgbClr val="7FA4BA"/>
-                </a:solidFill>
-                <a:latin typeface="Microsoft YaHei"/>
-                <a:ea typeface="Microsoft YaHei"/>
-                <a:cs typeface="Microsoft YaHei"/>
-              </a:rPr>
-              <a:t>设备时间 __</a:t>
-            </a:r>
-          </a:p>
-        </p:txBody>
-      </p:sp>
-      <p:sp>
-        <p:nvSpPr>
-          <p:cNvPr id="112" name="Rectangle 111"/>
-          <p:cNvSpPr/>
-          <p:nvPr/>
-        </p:nvSpPr>
-        <p:spPr>
-          <a:xfrm>
-            <a:off x="548640" y="5797296"/>
-            <a:ext cx="11094415" cy="475488"/>
+            <a:off x="9139732" y="5084064"/>
+            <a:ext cx="2503322" cy="621792"/>
           </a:xfrm>
           <a:prstGeom prst="rect">
             <a:avLst/>
@@ -7770,7 +5724,152 @@
       </p:sp>
       <p:sp>
         <p:nvSpPr>
-          <p:cNvPr id="113" name="Rectangle 112"/>
+          <p:cNvPr id="58" name="TextBox 57"/>
+          <p:cNvSpPr txBox="1"/>
+          <p:nvPr/>
+        </p:nvSpPr>
+        <p:spPr>
+          <a:xfrm>
+            <a:off x="9322612" y="5157216"/>
+            <a:ext cx="2137562" cy="201168"/>
+          </a:xfrm>
+          <a:prstGeom prst="rect">
+            <a:avLst/>
+          </a:prstGeom>
+          <a:noFill/>
+        </p:spPr>
+        <p:txBody>
+          <a:bodyPr wrap="square" anchor="ctr" lIns="0" tIns="0" rIns="0" bIns="0">
+            <a:noAutofit/>
+          </a:bodyPr>
+          <a:lstStyle/>
+          <a:p>
+            <a:pPr algn="l" latinLnBrk="0">
+              <a:lnSpc>
+                <a:spcPct val="100000"/>
+              </a:lnSpc>
+              <a:spcBef>
+                <a:spcPts val="0"/>
+              </a:spcBef>
+              <a:spcAft>
+                <a:spcPts val="0"/>
+              </a:spcAft>
+            </a:pPr>
+            <a:r>
+              <a:rPr sz="950" b="1">
+                <a:solidFill>
+                  <a:srgbClr val="0F62CE"/>
+                </a:solidFill>
+                <a:latin typeface="Microsoft YaHei"/>
+                <a:ea typeface="Microsoft YaHei"/>
+                <a:cs typeface="Microsoft YaHei"/>
+              </a:rPr>
+              <a:t>交付</a:t>
+            </a:r>
+          </a:p>
+        </p:txBody>
+      </p:sp>
+      <p:sp>
+        <p:nvSpPr>
+          <p:cNvPr id="59" name="TextBox 58"/>
+          <p:cNvSpPr txBox="1"/>
+          <p:nvPr/>
+        </p:nvSpPr>
+        <p:spPr>
+          <a:xfrm>
+            <a:off x="9322612" y="5376672"/>
+            <a:ext cx="2137562" cy="274320"/>
+          </a:xfrm>
+          <a:prstGeom prst="rect">
+            <a:avLst/>
+          </a:prstGeom>
+          <a:noFill/>
+        </p:spPr>
+        <p:txBody>
+          <a:bodyPr wrap="square" anchor="ctr" lIns="0" tIns="0" rIns="0" bIns="0">
+            <a:noAutofit/>
+          </a:bodyPr>
+          <a:lstStyle/>
+          <a:p>
+            <a:pPr algn="l" latinLnBrk="0">
+              <a:lnSpc>
+                <a:spcPct val="100000"/>
+              </a:lnSpc>
+              <a:spcBef>
+                <a:spcPts val="0"/>
+              </a:spcBef>
+              <a:spcAft>
+                <a:spcPts val="0"/>
+              </a:spcAft>
+            </a:pPr>
+            <a:r>
+              <a:rPr sz="1600" b="1">
+                <a:solidFill>
+                  <a:srgbClr val="0A2B45"/>
+                </a:solidFill>
+                <a:latin typeface="Arial"/>
+                <a:ea typeface="Microsoft YaHei"/>
+                <a:cs typeface="Microsoft YaHei"/>
+              </a:rPr>
+              <a:t>2</a:t>
+            </a:r>
+          </a:p>
+        </p:txBody>
+      </p:sp>
+      <p:cxnSp>
+        <p:nvCxnSpPr>
+          <p:cNvPr id="60" name="Connector 59"/>
+          <p:cNvCxnSpPr/>
+          <p:nvPr/>
+        </p:nvCxnSpPr>
+        <p:spPr>
+          <a:xfrm>
+            <a:off x="8810548" y="5394959"/>
+            <a:ext cx="237744" cy="0"/>
+          </a:xfrm>
+          <a:prstGeom prst="line">
+            <a:avLst/>
+          </a:prstGeom>
+          <a:ln w="15875">
+            <a:solidFill>
+              <a:srgbClr val="7FA4BA"/>
+            </a:solidFill>
+            <a:tailEnd type="triangle" w="med" len="med"/>
+          </a:ln>
+        </p:spPr>
+      </p:cxnSp>
+      <p:sp>
+        <p:nvSpPr>
+          <p:cNvPr id="61" name="Rectangle 60"/>
+          <p:cNvSpPr/>
+          <p:nvPr/>
+        </p:nvSpPr>
+        <p:spPr>
+          <a:xfrm>
+            <a:off x="548640" y="5797296"/>
+            <a:ext cx="11094415" cy="475488"/>
+          </a:xfrm>
+          <a:prstGeom prst="rect">
+            <a:avLst/>
+          </a:prstGeom>
+          <a:solidFill>
+            <a:srgbClr val="C9E1FC"/>
+          </a:solidFill>
+          <a:ln>
+            <a:noFill/>
+          </a:ln>
+        </p:spPr>
+        <p:txBody>
+          <a:bodyPr rtlCol="0" anchor="ctr"/>
+          <a:lstStyle/>
+          <a:p>
+            <a:pPr algn="ctr"/>
+          </a:p>
+        </p:txBody>
+      </p:sp>
+      <p:sp>
+        <p:nvSpPr>
+          <p:cNvPr id="62" name="Rectangle 61"/>
           <p:cNvSpPr/>
           <p:nvPr/>
         </p:nvSpPr>
@@ -7799,7 +5898,7 @@
       </p:sp>
       <p:sp>
         <p:nvSpPr>
-          <p:cNvPr id="114" name="TextBox 113"/>
+          <p:cNvPr id="63" name="TextBox 62"/>
           <p:cNvSpPr txBox="1"/>
           <p:nvPr/>
         </p:nvSpPr>
@@ -7850,14 +5949,14 @@
                 <a:ea typeface="Microsoft YaHei"/>
                 <a:cs typeface="Microsoft YaHei"/>
               </a:rPr>
-              <a:t>待填：交付了哪个候选、复验收益多少、哪道门挡掉的最多</a:t>
-            </a:r>
-          </a:p>
-        </p:txBody>
-      </p:sp>
-      <p:sp>
-        <p:nvSpPr>
-          <p:cNvPr id="115" name="TextBox 114"/>
+              <a:t>两个交付都在替换小核；闭源 grouped-GEMM 的旋钮调不动，占比不到 1% 的核再快也不接线</a:t>
+            </a:r>
+          </a:p>
+        </p:txBody>
+      </p:sp>
+      <p:sp>
+        <p:nvSpPr>
+          <p:cNvPr id="64" name="TextBox 63"/>
           <p:cNvSpPr txBox="1"/>
           <p:nvPr/>
         </p:nvSpPr>
@@ -7889,26 +5988,15 @@
               </a:spcAft>
             </a:pPr>
             <a:r>
-              <a:rPr sz="1000" b="1">
-                <a:solidFill>
-                  <a:srgbClr val="D4147A"/>
+              <a:rPr sz="1000" b="0">
+                <a:solidFill>
+                  <a:srgbClr val="40708B"/>
                 </a:solidFill>
                 <a:latin typeface="Microsoft YaHei"/>
                 <a:ea typeface="Microsoft YaHei"/>
                 <a:cs typeface="Microsoft YaHei"/>
               </a:rPr>
-              <a:t>方案 A　</a:t>
-            </a:r>
-            <a:r>
-              <a:rPr sz="1000" b="0">
-                <a:solidFill>
-                  <a:srgbClr val="40708B"/>
-                </a:solidFill>
-                <a:latin typeface="Microsoft YaHei"/>
-                <a:ea typeface="Microsoft YaHei"/>
-                <a:cs typeface="Microsoft YaHei"/>
-              </a:rPr>
-              <a:t>与第 7 页同骨架，但候选都从基线分叉、收益不叠加，所以画逐个候选而不画爬升曲线；要一次跑完 A–D 的任务才能填满</a:t>
+              <a:t>C 列是内核或微基准读数，D 列是整步或端到端读数，两列口径不同、不能互相换算；表中全部为 M100 单卡 TP1</a:t>
             </a:r>
           </a:p>
         </p:txBody>

--- a/slides/model_layer_mock_1024.pptx
+++ b/slides/model_layer_mock_1024.pptx
@@ -7,6 +7,7 @@
   <p:sldIdLst>
     <p:sldId id="256" r:id="rId7"/>
     <p:sldId id="257" r:id="rId8"/>
+    <p:sldId id="258" r:id="rId9"/>
   </p:sldIdLst>
   <p:sldSz cx="12191695" cy="6858000" type="screen4x3"/>
   <p:notesSz cx="6858000" cy="9144000"/>
@@ -3278,7 +3279,7 @@
                 <a:ea typeface="Microsoft YaHei"/>
                 <a:cs typeface="Microsoft YaHei"/>
               </a:rPr>
-              <a:t>判定全部来自 M100 真机——数值不对、更慢的当场挡掉，占比太小的不接线</a:t>
+              <a:t>先用 Trace 量出每类算子离上界多远、占多少，再决定对谁下手——判定全部来自 M100 真机</a:t>
             </a:r>
           </a:p>
         </p:txBody>
@@ -3401,7 +3402,7 @@
         <p:spPr>
           <a:xfrm>
             <a:off x="548640" y="1975104"/>
-            <a:ext cx="2743200" cy="3017520"/>
+            <a:ext cx="5669280" cy="3017520"/>
           </a:xfrm>
           <a:prstGeom prst="rect">
             <a:avLst/>
@@ -3429,8 +3430,8 @@
         </p:nvSpPr>
         <p:spPr>
           <a:xfrm>
-            <a:off x="749808" y="2048256"/>
-            <a:ext cx="2340864" cy="256032"/>
+            <a:off x="749808" y="2029968"/>
+            <a:ext cx="5266944" cy="237744"/>
           </a:xfrm>
           <a:prstGeom prst="rect">
             <a:avLst/>
@@ -3455,18 +3456,29 @@
               </a:spcAft>
             </a:pPr>
             <a:r>
-              <a:rPr sz="1250" b="1">
+              <a:rPr sz="1000" b="1">
                 <a:solidFill>
                   <a:srgbClr val="0A2B45"/>
                 </a:solidFill>
+                <a:latin typeface="Consolas"/>
+                <a:ea typeface="Microsoft YaHei"/>
+                <a:cs typeface="Microsoft YaHei"/>
+              </a:rPr>
+              <a:t>achieved</a:t>
+            </a:r>
+            <a:r>
+              <a:rPr sz="1000" b="0">
+                <a:solidFill>
+                  <a:srgbClr val="1B4D69"/>
+                </a:solidFill>
                 <a:latin typeface="Microsoft YaHei"/>
                 <a:ea typeface="Microsoft YaHei"/>
                 <a:cs typeface="Microsoft YaHei"/>
               </a:rPr>
-              <a:t>峰值吞吐</a:t>
-            </a:r>
-            <a:r>
-              <a:rPr sz="1000" b="0">
+              <a:t> = 上界耗时 ÷ 实测耗时</a:t>
+            </a:r>
+            <a:r>
+              <a:rPr sz="950" b="0">
                 <a:solidFill>
                   <a:srgbClr val="40708B"/>
                 </a:solidFill>
@@ -3474,7 +3486,7 @@
                 <a:ea typeface="Microsoft YaHei"/>
                 <a:cs typeface="Microsoft YaHei"/>
               </a:rPr>
-              <a:t>　持续输出 tok/s</a:t>
+              <a:t>　上界按峰值 __ TFLOPS、带宽 __ GB/s 逐类计算</a:t>
             </a:r>
           </a:p>
         </p:txBody>
@@ -3487,8 +3499,8 @@
         </p:nvSpPr>
         <p:spPr>
           <a:xfrm>
-            <a:off x="749808" y="2340864"/>
-            <a:ext cx="2340864" cy="475488"/>
+            <a:off x="749808" y="2322576"/>
+            <a:ext cx="1783080" cy="219456"/>
           </a:xfrm>
           <a:prstGeom prst="rect">
             <a:avLst/>
@@ -3513,35 +3525,335 @@
               </a:spcAft>
             </a:pPr>
             <a:r>
-              <a:rPr sz="2800" b="1">
-                <a:solidFill>
-                  <a:srgbClr val="0F62CE"/>
-                </a:solidFill>
-                <a:latin typeface="Arial"/>
-                <a:ea typeface="Microsoft YaHei"/>
-                <a:cs typeface="Microsoft YaHei"/>
-              </a:rPr>
-              <a:t>+37%</a:t>
-            </a:r>
-          </a:p>
-        </p:txBody>
-      </p:sp>
-      <p:sp>
-        <p:nvSpPr>
-          <p:cNvPr id="12" name="Rectangle 11"/>
+              <a:rPr sz="900" b="0">
+                <a:solidFill>
+                  <a:srgbClr val="7FA4BA"/>
+                </a:solidFill>
+                <a:latin typeface="Microsoft YaHei"/>
+                <a:ea typeface="Microsoft YaHei"/>
+                <a:cs typeface="Microsoft YaHei"/>
+              </a:rPr>
+              <a:t>类别</a:t>
+            </a:r>
+          </a:p>
+        </p:txBody>
+      </p:sp>
+      <p:sp>
+        <p:nvSpPr>
+          <p:cNvPr id="12" name="TextBox 11"/>
+          <p:cNvSpPr txBox="1"/>
+          <p:nvPr/>
+        </p:nvSpPr>
+        <p:spPr>
+          <a:xfrm>
+            <a:off x="2606040" y="2322576"/>
+            <a:ext cx="1920240" cy="219456"/>
+          </a:xfrm>
+          <a:prstGeom prst="rect">
+            <a:avLst/>
+          </a:prstGeom>
+          <a:noFill/>
+        </p:spPr>
+        <p:txBody>
+          <a:bodyPr wrap="square" anchor="ctr" lIns="0" tIns="0" rIns="0" bIns="0">
+            <a:noAutofit/>
+          </a:bodyPr>
+          <a:lstStyle/>
+          <a:p>
+            <a:pPr algn="l" latinLnBrk="0">
+              <a:lnSpc>
+                <a:spcPct val="100000"/>
+              </a:lnSpc>
+              <a:spcBef>
+                <a:spcPts val="0"/>
+              </a:spcBef>
+              <a:spcAft>
+                <a:spcPts val="0"/>
+              </a:spcAft>
+            </a:pPr>
+            <a:r>
+              <a:rPr sz="900" b="0">
+                <a:solidFill>
+                  <a:srgbClr val="7FA4BA"/>
+                </a:solidFill>
+                <a:latin typeface="Microsoft YaHei"/>
+                <a:ea typeface="Microsoft YaHei"/>
+                <a:cs typeface="Microsoft YaHei"/>
+              </a:rPr>
+              <a:t>每步耗时　</a:t>
+            </a:r>
+            <a:r>
+              <a:rPr sz="900" b="0">
+                <a:solidFill>
+                  <a:srgbClr val="7FA4BA"/>
+                </a:solidFill>
+                <a:latin typeface="Microsoft YaHei"/>
+                <a:ea typeface="Microsoft YaHei"/>
+                <a:cs typeface="Microsoft YaHei"/>
+              </a:rPr>
+              <a:t>■</a:t>
+            </a:r>
+            <a:r>
+              <a:rPr sz="900" b="0">
+                <a:solidFill>
+                  <a:srgbClr val="7FA4BA"/>
+                </a:solidFill>
+                <a:latin typeface="Microsoft YaHei"/>
+                <a:ea typeface="Microsoft YaHei"/>
+                <a:cs typeface="Microsoft YaHei"/>
+              </a:rPr>
+              <a:t> 上界内　</a:t>
+            </a:r>
+            <a:r>
+              <a:rPr sz="900" b="0">
+                <a:solidFill>
+                  <a:srgbClr val="CFE3F0"/>
+                </a:solidFill>
+                <a:latin typeface="Microsoft YaHei"/>
+                <a:ea typeface="Microsoft YaHei"/>
+                <a:cs typeface="Microsoft YaHei"/>
+              </a:rPr>
+              <a:t>■</a:t>
+            </a:r>
+            <a:r>
+              <a:rPr sz="900" b="0">
+                <a:solidFill>
+                  <a:srgbClr val="7FA4BA"/>
+                </a:solidFill>
+                <a:latin typeface="Microsoft YaHei"/>
+                <a:ea typeface="Microsoft YaHei"/>
+                <a:cs typeface="Microsoft YaHei"/>
+              </a:rPr>
+              <a:t> 超出上界</a:t>
+            </a:r>
+          </a:p>
+        </p:txBody>
+      </p:sp>
+      <p:sp>
+        <p:nvSpPr>
+          <p:cNvPr id="13" name="TextBox 12"/>
+          <p:cNvSpPr txBox="1"/>
+          <p:nvPr/>
+        </p:nvSpPr>
+        <p:spPr>
+          <a:xfrm>
+            <a:off x="4572000" y="2322576"/>
+            <a:ext cx="438912" cy="219456"/>
+          </a:xfrm>
+          <a:prstGeom prst="rect">
+            <a:avLst/>
+          </a:prstGeom>
+          <a:noFill/>
+        </p:spPr>
+        <p:txBody>
+          <a:bodyPr wrap="square" anchor="ctr" lIns="0" tIns="0" rIns="0" bIns="0">
+            <a:noAutofit/>
+          </a:bodyPr>
+          <a:lstStyle/>
+          <a:p>
+            <a:pPr algn="r" latinLnBrk="0">
+              <a:lnSpc>
+                <a:spcPct val="100000"/>
+              </a:lnSpc>
+              <a:spcBef>
+                <a:spcPts val="0"/>
+              </a:spcBef>
+              <a:spcAft>
+                <a:spcPts val="0"/>
+              </a:spcAft>
+            </a:pPr>
+            <a:r>
+              <a:rPr sz="900" b="0">
+                <a:solidFill>
+                  <a:srgbClr val="7FA4BA"/>
+                </a:solidFill>
+                <a:latin typeface="Microsoft YaHei"/>
+                <a:ea typeface="Microsoft YaHei"/>
+                <a:cs typeface="Microsoft YaHei"/>
+              </a:rPr>
+              <a:t>占比</a:t>
+            </a:r>
+          </a:p>
+        </p:txBody>
+      </p:sp>
+      <p:sp>
+        <p:nvSpPr>
+          <p:cNvPr id="14" name="TextBox 13"/>
+          <p:cNvSpPr txBox="1"/>
+          <p:nvPr/>
+        </p:nvSpPr>
+        <p:spPr>
+          <a:xfrm>
+            <a:off x="5065776" y="2322576"/>
+            <a:ext cx="585216" cy="219456"/>
+          </a:xfrm>
+          <a:prstGeom prst="rect">
+            <a:avLst/>
+          </a:prstGeom>
+          <a:noFill/>
+        </p:spPr>
+        <p:txBody>
+          <a:bodyPr wrap="square" anchor="ctr" lIns="0" tIns="0" rIns="0" bIns="0">
+            <a:noAutofit/>
+          </a:bodyPr>
+          <a:lstStyle/>
+          <a:p>
+            <a:pPr algn="r" latinLnBrk="0">
+              <a:lnSpc>
+                <a:spcPct val="100000"/>
+              </a:lnSpc>
+              <a:spcBef>
+                <a:spcPts val="0"/>
+              </a:spcBef>
+              <a:spcAft>
+                <a:spcPts val="0"/>
+              </a:spcAft>
+            </a:pPr>
+            <a:r>
+              <a:rPr sz="900" b="0">
+                <a:solidFill>
+                  <a:srgbClr val="7FA4BA"/>
+                </a:solidFill>
+                <a:latin typeface="Microsoft YaHei"/>
+                <a:ea typeface="Microsoft YaHei"/>
+                <a:cs typeface="Microsoft YaHei"/>
+              </a:rPr>
+              <a:t>achieved</a:t>
+            </a:r>
+          </a:p>
+        </p:txBody>
+      </p:sp>
+      <p:sp>
+        <p:nvSpPr>
+          <p:cNvPr id="15" name="TextBox 14"/>
+          <p:cNvSpPr txBox="1"/>
+          <p:nvPr/>
+        </p:nvSpPr>
+        <p:spPr>
+          <a:xfrm>
+            <a:off x="5687568" y="2322576"/>
+            <a:ext cx="329184" cy="219456"/>
+          </a:xfrm>
+          <a:prstGeom prst="rect">
+            <a:avLst/>
+          </a:prstGeom>
+          <a:noFill/>
+        </p:spPr>
+        <p:txBody>
+          <a:bodyPr wrap="square" anchor="ctr" lIns="0" tIns="0" rIns="0" bIns="0">
+            <a:noAutofit/>
+          </a:bodyPr>
+          <a:lstStyle/>
+          <a:p>
+            <a:pPr algn="ctr" latinLnBrk="0">
+              <a:lnSpc>
+                <a:spcPct val="100000"/>
+              </a:lnSpc>
+              <a:spcBef>
+                <a:spcPts val="0"/>
+              </a:spcBef>
+              <a:spcAft>
+                <a:spcPts val="0"/>
+              </a:spcAft>
+            </a:pPr>
+            <a:r>
+              <a:rPr sz="900" b="0">
+                <a:solidFill>
+                  <a:srgbClr val="7FA4BA"/>
+                </a:solidFill>
+                <a:latin typeface="Microsoft YaHei"/>
+                <a:ea typeface="Microsoft YaHei"/>
+                <a:cs typeface="Microsoft YaHei"/>
+              </a:rPr>
+              <a:t>候选</a:t>
+            </a:r>
+          </a:p>
+        </p:txBody>
+      </p:sp>
+      <p:cxnSp>
+        <p:nvCxnSpPr>
+          <p:cNvPr id="16" name="Connector 15"/>
+          <p:cNvCxnSpPr/>
+          <p:nvPr/>
+        </p:nvCxnSpPr>
+        <p:spPr>
+          <a:xfrm>
+            <a:off x="749808" y="2560320"/>
+            <a:ext cx="5266944" cy="0"/>
+          </a:xfrm>
+          <a:prstGeom prst="line">
+            <a:avLst/>
+          </a:prstGeom>
+          <a:ln w="9525">
+            <a:solidFill>
+              <a:srgbClr val="CFE3F0"/>
+            </a:solidFill>
+          </a:ln>
+        </p:spPr>
+      </p:cxnSp>
+      <p:sp>
+        <p:nvSpPr>
+          <p:cNvPr id="17" name="TextBox 16"/>
+          <p:cNvSpPr txBox="1"/>
+          <p:nvPr/>
+        </p:nvSpPr>
+        <p:spPr>
+          <a:xfrm>
+            <a:off x="749808" y="2615184"/>
+            <a:ext cx="1783080" cy="228600"/>
+          </a:xfrm>
+          <a:prstGeom prst="rect">
+            <a:avLst/>
+          </a:prstGeom>
+          <a:noFill/>
+        </p:spPr>
+        <p:txBody>
+          <a:bodyPr wrap="square" anchor="ctr" lIns="0" tIns="0" rIns="0" bIns="0">
+            <a:noAutofit/>
+          </a:bodyPr>
+          <a:lstStyle/>
+          <a:p>
+            <a:pPr algn="l" latinLnBrk="0">
+              <a:lnSpc>
+                <a:spcPct val="100000"/>
+              </a:lnSpc>
+              <a:spcBef>
+                <a:spcPts val="0"/>
+              </a:spcBef>
+              <a:spcAft>
+                <a:spcPts val="0"/>
+              </a:spcAft>
+            </a:pPr>
+            <a:r>
+              <a:rPr sz="950" b="0">
+                <a:solidFill>
+                  <a:srgbClr val="1B4D69"/>
+                </a:solidFill>
+                <a:latin typeface="Microsoft YaHei"/>
+                <a:ea typeface="Microsoft YaHei"/>
+                <a:cs typeface="Microsoft YaHei"/>
+              </a:rPr>
+              <a:t>专家 GEMM（闭源核）</a:t>
+            </a:r>
+          </a:p>
+        </p:txBody>
+      </p:sp>
+      <p:sp>
+        <p:nvSpPr>
+          <p:cNvPr id="18" name="Rectangle 17"/>
           <p:cNvSpPr/>
           <p:nvPr/>
         </p:nvSpPr>
         <p:spPr>
           <a:xfrm>
-            <a:off x="1005840" y="3416165"/>
-            <a:ext cx="640080" cy="918090"/>
+            <a:off x="2606040" y="2660904"/>
+            <a:ext cx="1766620" cy="137160"/>
           </a:xfrm>
           <a:prstGeom prst="rect">
             <a:avLst/>
           </a:prstGeom>
           <a:solidFill>
-            <a:srgbClr val="AFCEE1"/>
+            <a:srgbClr val="CFE3F0"/>
           </a:solidFill>
           <a:ln>
             <a:noFill/>
@@ -3557,114 +3869,20 @@
       </p:sp>
       <p:sp>
         <p:nvSpPr>
-          <p:cNvPr id="13" name="TextBox 12"/>
-          <p:cNvSpPr txBox="1"/>
-          <p:nvPr/>
-        </p:nvSpPr>
-        <p:spPr>
-          <a:xfrm>
-            <a:off x="777240" y="3160133"/>
-            <a:ext cx="1097280" cy="219456"/>
-          </a:xfrm>
-          <a:prstGeom prst="rect">
-            <a:avLst/>
-          </a:prstGeom>
-          <a:noFill/>
-        </p:spPr>
-        <p:txBody>
-          <a:bodyPr wrap="square" anchor="ctr" lIns="0" tIns="0" rIns="0" bIns="0">
-            <a:noAutofit/>
-          </a:bodyPr>
-          <a:lstStyle/>
-          <a:p>
-            <a:pPr algn="ctr" latinLnBrk="0">
-              <a:lnSpc>
-                <a:spcPct val="100000"/>
-              </a:lnSpc>
-              <a:spcBef>
-                <a:spcPts val="0"/>
-              </a:spcBef>
-              <a:spcAft>
-                <a:spcPts val="0"/>
-              </a:spcAft>
-            </a:pPr>
-            <a:r>
-              <a:rPr sz="1150" b="1">
-                <a:solidFill>
-                  <a:srgbClr val="0A2B45"/>
-                </a:solidFill>
-                <a:latin typeface="Arial"/>
-                <a:ea typeface="Microsoft YaHei"/>
-                <a:cs typeface="Microsoft YaHei"/>
-              </a:rPr>
-              <a:t>1370</a:t>
-            </a:r>
-          </a:p>
-        </p:txBody>
-      </p:sp>
-      <p:sp>
-        <p:nvSpPr>
-          <p:cNvPr id="14" name="TextBox 13"/>
-          <p:cNvSpPr txBox="1"/>
-          <p:nvPr/>
-        </p:nvSpPr>
-        <p:spPr>
-          <a:xfrm>
-            <a:off x="777240" y="4398264"/>
-            <a:ext cx="1097280" cy="201168"/>
-          </a:xfrm>
-          <a:prstGeom prst="rect">
-            <a:avLst/>
-          </a:prstGeom>
-          <a:noFill/>
-        </p:spPr>
-        <p:txBody>
-          <a:bodyPr wrap="square" anchor="ctr" lIns="0" tIns="0" rIns="0" bIns="0">
-            <a:noAutofit/>
-          </a:bodyPr>
-          <a:lstStyle/>
-          <a:p>
-            <a:pPr algn="ctr" latinLnBrk="0">
-              <a:lnSpc>
-                <a:spcPct val="100000"/>
-              </a:lnSpc>
-              <a:spcBef>
-                <a:spcPts val="0"/>
-              </a:spcBef>
-              <a:spcAft>
-                <a:spcPts val="0"/>
-              </a:spcAft>
-            </a:pPr>
-            <a:r>
-              <a:rPr sz="950" b="0">
-                <a:solidFill>
-                  <a:srgbClr val="1B4D69"/>
-                </a:solidFill>
-                <a:latin typeface="Microsoft YaHei"/>
-                <a:ea typeface="Microsoft YaHei"/>
-                <a:cs typeface="Microsoft YaHei"/>
-              </a:rPr>
-              <a:t>基线</a:t>
-            </a:r>
-          </a:p>
-        </p:txBody>
-      </p:sp>
-      <p:sp>
-        <p:nvSpPr>
-          <p:cNvPr id="15" name="Rectangle 14"/>
+          <p:cNvPr id="19" name="Rectangle 18"/>
           <p:cNvSpPr/>
           <p:nvPr/>
         </p:nvSpPr>
         <p:spPr>
           <a:xfrm>
-            <a:off x="2194560" y="3072384"/>
-            <a:ext cx="640080" cy="1261872"/>
+            <a:off x="2606040" y="2660904"/>
+            <a:ext cx="1075334" cy="137160"/>
           </a:xfrm>
           <a:prstGeom prst="rect">
             <a:avLst/>
           </a:prstGeom>
           <a:solidFill>
-            <a:srgbClr val="0F62CE"/>
+            <a:srgbClr val="7FA4BA"/>
           </a:solidFill>
           <a:ln>
             <a:noFill/>
@@ -3680,14 +3898,108 @@
       </p:sp>
       <p:sp>
         <p:nvSpPr>
-          <p:cNvPr id="16" name="TextBox 15"/>
-          <p:cNvSpPr txBox="1"/>
-          <p:nvPr/>
-        </p:nvSpPr>
-        <p:spPr>
-          <a:xfrm>
-            <a:off x="1965960" y="2816352"/>
-            <a:ext cx="1097280" cy="219456"/>
+          <p:cNvPr id="20" name="TextBox 19"/>
+          <p:cNvSpPr txBox="1"/>
+          <p:nvPr/>
+        </p:nvSpPr>
+        <p:spPr>
+          <a:xfrm>
+            <a:off x="4572000" y="2615184"/>
+            <a:ext cx="438912" cy="228600"/>
+          </a:xfrm>
+          <a:prstGeom prst="rect">
+            <a:avLst/>
+          </a:prstGeom>
+          <a:noFill/>
+        </p:spPr>
+        <p:txBody>
+          <a:bodyPr wrap="square" anchor="ctr" lIns="0" tIns="0" rIns="0" bIns="0">
+            <a:noAutofit/>
+          </a:bodyPr>
+          <a:lstStyle/>
+          <a:p>
+            <a:pPr algn="r" latinLnBrk="0">
+              <a:lnSpc>
+                <a:spcPct val="100000"/>
+              </a:lnSpc>
+              <a:spcBef>
+                <a:spcPts val="0"/>
+              </a:spcBef>
+              <a:spcAft>
+                <a:spcPts val="0"/>
+              </a:spcAft>
+            </a:pPr>
+            <a:r>
+              <a:rPr sz="950" b="0">
+                <a:solidFill>
+                  <a:srgbClr val="7FA4BA"/>
+                </a:solidFill>
+                <a:latin typeface="Consolas"/>
+                <a:ea typeface="Microsoft YaHei"/>
+                <a:cs typeface="Microsoft YaHei"/>
+              </a:rPr>
+              <a:t>__%</a:t>
+            </a:r>
+          </a:p>
+        </p:txBody>
+      </p:sp>
+      <p:sp>
+        <p:nvSpPr>
+          <p:cNvPr id="21" name="TextBox 20"/>
+          <p:cNvSpPr txBox="1"/>
+          <p:nvPr/>
+        </p:nvSpPr>
+        <p:spPr>
+          <a:xfrm>
+            <a:off x="5065776" y="2615184"/>
+            <a:ext cx="585216" cy="228600"/>
+          </a:xfrm>
+          <a:prstGeom prst="rect">
+            <a:avLst/>
+          </a:prstGeom>
+          <a:noFill/>
+        </p:spPr>
+        <p:txBody>
+          <a:bodyPr wrap="square" anchor="ctr" lIns="0" tIns="0" rIns="0" bIns="0">
+            <a:noAutofit/>
+          </a:bodyPr>
+          <a:lstStyle/>
+          <a:p>
+            <a:pPr algn="r" latinLnBrk="0">
+              <a:lnSpc>
+                <a:spcPct val="100000"/>
+              </a:lnSpc>
+              <a:spcBef>
+                <a:spcPts val="0"/>
+              </a:spcBef>
+              <a:spcAft>
+                <a:spcPts val="0"/>
+              </a:spcAft>
+            </a:pPr>
+            <a:r>
+              <a:rPr sz="950" b="0">
+                <a:solidFill>
+                  <a:srgbClr val="7FA4BA"/>
+                </a:solidFill>
+                <a:latin typeface="Consolas"/>
+                <a:ea typeface="Microsoft YaHei"/>
+                <a:cs typeface="Microsoft YaHei"/>
+              </a:rPr>
+              <a:t>__</a:t>
+            </a:r>
+          </a:p>
+        </p:txBody>
+      </p:sp>
+      <p:sp>
+        <p:nvSpPr>
+          <p:cNvPr id="22" name="TextBox 21"/>
+          <p:cNvSpPr txBox="1"/>
+          <p:nvPr/>
+        </p:nvSpPr>
+        <p:spPr>
+          <a:xfrm>
+            <a:off x="5687568" y="2615184"/>
+            <a:ext cx="329184" cy="228600"/>
           </a:xfrm>
           <a:prstGeom prst="rect">
             <a:avLst/>
@@ -3712,29 +4024,228 @@
               </a:spcAft>
             </a:pPr>
             <a:r>
-              <a:rPr sz="1150" b="1">
-                <a:solidFill>
-                  <a:srgbClr val="0A2B45"/>
-                </a:solidFill>
-                <a:latin typeface="Arial"/>
-                <a:ea typeface="Microsoft YaHei"/>
-                <a:cs typeface="Microsoft YaHei"/>
-              </a:rPr>
-              <a:t>1883</a:t>
-            </a:r>
-          </a:p>
-        </p:txBody>
-      </p:sp>
-      <p:sp>
-        <p:nvSpPr>
-          <p:cNvPr id="17" name="TextBox 16"/>
-          <p:cNvSpPr txBox="1"/>
-          <p:nvPr/>
-        </p:nvSpPr>
-        <p:spPr>
-          <a:xfrm>
-            <a:off x="1965960" y="4398264"/>
-            <a:ext cx="1097280" cy="201168"/>
+              <a:rPr sz="950" b="1">
+                <a:solidFill>
+                  <a:srgbClr val="1B4D69"/>
+                </a:solidFill>
+                <a:latin typeface="Microsoft YaHei"/>
+                <a:ea typeface="Microsoft YaHei"/>
+                <a:cs typeface="Microsoft YaHei"/>
+              </a:rPr>
+              <a:t>3</a:t>
+            </a:r>
+          </a:p>
+        </p:txBody>
+      </p:sp>
+      <p:sp>
+        <p:nvSpPr>
+          <p:cNvPr id="23" name="TextBox 22"/>
+          <p:cNvSpPr txBox="1"/>
+          <p:nvPr/>
+        </p:nvSpPr>
+        <p:spPr>
+          <a:xfrm>
+            <a:off x="749808" y="2875788"/>
+            <a:ext cx="1783080" cy="228600"/>
+          </a:xfrm>
+          <a:prstGeom prst="rect">
+            <a:avLst/>
+          </a:prstGeom>
+          <a:noFill/>
+        </p:spPr>
+        <p:txBody>
+          <a:bodyPr wrap="square" anchor="ctr" lIns="0" tIns="0" rIns="0" bIns="0">
+            <a:noAutofit/>
+          </a:bodyPr>
+          <a:lstStyle/>
+          <a:p>
+            <a:pPr algn="l" latinLnBrk="0">
+              <a:lnSpc>
+                <a:spcPct val="100000"/>
+              </a:lnSpc>
+              <a:spcBef>
+                <a:spcPts val="0"/>
+              </a:spcBef>
+              <a:spcAft>
+                <a:spcPts val="0"/>
+              </a:spcAft>
+            </a:pPr>
+            <a:r>
+              <a:rPr sz="950" b="0">
+                <a:solidFill>
+                  <a:srgbClr val="1B4D69"/>
+                </a:solidFill>
+                <a:latin typeface="Microsoft YaHei"/>
+                <a:ea typeface="Microsoft YaHei"/>
+                <a:cs typeface="Microsoft YaHei"/>
+              </a:rPr>
+              <a:t>专家重排与合并</a:t>
+            </a:r>
+          </a:p>
+        </p:txBody>
+      </p:sp>
+      <p:sp>
+        <p:nvSpPr>
+          <p:cNvPr id="24" name="Rectangle 23"/>
+          <p:cNvSpPr/>
+          <p:nvPr/>
+        </p:nvSpPr>
+        <p:spPr>
+          <a:xfrm>
+            <a:off x="2606040" y="2921508"/>
+            <a:ext cx="883310" cy="137160"/>
+          </a:xfrm>
+          <a:prstGeom prst="rect">
+            <a:avLst/>
+          </a:prstGeom>
+          <a:solidFill>
+            <a:srgbClr val="CFE3F0"/>
+          </a:solidFill>
+          <a:ln>
+            <a:noFill/>
+          </a:ln>
+        </p:spPr>
+        <p:txBody>
+          <a:bodyPr rtlCol="0" anchor="ctr"/>
+          <a:lstStyle/>
+          <a:p>
+            <a:pPr algn="ctr"/>
+          </a:p>
+        </p:txBody>
+      </p:sp>
+      <p:sp>
+        <p:nvSpPr>
+          <p:cNvPr id="25" name="Rectangle 24"/>
+          <p:cNvSpPr/>
+          <p:nvPr/>
+        </p:nvSpPr>
+        <p:spPr>
+          <a:xfrm>
+            <a:off x="2606040" y="2921508"/>
+            <a:ext cx="288036" cy="137160"/>
+          </a:xfrm>
+          <a:prstGeom prst="rect">
+            <a:avLst/>
+          </a:prstGeom>
+          <a:solidFill>
+            <a:srgbClr val="7FA4BA"/>
+          </a:solidFill>
+          <a:ln>
+            <a:noFill/>
+          </a:ln>
+        </p:spPr>
+        <p:txBody>
+          <a:bodyPr rtlCol="0" anchor="ctr"/>
+          <a:lstStyle/>
+          <a:p>
+            <a:pPr algn="ctr"/>
+          </a:p>
+        </p:txBody>
+      </p:sp>
+      <p:sp>
+        <p:nvSpPr>
+          <p:cNvPr id="26" name="TextBox 25"/>
+          <p:cNvSpPr txBox="1"/>
+          <p:nvPr/>
+        </p:nvSpPr>
+        <p:spPr>
+          <a:xfrm>
+            <a:off x="4572000" y="2875788"/>
+            <a:ext cx="438912" cy="228600"/>
+          </a:xfrm>
+          <a:prstGeom prst="rect">
+            <a:avLst/>
+          </a:prstGeom>
+          <a:noFill/>
+        </p:spPr>
+        <p:txBody>
+          <a:bodyPr wrap="square" anchor="ctr" lIns="0" tIns="0" rIns="0" bIns="0">
+            <a:noAutofit/>
+          </a:bodyPr>
+          <a:lstStyle/>
+          <a:p>
+            <a:pPr algn="r" latinLnBrk="0">
+              <a:lnSpc>
+                <a:spcPct val="100000"/>
+              </a:lnSpc>
+              <a:spcBef>
+                <a:spcPts val="0"/>
+              </a:spcBef>
+              <a:spcAft>
+                <a:spcPts val="0"/>
+              </a:spcAft>
+            </a:pPr>
+            <a:r>
+              <a:rPr sz="950" b="0">
+                <a:solidFill>
+                  <a:srgbClr val="7FA4BA"/>
+                </a:solidFill>
+                <a:latin typeface="Consolas"/>
+                <a:ea typeface="Microsoft YaHei"/>
+                <a:cs typeface="Microsoft YaHei"/>
+              </a:rPr>
+              <a:t>__%</a:t>
+            </a:r>
+          </a:p>
+        </p:txBody>
+      </p:sp>
+      <p:sp>
+        <p:nvSpPr>
+          <p:cNvPr id="27" name="TextBox 26"/>
+          <p:cNvSpPr txBox="1"/>
+          <p:nvPr/>
+        </p:nvSpPr>
+        <p:spPr>
+          <a:xfrm>
+            <a:off x="5065776" y="2875788"/>
+            <a:ext cx="585216" cy="228600"/>
+          </a:xfrm>
+          <a:prstGeom prst="rect">
+            <a:avLst/>
+          </a:prstGeom>
+          <a:noFill/>
+        </p:spPr>
+        <p:txBody>
+          <a:bodyPr wrap="square" anchor="ctr" lIns="0" tIns="0" rIns="0" bIns="0">
+            <a:noAutofit/>
+          </a:bodyPr>
+          <a:lstStyle/>
+          <a:p>
+            <a:pPr algn="r" latinLnBrk="0">
+              <a:lnSpc>
+                <a:spcPct val="100000"/>
+              </a:lnSpc>
+              <a:spcBef>
+                <a:spcPts val="0"/>
+              </a:spcBef>
+              <a:spcAft>
+                <a:spcPts val="0"/>
+              </a:spcAft>
+            </a:pPr>
+            <a:r>
+              <a:rPr sz="950" b="0">
+                <a:solidFill>
+                  <a:srgbClr val="7FA4BA"/>
+                </a:solidFill>
+                <a:latin typeface="Consolas"/>
+                <a:ea typeface="Microsoft YaHei"/>
+                <a:cs typeface="Microsoft YaHei"/>
+              </a:rPr>
+              <a:t>__</a:t>
+            </a:r>
+          </a:p>
+        </p:txBody>
+      </p:sp>
+      <p:sp>
+        <p:nvSpPr>
+          <p:cNvPr id="28" name="TextBox 27"/>
+          <p:cNvSpPr txBox="1"/>
+          <p:nvPr/>
+        </p:nvSpPr>
+        <p:spPr>
+          <a:xfrm>
+            <a:off x="5687568" y="2875788"/>
+            <a:ext cx="329184" cy="228600"/>
           </a:xfrm>
           <a:prstGeom prst="rect">
             <a:avLst/>
@@ -3759,6 +4270,53 @@
               </a:spcAft>
             </a:pPr>
             <a:r>
+              <a:rPr sz="950" b="1">
+                <a:solidFill>
+                  <a:srgbClr val="1B4D69"/>
+                </a:solidFill>
+                <a:latin typeface="Microsoft YaHei"/>
+                <a:ea typeface="Microsoft YaHei"/>
+                <a:cs typeface="Microsoft YaHei"/>
+              </a:rPr>
+              <a:t>2 · 4</a:t>
+            </a:r>
+          </a:p>
+        </p:txBody>
+      </p:sp>
+      <p:sp>
+        <p:nvSpPr>
+          <p:cNvPr id="29" name="TextBox 28"/>
+          <p:cNvSpPr txBox="1"/>
+          <p:nvPr/>
+        </p:nvSpPr>
+        <p:spPr>
+          <a:xfrm>
+            <a:off x="749808" y="3136392"/>
+            <a:ext cx="1783080" cy="228600"/>
+          </a:xfrm>
+          <a:prstGeom prst="rect">
+            <a:avLst/>
+          </a:prstGeom>
+          <a:noFill/>
+        </p:spPr>
+        <p:txBody>
+          <a:bodyPr wrap="square" anchor="ctr" lIns="0" tIns="0" rIns="0" bIns="0">
+            <a:noAutofit/>
+          </a:bodyPr>
+          <a:lstStyle/>
+          <a:p>
+            <a:pPr algn="l" latinLnBrk="0">
+              <a:lnSpc>
+                <a:spcPct val="100000"/>
+              </a:lnSpc>
+              <a:spcBef>
+                <a:spcPts val="0"/>
+              </a:spcBef>
+              <a:spcAft>
+                <a:spcPts val="0"/>
+              </a:spcAft>
+            </a:pPr>
+            <a:r>
               <a:rPr sz="950" b="0">
                 <a:solidFill>
                   <a:srgbClr val="1B4D69"/>
@@ -3767,42 +4325,220 @@
                 <a:ea typeface="Microsoft YaHei"/>
                 <a:cs typeface="Microsoft YaHei"/>
               </a:rPr>
-              <a:t>交付</a:t>
-            </a:r>
-          </a:p>
-        </p:txBody>
-      </p:sp>
-      <p:cxnSp>
-        <p:nvCxnSpPr>
-          <p:cNvPr id="18" name="Connector 17"/>
-          <p:cNvCxnSpPr/>
-          <p:nvPr/>
-        </p:nvCxnSpPr>
-        <p:spPr>
-          <a:xfrm>
-            <a:off x="822959" y="4334256"/>
-            <a:ext cx="2194561" cy="0"/>
-          </a:xfrm>
-          <a:prstGeom prst="line">
-            <a:avLst/>
-          </a:prstGeom>
-          <a:ln w="12700">
-            <a:solidFill>
-              <a:srgbClr val="AFCEE1"/>
-            </a:solidFill>
+              <a:t>逐元素 + 量化</a:t>
+            </a:r>
+          </a:p>
+        </p:txBody>
+      </p:sp>
+      <p:sp>
+        <p:nvSpPr>
+          <p:cNvPr id="30" name="Rectangle 29"/>
+          <p:cNvSpPr/>
+          <p:nvPr/>
+        </p:nvSpPr>
+        <p:spPr>
+          <a:xfrm>
+            <a:off x="2606040" y="3182112"/>
+            <a:ext cx="1056132" cy="137160"/>
+          </a:xfrm>
+          <a:prstGeom prst="rect">
+            <a:avLst/>
+          </a:prstGeom>
+          <a:solidFill>
+            <a:srgbClr val="CFE3F0"/>
+          </a:solidFill>
+          <a:ln>
+            <a:noFill/>
           </a:ln>
         </p:spPr>
-      </p:cxnSp>
-      <p:sp>
-        <p:nvSpPr>
-          <p:cNvPr id="19" name="TextBox 18"/>
-          <p:cNvSpPr txBox="1"/>
-          <p:nvPr/>
-        </p:nvSpPr>
-        <p:spPr>
-          <a:xfrm>
-            <a:off x="749808" y="4681728"/>
-            <a:ext cx="2340864" cy="219456"/>
+        <p:txBody>
+          <a:bodyPr rtlCol="0" anchor="ctr"/>
+          <a:lstStyle/>
+          <a:p>
+            <a:pPr algn="ctr"/>
+          </a:p>
+        </p:txBody>
+      </p:sp>
+      <p:sp>
+        <p:nvSpPr>
+          <p:cNvPr id="31" name="Rectangle 30"/>
+          <p:cNvSpPr/>
+          <p:nvPr/>
+        </p:nvSpPr>
+        <p:spPr>
+          <a:xfrm>
+            <a:off x="2606040" y="3182112"/>
+            <a:ext cx="211226" cy="137160"/>
+          </a:xfrm>
+          <a:prstGeom prst="rect">
+            <a:avLst/>
+          </a:prstGeom>
+          <a:solidFill>
+            <a:srgbClr val="7FA4BA"/>
+          </a:solidFill>
+          <a:ln>
+            <a:noFill/>
+          </a:ln>
+        </p:spPr>
+        <p:txBody>
+          <a:bodyPr rtlCol="0" anchor="ctr"/>
+          <a:lstStyle/>
+          <a:p>
+            <a:pPr algn="ctr"/>
+          </a:p>
+        </p:txBody>
+      </p:sp>
+      <p:sp>
+        <p:nvSpPr>
+          <p:cNvPr id="32" name="TextBox 31"/>
+          <p:cNvSpPr txBox="1"/>
+          <p:nvPr/>
+        </p:nvSpPr>
+        <p:spPr>
+          <a:xfrm>
+            <a:off x="4572000" y="3136392"/>
+            <a:ext cx="438912" cy="228600"/>
+          </a:xfrm>
+          <a:prstGeom prst="rect">
+            <a:avLst/>
+          </a:prstGeom>
+          <a:noFill/>
+        </p:spPr>
+        <p:txBody>
+          <a:bodyPr wrap="square" anchor="ctr" lIns="0" tIns="0" rIns="0" bIns="0">
+            <a:noAutofit/>
+          </a:bodyPr>
+          <a:lstStyle/>
+          <a:p>
+            <a:pPr algn="r" latinLnBrk="0">
+              <a:lnSpc>
+                <a:spcPct val="100000"/>
+              </a:lnSpc>
+              <a:spcBef>
+                <a:spcPts val="0"/>
+              </a:spcBef>
+              <a:spcAft>
+                <a:spcPts val="0"/>
+              </a:spcAft>
+            </a:pPr>
+            <a:r>
+              <a:rPr sz="950" b="0">
+                <a:solidFill>
+                  <a:srgbClr val="7FA4BA"/>
+                </a:solidFill>
+                <a:latin typeface="Consolas"/>
+                <a:ea typeface="Microsoft YaHei"/>
+                <a:cs typeface="Microsoft YaHei"/>
+              </a:rPr>
+              <a:t>__%</a:t>
+            </a:r>
+          </a:p>
+        </p:txBody>
+      </p:sp>
+      <p:sp>
+        <p:nvSpPr>
+          <p:cNvPr id="33" name="TextBox 32"/>
+          <p:cNvSpPr txBox="1"/>
+          <p:nvPr/>
+        </p:nvSpPr>
+        <p:spPr>
+          <a:xfrm>
+            <a:off x="5065776" y="3136392"/>
+            <a:ext cx="585216" cy="228600"/>
+          </a:xfrm>
+          <a:prstGeom prst="rect">
+            <a:avLst/>
+          </a:prstGeom>
+          <a:noFill/>
+        </p:spPr>
+        <p:txBody>
+          <a:bodyPr wrap="square" anchor="ctr" lIns="0" tIns="0" rIns="0" bIns="0">
+            <a:noAutofit/>
+          </a:bodyPr>
+          <a:lstStyle/>
+          <a:p>
+            <a:pPr algn="r" latinLnBrk="0">
+              <a:lnSpc>
+                <a:spcPct val="100000"/>
+              </a:lnSpc>
+              <a:spcBef>
+                <a:spcPts val="0"/>
+              </a:spcBef>
+              <a:spcAft>
+                <a:spcPts val="0"/>
+              </a:spcAft>
+            </a:pPr>
+            <a:r>
+              <a:rPr sz="950" b="0">
+                <a:solidFill>
+                  <a:srgbClr val="7FA4BA"/>
+                </a:solidFill>
+                <a:latin typeface="Consolas"/>
+                <a:ea typeface="Microsoft YaHei"/>
+                <a:cs typeface="Microsoft YaHei"/>
+              </a:rPr>
+              <a:t>__</a:t>
+            </a:r>
+          </a:p>
+        </p:txBody>
+      </p:sp>
+      <p:sp>
+        <p:nvSpPr>
+          <p:cNvPr id="34" name="TextBox 33"/>
+          <p:cNvSpPr txBox="1"/>
+          <p:nvPr/>
+        </p:nvSpPr>
+        <p:spPr>
+          <a:xfrm>
+            <a:off x="5687568" y="3136392"/>
+            <a:ext cx="329184" cy="228600"/>
+          </a:xfrm>
+          <a:prstGeom prst="rect">
+            <a:avLst/>
+          </a:prstGeom>
+          <a:noFill/>
+        </p:spPr>
+        <p:txBody>
+          <a:bodyPr wrap="square" anchor="ctr" lIns="0" tIns="0" rIns="0" bIns="0">
+            <a:noAutofit/>
+          </a:bodyPr>
+          <a:lstStyle/>
+          <a:p>
+            <a:pPr algn="ctr" latinLnBrk="0">
+              <a:lnSpc>
+                <a:spcPct val="100000"/>
+              </a:lnSpc>
+              <a:spcBef>
+                <a:spcPts val="0"/>
+              </a:spcBef>
+              <a:spcAft>
+                <a:spcPts val="0"/>
+              </a:spcAft>
+            </a:pPr>
+            <a:r>
+              <a:rPr sz="950" b="1">
+                <a:solidFill>
+                  <a:srgbClr val="1B4D69"/>
+                </a:solidFill>
+                <a:latin typeface="Microsoft YaHei"/>
+                <a:ea typeface="Microsoft YaHei"/>
+                <a:cs typeface="Microsoft YaHei"/>
+              </a:rPr>
+              <a:t>1</a:t>
+            </a:r>
+          </a:p>
+        </p:txBody>
+      </p:sp>
+      <p:sp>
+        <p:nvSpPr>
+          <p:cNvPr id="35" name="TextBox 34"/>
+          <p:cNvSpPr txBox="1"/>
+          <p:nvPr/>
+        </p:nvSpPr>
+        <p:spPr>
+          <a:xfrm>
+            <a:off x="749808" y="3396996"/>
+            <a:ext cx="1783080" cy="228600"/>
           </a:xfrm>
           <a:prstGeom prst="rect">
             <a:avLst/>
@@ -3827,6 +4563,1218 @@
               </a:spcAft>
             </a:pPr>
             <a:r>
+              <a:rPr sz="950" b="0">
+                <a:solidFill>
+                  <a:srgbClr val="1B4D69"/>
+                </a:solidFill>
+                <a:latin typeface="Microsoft YaHei"/>
+                <a:ea typeface="Microsoft YaHei"/>
+                <a:cs typeface="Microsoft YaHei"/>
+              </a:rPr>
+              <a:t>Attention</a:t>
+            </a:r>
+          </a:p>
+        </p:txBody>
+      </p:sp>
+      <p:sp>
+        <p:nvSpPr>
+          <p:cNvPr id="36" name="Rectangle 35"/>
+          <p:cNvSpPr/>
+          <p:nvPr/>
+        </p:nvSpPr>
+        <p:spPr>
+          <a:xfrm>
+            <a:off x="2606040" y="3442716"/>
+            <a:ext cx="844905" cy="137160"/>
+          </a:xfrm>
+          <a:prstGeom prst="rect">
+            <a:avLst/>
+          </a:prstGeom>
+          <a:solidFill>
+            <a:srgbClr val="CFE3F0"/>
+          </a:solidFill>
+          <a:ln>
+            <a:noFill/>
+          </a:ln>
+        </p:spPr>
+        <p:txBody>
+          <a:bodyPr rtlCol="0" anchor="ctr"/>
+          <a:lstStyle/>
+          <a:p>
+            <a:pPr algn="ctr"/>
+          </a:p>
+        </p:txBody>
+      </p:sp>
+      <p:sp>
+        <p:nvSpPr>
+          <p:cNvPr id="37" name="Rectangle 36"/>
+          <p:cNvSpPr/>
+          <p:nvPr/>
+        </p:nvSpPr>
+        <p:spPr>
+          <a:xfrm>
+            <a:off x="2606040" y="3442716"/>
+            <a:ext cx="556869" cy="137160"/>
+          </a:xfrm>
+          <a:prstGeom prst="rect">
+            <a:avLst/>
+          </a:prstGeom>
+          <a:solidFill>
+            <a:srgbClr val="7FA4BA"/>
+          </a:solidFill>
+          <a:ln>
+            <a:noFill/>
+          </a:ln>
+        </p:spPr>
+        <p:txBody>
+          <a:bodyPr rtlCol="0" anchor="ctr"/>
+          <a:lstStyle/>
+          <a:p>
+            <a:pPr algn="ctr"/>
+          </a:p>
+        </p:txBody>
+      </p:sp>
+      <p:sp>
+        <p:nvSpPr>
+          <p:cNvPr id="38" name="TextBox 37"/>
+          <p:cNvSpPr txBox="1"/>
+          <p:nvPr/>
+        </p:nvSpPr>
+        <p:spPr>
+          <a:xfrm>
+            <a:off x="4572000" y="3396996"/>
+            <a:ext cx="438912" cy="228600"/>
+          </a:xfrm>
+          <a:prstGeom prst="rect">
+            <a:avLst/>
+          </a:prstGeom>
+          <a:noFill/>
+        </p:spPr>
+        <p:txBody>
+          <a:bodyPr wrap="square" anchor="ctr" lIns="0" tIns="0" rIns="0" bIns="0">
+            <a:noAutofit/>
+          </a:bodyPr>
+          <a:lstStyle/>
+          <a:p>
+            <a:pPr algn="r" latinLnBrk="0">
+              <a:lnSpc>
+                <a:spcPct val="100000"/>
+              </a:lnSpc>
+              <a:spcBef>
+                <a:spcPts val="0"/>
+              </a:spcBef>
+              <a:spcAft>
+                <a:spcPts val="0"/>
+              </a:spcAft>
+            </a:pPr>
+            <a:r>
+              <a:rPr sz="950" b="0">
+                <a:solidFill>
+                  <a:srgbClr val="7FA4BA"/>
+                </a:solidFill>
+                <a:latin typeface="Consolas"/>
+                <a:ea typeface="Microsoft YaHei"/>
+                <a:cs typeface="Microsoft YaHei"/>
+              </a:rPr>
+              <a:t>__%</a:t>
+            </a:r>
+          </a:p>
+        </p:txBody>
+      </p:sp>
+      <p:sp>
+        <p:nvSpPr>
+          <p:cNvPr id="39" name="TextBox 38"/>
+          <p:cNvSpPr txBox="1"/>
+          <p:nvPr/>
+        </p:nvSpPr>
+        <p:spPr>
+          <a:xfrm>
+            <a:off x="5065776" y="3396996"/>
+            <a:ext cx="585216" cy="228600"/>
+          </a:xfrm>
+          <a:prstGeom prst="rect">
+            <a:avLst/>
+          </a:prstGeom>
+          <a:noFill/>
+        </p:spPr>
+        <p:txBody>
+          <a:bodyPr wrap="square" anchor="ctr" lIns="0" tIns="0" rIns="0" bIns="0">
+            <a:noAutofit/>
+          </a:bodyPr>
+          <a:lstStyle/>
+          <a:p>
+            <a:pPr algn="r" latinLnBrk="0">
+              <a:lnSpc>
+                <a:spcPct val="100000"/>
+              </a:lnSpc>
+              <a:spcBef>
+                <a:spcPts val="0"/>
+              </a:spcBef>
+              <a:spcAft>
+                <a:spcPts val="0"/>
+              </a:spcAft>
+            </a:pPr>
+            <a:r>
+              <a:rPr sz="950" b="0">
+                <a:solidFill>
+                  <a:srgbClr val="7FA4BA"/>
+                </a:solidFill>
+                <a:latin typeface="Consolas"/>
+                <a:ea typeface="Microsoft YaHei"/>
+                <a:cs typeface="Microsoft YaHei"/>
+              </a:rPr>
+              <a:t>__</a:t>
+            </a:r>
+          </a:p>
+        </p:txBody>
+      </p:sp>
+      <p:sp>
+        <p:nvSpPr>
+          <p:cNvPr id="40" name="TextBox 39"/>
+          <p:cNvSpPr txBox="1"/>
+          <p:nvPr/>
+        </p:nvSpPr>
+        <p:spPr>
+          <a:xfrm>
+            <a:off x="5687568" y="3396996"/>
+            <a:ext cx="329184" cy="228600"/>
+          </a:xfrm>
+          <a:prstGeom prst="rect">
+            <a:avLst/>
+          </a:prstGeom>
+          <a:noFill/>
+        </p:spPr>
+        <p:txBody>
+          <a:bodyPr wrap="square" anchor="ctr" lIns="0" tIns="0" rIns="0" bIns="0">
+            <a:noAutofit/>
+          </a:bodyPr>
+          <a:lstStyle/>
+          <a:p>
+            <a:pPr algn="ctr" latinLnBrk="0">
+              <a:lnSpc>
+                <a:spcPct val="100000"/>
+              </a:lnSpc>
+              <a:spcBef>
+                <a:spcPts val="0"/>
+              </a:spcBef>
+              <a:spcAft>
+                <a:spcPts val="0"/>
+              </a:spcAft>
+            </a:pPr>
+            <a:r>
+              <a:rPr sz="950" b="0">
+                <a:solidFill>
+                  <a:srgbClr val="7FA4BA"/>
+                </a:solidFill>
+                <a:latin typeface="Microsoft YaHei"/>
+                <a:ea typeface="Microsoft YaHei"/>
+                <a:cs typeface="Microsoft YaHei"/>
+              </a:rPr>
+              <a:t>—</a:t>
+            </a:r>
+          </a:p>
+        </p:txBody>
+      </p:sp>
+      <p:sp>
+        <p:nvSpPr>
+          <p:cNvPr id="41" name="TextBox 40"/>
+          <p:cNvSpPr txBox="1"/>
+          <p:nvPr/>
+        </p:nvSpPr>
+        <p:spPr>
+          <a:xfrm>
+            <a:off x="749808" y="3657600"/>
+            <a:ext cx="1783080" cy="228600"/>
+          </a:xfrm>
+          <a:prstGeom prst="rect">
+            <a:avLst/>
+          </a:prstGeom>
+          <a:noFill/>
+        </p:spPr>
+        <p:txBody>
+          <a:bodyPr wrap="square" anchor="ctr" lIns="0" tIns="0" rIns="0" bIns="0">
+            <a:noAutofit/>
+          </a:bodyPr>
+          <a:lstStyle/>
+          <a:p>
+            <a:pPr algn="l" latinLnBrk="0">
+              <a:lnSpc>
+                <a:spcPct val="100000"/>
+              </a:lnSpc>
+              <a:spcBef>
+                <a:spcPts val="0"/>
+              </a:spcBef>
+              <a:spcAft>
+                <a:spcPts val="0"/>
+              </a:spcAft>
+            </a:pPr>
+            <a:r>
+              <a:rPr sz="950" b="0">
+                <a:solidFill>
+                  <a:srgbClr val="1B4D69"/>
+                </a:solidFill>
+                <a:latin typeface="Microsoft YaHei"/>
+                <a:ea typeface="Microsoft YaHei"/>
+                <a:cs typeface="Microsoft YaHei"/>
+              </a:rPr>
+              <a:t>稠密 GEMM（QKV / O 等）</a:t>
+            </a:r>
+          </a:p>
+        </p:txBody>
+      </p:sp>
+      <p:sp>
+        <p:nvSpPr>
+          <p:cNvPr id="42" name="Rectangle 41"/>
+          <p:cNvSpPr/>
+          <p:nvPr/>
+        </p:nvSpPr>
+        <p:spPr>
+          <a:xfrm>
+            <a:off x="2606040" y="3703320"/>
+            <a:ext cx="691286" cy="137160"/>
+          </a:xfrm>
+          <a:prstGeom prst="rect">
+            <a:avLst/>
+          </a:prstGeom>
+          <a:solidFill>
+            <a:srgbClr val="CFE3F0"/>
+          </a:solidFill>
+          <a:ln>
+            <a:noFill/>
+          </a:ln>
+        </p:spPr>
+        <p:txBody>
+          <a:bodyPr rtlCol="0" anchor="ctr"/>
+          <a:lstStyle/>
+          <a:p>
+            <a:pPr algn="ctr"/>
+          </a:p>
+        </p:txBody>
+      </p:sp>
+      <p:sp>
+        <p:nvSpPr>
+          <p:cNvPr id="43" name="Rectangle 42"/>
+          <p:cNvSpPr/>
+          <p:nvPr/>
+        </p:nvSpPr>
+        <p:spPr>
+          <a:xfrm>
+            <a:off x="2606040" y="3703320"/>
+            <a:ext cx="499262" cy="137160"/>
+          </a:xfrm>
+          <a:prstGeom prst="rect">
+            <a:avLst/>
+          </a:prstGeom>
+          <a:solidFill>
+            <a:srgbClr val="7FA4BA"/>
+          </a:solidFill>
+          <a:ln>
+            <a:noFill/>
+          </a:ln>
+        </p:spPr>
+        <p:txBody>
+          <a:bodyPr rtlCol="0" anchor="ctr"/>
+          <a:lstStyle/>
+          <a:p>
+            <a:pPr algn="ctr"/>
+          </a:p>
+        </p:txBody>
+      </p:sp>
+      <p:sp>
+        <p:nvSpPr>
+          <p:cNvPr id="44" name="TextBox 43"/>
+          <p:cNvSpPr txBox="1"/>
+          <p:nvPr/>
+        </p:nvSpPr>
+        <p:spPr>
+          <a:xfrm>
+            <a:off x="4572000" y="3657600"/>
+            <a:ext cx="438912" cy="228600"/>
+          </a:xfrm>
+          <a:prstGeom prst="rect">
+            <a:avLst/>
+          </a:prstGeom>
+          <a:noFill/>
+        </p:spPr>
+        <p:txBody>
+          <a:bodyPr wrap="square" anchor="ctr" lIns="0" tIns="0" rIns="0" bIns="0">
+            <a:noAutofit/>
+          </a:bodyPr>
+          <a:lstStyle/>
+          <a:p>
+            <a:pPr algn="r" latinLnBrk="0">
+              <a:lnSpc>
+                <a:spcPct val="100000"/>
+              </a:lnSpc>
+              <a:spcBef>
+                <a:spcPts val="0"/>
+              </a:spcBef>
+              <a:spcAft>
+                <a:spcPts val="0"/>
+              </a:spcAft>
+            </a:pPr>
+            <a:r>
+              <a:rPr sz="950" b="0">
+                <a:solidFill>
+                  <a:srgbClr val="7FA4BA"/>
+                </a:solidFill>
+                <a:latin typeface="Consolas"/>
+                <a:ea typeface="Microsoft YaHei"/>
+                <a:cs typeface="Microsoft YaHei"/>
+              </a:rPr>
+              <a:t>__%</a:t>
+            </a:r>
+          </a:p>
+        </p:txBody>
+      </p:sp>
+      <p:sp>
+        <p:nvSpPr>
+          <p:cNvPr id="45" name="TextBox 44"/>
+          <p:cNvSpPr txBox="1"/>
+          <p:nvPr/>
+        </p:nvSpPr>
+        <p:spPr>
+          <a:xfrm>
+            <a:off x="5065776" y="3657600"/>
+            <a:ext cx="585216" cy="228600"/>
+          </a:xfrm>
+          <a:prstGeom prst="rect">
+            <a:avLst/>
+          </a:prstGeom>
+          <a:noFill/>
+        </p:spPr>
+        <p:txBody>
+          <a:bodyPr wrap="square" anchor="ctr" lIns="0" tIns="0" rIns="0" bIns="0">
+            <a:noAutofit/>
+          </a:bodyPr>
+          <a:lstStyle/>
+          <a:p>
+            <a:pPr algn="r" latinLnBrk="0">
+              <a:lnSpc>
+                <a:spcPct val="100000"/>
+              </a:lnSpc>
+              <a:spcBef>
+                <a:spcPts val="0"/>
+              </a:spcBef>
+              <a:spcAft>
+                <a:spcPts val="0"/>
+              </a:spcAft>
+            </a:pPr>
+            <a:r>
+              <a:rPr sz="950" b="0">
+                <a:solidFill>
+                  <a:srgbClr val="7FA4BA"/>
+                </a:solidFill>
+                <a:latin typeface="Consolas"/>
+                <a:ea typeface="Microsoft YaHei"/>
+                <a:cs typeface="Microsoft YaHei"/>
+              </a:rPr>
+              <a:t>__</a:t>
+            </a:r>
+          </a:p>
+        </p:txBody>
+      </p:sp>
+      <p:sp>
+        <p:nvSpPr>
+          <p:cNvPr id="46" name="TextBox 45"/>
+          <p:cNvSpPr txBox="1"/>
+          <p:nvPr/>
+        </p:nvSpPr>
+        <p:spPr>
+          <a:xfrm>
+            <a:off x="5687568" y="3657600"/>
+            <a:ext cx="329184" cy="228600"/>
+          </a:xfrm>
+          <a:prstGeom prst="rect">
+            <a:avLst/>
+          </a:prstGeom>
+          <a:noFill/>
+        </p:spPr>
+        <p:txBody>
+          <a:bodyPr wrap="square" anchor="ctr" lIns="0" tIns="0" rIns="0" bIns="0">
+            <a:noAutofit/>
+          </a:bodyPr>
+          <a:lstStyle/>
+          <a:p>
+            <a:pPr algn="ctr" latinLnBrk="0">
+              <a:lnSpc>
+                <a:spcPct val="100000"/>
+              </a:lnSpc>
+              <a:spcBef>
+                <a:spcPts val="0"/>
+              </a:spcBef>
+              <a:spcAft>
+                <a:spcPts val="0"/>
+              </a:spcAft>
+            </a:pPr>
+            <a:r>
+              <a:rPr sz="950" b="0">
+                <a:solidFill>
+                  <a:srgbClr val="7FA4BA"/>
+                </a:solidFill>
+                <a:latin typeface="Microsoft YaHei"/>
+                <a:ea typeface="Microsoft YaHei"/>
+                <a:cs typeface="Microsoft YaHei"/>
+              </a:rPr>
+              <a:t>—</a:t>
+            </a:r>
+          </a:p>
+        </p:txBody>
+      </p:sp>
+      <p:sp>
+        <p:nvSpPr>
+          <p:cNvPr id="47" name="TextBox 46"/>
+          <p:cNvSpPr txBox="1"/>
+          <p:nvPr/>
+        </p:nvSpPr>
+        <p:spPr>
+          <a:xfrm>
+            <a:off x="749808" y="3918204"/>
+            <a:ext cx="1783080" cy="228600"/>
+          </a:xfrm>
+          <a:prstGeom prst="rect">
+            <a:avLst/>
+          </a:prstGeom>
+          <a:noFill/>
+        </p:spPr>
+        <p:txBody>
+          <a:bodyPr wrap="square" anchor="ctr" lIns="0" tIns="0" rIns="0" bIns="0">
+            <a:noAutofit/>
+          </a:bodyPr>
+          <a:lstStyle/>
+          <a:p>
+            <a:pPr algn="l" latinLnBrk="0">
+              <a:lnSpc>
+                <a:spcPct val="100000"/>
+              </a:lnSpc>
+              <a:spcBef>
+                <a:spcPts val="0"/>
+              </a:spcBef>
+              <a:spcAft>
+                <a:spcPts val="0"/>
+              </a:spcAft>
+            </a:pPr>
+            <a:r>
+              <a:rPr sz="950" b="0">
+                <a:solidFill>
+                  <a:srgbClr val="1B4D69"/>
+                </a:solidFill>
+                <a:latin typeface="Microsoft YaHei"/>
+                <a:ea typeface="Microsoft YaHei"/>
+                <a:cs typeface="Microsoft YaHei"/>
+              </a:rPr>
+              <a:t>路由 softmax / topk</a:t>
+            </a:r>
+          </a:p>
+        </p:txBody>
+      </p:sp>
+      <p:sp>
+        <p:nvSpPr>
+          <p:cNvPr id="48" name="Rectangle 47"/>
+          <p:cNvSpPr/>
+          <p:nvPr/>
+        </p:nvSpPr>
+        <p:spPr>
+          <a:xfrm>
+            <a:off x="2606040" y="3963924"/>
+            <a:ext cx="172821" cy="137160"/>
+          </a:xfrm>
+          <a:prstGeom prst="rect">
+            <a:avLst/>
+          </a:prstGeom>
+          <a:solidFill>
+            <a:srgbClr val="CFE3F0"/>
+          </a:solidFill>
+          <a:ln>
+            <a:noFill/>
+          </a:ln>
+        </p:spPr>
+        <p:txBody>
+          <a:bodyPr rtlCol="0" anchor="ctr"/>
+          <a:lstStyle/>
+          <a:p>
+            <a:pPr algn="ctr"/>
+          </a:p>
+        </p:txBody>
+      </p:sp>
+      <p:sp>
+        <p:nvSpPr>
+          <p:cNvPr id="49" name="Rectangle 48"/>
+          <p:cNvSpPr/>
+          <p:nvPr/>
+        </p:nvSpPr>
+        <p:spPr>
+          <a:xfrm>
+            <a:off x="2606040" y="3963924"/>
+            <a:ext cx="57607" cy="137160"/>
+          </a:xfrm>
+          <a:prstGeom prst="rect">
+            <a:avLst/>
+          </a:prstGeom>
+          <a:solidFill>
+            <a:srgbClr val="7FA4BA"/>
+          </a:solidFill>
+          <a:ln>
+            <a:noFill/>
+          </a:ln>
+        </p:spPr>
+        <p:txBody>
+          <a:bodyPr rtlCol="0" anchor="ctr"/>
+          <a:lstStyle/>
+          <a:p>
+            <a:pPr algn="ctr"/>
+          </a:p>
+        </p:txBody>
+      </p:sp>
+      <p:sp>
+        <p:nvSpPr>
+          <p:cNvPr id="50" name="TextBox 49"/>
+          <p:cNvSpPr txBox="1"/>
+          <p:nvPr/>
+        </p:nvSpPr>
+        <p:spPr>
+          <a:xfrm>
+            <a:off x="4572000" y="3918204"/>
+            <a:ext cx="438912" cy="228600"/>
+          </a:xfrm>
+          <a:prstGeom prst="rect">
+            <a:avLst/>
+          </a:prstGeom>
+          <a:noFill/>
+        </p:spPr>
+        <p:txBody>
+          <a:bodyPr wrap="square" anchor="ctr" lIns="0" tIns="0" rIns="0" bIns="0">
+            <a:noAutofit/>
+          </a:bodyPr>
+          <a:lstStyle/>
+          <a:p>
+            <a:pPr algn="r" latinLnBrk="0">
+              <a:lnSpc>
+                <a:spcPct val="100000"/>
+              </a:lnSpc>
+              <a:spcBef>
+                <a:spcPts val="0"/>
+              </a:spcBef>
+              <a:spcAft>
+                <a:spcPts val="0"/>
+              </a:spcAft>
+            </a:pPr>
+            <a:r>
+              <a:rPr sz="950" b="0">
+                <a:solidFill>
+                  <a:srgbClr val="7FA4BA"/>
+                </a:solidFill>
+                <a:latin typeface="Consolas"/>
+                <a:ea typeface="Microsoft YaHei"/>
+                <a:cs typeface="Microsoft YaHei"/>
+              </a:rPr>
+              <a:t>__%</a:t>
+            </a:r>
+          </a:p>
+        </p:txBody>
+      </p:sp>
+      <p:sp>
+        <p:nvSpPr>
+          <p:cNvPr id="51" name="TextBox 50"/>
+          <p:cNvSpPr txBox="1"/>
+          <p:nvPr/>
+        </p:nvSpPr>
+        <p:spPr>
+          <a:xfrm>
+            <a:off x="5065776" y="3918204"/>
+            <a:ext cx="585216" cy="228600"/>
+          </a:xfrm>
+          <a:prstGeom prst="rect">
+            <a:avLst/>
+          </a:prstGeom>
+          <a:noFill/>
+        </p:spPr>
+        <p:txBody>
+          <a:bodyPr wrap="square" anchor="ctr" lIns="0" tIns="0" rIns="0" bIns="0">
+            <a:noAutofit/>
+          </a:bodyPr>
+          <a:lstStyle/>
+          <a:p>
+            <a:pPr algn="r" latinLnBrk="0">
+              <a:lnSpc>
+                <a:spcPct val="100000"/>
+              </a:lnSpc>
+              <a:spcBef>
+                <a:spcPts val="0"/>
+              </a:spcBef>
+              <a:spcAft>
+                <a:spcPts val="0"/>
+              </a:spcAft>
+            </a:pPr>
+            <a:r>
+              <a:rPr sz="950" b="0">
+                <a:solidFill>
+                  <a:srgbClr val="7FA4BA"/>
+                </a:solidFill>
+                <a:latin typeface="Consolas"/>
+                <a:ea typeface="Microsoft YaHei"/>
+                <a:cs typeface="Microsoft YaHei"/>
+              </a:rPr>
+              <a:t>__</a:t>
+            </a:r>
+          </a:p>
+        </p:txBody>
+      </p:sp>
+      <p:sp>
+        <p:nvSpPr>
+          <p:cNvPr id="52" name="TextBox 51"/>
+          <p:cNvSpPr txBox="1"/>
+          <p:nvPr/>
+        </p:nvSpPr>
+        <p:spPr>
+          <a:xfrm>
+            <a:off x="5687568" y="3918204"/>
+            <a:ext cx="329184" cy="228600"/>
+          </a:xfrm>
+          <a:prstGeom prst="rect">
+            <a:avLst/>
+          </a:prstGeom>
+          <a:noFill/>
+        </p:spPr>
+        <p:txBody>
+          <a:bodyPr wrap="square" anchor="ctr" lIns="0" tIns="0" rIns="0" bIns="0">
+            <a:noAutofit/>
+          </a:bodyPr>
+          <a:lstStyle/>
+          <a:p>
+            <a:pPr algn="ctr" latinLnBrk="0">
+              <a:lnSpc>
+                <a:spcPct val="100000"/>
+              </a:lnSpc>
+              <a:spcBef>
+                <a:spcPts val="0"/>
+              </a:spcBef>
+              <a:spcAft>
+                <a:spcPts val="0"/>
+              </a:spcAft>
+            </a:pPr>
+            <a:r>
+              <a:rPr sz="950" b="1">
+                <a:solidFill>
+                  <a:srgbClr val="1B4D69"/>
+                </a:solidFill>
+                <a:latin typeface="Microsoft YaHei"/>
+                <a:ea typeface="Microsoft YaHei"/>
+                <a:cs typeface="Microsoft YaHei"/>
+              </a:rPr>
+              <a:t>5</a:t>
+            </a:r>
+          </a:p>
+        </p:txBody>
+      </p:sp>
+      <p:sp>
+        <p:nvSpPr>
+          <p:cNvPr id="53" name="TextBox 52"/>
+          <p:cNvSpPr txBox="1"/>
+          <p:nvPr/>
+        </p:nvSpPr>
+        <p:spPr>
+          <a:xfrm>
+            <a:off x="749808" y="4178808"/>
+            <a:ext cx="1783080" cy="228600"/>
+          </a:xfrm>
+          <a:prstGeom prst="rect">
+            <a:avLst/>
+          </a:prstGeom>
+          <a:noFill/>
+        </p:spPr>
+        <p:txBody>
+          <a:bodyPr wrap="square" anchor="ctr" lIns="0" tIns="0" rIns="0" bIns="0">
+            <a:noAutofit/>
+          </a:bodyPr>
+          <a:lstStyle/>
+          <a:p>
+            <a:pPr algn="l" latinLnBrk="0">
+              <a:lnSpc>
+                <a:spcPct val="100000"/>
+              </a:lnSpc>
+              <a:spcBef>
+                <a:spcPts val="0"/>
+              </a:spcBef>
+              <a:spcAft>
+                <a:spcPts val="0"/>
+              </a:spcAft>
+            </a:pPr>
+            <a:r>
+              <a:rPr sz="950" b="0">
+                <a:solidFill>
+                  <a:srgbClr val="1B4D69"/>
+                </a:solidFill>
+                <a:latin typeface="Microsoft YaHei"/>
+                <a:ea typeface="Microsoft YaHei"/>
+                <a:cs typeface="Microsoft YaHei"/>
+              </a:rPr>
+              <a:t>Norm 与其他小核</a:t>
+            </a:r>
+          </a:p>
+        </p:txBody>
+      </p:sp>
+      <p:sp>
+        <p:nvSpPr>
+          <p:cNvPr id="54" name="Rectangle 53"/>
+          <p:cNvSpPr/>
+          <p:nvPr/>
+        </p:nvSpPr>
+        <p:spPr>
+          <a:xfrm>
+            <a:off x="2606040" y="4224528"/>
+            <a:ext cx="422452" cy="137160"/>
+          </a:xfrm>
+          <a:prstGeom prst="rect">
+            <a:avLst/>
+          </a:prstGeom>
+          <a:solidFill>
+            <a:srgbClr val="CFE3F0"/>
+          </a:solidFill>
+          <a:ln>
+            <a:noFill/>
+          </a:ln>
+        </p:spPr>
+        <p:txBody>
+          <a:bodyPr rtlCol="0" anchor="ctr"/>
+          <a:lstStyle/>
+          <a:p>
+            <a:pPr algn="ctr"/>
+          </a:p>
+        </p:txBody>
+      </p:sp>
+      <p:sp>
+        <p:nvSpPr>
+          <p:cNvPr id="55" name="Rectangle 54"/>
+          <p:cNvSpPr/>
+          <p:nvPr/>
+        </p:nvSpPr>
+        <p:spPr>
+          <a:xfrm>
+            <a:off x="2606040" y="4224528"/>
+            <a:ext cx="134416" cy="137160"/>
+          </a:xfrm>
+          <a:prstGeom prst="rect">
+            <a:avLst/>
+          </a:prstGeom>
+          <a:solidFill>
+            <a:srgbClr val="7FA4BA"/>
+          </a:solidFill>
+          <a:ln>
+            <a:noFill/>
+          </a:ln>
+        </p:spPr>
+        <p:txBody>
+          <a:bodyPr rtlCol="0" anchor="ctr"/>
+          <a:lstStyle/>
+          <a:p>
+            <a:pPr algn="ctr"/>
+          </a:p>
+        </p:txBody>
+      </p:sp>
+      <p:sp>
+        <p:nvSpPr>
+          <p:cNvPr id="56" name="TextBox 55"/>
+          <p:cNvSpPr txBox="1"/>
+          <p:nvPr/>
+        </p:nvSpPr>
+        <p:spPr>
+          <a:xfrm>
+            <a:off x="4572000" y="4178808"/>
+            <a:ext cx="438912" cy="228600"/>
+          </a:xfrm>
+          <a:prstGeom prst="rect">
+            <a:avLst/>
+          </a:prstGeom>
+          <a:noFill/>
+        </p:spPr>
+        <p:txBody>
+          <a:bodyPr wrap="square" anchor="ctr" lIns="0" tIns="0" rIns="0" bIns="0">
+            <a:noAutofit/>
+          </a:bodyPr>
+          <a:lstStyle/>
+          <a:p>
+            <a:pPr algn="r" latinLnBrk="0">
+              <a:lnSpc>
+                <a:spcPct val="100000"/>
+              </a:lnSpc>
+              <a:spcBef>
+                <a:spcPts val="0"/>
+              </a:spcBef>
+              <a:spcAft>
+                <a:spcPts val="0"/>
+              </a:spcAft>
+            </a:pPr>
+            <a:r>
+              <a:rPr sz="950" b="0">
+                <a:solidFill>
+                  <a:srgbClr val="7FA4BA"/>
+                </a:solidFill>
+                <a:latin typeface="Consolas"/>
+                <a:ea typeface="Microsoft YaHei"/>
+                <a:cs typeface="Microsoft YaHei"/>
+              </a:rPr>
+              <a:t>__%</a:t>
+            </a:r>
+          </a:p>
+        </p:txBody>
+      </p:sp>
+      <p:sp>
+        <p:nvSpPr>
+          <p:cNvPr id="57" name="TextBox 56"/>
+          <p:cNvSpPr txBox="1"/>
+          <p:nvPr/>
+        </p:nvSpPr>
+        <p:spPr>
+          <a:xfrm>
+            <a:off x="5065776" y="4178808"/>
+            <a:ext cx="585216" cy="228600"/>
+          </a:xfrm>
+          <a:prstGeom prst="rect">
+            <a:avLst/>
+          </a:prstGeom>
+          <a:noFill/>
+        </p:spPr>
+        <p:txBody>
+          <a:bodyPr wrap="square" anchor="ctr" lIns="0" tIns="0" rIns="0" bIns="0">
+            <a:noAutofit/>
+          </a:bodyPr>
+          <a:lstStyle/>
+          <a:p>
+            <a:pPr algn="r" latinLnBrk="0">
+              <a:lnSpc>
+                <a:spcPct val="100000"/>
+              </a:lnSpc>
+              <a:spcBef>
+                <a:spcPts val="0"/>
+              </a:spcBef>
+              <a:spcAft>
+                <a:spcPts val="0"/>
+              </a:spcAft>
+            </a:pPr>
+            <a:r>
+              <a:rPr sz="950" b="0">
+                <a:solidFill>
+                  <a:srgbClr val="7FA4BA"/>
+                </a:solidFill>
+                <a:latin typeface="Consolas"/>
+                <a:ea typeface="Microsoft YaHei"/>
+                <a:cs typeface="Microsoft YaHei"/>
+              </a:rPr>
+              <a:t>__</a:t>
+            </a:r>
+          </a:p>
+        </p:txBody>
+      </p:sp>
+      <p:sp>
+        <p:nvSpPr>
+          <p:cNvPr id="58" name="TextBox 57"/>
+          <p:cNvSpPr txBox="1"/>
+          <p:nvPr/>
+        </p:nvSpPr>
+        <p:spPr>
+          <a:xfrm>
+            <a:off x="5687568" y="4178808"/>
+            <a:ext cx="329184" cy="228600"/>
+          </a:xfrm>
+          <a:prstGeom prst="rect">
+            <a:avLst/>
+          </a:prstGeom>
+          <a:noFill/>
+        </p:spPr>
+        <p:txBody>
+          <a:bodyPr wrap="square" anchor="ctr" lIns="0" tIns="0" rIns="0" bIns="0">
+            <a:noAutofit/>
+          </a:bodyPr>
+          <a:lstStyle/>
+          <a:p>
+            <a:pPr algn="ctr" latinLnBrk="0">
+              <a:lnSpc>
+                <a:spcPct val="100000"/>
+              </a:lnSpc>
+              <a:spcBef>
+                <a:spcPts val="0"/>
+              </a:spcBef>
+              <a:spcAft>
+                <a:spcPts val="0"/>
+              </a:spcAft>
+            </a:pPr>
+            <a:r>
+              <a:rPr sz="950" b="0">
+                <a:solidFill>
+                  <a:srgbClr val="7FA4BA"/>
+                </a:solidFill>
+                <a:latin typeface="Microsoft YaHei"/>
+                <a:ea typeface="Microsoft YaHei"/>
+                <a:cs typeface="Microsoft YaHei"/>
+              </a:rPr>
+              <a:t>—</a:t>
+            </a:r>
+          </a:p>
+        </p:txBody>
+      </p:sp>
+      <p:sp>
+        <p:nvSpPr>
+          <p:cNvPr id="59" name="TextBox 58"/>
+          <p:cNvSpPr txBox="1"/>
+          <p:nvPr/>
+        </p:nvSpPr>
+        <p:spPr>
+          <a:xfrm>
+            <a:off x="749808" y="4439412"/>
+            <a:ext cx="1783080" cy="228600"/>
+          </a:xfrm>
+          <a:prstGeom prst="rect">
+            <a:avLst/>
+          </a:prstGeom>
+          <a:noFill/>
+        </p:spPr>
+        <p:txBody>
+          <a:bodyPr wrap="square" anchor="ctr" lIns="0" tIns="0" rIns="0" bIns="0">
+            <a:noAutofit/>
+          </a:bodyPr>
+          <a:lstStyle/>
+          <a:p>
+            <a:pPr algn="l" latinLnBrk="0">
+              <a:lnSpc>
+                <a:spcPct val="100000"/>
+              </a:lnSpc>
+              <a:spcBef>
+                <a:spcPts val="0"/>
+              </a:spcBef>
+              <a:spcAft>
+                <a:spcPts val="0"/>
+              </a:spcAft>
+            </a:pPr>
+            <a:r>
+              <a:rPr sz="950" b="0">
+                <a:solidFill>
+                  <a:srgbClr val="1B4D69"/>
+                </a:solidFill>
+                <a:latin typeface="Microsoft YaHei"/>
+                <a:ea typeface="Microsoft YaHei"/>
+                <a:cs typeface="Microsoft YaHei"/>
+              </a:rPr>
+              <a:t>device 空闲（host / 调度）</a:t>
+            </a:r>
+          </a:p>
+        </p:txBody>
+      </p:sp>
+      <p:sp>
+        <p:nvSpPr>
+          <p:cNvPr id="60" name="Rectangle 59"/>
+          <p:cNvSpPr/>
+          <p:nvPr/>
+        </p:nvSpPr>
+        <p:spPr>
+          <a:xfrm>
+            <a:off x="2606040" y="4485132"/>
+            <a:ext cx="1190548" cy="137160"/>
+          </a:xfrm>
+          <a:prstGeom prst="rect">
+            <a:avLst/>
+          </a:prstGeom>
+          <a:solidFill>
+            <a:srgbClr val="CFE3F0"/>
+          </a:solidFill>
+          <a:ln>
+            <a:noFill/>
+          </a:ln>
+        </p:spPr>
+        <p:txBody>
+          <a:bodyPr rtlCol="0" anchor="ctr"/>
+          <a:lstStyle/>
+          <a:p>
+            <a:pPr algn="ctr"/>
+          </a:p>
+        </p:txBody>
+      </p:sp>
+      <p:sp>
+        <p:nvSpPr>
+          <p:cNvPr id="61" name="TextBox 60"/>
+          <p:cNvSpPr txBox="1"/>
+          <p:nvPr/>
+        </p:nvSpPr>
+        <p:spPr>
+          <a:xfrm>
+            <a:off x="4572000" y="4439412"/>
+            <a:ext cx="438912" cy="228600"/>
+          </a:xfrm>
+          <a:prstGeom prst="rect">
+            <a:avLst/>
+          </a:prstGeom>
+          <a:noFill/>
+        </p:spPr>
+        <p:txBody>
+          <a:bodyPr wrap="square" anchor="ctr" lIns="0" tIns="0" rIns="0" bIns="0">
+            <a:noAutofit/>
+          </a:bodyPr>
+          <a:lstStyle/>
+          <a:p>
+            <a:pPr algn="r" latinLnBrk="0">
+              <a:lnSpc>
+                <a:spcPct val="100000"/>
+              </a:lnSpc>
+              <a:spcBef>
+                <a:spcPts val="0"/>
+              </a:spcBef>
+              <a:spcAft>
+                <a:spcPts val="0"/>
+              </a:spcAft>
+            </a:pPr>
+            <a:r>
+              <a:rPr sz="950" b="0">
+                <a:solidFill>
+                  <a:srgbClr val="7FA4BA"/>
+                </a:solidFill>
+                <a:latin typeface="Consolas"/>
+                <a:ea typeface="Microsoft YaHei"/>
+                <a:cs typeface="Microsoft YaHei"/>
+              </a:rPr>
+              <a:t>__%</a:t>
+            </a:r>
+          </a:p>
+        </p:txBody>
+      </p:sp>
+      <p:sp>
+        <p:nvSpPr>
+          <p:cNvPr id="62" name="TextBox 61"/>
+          <p:cNvSpPr txBox="1"/>
+          <p:nvPr/>
+        </p:nvSpPr>
+        <p:spPr>
+          <a:xfrm>
+            <a:off x="5065776" y="4439412"/>
+            <a:ext cx="585216" cy="228600"/>
+          </a:xfrm>
+          <a:prstGeom prst="rect">
+            <a:avLst/>
+          </a:prstGeom>
+          <a:noFill/>
+        </p:spPr>
+        <p:txBody>
+          <a:bodyPr wrap="square" anchor="ctr" lIns="0" tIns="0" rIns="0" bIns="0">
+            <a:noAutofit/>
+          </a:bodyPr>
+          <a:lstStyle/>
+          <a:p>
+            <a:pPr algn="r" latinLnBrk="0">
+              <a:lnSpc>
+                <a:spcPct val="100000"/>
+              </a:lnSpc>
+              <a:spcBef>
+                <a:spcPts val="0"/>
+              </a:spcBef>
+              <a:spcAft>
+                <a:spcPts val="0"/>
+              </a:spcAft>
+            </a:pPr>
+            <a:r>
+              <a:rPr sz="950" b="0">
+                <a:solidFill>
+                  <a:srgbClr val="7FA4BA"/>
+                </a:solidFill>
+                <a:latin typeface="Consolas"/>
+                <a:ea typeface="Microsoft YaHei"/>
+                <a:cs typeface="Microsoft YaHei"/>
+              </a:rPr>
+              <a:t>—</a:t>
+            </a:r>
+          </a:p>
+        </p:txBody>
+      </p:sp>
+      <p:sp>
+        <p:nvSpPr>
+          <p:cNvPr id="63" name="TextBox 62"/>
+          <p:cNvSpPr txBox="1"/>
+          <p:nvPr/>
+        </p:nvSpPr>
+        <p:spPr>
+          <a:xfrm>
+            <a:off x="5687568" y="4439412"/>
+            <a:ext cx="329184" cy="228600"/>
+          </a:xfrm>
+          <a:prstGeom prst="rect">
+            <a:avLst/>
+          </a:prstGeom>
+          <a:noFill/>
+        </p:spPr>
+        <p:txBody>
+          <a:bodyPr wrap="square" anchor="ctr" lIns="0" tIns="0" rIns="0" bIns="0">
+            <a:noAutofit/>
+          </a:bodyPr>
+          <a:lstStyle/>
+          <a:p>
+            <a:pPr algn="ctr" latinLnBrk="0">
+              <a:lnSpc>
+                <a:spcPct val="100000"/>
+              </a:lnSpc>
+              <a:spcBef>
+                <a:spcPts val="0"/>
+              </a:spcBef>
+              <a:spcAft>
+                <a:spcPts val="0"/>
+              </a:spcAft>
+            </a:pPr>
+            <a:r>
+              <a:rPr sz="950" b="0">
+                <a:solidFill>
+                  <a:srgbClr val="7FA4BA"/>
+                </a:solidFill>
+                <a:latin typeface="Microsoft YaHei"/>
+                <a:ea typeface="Microsoft YaHei"/>
+                <a:cs typeface="Microsoft YaHei"/>
+              </a:rPr>
+              <a:t>—</a:t>
+            </a:r>
+          </a:p>
+        </p:txBody>
+      </p:sp>
+      <p:sp>
+        <p:nvSpPr>
+          <p:cNvPr id="64" name="TextBox 63"/>
+          <p:cNvSpPr txBox="1"/>
+          <p:nvPr/>
+        </p:nvSpPr>
+        <p:spPr>
+          <a:xfrm>
+            <a:off x="749808" y="4700016"/>
+            <a:ext cx="4114800" cy="219456"/>
+          </a:xfrm>
+          <a:prstGeom prst="rect">
+            <a:avLst/>
+          </a:prstGeom>
+          <a:noFill/>
+        </p:spPr>
+        <p:txBody>
+          <a:bodyPr wrap="square" anchor="ctr" lIns="0" tIns="0" rIns="0" bIns="0">
+            <a:noAutofit/>
+          </a:bodyPr>
+          <a:lstStyle/>
+          <a:p>
+            <a:pPr algn="l" latinLnBrk="0">
+              <a:lnSpc>
+                <a:spcPct val="100000"/>
+              </a:lnSpc>
+              <a:spcBef>
+                <a:spcPts val="0"/>
+              </a:spcBef>
+              <a:spcAft>
+                <a:spcPts val="0"/>
+              </a:spcAft>
+            </a:pPr>
+            <a:r>
+              <a:rPr sz="900" b="1">
+                <a:solidFill>
+                  <a:srgbClr val="1B4D69"/>
+                </a:solidFill>
+                <a:latin typeface="Microsoft YaHei"/>
+                <a:ea typeface="Microsoft YaHei"/>
+                <a:cs typeface="Microsoft YaHei"/>
+              </a:rPr>
+              <a:t>整步　</a:t>
+            </a:r>
+            <a:r>
               <a:rPr sz="900" b="0">
                 <a:solidFill>
                   <a:srgbClr val="40708B"/>
@@ -3835,21 +5783,97 @@
                 <a:ea typeface="Microsoft YaHei"/>
                 <a:cs typeface="Microsoft YaHei"/>
               </a:rPr>
-              <a:t>基线峰值在 c128，1K/1K</a:t>
-            </a:r>
-          </a:p>
-        </p:txBody>
-      </p:sp>
-      <p:sp>
-        <p:nvSpPr>
-          <p:cNvPr id="20" name="Rectangle 19"/>
+              <a:t>Σ 上界 __ ms ÷ 实测 __ ms = achieved __</a:t>
+            </a:r>
+          </a:p>
+        </p:txBody>
+      </p:sp>
+      <p:sp>
+        <p:nvSpPr>
+          <p:cNvPr id="65" name="Rectangle 64"/>
           <p:cNvSpPr/>
           <p:nvPr/>
         </p:nvSpPr>
         <p:spPr>
           <a:xfrm>
-            <a:off x="3474720" y="1975104"/>
-            <a:ext cx="8168335" cy="3017520"/>
+            <a:off x="4937760" y="4681728"/>
+            <a:ext cx="1078992" cy="219456"/>
+          </a:xfrm>
+          <a:prstGeom prst="rect">
+            <a:avLst/>
+          </a:prstGeom>
+          <a:solidFill>
+            <a:srgbClr val="FBD9E9"/>
+          </a:solidFill>
+          <a:ln>
+            <a:noFill/>
+          </a:ln>
+        </p:spPr>
+        <p:txBody>
+          <a:bodyPr rtlCol="0" anchor="ctr"/>
+          <a:lstStyle/>
+          <a:p>
+            <a:pPr algn="ctr"/>
+          </a:p>
+        </p:txBody>
+      </p:sp>
+      <p:sp>
+        <p:nvSpPr>
+          <p:cNvPr id="66" name="TextBox 65"/>
+          <p:cNvSpPr txBox="1"/>
+          <p:nvPr/>
+        </p:nvSpPr>
+        <p:spPr>
+          <a:xfrm>
+            <a:off x="4937760" y="4681728"/>
+            <a:ext cx="1078992" cy="219456"/>
+          </a:xfrm>
+          <a:prstGeom prst="rect">
+            <a:avLst/>
+          </a:prstGeom>
+          <a:noFill/>
+        </p:spPr>
+        <p:txBody>
+          <a:bodyPr wrap="square" anchor="ctr" lIns="0" tIns="0" rIns="0" bIns="0">
+            <a:noAutofit/>
+          </a:bodyPr>
+          <a:lstStyle/>
+          <a:p>
+            <a:pPr algn="ctr" latinLnBrk="0">
+              <a:lnSpc>
+                <a:spcPct val="100000"/>
+              </a:lnSpc>
+              <a:spcBef>
+                <a:spcPts val="0"/>
+              </a:spcBef>
+              <a:spcAft>
+                <a:spcPts val="0"/>
+              </a:spcAft>
+            </a:pPr>
+            <a:r>
+              <a:rPr sz="850" b="1">
+                <a:solidFill>
+                  <a:srgbClr val="D4147A"/>
+                </a:solidFill>
+                <a:latin typeface="Microsoft YaHei"/>
+                <a:ea typeface="Microsoft YaHei"/>
+                <a:cs typeface="Microsoft YaHei"/>
+              </a:rPr>
+              <a:t>示意　非数据</a:t>
+            </a:r>
+          </a:p>
+        </p:txBody>
+      </p:sp>
+      <p:sp>
+        <p:nvSpPr>
+          <p:cNvPr id="67" name="Rectangle 66"/>
+          <p:cNvSpPr/>
+          <p:nvPr/>
+        </p:nvSpPr>
+        <p:spPr>
+          <a:xfrm>
+            <a:off x="6400800" y="1975104"/>
+            <a:ext cx="5242255" cy="3017520"/>
           </a:xfrm>
           <a:prstGeom prst="rect">
             <a:avLst/>
@@ -3871,14 +5895,14 @@
       </p:sp>
       <p:sp>
         <p:nvSpPr>
-          <p:cNvPr id="21" name="TextBox 20"/>
-          <p:cNvSpPr txBox="1"/>
-          <p:nvPr/>
-        </p:nvSpPr>
-        <p:spPr>
-          <a:xfrm>
-            <a:off x="3675888" y="2048256"/>
-            <a:ext cx="7765999" cy="256032"/>
+          <p:cNvPr id="68" name="TextBox 67"/>
+          <p:cNvSpPr txBox="1"/>
+          <p:nvPr/>
+        </p:nvSpPr>
+        <p:spPr>
+          <a:xfrm>
+            <a:off x="6601968" y="2048256"/>
+            <a:ext cx="4839919" cy="256032"/>
           </a:xfrm>
           <a:prstGeom prst="rect">
             <a:avLst/>
@@ -3929,223 +5953,14 @@
       </p:sp>
       <p:sp>
         <p:nvSpPr>
-          <p:cNvPr id="22" name="TextBox 21"/>
-          <p:cNvSpPr txBox="1"/>
-          <p:nvPr/>
-        </p:nvSpPr>
-        <p:spPr>
-          <a:xfrm>
-            <a:off x="3675888" y="2340864"/>
-            <a:ext cx="2651760" cy="219456"/>
-          </a:xfrm>
-          <a:prstGeom prst="rect">
-            <a:avLst/>
-          </a:prstGeom>
-          <a:noFill/>
-        </p:spPr>
-        <p:txBody>
-          <a:bodyPr wrap="square" anchor="ctr" lIns="0" tIns="0" rIns="0" bIns="0">
-            <a:noAutofit/>
-          </a:bodyPr>
-          <a:lstStyle/>
-          <a:p>
-            <a:pPr algn="l" latinLnBrk="0">
-              <a:lnSpc>
-                <a:spcPct val="100000"/>
-              </a:lnSpc>
-              <a:spcBef>
-                <a:spcPts val="0"/>
-              </a:spcBef>
-              <a:spcAft>
-                <a:spcPts val="0"/>
-              </a:spcAft>
-            </a:pPr>
-            <a:r>
-              <a:rPr sz="900" b="0">
-                <a:solidFill>
-                  <a:srgbClr val="7FA4BA"/>
-                </a:solidFill>
-                <a:latin typeface="Microsoft YaHei"/>
-                <a:ea typeface="Microsoft YaHei"/>
-                <a:cs typeface="Microsoft YaHei"/>
-              </a:rPr>
-              <a:t>改动</a:t>
-            </a:r>
-          </a:p>
-        </p:txBody>
-      </p:sp>
-      <p:sp>
-        <p:nvSpPr>
-          <p:cNvPr id="23" name="TextBox 22"/>
-          <p:cNvSpPr txBox="1"/>
-          <p:nvPr/>
-        </p:nvSpPr>
-        <p:spPr>
-          <a:xfrm>
-            <a:off x="6419088" y="2340864"/>
-            <a:ext cx="2002536" cy="219456"/>
-          </a:xfrm>
-          <a:prstGeom prst="rect">
-            <a:avLst/>
-          </a:prstGeom>
-          <a:noFill/>
-        </p:spPr>
-        <p:txBody>
-          <a:bodyPr wrap="square" anchor="ctr" lIns="0" tIns="0" rIns="0" bIns="0">
-            <a:noAutofit/>
-          </a:bodyPr>
-          <a:lstStyle/>
-          <a:p>
-            <a:pPr algn="l" latinLnBrk="0">
-              <a:lnSpc>
-                <a:spcPct val="100000"/>
-              </a:lnSpc>
-              <a:spcBef>
-                <a:spcPts val="0"/>
-              </a:spcBef>
-              <a:spcAft>
-                <a:spcPts val="0"/>
-              </a:spcAft>
-            </a:pPr>
-            <a:r>
-              <a:rPr sz="900" b="0">
-                <a:solidFill>
-                  <a:srgbClr val="7FA4BA"/>
-                </a:solidFill>
-                <a:latin typeface="Microsoft YaHei"/>
-                <a:ea typeface="Microsoft YaHei"/>
-                <a:cs typeface="Microsoft YaHei"/>
-              </a:rPr>
-              <a:t>C 筛选</a:t>
-            </a:r>
-          </a:p>
-        </p:txBody>
-      </p:sp>
-      <p:sp>
-        <p:nvSpPr>
-          <p:cNvPr id="24" name="TextBox 23"/>
-          <p:cNvSpPr txBox="1"/>
-          <p:nvPr/>
-        </p:nvSpPr>
-        <p:spPr>
-          <a:xfrm>
-            <a:off x="8513064" y="2340864"/>
-            <a:ext cx="1280160" cy="219456"/>
-          </a:xfrm>
-          <a:prstGeom prst="rect">
-            <a:avLst/>
-          </a:prstGeom>
-          <a:noFill/>
-        </p:spPr>
-        <p:txBody>
-          <a:bodyPr wrap="square" anchor="ctr" lIns="0" tIns="0" rIns="0" bIns="0">
-            <a:noAutofit/>
-          </a:bodyPr>
-          <a:lstStyle/>
-          <a:p>
-            <a:pPr algn="l" latinLnBrk="0">
-              <a:lnSpc>
-                <a:spcPct val="100000"/>
-              </a:lnSpc>
-              <a:spcBef>
-                <a:spcPts val="0"/>
-              </a:spcBef>
-              <a:spcAft>
-                <a:spcPts val="0"/>
-              </a:spcAft>
-            </a:pPr>
-            <a:r>
-              <a:rPr sz="900" b="0">
-                <a:solidFill>
-                  <a:srgbClr val="7FA4BA"/>
-                </a:solidFill>
-                <a:latin typeface="Microsoft YaHei"/>
-                <a:ea typeface="Microsoft YaHei"/>
-                <a:cs typeface="Microsoft YaHei"/>
-              </a:rPr>
-              <a:t>D 复验</a:t>
-            </a:r>
-          </a:p>
-        </p:txBody>
-      </p:sp>
-      <p:sp>
-        <p:nvSpPr>
-          <p:cNvPr id="25" name="TextBox 24"/>
-          <p:cNvSpPr txBox="1"/>
-          <p:nvPr/>
-        </p:nvSpPr>
-        <p:spPr>
-          <a:xfrm>
-            <a:off x="9884664" y="2340864"/>
-            <a:ext cx="1554480" cy="219456"/>
-          </a:xfrm>
-          <a:prstGeom prst="rect">
-            <a:avLst/>
-          </a:prstGeom>
-          <a:noFill/>
-        </p:spPr>
-        <p:txBody>
-          <a:bodyPr wrap="square" anchor="ctr" lIns="0" tIns="0" rIns="0" bIns="0">
-            <a:noAutofit/>
-          </a:bodyPr>
-          <a:lstStyle/>
-          <a:p>
-            <a:pPr algn="l" latinLnBrk="0">
-              <a:lnSpc>
-                <a:spcPct val="100000"/>
-              </a:lnSpc>
-              <a:spcBef>
-                <a:spcPts val="0"/>
-              </a:spcBef>
-              <a:spcAft>
-                <a:spcPts val="0"/>
-              </a:spcAft>
-            </a:pPr>
-            <a:r>
-              <a:rPr sz="900" b="0">
-                <a:solidFill>
-                  <a:srgbClr val="7FA4BA"/>
-                </a:solidFill>
-                <a:latin typeface="Microsoft YaHei"/>
-                <a:ea typeface="Microsoft YaHei"/>
-                <a:cs typeface="Microsoft YaHei"/>
-              </a:rPr>
-              <a:t>结论</a:t>
-            </a:r>
-          </a:p>
-        </p:txBody>
-      </p:sp>
-      <p:cxnSp>
-        <p:nvCxnSpPr>
-          <p:cNvPr id="26" name="Connector 25"/>
-          <p:cNvCxnSpPr/>
-          <p:nvPr/>
-        </p:nvCxnSpPr>
-        <p:spPr>
-          <a:xfrm>
-            <a:off x="3675888" y="2578608"/>
-            <a:ext cx="7765999" cy="0"/>
-          </a:xfrm>
-          <a:prstGeom prst="line">
-            <a:avLst/>
-          </a:prstGeom>
-          <a:ln w="9525">
-            <a:solidFill>
-              <a:srgbClr val="CFE3F0"/>
-            </a:solidFill>
-          </a:ln>
-        </p:spPr>
-      </p:cxnSp>
-      <p:sp>
-        <p:nvSpPr>
-          <p:cNvPr id="27" name="Rectangle 26"/>
+          <p:cNvPr id="69" name="Rectangle 68"/>
           <p:cNvSpPr/>
           <p:nvPr/>
         </p:nvSpPr>
         <p:spPr>
           <a:xfrm>
-            <a:off x="3602736" y="2633472"/>
-            <a:ext cx="7912303" cy="566928"/>
+            <a:off x="6528816" y="2395728"/>
+            <a:ext cx="4986223" cy="475488"/>
           </a:xfrm>
           <a:prstGeom prst="rect">
             <a:avLst/>
@@ -4167,14 +5982,14 @@
       </p:sp>
       <p:sp>
         <p:nvSpPr>
-          <p:cNvPr id="28" name="TextBox 27"/>
-          <p:cNvSpPr txBox="1"/>
-          <p:nvPr/>
-        </p:nvSpPr>
-        <p:spPr>
-          <a:xfrm>
-            <a:off x="3675888" y="2633472"/>
-            <a:ext cx="2651760" cy="566928"/>
+          <p:cNvPr id="70" name="TextBox 69"/>
+          <p:cNvSpPr txBox="1"/>
+          <p:nvPr/>
+        </p:nvSpPr>
+        <p:spPr>
+          <a:xfrm>
+            <a:off x="6601968" y="2423160"/>
+            <a:ext cx="274320" cy="219456"/>
           </a:xfrm>
           <a:prstGeom prst="rect">
             <a:avLst/>
@@ -4199,7 +6014,54 @@
               </a:spcAft>
             </a:pPr>
             <a:r>
-              <a:rPr sz="950" b="0">
+              <a:rPr sz="1000" b="1">
+                <a:solidFill>
+                  <a:srgbClr val="0F62CE"/>
+                </a:solidFill>
+                <a:latin typeface="Arial"/>
+                <a:ea typeface="Microsoft YaHei"/>
+                <a:cs typeface="Microsoft YaHei"/>
+              </a:rPr>
+              <a:t>1</a:t>
+            </a:r>
+          </a:p>
+        </p:txBody>
+      </p:sp>
+      <p:sp>
+        <p:nvSpPr>
+          <p:cNvPr id="71" name="TextBox 70"/>
+          <p:cNvSpPr txBox="1"/>
+          <p:nvPr/>
+        </p:nvSpPr>
+        <p:spPr>
+          <a:xfrm>
+            <a:off x="6912864" y="2423160"/>
+            <a:ext cx="3047695" cy="219456"/>
+          </a:xfrm>
+          <a:prstGeom prst="rect">
+            <a:avLst/>
+          </a:prstGeom>
+          <a:noFill/>
+        </p:spPr>
+        <p:txBody>
+          <a:bodyPr wrap="square" anchor="ctr" lIns="0" tIns="0" rIns="0" bIns="0">
+            <a:noAutofit/>
+          </a:bodyPr>
+          <a:lstStyle/>
+          <a:p>
+            <a:pPr algn="l" latinLnBrk="0">
+              <a:lnSpc>
+                <a:spcPct val="100000"/>
+              </a:lnSpc>
+              <a:spcBef>
+                <a:spcPts val="0"/>
+              </a:spcBef>
+              <a:spcAft>
+                <a:spcPts val="0"/>
+              </a:spcAft>
+            </a:pPr>
+            <a:r>
+              <a:rPr sz="950" b="1">
                 <a:solidFill>
                   <a:srgbClr val="0A2B45"/>
                 </a:solidFill>
@@ -4210,6 +6072,76 @@
               <a:t>融合 swiglu + 动态量化</a:t>
             </a:r>
           </a:p>
+        </p:txBody>
+      </p:sp>
+      <p:sp>
+        <p:nvSpPr>
+          <p:cNvPr id="72" name="TextBox 71"/>
+          <p:cNvSpPr txBox="1"/>
+          <p:nvPr/>
+        </p:nvSpPr>
+        <p:spPr>
+          <a:xfrm>
+            <a:off x="9960559" y="2423160"/>
+            <a:ext cx="1481328" cy="219456"/>
+          </a:xfrm>
+          <a:prstGeom prst="rect">
+            <a:avLst/>
+          </a:prstGeom>
+          <a:noFill/>
+        </p:spPr>
+        <p:txBody>
+          <a:bodyPr wrap="square" anchor="ctr" lIns="0" tIns="0" rIns="0" bIns="0">
+            <a:noAutofit/>
+          </a:bodyPr>
+          <a:lstStyle/>
+          <a:p>
+            <a:pPr algn="r" latinLnBrk="0">
+              <a:lnSpc>
+                <a:spcPct val="100000"/>
+              </a:lnSpc>
+              <a:spcBef>
+                <a:spcPts val="0"/>
+              </a:spcBef>
+              <a:spcAft>
+                <a:spcPts val="0"/>
+              </a:spcAft>
+            </a:pPr>
+            <a:r>
+              <a:rPr sz="950" b="1">
+                <a:solidFill>
+                  <a:srgbClr val="0F62CE"/>
+                </a:solidFill>
+                <a:latin typeface="Microsoft YaHei"/>
+                <a:ea typeface="Microsoft YaHei"/>
+                <a:cs typeface="Microsoft YaHei"/>
+              </a:rPr>
+              <a:t>交付，全矩阵 +22~38%</a:t>
+            </a:r>
+          </a:p>
+        </p:txBody>
+      </p:sp>
+      <p:sp>
+        <p:nvSpPr>
+          <p:cNvPr id="73" name="TextBox 72"/>
+          <p:cNvSpPr txBox="1"/>
+          <p:nvPr/>
+        </p:nvSpPr>
+        <p:spPr>
+          <a:xfrm>
+            <a:off x="6912864" y="2642616"/>
+            <a:ext cx="4529023" cy="201168"/>
+          </a:xfrm>
+          <a:prstGeom prst="rect">
+            <a:avLst/>
+          </a:prstGeom>
+          <a:noFill/>
+        </p:spPr>
+        <p:txBody>
+          <a:bodyPr wrap="square" anchor="ctr" lIns="0" tIns="0" rIns="0" bIns="0">
+            <a:noAutofit/>
+          </a:bodyPr>
+          <a:lstStyle/>
           <a:p>
             <a:pPr algn="l" latinLnBrk="0">
               <a:lnSpc>
@@ -4223,218 +6155,29 @@
               </a:spcAft>
             </a:pPr>
             <a:r>
-              <a:rPr sz="950" b="0">
-                <a:solidFill>
-                  <a:srgbClr val="0A2B45"/>
+              <a:rPr sz="900" b="0">
+                <a:solidFill>
+                  <a:srgbClr val="40708B"/>
                 </a:solidFill>
                 <a:latin typeface="Microsoft YaHei"/>
                 <a:ea typeface="Microsoft YaHei"/>
                 <a:cs typeface="Microsoft YaHei"/>
               </a:rPr>
-              <a:t>替掉散点 elementwise 3.08 ms</a:t>
-            </a:r>
-          </a:p>
-          <a:p>
-            <a:pPr algn="l" latinLnBrk="0">
-              <a:lnSpc>
-                <a:spcPct val="100000"/>
-              </a:lnSpc>
-              <a:spcBef>
-                <a:spcPts val="0"/>
-              </a:spcBef>
-              <a:spcAft>
-                <a:spcPts val="0"/>
-              </a:spcAft>
-            </a:pPr>
-            <a:r>
-              <a:rPr sz="950" b="0">
-                <a:solidFill>
-                  <a:srgbClr val="0A2B45"/>
-                </a:solidFill>
-                <a:latin typeface="Microsoft YaHei"/>
-                <a:ea typeface="Microsoft YaHei"/>
-                <a:cs typeface="Microsoft YaHei"/>
-              </a:rPr>
-              <a:t>+ per-token quant 0.43 ms</a:t>
-            </a:r>
-          </a:p>
-        </p:txBody>
-      </p:sp>
-      <p:sp>
-        <p:nvSpPr>
-          <p:cNvPr id="29" name="TextBox 28"/>
-          <p:cNvSpPr txBox="1"/>
-          <p:nvPr/>
-        </p:nvSpPr>
-        <p:spPr>
-          <a:xfrm>
-            <a:off x="6419088" y="2633472"/>
-            <a:ext cx="2002536" cy="566928"/>
-          </a:xfrm>
-          <a:prstGeom prst="rect">
-            <a:avLst/>
-          </a:prstGeom>
-          <a:noFill/>
-        </p:spPr>
-        <p:txBody>
-          <a:bodyPr wrap="square" anchor="ctr" lIns="0" tIns="0" rIns="0" bIns="0">
-            <a:noAutofit/>
-          </a:bodyPr>
-          <a:lstStyle/>
-          <a:p>
-            <a:pPr algn="l" latinLnBrk="0">
-              <a:lnSpc>
-                <a:spcPct val="100000"/>
-              </a:lnSpc>
-              <a:spcBef>
-                <a:spcPts val="0"/>
-              </a:spcBef>
-              <a:spcAft>
-                <a:spcPts val="0"/>
-              </a:spcAft>
-            </a:pPr>
-            <a:r>
-              <a:rPr sz="950" b="0">
-                <a:solidFill>
-                  <a:srgbClr val="1B4D69"/>
-                </a:solidFill>
-                <a:latin typeface="Microsoft YaHei"/>
-                <a:ea typeface="Microsoft YaHei"/>
-                <a:cs typeface="Microsoft YaHei"/>
-              </a:rPr>
-              <a:t>单核 1.75 ms/步</a:t>
-            </a:r>
-          </a:p>
-        </p:txBody>
-      </p:sp>
-      <p:sp>
-        <p:nvSpPr>
-          <p:cNvPr id="30" name="TextBox 29"/>
-          <p:cNvSpPr txBox="1"/>
-          <p:nvPr/>
-        </p:nvSpPr>
-        <p:spPr>
-          <a:xfrm>
-            <a:off x="8513064" y="2633472"/>
-            <a:ext cx="1280160" cy="566928"/>
-          </a:xfrm>
-          <a:prstGeom prst="rect">
-            <a:avLst/>
-          </a:prstGeom>
-          <a:noFill/>
-        </p:spPr>
-        <p:txBody>
-          <a:bodyPr wrap="square" anchor="ctr" lIns="0" tIns="0" rIns="0" bIns="0">
-            <a:noAutofit/>
-          </a:bodyPr>
-          <a:lstStyle/>
-          <a:p>
-            <a:pPr algn="l" latinLnBrk="0">
-              <a:lnSpc>
-                <a:spcPct val="100000"/>
-              </a:lnSpc>
-              <a:spcBef>
-                <a:spcPts val="0"/>
-              </a:spcBef>
-              <a:spcAft>
-                <a:spcPts val="0"/>
-              </a:spcAft>
-            </a:pPr>
-            <a:r>
-              <a:rPr sz="950" b="0">
-                <a:solidFill>
-                  <a:srgbClr val="1B4D69"/>
-                </a:solidFill>
-                <a:latin typeface="Microsoft YaHei"/>
-                <a:ea typeface="Microsoft YaHei"/>
-                <a:cs typeface="Microsoft YaHei"/>
-              </a:rPr>
-              <a:t>device 单步时间</a:t>
-            </a:r>
-          </a:p>
-          <a:p>
-            <a:pPr algn="l" latinLnBrk="0">
-              <a:lnSpc>
-                <a:spcPct val="100000"/>
-              </a:lnSpc>
-              <a:spcBef>
-                <a:spcPts val="0"/>
-              </a:spcBef>
-              <a:spcAft>
-                <a:spcPts val="0"/>
-              </a:spcAft>
-            </a:pPr>
-            <a:r>
-              <a:rPr sz="950" b="0">
-                <a:solidFill>
-                  <a:srgbClr val="1B4D69"/>
-                </a:solidFill>
-                <a:latin typeface="Microsoft YaHei"/>
-                <a:ea typeface="Microsoft YaHei"/>
-                <a:cs typeface="Microsoft YaHei"/>
-              </a:rPr>
-              <a:t>24.7 → 22.2 ms</a:t>
-            </a:r>
-          </a:p>
-        </p:txBody>
-      </p:sp>
-      <p:sp>
-        <p:nvSpPr>
-          <p:cNvPr id="31" name="TextBox 30"/>
-          <p:cNvSpPr txBox="1"/>
-          <p:nvPr/>
-        </p:nvSpPr>
-        <p:spPr>
-          <a:xfrm>
-            <a:off x="9884664" y="2633472"/>
-            <a:ext cx="1554480" cy="566928"/>
-          </a:xfrm>
-          <a:prstGeom prst="rect">
-            <a:avLst/>
-          </a:prstGeom>
-          <a:noFill/>
-        </p:spPr>
-        <p:txBody>
-          <a:bodyPr wrap="square" anchor="ctr" lIns="0" tIns="0" rIns="0" bIns="0">
-            <a:noAutofit/>
-          </a:bodyPr>
-          <a:lstStyle/>
-          <a:p>
-            <a:pPr algn="l" latinLnBrk="0">
-              <a:lnSpc>
-                <a:spcPct val="100000"/>
-              </a:lnSpc>
-              <a:spcBef>
-                <a:spcPts val="0"/>
-              </a:spcBef>
-              <a:spcAft>
-                <a:spcPts val="0"/>
-              </a:spcAft>
-            </a:pPr>
-            <a:r>
-              <a:rPr sz="950" b="1">
-                <a:solidFill>
-                  <a:srgbClr val="0F62CE"/>
-                </a:solidFill>
-                <a:latin typeface="Microsoft YaHei"/>
-                <a:ea typeface="Microsoft YaHei"/>
-                <a:cs typeface="Microsoft YaHei"/>
-              </a:rPr>
-              <a:t>交付，全矩阵 +22~38%</a:t>
-            </a:r>
-          </a:p>
-        </p:txBody>
-      </p:sp>
-      <p:sp>
-        <p:nvSpPr>
-          <p:cNvPr id="32" name="Rectangle 31"/>
+              <a:t>C 单核 1.75 ms/步（原 3.08 + 0.43 ms）· D device 24.7 → 22.2 ms</a:t>
+            </a:r>
+          </a:p>
+        </p:txBody>
+      </p:sp>
+      <p:sp>
+        <p:nvSpPr>
+          <p:cNvPr id="74" name="Rectangle 73"/>
           <p:cNvSpPr/>
           <p:nvPr/>
         </p:nvSpPr>
         <p:spPr>
           <a:xfrm>
-            <a:off x="3602736" y="3236976"/>
-            <a:ext cx="7912303" cy="420624"/>
+            <a:off x="6528816" y="2907792"/>
+            <a:ext cx="4986223" cy="475488"/>
           </a:xfrm>
           <a:prstGeom prst="rect">
             <a:avLst/>
@@ -4456,14 +6199,14 @@
       </p:sp>
       <p:sp>
         <p:nvSpPr>
-          <p:cNvPr id="33" name="TextBox 32"/>
-          <p:cNvSpPr txBox="1"/>
-          <p:nvPr/>
-        </p:nvSpPr>
-        <p:spPr>
-          <a:xfrm>
-            <a:off x="3675888" y="3236976"/>
-            <a:ext cx="2651760" cy="420624"/>
+          <p:cNvPr id="75" name="TextBox 74"/>
+          <p:cNvSpPr txBox="1"/>
+          <p:nvPr/>
+        </p:nvSpPr>
+        <p:spPr>
+          <a:xfrm>
+            <a:off x="6601968" y="2935224"/>
+            <a:ext cx="274320" cy="219456"/>
           </a:xfrm>
           <a:prstGeom prst="rect">
             <a:avLst/>
@@ -4488,17 +6231,322 @@
               </a:spcAft>
             </a:pPr>
             <a:r>
+              <a:rPr sz="1000" b="1">
+                <a:solidFill>
+                  <a:srgbClr val="0F62CE"/>
+                </a:solidFill>
+                <a:latin typeface="Arial"/>
+                <a:ea typeface="Microsoft YaHei"/>
+                <a:cs typeface="Microsoft YaHei"/>
+              </a:rPr>
+              <a:t>2</a:t>
+            </a:r>
+          </a:p>
+        </p:txBody>
+      </p:sp>
+      <p:sp>
+        <p:nvSpPr>
+          <p:cNvPr id="76" name="TextBox 75"/>
+          <p:cNvSpPr txBox="1"/>
+          <p:nvPr/>
+        </p:nvSpPr>
+        <p:spPr>
+          <a:xfrm>
+            <a:off x="6912864" y="2935224"/>
+            <a:ext cx="3047695" cy="219456"/>
+          </a:xfrm>
+          <a:prstGeom prst="rect">
+            <a:avLst/>
+          </a:prstGeom>
+          <a:noFill/>
+        </p:spPr>
+        <p:txBody>
+          <a:bodyPr wrap="square" anchor="ctr" lIns="0" tIns="0" rIns="0" bIns="0">
+            <a:noAutofit/>
+          </a:bodyPr>
+          <a:lstStyle/>
+          <a:p>
+            <a:pPr algn="l" latinLnBrk="0">
+              <a:lnSpc>
+                <a:spcPct val="100000"/>
+              </a:lnSpc>
+              <a:spcBef>
+                <a:spcPts val="0"/>
+              </a:spcBef>
+              <a:spcAft>
+                <a:spcPts val="0"/>
+              </a:spcAft>
+            </a:pPr>
+            <a:r>
+              <a:rPr sz="950" b="1">
+                <a:solidFill>
+                  <a:srgbClr val="0A2B45"/>
+                </a:solidFill>
+                <a:latin typeface="Microsoft YaHei"/>
+                <a:ea typeface="Microsoft YaHei"/>
+                <a:cs typeface="Microsoft YaHei"/>
+              </a:rPr>
+              <a:t>量化 + shuffle 换 SDNN 恒定核</a:t>
+            </a:r>
+          </a:p>
+        </p:txBody>
+      </p:sp>
+      <p:sp>
+        <p:nvSpPr>
+          <p:cNvPr id="77" name="TextBox 76"/>
+          <p:cNvSpPr txBox="1"/>
+          <p:nvPr/>
+        </p:nvSpPr>
+        <p:spPr>
+          <a:xfrm>
+            <a:off x="9960559" y="2935224"/>
+            <a:ext cx="1481328" cy="219456"/>
+          </a:xfrm>
+          <a:prstGeom prst="rect">
+            <a:avLst/>
+          </a:prstGeom>
+          <a:noFill/>
+        </p:spPr>
+        <p:txBody>
+          <a:bodyPr wrap="square" anchor="ctr" lIns="0" tIns="0" rIns="0" bIns="0">
+            <a:noAutofit/>
+          </a:bodyPr>
+          <a:lstStyle/>
+          <a:p>
+            <a:pPr algn="r" latinLnBrk="0">
+              <a:lnSpc>
+                <a:spcPct val="100000"/>
+              </a:lnSpc>
+              <a:spcBef>
+                <a:spcPts val="0"/>
+              </a:spcBef>
+              <a:spcAft>
+                <a:spcPts val="0"/>
+              </a:spcAft>
+            </a:pPr>
+            <a:r>
+              <a:rPr sz="950" b="1">
+                <a:solidFill>
+                  <a:srgbClr val="0F62CE"/>
+                </a:solidFill>
+                <a:latin typeface="Microsoft YaHei"/>
+                <a:ea typeface="Microsoft YaHei"/>
+                <a:cs typeface="Microsoft YaHei"/>
+              </a:rPr>
+              <a:t>交付</a:t>
+            </a:r>
+          </a:p>
+        </p:txBody>
+      </p:sp>
+      <p:sp>
+        <p:nvSpPr>
+          <p:cNvPr id="78" name="TextBox 77"/>
+          <p:cNvSpPr txBox="1"/>
+          <p:nvPr/>
+        </p:nvSpPr>
+        <p:spPr>
+          <a:xfrm>
+            <a:off x="6912864" y="3154680"/>
+            <a:ext cx="4529023" cy="201168"/>
+          </a:xfrm>
+          <a:prstGeom prst="rect">
+            <a:avLst/>
+          </a:prstGeom>
+          <a:noFill/>
+        </p:spPr>
+        <p:txBody>
+          <a:bodyPr wrap="square" anchor="ctr" lIns="0" tIns="0" rIns="0" bIns="0">
+            <a:noAutofit/>
+          </a:bodyPr>
+          <a:lstStyle/>
+          <a:p>
+            <a:pPr algn="l" latinLnBrk="0">
+              <a:lnSpc>
+                <a:spcPct val="100000"/>
+              </a:lnSpc>
+              <a:spcBef>
+                <a:spcPts val="0"/>
+              </a:spcBef>
+              <a:spcAft>
+                <a:spcPts val="0"/>
+              </a:spcAft>
+            </a:pPr>
+            <a:r>
+              <a:rPr sz="900" b="0">
+                <a:solidFill>
+                  <a:srgbClr val="40708B"/>
+                </a:solidFill>
+                <a:latin typeface="Microsoft YaHei"/>
+                <a:ea typeface="Microsoft YaHei"/>
+                <a:cs typeface="Microsoft YaHei"/>
+              </a:rPr>
+              <a:t>C 微基准 c128 5.43×，cos = 1.0 · D E2E 吞吐 +3%，TPOT −3.4%</a:t>
+            </a:r>
+          </a:p>
+        </p:txBody>
+      </p:sp>
+      <p:sp>
+        <p:nvSpPr>
+          <p:cNvPr id="79" name="TextBox 78"/>
+          <p:cNvSpPr txBox="1"/>
+          <p:nvPr/>
+        </p:nvSpPr>
+        <p:spPr>
+          <a:xfrm>
+            <a:off x="6601968" y="3447288"/>
+            <a:ext cx="274320" cy="219456"/>
+          </a:xfrm>
+          <a:prstGeom prst="rect">
+            <a:avLst/>
+          </a:prstGeom>
+          <a:noFill/>
+        </p:spPr>
+        <p:txBody>
+          <a:bodyPr wrap="square" anchor="ctr" lIns="0" tIns="0" rIns="0" bIns="0">
+            <a:noAutofit/>
+          </a:bodyPr>
+          <a:lstStyle/>
+          <a:p>
+            <a:pPr algn="l" latinLnBrk="0">
+              <a:lnSpc>
+                <a:spcPct val="100000"/>
+              </a:lnSpc>
+              <a:spcBef>
+                <a:spcPts val="0"/>
+              </a:spcBef>
+              <a:spcAft>
+                <a:spcPts val="0"/>
+              </a:spcAft>
+            </a:pPr>
+            <a:r>
+              <a:rPr sz="1000" b="1">
+                <a:solidFill>
+                  <a:srgbClr val="D94A3D"/>
+                </a:solidFill>
+                <a:latin typeface="Arial"/>
+                <a:ea typeface="Microsoft YaHei"/>
+                <a:cs typeface="Microsoft YaHei"/>
+              </a:rPr>
+              <a:t>3</a:t>
+            </a:r>
+          </a:p>
+        </p:txBody>
+      </p:sp>
+      <p:sp>
+        <p:nvSpPr>
+          <p:cNvPr id="80" name="TextBox 79"/>
+          <p:cNvSpPr txBox="1"/>
+          <p:nvPr/>
+        </p:nvSpPr>
+        <p:spPr>
+          <a:xfrm>
+            <a:off x="6912864" y="3447288"/>
+            <a:ext cx="3047695" cy="219456"/>
+          </a:xfrm>
+          <a:prstGeom prst="rect">
+            <a:avLst/>
+          </a:prstGeom>
+          <a:noFill/>
+        </p:spPr>
+        <p:txBody>
+          <a:bodyPr wrap="square" anchor="ctr" lIns="0" tIns="0" rIns="0" bIns="0">
+            <a:noAutofit/>
+          </a:bodyPr>
+          <a:lstStyle/>
+          <a:p>
+            <a:pPr algn="l" latinLnBrk="0">
+              <a:lnSpc>
+                <a:spcPct val="100000"/>
+              </a:lnSpc>
+              <a:spcBef>
+                <a:spcPts val="0"/>
+              </a:spcBef>
+              <a:spcAft>
+                <a:spcPts val="0"/>
+              </a:spcAft>
+            </a:pPr>
+            <a:r>
               <a:rPr sz="950" b="0">
                 <a:solidFill>
-                  <a:srgbClr val="0A2B45"/>
+                  <a:srgbClr val="1B4D69"/>
                 </a:solidFill>
                 <a:latin typeface="Microsoft YaHei"/>
                 <a:ea typeface="Microsoft YaHei"/>
                 <a:cs typeface="Microsoft YaHei"/>
               </a:rPr>
-              <a:t>量化 + shuffle 换 SDNN 恒定核</a:t>
-            </a:r>
-          </a:p>
+              <a:t>grouped-GEMM group-mode 四个旋钮</a:t>
+            </a:r>
+          </a:p>
+        </p:txBody>
+      </p:sp>
+      <p:sp>
+        <p:nvSpPr>
+          <p:cNvPr id="81" name="TextBox 80"/>
+          <p:cNvSpPr txBox="1"/>
+          <p:nvPr/>
+        </p:nvSpPr>
+        <p:spPr>
+          <a:xfrm>
+            <a:off x="9960559" y="3447288"/>
+            <a:ext cx="1481328" cy="219456"/>
+          </a:xfrm>
+          <a:prstGeom prst="rect">
+            <a:avLst/>
+          </a:prstGeom>
+          <a:noFill/>
+        </p:spPr>
+        <p:txBody>
+          <a:bodyPr wrap="square" anchor="ctr" lIns="0" tIns="0" rIns="0" bIns="0">
+            <a:noAutofit/>
+          </a:bodyPr>
+          <a:lstStyle/>
+          <a:p>
+            <a:pPr algn="r" latinLnBrk="0">
+              <a:lnSpc>
+                <a:spcPct val="100000"/>
+              </a:lnSpc>
+              <a:spcBef>
+                <a:spcPts val="0"/>
+              </a:spcBef>
+              <a:spcAft>
+                <a:spcPts val="0"/>
+              </a:spcAft>
+            </a:pPr>
+            <a:r>
+              <a:rPr sz="950" b="0">
+                <a:solidFill>
+                  <a:srgbClr val="D94A3D"/>
+                </a:solidFill>
+                <a:latin typeface="Microsoft YaHei"/>
+                <a:ea typeface="Microsoft YaHei"/>
+                <a:cs typeface="Microsoft YaHei"/>
+              </a:rPr>
+              <a:t>① 挡 1，③ 挡其余</a:t>
+            </a:r>
+          </a:p>
+        </p:txBody>
+      </p:sp>
+      <p:sp>
+        <p:nvSpPr>
+          <p:cNvPr id="82" name="TextBox 81"/>
+          <p:cNvSpPr txBox="1"/>
+          <p:nvPr/>
+        </p:nvSpPr>
+        <p:spPr>
+          <a:xfrm>
+            <a:off x="6912864" y="3666744"/>
+            <a:ext cx="4529023" cy="201168"/>
+          </a:xfrm>
+          <a:prstGeom prst="rect">
+            <a:avLst/>
+          </a:prstGeom>
+          <a:noFill/>
+        </p:spPr>
+        <p:txBody>
+          <a:bodyPr wrap="square" anchor="ctr" lIns="0" tIns="0" rIns="0" bIns="0">
+            <a:noAutofit/>
+          </a:bodyPr>
+          <a:lstStyle/>
           <a:p>
             <a:pPr algn="l" latinLnBrk="0">
               <a:lnSpc>
@@ -4512,29 +6560,170 @@
               </a:spcAft>
             </a:pPr>
             <a:r>
+              <a:rPr sz="900" b="0">
+                <a:solidFill>
+                  <a:srgbClr val="40708B"/>
+                </a:solidFill>
+                <a:latin typeface="Microsoft YaHei"/>
+                <a:ea typeface="Microsoft YaHei"/>
+                <a:cs typeface="Microsoft YaHei"/>
+              </a:rPr>
+              <a:t>C 四模式同速；force_nogroup −20%；no_group cos 0.000</a:t>
+            </a:r>
+          </a:p>
+        </p:txBody>
+      </p:sp>
+      <p:sp>
+        <p:nvSpPr>
+          <p:cNvPr id="83" name="TextBox 82"/>
+          <p:cNvSpPr txBox="1"/>
+          <p:nvPr/>
+        </p:nvSpPr>
+        <p:spPr>
+          <a:xfrm>
+            <a:off x="6601968" y="3959352"/>
+            <a:ext cx="274320" cy="219456"/>
+          </a:xfrm>
+          <a:prstGeom prst="rect">
+            <a:avLst/>
+          </a:prstGeom>
+          <a:noFill/>
+        </p:spPr>
+        <p:txBody>
+          <a:bodyPr wrap="square" anchor="ctr" lIns="0" tIns="0" rIns="0" bIns="0">
+            <a:noAutofit/>
+          </a:bodyPr>
+          <a:lstStyle/>
+          <a:p>
+            <a:pPr algn="l" latinLnBrk="0">
+              <a:lnSpc>
+                <a:spcPct val="100000"/>
+              </a:lnSpc>
+              <a:spcBef>
+                <a:spcPts val="0"/>
+              </a:spcBef>
+              <a:spcAft>
+                <a:spcPts val="0"/>
+              </a:spcAft>
+            </a:pPr>
+            <a:r>
+              <a:rPr sz="1000" b="1">
+                <a:solidFill>
+                  <a:srgbClr val="D94A3D"/>
+                </a:solidFill>
+                <a:latin typeface="Arial"/>
+                <a:ea typeface="Microsoft YaHei"/>
+                <a:cs typeface="Microsoft YaHei"/>
+              </a:rPr>
+              <a:t>4</a:t>
+            </a:r>
+          </a:p>
+        </p:txBody>
+      </p:sp>
+      <p:sp>
+        <p:nvSpPr>
+          <p:cNvPr id="84" name="TextBox 83"/>
+          <p:cNvSpPr txBox="1"/>
+          <p:nvPr/>
+        </p:nvSpPr>
+        <p:spPr>
+          <a:xfrm>
+            <a:off x="6912864" y="3959352"/>
+            <a:ext cx="3047695" cy="219456"/>
+          </a:xfrm>
+          <a:prstGeom prst="rect">
+            <a:avLst/>
+          </a:prstGeom>
+          <a:noFill/>
+        </p:spPr>
+        <p:txBody>
+          <a:bodyPr wrap="square" anchor="ctr" lIns="0" tIns="0" rIns="0" bIns="0">
+            <a:noAutofit/>
+          </a:bodyPr>
+          <a:lstStyle/>
+          <a:p>
+            <a:pPr algn="l" latinLnBrk="0">
+              <a:lnSpc>
+                <a:spcPct val="100000"/>
+              </a:lnSpc>
+              <a:spcBef>
+                <a:spcPts val="0"/>
+              </a:spcBef>
+              <a:spcAft>
+                <a:spcPts val="0"/>
+              </a:spcAft>
+            </a:pPr>
+            <a:r>
               <a:rPr sz="950" b="0">
                 <a:solidFill>
-                  <a:srgbClr val="0A2B45"/>
+                  <a:srgbClr val="1B4D69"/>
                 </a:solidFill>
                 <a:latin typeface="Microsoft YaHei"/>
                 <a:ea typeface="Microsoft YaHei"/>
                 <a:cs typeface="Microsoft YaHei"/>
               </a:rPr>
-              <a:t>现用核随 rows×hidden 从 20 涨到 141 µs</a:t>
-            </a:r>
-          </a:p>
-        </p:txBody>
-      </p:sp>
-      <p:sp>
-        <p:nvSpPr>
-          <p:cNvPr id="34" name="TextBox 33"/>
-          <p:cNvSpPr txBox="1"/>
-          <p:nvPr/>
-        </p:nvSpPr>
-        <p:spPr>
-          <a:xfrm>
-            <a:off x="6419088" y="3236976"/>
-            <a:ext cx="2002536" cy="420624"/>
+              <a:t>FFN 输出合并换 shuffle_mul_sum_sdnn</a:t>
+            </a:r>
+          </a:p>
+        </p:txBody>
+      </p:sp>
+      <p:sp>
+        <p:nvSpPr>
+          <p:cNvPr id="85" name="TextBox 84"/>
+          <p:cNvSpPr txBox="1"/>
+          <p:nvPr/>
+        </p:nvSpPr>
+        <p:spPr>
+          <a:xfrm>
+            <a:off x="9960559" y="3959352"/>
+            <a:ext cx="1481328" cy="219456"/>
+          </a:xfrm>
+          <a:prstGeom prst="rect">
+            <a:avLst/>
+          </a:prstGeom>
+          <a:noFill/>
+        </p:spPr>
+        <p:txBody>
+          <a:bodyPr wrap="square" anchor="ctr" lIns="0" tIns="0" rIns="0" bIns="0">
+            <a:noAutofit/>
+          </a:bodyPr>
+          <a:lstStyle/>
+          <a:p>
+            <a:pPr algn="r" latinLnBrk="0">
+              <a:lnSpc>
+                <a:spcPct val="100000"/>
+              </a:lnSpc>
+              <a:spcBef>
+                <a:spcPts val="0"/>
+              </a:spcBef>
+              <a:spcAft>
+                <a:spcPts val="0"/>
+              </a:spcAft>
+            </a:pPr>
+            <a:r>
+              <a:rPr sz="950" b="0">
+                <a:solidFill>
+                  <a:srgbClr val="D94A3D"/>
+                </a:solidFill>
+                <a:latin typeface="Microsoft YaHei"/>
+                <a:ea typeface="Microsoft YaHei"/>
+                <a:cs typeface="Microsoft YaHei"/>
+              </a:rPr>
+              <a:t>③ 未过</a:t>
+            </a:r>
+          </a:p>
+        </p:txBody>
+      </p:sp>
+      <p:sp>
+        <p:nvSpPr>
+          <p:cNvPr id="86" name="TextBox 85"/>
+          <p:cNvSpPr txBox="1"/>
+          <p:nvPr/>
+        </p:nvSpPr>
+        <p:spPr>
+          <a:xfrm>
+            <a:off x="6912864" y="4178808"/>
+            <a:ext cx="4529023" cy="201168"/>
           </a:xfrm>
           <a:prstGeom prst="rect">
             <a:avLst/>
@@ -4559,6 +6748,100 @@
               </a:spcAft>
             </a:pPr>
             <a:r>
+              <a:rPr sz="900" b="0">
+                <a:solidFill>
+                  <a:srgbClr val="40708B"/>
+                </a:solidFill>
+                <a:latin typeface="Microsoft YaHei"/>
+                <a:ea typeface="Microsoft YaHei"/>
+                <a:cs typeface="Microsoft YaHei"/>
+              </a:rPr>
+              <a:t>C 0.61×，更慢</a:t>
+            </a:r>
+          </a:p>
+        </p:txBody>
+      </p:sp>
+      <p:sp>
+        <p:nvSpPr>
+          <p:cNvPr id="87" name="TextBox 86"/>
+          <p:cNvSpPr txBox="1"/>
+          <p:nvPr/>
+        </p:nvSpPr>
+        <p:spPr>
+          <a:xfrm>
+            <a:off x="6601968" y="4471416"/>
+            <a:ext cx="274320" cy="219456"/>
+          </a:xfrm>
+          <a:prstGeom prst="rect">
+            <a:avLst/>
+          </a:prstGeom>
+          <a:noFill/>
+        </p:spPr>
+        <p:txBody>
+          <a:bodyPr wrap="square" anchor="ctr" lIns="0" tIns="0" rIns="0" bIns="0">
+            <a:noAutofit/>
+          </a:bodyPr>
+          <a:lstStyle/>
+          <a:p>
+            <a:pPr algn="l" latinLnBrk="0">
+              <a:lnSpc>
+                <a:spcPct val="100000"/>
+              </a:lnSpc>
+              <a:spcBef>
+                <a:spcPts val="0"/>
+              </a:spcBef>
+              <a:spcAft>
+                <a:spcPts val="0"/>
+              </a:spcAft>
+            </a:pPr>
+            <a:r>
+              <a:rPr sz="1000" b="1">
+                <a:solidFill>
+                  <a:srgbClr val="40708B"/>
+                </a:solidFill>
+                <a:latin typeface="Arial"/>
+                <a:ea typeface="Microsoft YaHei"/>
+                <a:cs typeface="Microsoft YaHei"/>
+              </a:rPr>
+              <a:t>5</a:t>
+            </a:r>
+          </a:p>
+        </p:txBody>
+      </p:sp>
+      <p:sp>
+        <p:nvSpPr>
+          <p:cNvPr id="88" name="TextBox 87"/>
+          <p:cNvSpPr txBox="1"/>
+          <p:nvPr/>
+        </p:nvSpPr>
+        <p:spPr>
+          <a:xfrm>
+            <a:off x="6912864" y="4471416"/>
+            <a:ext cx="3047695" cy="219456"/>
+          </a:xfrm>
+          <a:prstGeom prst="rect">
+            <a:avLst/>
+          </a:prstGeom>
+          <a:noFill/>
+        </p:spPr>
+        <p:txBody>
+          <a:bodyPr wrap="square" anchor="ctr" lIns="0" tIns="0" rIns="0" bIns="0">
+            <a:noAutofit/>
+          </a:bodyPr>
+          <a:lstStyle/>
+          <a:p>
+            <a:pPr algn="l" latinLnBrk="0">
+              <a:lnSpc>
+                <a:spcPct val="100000"/>
+              </a:lnSpc>
+              <a:spcBef>
+                <a:spcPts val="0"/>
+              </a:spcBef>
+              <a:spcAft>
+                <a:spcPts val="0"/>
+              </a:spcAft>
+            </a:pPr>
+            <a:r>
               <a:rPr sz="950" b="0">
                 <a:solidFill>
                   <a:srgbClr val="1B4D69"/>
@@ -4567,21 +6850,68 @@
                 <a:ea typeface="Microsoft YaHei"/>
                 <a:cs typeface="Microsoft YaHei"/>
               </a:rPr>
-              <a:t>微基准 c128 5.43×，cos = 1.0</a:t>
-            </a:r>
-          </a:p>
-        </p:txBody>
-      </p:sp>
-      <p:sp>
-        <p:nvSpPr>
-          <p:cNvPr id="35" name="TextBox 34"/>
-          <p:cNvSpPr txBox="1"/>
-          <p:nvPr/>
-        </p:nvSpPr>
-        <p:spPr>
-          <a:xfrm>
-            <a:off x="8513064" y="3236976"/>
-            <a:ext cx="1280160" cy="420624"/>
+              <a:t>路由 softmax + topk + renorm 融合</a:t>
+            </a:r>
+          </a:p>
+        </p:txBody>
+      </p:sp>
+      <p:sp>
+        <p:nvSpPr>
+          <p:cNvPr id="89" name="TextBox 88"/>
+          <p:cNvSpPr txBox="1"/>
+          <p:nvPr/>
+        </p:nvSpPr>
+        <p:spPr>
+          <a:xfrm>
+            <a:off x="9960559" y="4471416"/>
+            <a:ext cx="1481328" cy="219456"/>
+          </a:xfrm>
+          <a:prstGeom prst="rect">
+            <a:avLst/>
+          </a:prstGeom>
+          <a:noFill/>
+        </p:spPr>
+        <p:txBody>
+          <a:bodyPr wrap="square" anchor="ctr" lIns="0" tIns="0" rIns="0" bIns="0">
+            <a:noAutofit/>
+          </a:bodyPr>
+          <a:lstStyle/>
+          <a:p>
+            <a:pPr algn="r" latinLnBrk="0">
+              <a:lnSpc>
+                <a:spcPct val="100000"/>
+              </a:lnSpc>
+              <a:spcBef>
+                <a:spcPts val="0"/>
+              </a:spcBef>
+              <a:spcAft>
+                <a:spcPts val="0"/>
+              </a:spcAft>
+            </a:pPr>
+            <a:r>
+              <a:rPr sz="950" b="0">
+                <a:solidFill>
+                  <a:srgbClr val="40708B"/>
+                </a:solidFill>
+                <a:latin typeface="Microsoft YaHei"/>
+                <a:ea typeface="Microsoft YaHei"/>
+                <a:cs typeface="Microsoft YaHei"/>
+              </a:rPr>
+              <a:t>③ 过但不值当，未接线</a:t>
+            </a:r>
+          </a:p>
+        </p:txBody>
+      </p:sp>
+      <p:sp>
+        <p:nvSpPr>
+          <p:cNvPr id="90" name="TextBox 89"/>
+          <p:cNvSpPr txBox="1"/>
+          <p:nvPr/>
+        </p:nvSpPr>
+        <p:spPr>
+          <a:xfrm>
+            <a:off x="6912864" y="4690872"/>
+            <a:ext cx="4529023" cy="201168"/>
           </a:xfrm>
           <a:prstGeom prst="rect">
             <a:avLst/>
@@ -4606,729 +6936,22 @@
               </a:spcAft>
             </a:pPr>
             <a:r>
-              <a:rPr sz="950" b="0">
-                <a:solidFill>
-                  <a:srgbClr val="1B4D69"/>
+              <a:rPr sz="900" b="0">
+                <a:solidFill>
+                  <a:srgbClr val="40708B"/>
                 </a:solidFill>
                 <a:latin typeface="Microsoft YaHei"/>
                 <a:ea typeface="Microsoft YaHei"/>
                 <a:cs typeface="Microsoft YaHei"/>
               </a:rPr>
-              <a:t>E2E 吞吐 +3%</a:t>
-            </a:r>
-          </a:p>
-          <a:p>
-            <a:pPr algn="l" latinLnBrk="0">
-              <a:lnSpc>
-                <a:spcPct val="100000"/>
-              </a:lnSpc>
-              <a:spcBef>
-                <a:spcPts val="0"/>
-              </a:spcBef>
-              <a:spcAft>
-                <a:spcPts val="0"/>
-              </a:spcAft>
-            </a:pPr>
-            <a:r>
-              <a:rPr sz="950" b="0">
-                <a:solidFill>
-                  <a:srgbClr val="1B4D69"/>
-                </a:solidFill>
-                <a:latin typeface="Microsoft YaHei"/>
-                <a:ea typeface="Microsoft YaHei"/>
-                <a:cs typeface="Microsoft YaHei"/>
-              </a:rPr>
-              <a:t>TPOT −3.4%</a:t>
-            </a:r>
-          </a:p>
-        </p:txBody>
-      </p:sp>
-      <p:sp>
-        <p:nvSpPr>
-          <p:cNvPr id="36" name="TextBox 35"/>
-          <p:cNvSpPr txBox="1"/>
-          <p:nvPr/>
-        </p:nvSpPr>
-        <p:spPr>
-          <a:xfrm>
-            <a:off x="9884664" y="3236976"/>
-            <a:ext cx="1554480" cy="420624"/>
-          </a:xfrm>
-          <a:prstGeom prst="rect">
-            <a:avLst/>
-          </a:prstGeom>
-          <a:noFill/>
-        </p:spPr>
-        <p:txBody>
-          <a:bodyPr wrap="square" anchor="ctr" lIns="0" tIns="0" rIns="0" bIns="0">
-            <a:noAutofit/>
-          </a:bodyPr>
-          <a:lstStyle/>
-          <a:p>
-            <a:pPr algn="l" latinLnBrk="0">
-              <a:lnSpc>
-                <a:spcPct val="100000"/>
-              </a:lnSpc>
-              <a:spcBef>
-                <a:spcPts val="0"/>
-              </a:spcBef>
-              <a:spcAft>
-                <a:spcPts val="0"/>
-              </a:spcAft>
-            </a:pPr>
-            <a:r>
-              <a:rPr sz="950" b="1">
-                <a:solidFill>
-                  <a:srgbClr val="0F62CE"/>
-                </a:solidFill>
-                <a:latin typeface="Microsoft YaHei"/>
-                <a:ea typeface="Microsoft YaHei"/>
-                <a:cs typeface="Microsoft YaHei"/>
-              </a:rPr>
-              <a:t>交付</a:t>
-            </a:r>
-          </a:p>
-        </p:txBody>
-      </p:sp>
-      <p:sp>
-        <p:nvSpPr>
-          <p:cNvPr id="37" name="TextBox 36"/>
-          <p:cNvSpPr txBox="1"/>
-          <p:nvPr/>
-        </p:nvSpPr>
-        <p:spPr>
-          <a:xfrm>
-            <a:off x="3675888" y="3694176"/>
-            <a:ext cx="2651760" cy="566928"/>
-          </a:xfrm>
-          <a:prstGeom prst="rect">
-            <a:avLst/>
-          </a:prstGeom>
-          <a:noFill/>
-        </p:spPr>
-        <p:txBody>
-          <a:bodyPr wrap="square" anchor="ctr" lIns="0" tIns="0" rIns="0" bIns="0">
-            <a:noAutofit/>
-          </a:bodyPr>
-          <a:lstStyle/>
-          <a:p>
-            <a:pPr algn="l" latinLnBrk="0">
-              <a:lnSpc>
-                <a:spcPct val="100000"/>
-              </a:lnSpc>
-              <a:spcBef>
-                <a:spcPts val="0"/>
-              </a:spcBef>
-              <a:spcAft>
-                <a:spcPts val="0"/>
-              </a:spcAft>
-            </a:pPr>
-            <a:r>
-              <a:rPr sz="950" b="0">
-                <a:solidFill>
-                  <a:srgbClr val="1B4D69"/>
-                </a:solidFill>
-                <a:latin typeface="Microsoft YaHei"/>
-                <a:ea typeface="Microsoft YaHei"/>
-                <a:cs typeface="Microsoft YaHei"/>
-              </a:rPr>
-              <a:t>grouped-GEMM group-mode 四个旋钮</a:t>
-            </a:r>
-          </a:p>
-        </p:txBody>
-      </p:sp>
-      <p:sp>
-        <p:nvSpPr>
-          <p:cNvPr id="38" name="TextBox 37"/>
-          <p:cNvSpPr txBox="1"/>
-          <p:nvPr/>
-        </p:nvSpPr>
-        <p:spPr>
-          <a:xfrm>
-            <a:off x="6419088" y="3694176"/>
-            <a:ext cx="2002536" cy="566928"/>
-          </a:xfrm>
-          <a:prstGeom prst="rect">
-            <a:avLst/>
-          </a:prstGeom>
-          <a:noFill/>
-        </p:spPr>
-        <p:txBody>
-          <a:bodyPr wrap="square" anchor="ctr" lIns="0" tIns="0" rIns="0" bIns="0">
-            <a:noAutofit/>
-          </a:bodyPr>
-          <a:lstStyle/>
-          <a:p>
-            <a:pPr algn="l" latinLnBrk="0">
-              <a:lnSpc>
-                <a:spcPct val="100000"/>
-              </a:lnSpc>
-              <a:spcBef>
-                <a:spcPts val="0"/>
-              </a:spcBef>
-              <a:spcAft>
-                <a:spcPts val="0"/>
-              </a:spcAft>
-            </a:pPr>
-            <a:r>
-              <a:rPr sz="950" b="0">
-                <a:solidFill>
-                  <a:srgbClr val="1B4D69"/>
-                </a:solidFill>
-                <a:latin typeface="Microsoft YaHei"/>
-                <a:ea typeface="Microsoft YaHei"/>
-                <a:cs typeface="Microsoft YaHei"/>
-              </a:rPr>
-              <a:t>四模式完全同速</a:t>
-            </a:r>
-          </a:p>
-          <a:p>
-            <a:pPr algn="l" latinLnBrk="0">
-              <a:lnSpc>
-                <a:spcPct val="100000"/>
-              </a:lnSpc>
-              <a:spcBef>
-                <a:spcPts val="0"/>
-              </a:spcBef>
-              <a:spcAft>
-                <a:spcPts val="0"/>
-              </a:spcAft>
-            </a:pPr>
-            <a:r>
-              <a:rPr sz="950" b="0">
-                <a:solidFill>
-                  <a:srgbClr val="1B4D69"/>
-                </a:solidFill>
-                <a:latin typeface="Microsoft YaHei"/>
-                <a:ea typeface="Microsoft YaHei"/>
-                <a:cs typeface="Microsoft YaHei"/>
-              </a:rPr>
-              <a:t>force_nogroup −20%</a:t>
-            </a:r>
-          </a:p>
-          <a:p>
-            <a:pPr algn="l" latinLnBrk="0">
-              <a:lnSpc>
-                <a:spcPct val="100000"/>
-              </a:lnSpc>
-              <a:spcBef>
-                <a:spcPts val="0"/>
-              </a:spcBef>
-              <a:spcAft>
-                <a:spcPts val="0"/>
-              </a:spcAft>
-            </a:pPr>
-            <a:r>
-              <a:rPr sz="950" b="0">
-                <a:solidFill>
-                  <a:srgbClr val="1B4D69"/>
-                </a:solidFill>
-                <a:latin typeface="Microsoft YaHei"/>
-                <a:ea typeface="Microsoft YaHei"/>
-                <a:cs typeface="Microsoft YaHei"/>
-              </a:rPr>
-              <a:t>no_group cos 0.000</a:t>
-            </a:r>
-          </a:p>
-        </p:txBody>
-      </p:sp>
-      <p:sp>
-        <p:nvSpPr>
-          <p:cNvPr id="39" name="TextBox 38"/>
-          <p:cNvSpPr txBox="1"/>
-          <p:nvPr/>
-        </p:nvSpPr>
-        <p:spPr>
-          <a:xfrm>
-            <a:off x="8513064" y="3694176"/>
-            <a:ext cx="1280160" cy="566928"/>
-          </a:xfrm>
-          <a:prstGeom prst="rect">
-            <a:avLst/>
-          </a:prstGeom>
-          <a:noFill/>
-        </p:spPr>
-        <p:txBody>
-          <a:bodyPr wrap="square" anchor="ctr" lIns="0" tIns="0" rIns="0" bIns="0">
-            <a:noAutofit/>
-          </a:bodyPr>
-          <a:lstStyle/>
-          <a:p>
-            <a:pPr algn="l" latinLnBrk="0">
-              <a:lnSpc>
-                <a:spcPct val="100000"/>
-              </a:lnSpc>
-              <a:spcBef>
-                <a:spcPts val="0"/>
-              </a:spcBef>
-              <a:spcAft>
-                <a:spcPts val="0"/>
-              </a:spcAft>
-            </a:pPr>
-            <a:r>
-              <a:rPr sz="950" b="0">
-                <a:solidFill>
-                  <a:srgbClr val="7FA4BA"/>
-                </a:solidFill>
-                <a:latin typeface="Microsoft YaHei"/>
-                <a:ea typeface="Microsoft YaHei"/>
-                <a:cs typeface="Microsoft YaHei"/>
-              </a:rPr>
-              <a:t>—</a:t>
-            </a:r>
-          </a:p>
-        </p:txBody>
-      </p:sp>
-      <p:sp>
-        <p:nvSpPr>
-          <p:cNvPr id="40" name="TextBox 39"/>
-          <p:cNvSpPr txBox="1"/>
-          <p:nvPr/>
-        </p:nvSpPr>
-        <p:spPr>
-          <a:xfrm>
-            <a:off x="9884664" y="3694176"/>
-            <a:ext cx="1554480" cy="566928"/>
-          </a:xfrm>
-          <a:prstGeom prst="rect">
-            <a:avLst/>
-          </a:prstGeom>
-          <a:noFill/>
-        </p:spPr>
-        <p:txBody>
-          <a:bodyPr wrap="square" anchor="ctr" lIns="0" tIns="0" rIns="0" bIns="0">
-            <a:noAutofit/>
-          </a:bodyPr>
-          <a:lstStyle/>
-          <a:p>
-            <a:pPr algn="l" latinLnBrk="0">
-              <a:lnSpc>
-                <a:spcPct val="100000"/>
-              </a:lnSpc>
-              <a:spcBef>
-                <a:spcPts val="0"/>
-              </a:spcBef>
-              <a:spcAft>
-                <a:spcPts val="0"/>
-              </a:spcAft>
-            </a:pPr>
-            <a:r>
-              <a:rPr sz="950" b="0">
-                <a:solidFill>
-                  <a:srgbClr val="D94A3D"/>
-                </a:solidFill>
-                <a:latin typeface="Microsoft YaHei"/>
-                <a:ea typeface="Microsoft YaHei"/>
-                <a:cs typeface="Microsoft YaHei"/>
-              </a:rPr>
-              <a:t>① 挡掉一个，③ 挡掉其余</a:t>
-            </a:r>
-          </a:p>
-          <a:p>
-            <a:pPr algn="l" latinLnBrk="0">
-              <a:lnSpc>
-                <a:spcPct val="100000"/>
-              </a:lnSpc>
-              <a:spcBef>
-                <a:spcPts val="0"/>
-              </a:spcBef>
-              <a:spcAft>
-                <a:spcPts val="0"/>
-              </a:spcAft>
-            </a:pPr>
-            <a:r>
-              <a:rPr sz="950" b="0">
-                <a:solidFill>
-                  <a:srgbClr val="D94A3D"/>
-                </a:solidFill>
-                <a:latin typeface="Microsoft YaHei"/>
-                <a:ea typeface="Microsoft YaHei"/>
-                <a:cs typeface="Microsoft YaHei"/>
-              </a:rPr>
-              <a:t>判定为闭源核内在开销</a:t>
-            </a:r>
-          </a:p>
-        </p:txBody>
-      </p:sp>
-      <p:sp>
-        <p:nvSpPr>
-          <p:cNvPr id="41" name="TextBox 40"/>
-          <p:cNvSpPr txBox="1"/>
-          <p:nvPr/>
-        </p:nvSpPr>
-        <p:spPr>
-          <a:xfrm>
-            <a:off x="3675888" y="4297680"/>
-            <a:ext cx="2651760" cy="274320"/>
-          </a:xfrm>
-          <a:prstGeom prst="rect">
-            <a:avLst/>
-          </a:prstGeom>
-          <a:noFill/>
-        </p:spPr>
-        <p:txBody>
-          <a:bodyPr wrap="square" anchor="ctr" lIns="0" tIns="0" rIns="0" bIns="0">
-            <a:noAutofit/>
-          </a:bodyPr>
-          <a:lstStyle/>
-          <a:p>
-            <a:pPr algn="l" latinLnBrk="0">
-              <a:lnSpc>
-                <a:spcPct val="100000"/>
-              </a:lnSpc>
-              <a:spcBef>
-                <a:spcPts val="0"/>
-              </a:spcBef>
-              <a:spcAft>
-                <a:spcPts val="0"/>
-              </a:spcAft>
-            </a:pPr>
-            <a:r>
-              <a:rPr sz="950" b="0">
-                <a:solidFill>
-                  <a:srgbClr val="1B4D69"/>
-                </a:solidFill>
-                <a:latin typeface="Microsoft YaHei"/>
-                <a:ea typeface="Microsoft YaHei"/>
-                <a:cs typeface="Microsoft YaHei"/>
-              </a:rPr>
-              <a:t>FFN 输出合并换 shuffle_mul_sum_sdnn</a:t>
-            </a:r>
-          </a:p>
-        </p:txBody>
-      </p:sp>
-      <p:sp>
-        <p:nvSpPr>
-          <p:cNvPr id="42" name="TextBox 41"/>
-          <p:cNvSpPr txBox="1"/>
-          <p:nvPr/>
-        </p:nvSpPr>
-        <p:spPr>
-          <a:xfrm>
-            <a:off x="6419088" y="4297680"/>
-            <a:ext cx="2002536" cy="274320"/>
-          </a:xfrm>
-          <a:prstGeom prst="rect">
-            <a:avLst/>
-          </a:prstGeom>
-          <a:noFill/>
-        </p:spPr>
-        <p:txBody>
-          <a:bodyPr wrap="square" anchor="ctr" lIns="0" tIns="0" rIns="0" bIns="0">
-            <a:noAutofit/>
-          </a:bodyPr>
-          <a:lstStyle/>
-          <a:p>
-            <a:pPr algn="l" latinLnBrk="0">
-              <a:lnSpc>
-                <a:spcPct val="100000"/>
-              </a:lnSpc>
-              <a:spcBef>
-                <a:spcPts val="0"/>
-              </a:spcBef>
-              <a:spcAft>
-                <a:spcPts val="0"/>
-              </a:spcAft>
-            </a:pPr>
-            <a:r>
-              <a:rPr sz="950" b="0">
-                <a:solidFill>
-                  <a:srgbClr val="1B4D69"/>
-                </a:solidFill>
-                <a:latin typeface="Microsoft YaHei"/>
-                <a:ea typeface="Microsoft YaHei"/>
-                <a:cs typeface="Microsoft YaHei"/>
-              </a:rPr>
-              <a:t>0.61×，更慢</a:t>
-            </a:r>
-          </a:p>
-        </p:txBody>
-      </p:sp>
-      <p:sp>
-        <p:nvSpPr>
-          <p:cNvPr id="43" name="TextBox 42"/>
-          <p:cNvSpPr txBox="1"/>
-          <p:nvPr/>
-        </p:nvSpPr>
-        <p:spPr>
-          <a:xfrm>
-            <a:off x="8513064" y="4297680"/>
-            <a:ext cx="1280160" cy="274320"/>
-          </a:xfrm>
-          <a:prstGeom prst="rect">
-            <a:avLst/>
-          </a:prstGeom>
-          <a:noFill/>
-        </p:spPr>
-        <p:txBody>
-          <a:bodyPr wrap="square" anchor="ctr" lIns="0" tIns="0" rIns="0" bIns="0">
-            <a:noAutofit/>
-          </a:bodyPr>
-          <a:lstStyle/>
-          <a:p>
-            <a:pPr algn="l" latinLnBrk="0">
-              <a:lnSpc>
-                <a:spcPct val="100000"/>
-              </a:lnSpc>
-              <a:spcBef>
-                <a:spcPts val="0"/>
-              </a:spcBef>
-              <a:spcAft>
-                <a:spcPts val="0"/>
-              </a:spcAft>
-            </a:pPr>
-            <a:r>
-              <a:rPr sz="950" b="0">
-                <a:solidFill>
-                  <a:srgbClr val="7FA4BA"/>
-                </a:solidFill>
-                <a:latin typeface="Microsoft YaHei"/>
-                <a:ea typeface="Microsoft YaHei"/>
-                <a:cs typeface="Microsoft YaHei"/>
-              </a:rPr>
-              <a:t>—</a:t>
-            </a:r>
-          </a:p>
-        </p:txBody>
-      </p:sp>
-      <p:sp>
-        <p:nvSpPr>
-          <p:cNvPr id="44" name="TextBox 43"/>
-          <p:cNvSpPr txBox="1"/>
-          <p:nvPr/>
-        </p:nvSpPr>
-        <p:spPr>
-          <a:xfrm>
-            <a:off x="9884664" y="4297680"/>
-            <a:ext cx="1554480" cy="274320"/>
-          </a:xfrm>
-          <a:prstGeom prst="rect">
-            <a:avLst/>
-          </a:prstGeom>
-          <a:noFill/>
-        </p:spPr>
-        <p:txBody>
-          <a:bodyPr wrap="square" anchor="ctr" lIns="0" tIns="0" rIns="0" bIns="0">
-            <a:noAutofit/>
-          </a:bodyPr>
-          <a:lstStyle/>
-          <a:p>
-            <a:pPr algn="l" latinLnBrk="0">
-              <a:lnSpc>
-                <a:spcPct val="100000"/>
-              </a:lnSpc>
-              <a:spcBef>
-                <a:spcPts val="0"/>
-              </a:spcBef>
-              <a:spcAft>
-                <a:spcPts val="0"/>
-              </a:spcAft>
-            </a:pPr>
-            <a:r>
-              <a:rPr sz="950" b="0">
-                <a:solidFill>
-                  <a:srgbClr val="D94A3D"/>
-                </a:solidFill>
-                <a:latin typeface="Microsoft YaHei"/>
-                <a:ea typeface="Microsoft YaHei"/>
-                <a:cs typeface="Microsoft YaHei"/>
-              </a:rPr>
-              <a:t>③ 未过</a:t>
-            </a:r>
-          </a:p>
-        </p:txBody>
-      </p:sp>
-      <p:sp>
-        <p:nvSpPr>
-          <p:cNvPr id="45" name="TextBox 44"/>
-          <p:cNvSpPr txBox="1"/>
-          <p:nvPr/>
-        </p:nvSpPr>
-        <p:spPr>
-          <a:xfrm>
-            <a:off x="3675888" y="4608576"/>
-            <a:ext cx="2651760" cy="274320"/>
-          </a:xfrm>
-          <a:prstGeom prst="rect">
-            <a:avLst/>
-          </a:prstGeom>
-          <a:noFill/>
-        </p:spPr>
-        <p:txBody>
-          <a:bodyPr wrap="square" anchor="ctr" lIns="0" tIns="0" rIns="0" bIns="0">
-            <a:noAutofit/>
-          </a:bodyPr>
-          <a:lstStyle/>
-          <a:p>
-            <a:pPr algn="l" latinLnBrk="0">
-              <a:lnSpc>
-                <a:spcPct val="100000"/>
-              </a:lnSpc>
-              <a:spcBef>
-                <a:spcPts val="0"/>
-              </a:spcBef>
-              <a:spcAft>
-                <a:spcPts val="0"/>
-              </a:spcAft>
-            </a:pPr>
-            <a:r>
-              <a:rPr sz="950" b="0">
-                <a:solidFill>
-                  <a:srgbClr val="1B4D69"/>
-                </a:solidFill>
-                <a:latin typeface="Microsoft YaHei"/>
-                <a:ea typeface="Microsoft YaHei"/>
-                <a:cs typeface="Microsoft YaHei"/>
-              </a:rPr>
-              <a:t>路由 softmax + topk + renorm 融合</a:t>
-            </a:r>
-          </a:p>
-        </p:txBody>
-      </p:sp>
-      <p:sp>
-        <p:nvSpPr>
-          <p:cNvPr id="46" name="TextBox 45"/>
-          <p:cNvSpPr txBox="1"/>
-          <p:nvPr/>
-        </p:nvSpPr>
-        <p:spPr>
-          <a:xfrm>
-            <a:off x="6419088" y="4608576"/>
-            <a:ext cx="2002536" cy="274320"/>
-          </a:xfrm>
-          <a:prstGeom prst="rect">
-            <a:avLst/>
-          </a:prstGeom>
-          <a:noFill/>
-        </p:spPr>
-        <p:txBody>
-          <a:bodyPr wrap="square" anchor="ctr" lIns="0" tIns="0" rIns="0" bIns="0">
-            <a:noAutofit/>
-          </a:bodyPr>
-          <a:lstStyle/>
-          <a:p>
-            <a:pPr algn="l" latinLnBrk="0">
-              <a:lnSpc>
-                <a:spcPct val="100000"/>
-              </a:lnSpc>
-              <a:spcBef>
-                <a:spcPts val="0"/>
-              </a:spcBef>
-              <a:spcAft>
-                <a:spcPts val="0"/>
-              </a:spcAft>
-            </a:pPr>
-            <a:r>
-              <a:rPr sz="950" b="0">
-                <a:solidFill>
-                  <a:srgbClr val="1B4D69"/>
-                </a:solidFill>
-                <a:latin typeface="Microsoft YaHei"/>
-                <a:ea typeface="Microsoft YaHei"/>
-                <a:cs typeface="Microsoft YaHei"/>
-              </a:rPr>
-              <a:t>内核 2×，数值对（Δ 3e-8）</a:t>
-            </a:r>
-          </a:p>
-        </p:txBody>
-      </p:sp>
-      <p:sp>
-        <p:nvSpPr>
-          <p:cNvPr id="47" name="TextBox 46"/>
-          <p:cNvSpPr txBox="1"/>
-          <p:nvPr/>
-        </p:nvSpPr>
-        <p:spPr>
-          <a:xfrm>
-            <a:off x="8513064" y="4608576"/>
-            <a:ext cx="1280160" cy="274320"/>
-          </a:xfrm>
-          <a:prstGeom prst="rect">
-            <a:avLst/>
-          </a:prstGeom>
-          <a:noFill/>
-        </p:spPr>
-        <p:txBody>
-          <a:bodyPr wrap="square" anchor="ctr" lIns="0" tIns="0" rIns="0" bIns="0">
-            <a:noAutofit/>
-          </a:bodyPr>
-          <a:lstStyle/>
-          <a:p>
-            <a:pPr algn="l" latinLnBrk="0">
-              <a:lnSpc>
-                <a:spcPct val="100000"/>
-              </a:lnSpc>
-              <a:spcBef>
-                <a:spcPts val="0"/>
-              </a:spcBef>
-              <a:spcAft>
-                <a:spcPts val="0"/>
-              </a:spcAft>
-            </a:pPr>
-            <a:r>
-              <a:rPr sz="950" b="0">
-                <a:solidFill>
-                  <a:srgbClr val="1B4D69"/>
-                </a:solidFill>
-                <a:latin typeface="Microsoft YaHei"/>
-                <a:ea typeface="Microsoft YaHei"/>
-                <a:cs typeface="Microsoft YaHei"/>
-              </a:rPr>
-              <a:t>只占 ~0.9% TPOT</a:t>
-            </a:r>
-          </a:p>
-        </p:txBody>
-      </p:sp>
-      <p:sp>
-        <p:nvSpPr>
-          <p:cNvPr id="48" name="TextBox 47"/>
-          <p:cNvSpPr txBox="1"/>
-          <p:nvPr/>
-        </p:nvSpPr>
-        <p:spPr>
-          <a:xfrm>
-            <a:off x="9884664" y="4608576"/>
-            <a:ext cx="1554480" cy="274320"/>
-          </a:xfrm>
-          <a:prstGeom prst="rect">
-            <a:avLst/>
-          </a:prstGeom>
-          <a:noFill/>
-        </p:spPr>
-        <p:txBody>
-          <a:bodyPr wrap="square" anchor="ctr" lIns="0" tIns="0" rIns="0" bIns="0">
-            <a:noAutofit/>
-          </a:bodyPr>
-          <a:lstStyle/>
-          <a:p>
-            <a:pPr algn="l" latinLnBrk="0">
-              <a:lnSpc>
-                <a:spcPct val="100000"/>
-              </a:lnSpc>
-              <a:spcBef>
-                <a:spcPts val="0"/>
-              </a:spcBef>
-              <a:spcAft>
-                <a:spcPts val="0"/>
-              </a:spcAft>
-            </a:pPr>
-            <a:r>
-              <a:rPr sz="950" b="0">
-                <a:solidFill>
-                  <a:srgbClr val="40708B"/>
-                </a:solidFill>
-                <a:latin typeface="Microsoft YaHei"/>
-                <a:ea typeface="Microsoft YaHei"/>
-                <a:cs typeface="Microsoft YaHei"/>
-              </a:rPr>
-              <a:t>③ 过但不值当，未接线</a:t>
-            </a:r>
-          </a:p>
-        </p:txBody>
-      </p:sp>
-      <p:sp>
-        <p:nvSpPr>
-          <p:cNvPr id="49" name="TextBox 48"/>
+              <a:t>C 内核 2×，Δ 3e-8 · D 只占 ~0.9% TPOT</a:t>
+            </a:r>
+          </a:p>
+        </p:txBody>
+      </p:sp>
+      <p:sp>
+        <p:nvSpPr>
+          <p:cNvPr id="91" name="TextBox 90"/>
           <p:cNvSpPr txBox="1"/>
           <p:nvPr/>
         </p:nvSpPr>
@@ -5368,7 +6991,7 @@
                 <a:ea typeface="Microsoft YaHei"/>
                 <a:cs typeface="Microsoft YaHei"/>
               </a:rPr>
-              <a:t>三道门的漏斗</a:t>
+              <a:t>同一交付，换个并发</a:t>
             </a:r>
           </a:p>
           <a:p>
@@ -5392,7 +7015,7 @@
                 <a:ea typeface="Microsoft YaHei"/>
                 <a:cs typeface="Microsoft YaHei"/>
               </a:rPr>
-              <a:t>由便宜到贵，任一道不过即停，</a:t>
+              <a:t>每格是基线 → 交付的持续输出，</a:t>
             </a:r>
           </a:p>
           <a:p>
@@ -5416,21 +7039,21 @@
                 <a:ea typeface="Microsoft YaHei"/>
                 <a:cs typeface="Microsoft YaHei"/>
               </a:rPr>
-              <a:t>数值不对、更慢的当场挡掉</a:t>
-            </a:r>
-          </a:p>
-        </p:txBody>
-      </p:sp>
-      <p:sp>
-        <p:nvSpPr>
-          <p:cNvPr id="50" name="Rectangle 49"/>
+              <a:t>峰值点在 c128</a:t>
+            </a:r>
+          </a:p>
+        </p:txBody>
+      </p:sp>
+      <p:sp>
+        <p:nvSpPr>
+          <p:cNvPr id="92" name="Rectangle 91"/>
           <p:cNvSpPr/>
           <p:nvPr/>
         </p:nvSpPr>
         <p:spPr>
           <a:xfrm>
             <a:off x="3291840" y="5084064"/>
-            <a:ext cx="2503322" cy="621792"/>
+            <a:ext cx="1978075" cy="621792"/>
           </a:xfrm>
           <a:prstGeom prst="rect">
             <a:avLst/>
@@ -5454,14 +7077,14 @@
       </p:sp>
       <p:sp>
         <p:nvSpPr>
-          <p:cNvPr id="51" name="TextBox 50"/>
-          <p:cNvSpPr txBox="1"/>
-          <p:nvPr/>
-        </p:nvSpPr>
-        <p:spPr>
-          <a:xfrm>
-            <a:off x="3474720" y="5157216"/>
-            <a:ext cx="2137562" cy="201168"/>
+          <p:cNvPr id="93" name="TextBox 92"/>
+          <p:cNvSpPr txBox="1"/>
+          <p:nvPr/>
+        </p:nvSpPr>
+        <p:spPr>
+          <a:xfrm>
+            <a:off x="3438144" y="5120640"/>
+            <a:ext cx="1685467" cy="182880"/>
           </a:xfrm>
           <a:prstGeom prst="rect">
             <a:avLst/>
@@ -5490,25 +7113,25 @@
                 <a:solidFill>
                   <a:srgbClr val="40708B"/>
                 </a:solidFill>
-                <a:latin typeface="Microsoft YaHei"/>
-                <a:ea typeface="Microsoft YaHei"/>
-                <a:cs typeface="Microsoft YaHei"/>
-              </a:rPr>
-              <a:t>候选</a:t>
-            </a:r>
-          </a:p>
-        </p:txBody>
-      </p:sp>
-      <p:sp>
-        <p:nvSpPr>
-          <p:cNvPr id="52" name="TextBox 51"/>
-          <p:cNvSpPr txBox="1"/>
-          <p:nvPr/>
-        </p:nvSpPr>
-        <p:spPr>
-          <a:xfrm>
-            <a:off x="3474720" y="5376672"/>
-            <a:ext cx="2137562" cy="274320"/>
+                <a:latin typeface="Consolas"/>
+                <a:ea typeface="Microsoft YaHei"/>
+                <a:cs typeface="Microsoft YaHei"/>
+              </a:rPr>
+              <a:t>c__</a:t>
+            </a:r>
+          </a:p>
+        </p:txBody>
+      </p:sp>
+      <p:sp>
+        <p:nvSpPr>
+          <p:cNvPr id="94" name="TextBox 93"/>
+          <p:cNvSpPr txBox="1"/>
+          <p:nvPr/>
+        </p:nvSpPr>
+        <p:spPr>
+          <a:xfrm>
+            <a:off x="3438144" y="5312664"/>
+            <a:ext cx="1685467" cy="219456"/>
           </a:xfrm>
           <a:prstGeom prst="rect">
             <a:avLst/>
@@ -5533,29 +7156,76 @@
               </a:spcAft>
             </a:pPr>
             <a:r>
-              <a:rPr sz="1600" b="1">
-                <a:solidFill>
-                  <a:srgbClr val="0A2B45"/>
+              <a:rPr sz="1500" b="1">
+                <a:solidFill>
+                  <a:srgbClr val="7FA4BA"/>
                 </a:solidFill>
                 <a:latin typeface="Arial"/>
                 <a:ea typeface="Microsoft YaHei"/>
                 <a:cs typeface="Microsoft YaHei"/>
               </a:rPr>
-              <a:t>10</a:t>
-            </a:r>
-          </a:p>
-        </p:txBody>
-      </p:sp>
-      <p:sp>
-        <p:nvSpPr>
-          <p:cNvPr id="53" name="Rectangle 52"/>
+              <a:t>+__%</a:t>
+            </a:r>
+          </a:p>
+        </p:txBody>
+      </p:sp>
+      <p:sp>
+        <p:nvSpPr>
+          <p:cNvPr id="95" name="TextBox 94"/>
+          <p:cNvSpPr txBox="1"/>
+          <p:nvPr/>
+        </p:nvSpPr>
+        <p:spPr>
+          <a:xfrm>
+            <a:off x="3438144" y="5541264"/>
+            <a:ext cx="1685467" cy="146304"/>
+          </a:xfrm>
+          <a:prstGeom prst="rect">
+            <a:avLst/>
+          </a:prstGeom>
+          <a:noFill/>
+        </p:spPr>
+        <p:txBody>
+          <a:bodyPr wrap="square" anchor="ctr" lIns="0" tIns="0" rIns="0" bIns="0">
+            <a:noAutofit/>
+          </a:bodyPr>
+          <a:lstStyle/>
+          <a:p>
+            <a:pPr algn="l" latinLnBrk="0">
+              <a:lnSpc>
+                <a:spcPct val="100000"/>
+              </a:lnSpc>
+              <a:spcBef>
+                <a:spcPts val="0"/>
+              </a:spcBef>
+              <a:spcAft>
+                <a:spcPts val="0"/>
+              </a:spcAft>
+            </a:pPr>
+            <a:r>
+              <a:rPr sz="850" b="0">
+                <a:solidFill>
+                  <a:srgbClr val="7FA4BA"/>
+                </a:solidFill>
+                <a:latin typeface="Consolas"/>
+                <a:ea typeface="Microsoft YaHei"/>
+                <a:cs typeface="Microsoft YaHei"/>
+              </a:rPr>
+              <a:t>__ → __ tok/s</a:t>
+            </a:r>
+          </a:p>
+        </p:txBody>
+      </p:sp>
+      <p:sp>
+        <p:nvSpPr>
+          <p:cNvPr id="96" name="Rectangle 95"/>
           <p:cNvSpPr/>
           <p:nvPr/>
         </p:nvSpPr>
         <p:spPr>
           <a:xfrm>
-            <a:off x="6215786" y="5084064"/>
-            <a:ext cx="2503322" cy="621792"/>
+            <a:off x="5416219" y="5084064"/>
+            <a:ext cx="1978075" cy="621792"/>
           </a:xfrm>
           <a:prstGeom prst="rect">
             <a:avLst/>
@@ -5579,14 +7249,14 @@
       </p:sp>
       <p:sp>
         <p:nvSpPr>
-          <p:cNvPr id="54" name="TextBox 53"/>
-          <p:cNvSpPr txBox="1"/>
-          <p:nvPr/>
-        </p:nvSpPr>
-        <p:spPr>
-          <a:xfrm>
-            <a:off x="6398666" y="5157216"/>
-            <a:ext cx="2137562" cy="201168"/>
+          <p:cNvPr id="97" name="TextBox 96"/>
+          <p:cNvSpPr txBox="1"/>
+          <p:nvPr/>
+        </p:nvSpPr>
+        <p:spPr>
+          <a:xfrm>
+            <a:off x="5562523" y="5120640"/>
+            <a:ext cx="1685467" cy="182880"/>
           </a:xfrm>
           <a:prstGeom prst="rect">
             <a:avLst/>
@@ -5615,25 +7285,25 @@
                 <a:solidFill>
                   <a:srgbClr val="40708B"/>
                 </a:solidFill>
-                <a:latin typeface="Microsoft YaHei"/>
-                <a:ea typeface="Microsoft YaHei"/>
-                <a:cs typeface="Microsoft YaHei"/>
-              </a:rPr>
-              <a:t>过三道门</a:t>
-            </a:r>
-          </a:p>
-        </p:txBody>
-      </p:sp>
-      <p:sp>
-        <p:nvSpPr>
-          <p:cNvPr id="55" name="TextBox 54"/>
-          <p:cNvSpPr txBox="1"/>
-          <p:nvPr/>
-        </p:nvSpPr>
-        <p:spPr>
-          <a:xfrm>
-            <a:off x="6398666" y="5376672"/>
-            <a:ext cx="2137562" cy="274320"/>
+                <a:latin typeface="Consolas"/>
+                <a:ea typeface="Microsoft YaHei"/>
+                <a:cs typeface="Microsoft YaHei"/>
+              </a:rPr>
+              <a:t>c__</a:t>
+            </a:r>
+          </a:p>
+        </p:txBody>
+      </p:sp>
+      <p:sp>
+        <p:nvSpPr>
+          <p:cNvPr id="98" name="TextBox 97"/>
+          <p:cNvSpPr txBox="1"/>
+          <p:nvPr/>
+        </p:nvSpPr>
+        <p:spPr>
+          <a:xfrm>
+            <a:off x="5562523" y="5312664"/>
+            <a:ext cx="1685467" cy="219456"/>
           </a:xfrm>
           <a:prstGeom prst="rect">
             <a:avLst/>
@@ -5658,51 +7328,248 @@
               </a:spcAft>
             </a:pPr>
             <a:r>
-              <a:rPr sz="1600" b="1">
-                <a:solidFill>
-                  <a:srgbClr val="0A2B45"/>
+              <a:rPr sz="1500" b="1">
+                <a:solidFill>
+                  <a:srgbClr val="7FA4BA"/>
                 </a:solidFill>
                 <a:latin typeface="Arial"/>
                 <a:ea typeface="Microsoft YaHei"/>
                 <a:cs typeface="Microsoft YaHei"/>
               </a:rPr>
-              <a:t>5</a:t>
-            </a:r>
-          </a:p>
-        </p:txBody>
-      </p:sp>
-      <p:cxnSp>
-        <p:nvCxnSpPr>
-          <p:cNvPr id="56" name="Connector 55"/>
-          <p:cNvCxnSpPr/>
-          <p:nvPr/>
-        </p:nvCxnSpPr>
-        <p:spPr>
-          <a:xfrm>
-            <a:off x="5886602" y="5394959"/>
-            <a:ext cx="237744" cy="0"/>
-          </a:xfrm>
-          <a:prstGeom prst="line">
-            <a:avLst/>
-          </a:prstGeom>
-          <a:ln w="15875">
+              <a:t>+__%</a:t>
+            </a:r>
+          </a:p>
+        </p:txBody>
+      </p:sp>
+      <p:sp>
+        <p:nvSpPr>
+          <p:cNvPr id="99" name="TextBox 98"/>
+          <p:cNvSpPr txBox="1"/>
+          <p:nvPr/>
+        </p:nvSpPr>
+        <p:spPr>
+          <a:xfrm>
+            <a:off x="5562523" y="5541264"/>
+            <a:ext cx="1685467" cy="146304"/>
+          </a:xfrm>
+          <a:prstGeom prst="rect">
+            <a:avLst/>
+          </a:prstGeom>
+          <a:noFill/>
+        </p:spPr>
+        <p:txBody>
+          <a:bodyPr wrap="square" anchor="ctr" lIns="0" tIns="0" rIns="0" bIns="0">
+            <a:noAutofit/>
+          </a:bodyPr>
+          <a:lstStyle/>
+          <a:p>
+            <a:pPr algn="l" latinLnBrk="0">
+              <a:lnSpc>
+                <a:spcPct val="100000"/>
+              </a:lnSpc>
+              <a:spcBef>
+                <a:spcPts val="0"/>
+              </a:spcBef>
+              <a:spcAft>
+                <a:spcPts val="0"/>
+              </a:spcAft>
+            </a:pPr>
+            <a:r>
+              <a:rPr sz="850" b="0">
+                <a:solidFill>
+                  <a:srgbClr val="7FA4BA"/>
+                </a:solidFill>
+                <a:latin typeface="Consolas"/>
+                <a:ea typeface="Microsoft YaHei"/>
+                <a:cs typeface="Microsoft YaHei"/>
+              </a:rPr>
+              <a:t>__ → __ tok/s</a:t>
+            </a:r>
+          </a:p>
+        </p:txBody>
+      </p:sp>
+      <p:sp>
+        <p:nvSpPr>
+          <p:cNvPr id="100" name="Rectangle 99"/>
+          <p:cNvSpPr/>
+          <p:nvPr/>
+        </p:nvSpPr>
+        <p:spPr>
+          <a:xfrm>
+            <a:off x="7540599" y="5084064"/>
+            <a:ext cx="1978075" cy="621792"/>
+          </a:xfrm>
+          <a:prstGeom prst="rect">
+            <a:avLst/>
+          </a:prstGeom>
+          <a:solidFill>
+            <a:srgbClr val="FFFFFF"/>
+          </a:solidFill>
+          <a:ln w="9525">
             <a:solidFill>
-              <a:srgbClr val="7FA4BA"/>
+              <a:srgbClr val="CFE3F0"/>
             </a:solidFill>
-            <a:tailEnd type="triangle" w="med" len="med"/>
           </a:ln>
         </p:spPr>
-      </p:cxnSp>
-      <p:sp>
-        <p:nvSpPr>
-          <p:cNvPr id="57" name="Rectangle 56"/>
+        <p:txBody>
+          <a:bodyPr rtlCol="0" anchor="ctr"/>
+          <a:lstStyle/>
+          <a:p>
+            <a:pPr algn="ctr"/>
+          </a:p>
+        </p:txBody>
+      </p:sp>
+      <p:sp>
+        <p:nvSpPr>
+          <p:cNvPr id="101" name="TextBox 100"/>
+          <p:cNvSpPr txBox="1"/>
+          <p:nvPr/>
+        </p:nvSpPr>
+        <p:spPr>
+          <a:xfrm>
+            <a:off x="7686903" y="5120640"/>
+            <a:ext cx="1685467" cy="182880"/>
+          </a:xfrm>
+          <a:prstGeom prst="rect">
+            <a:avLst/>
+          </a:prstGeom>
+          <a:noFill/>
+        </p:spPr>
+        <p:txBody>
+          <a:bodyPr wrap="square" anchor="ctr" lIns="0" tIns="0" rIns="0" bIns="0">
+            <a:noAutofit/>
+          </a:bodyPr>
+          <a:lstStyle/>
+          <a:p>
+            <a:pPr algn="l" latinLnBrk="0">
+              <a:lnSpc>
+                <a:spcPct val="100000"/>
+              </a:lnSpc>
+              <a:spcBef>
+                <a:spcPts val="0"/>
+              </a:spcBef>
+              <a:spcAft>
+                <a:spcPts val="0"/>
+              </a:spcAft>
+            </a:pPr>
+            <a:r>
+              <a:rPr sz="950" b="0">
+                <a:solidFill>
+                  <a:srgbClr val="40708B"/>
+                </a:solidFill>
+                <a:latin typeface="Consolas"/>
+                <a:ea typeface="Microsoft YaHei"/>
+                <a:cs typeface="Microsoft YaHei"/>
+              </a:rPr>
+              <a:t>c__</a:t>
+            </a:r>
+          </a:p>
+        </p:txBody>
+      </p:sp>
+      <p:sp>
+        <p:nvSpPr>
+          <p:cNvPr id="102" name="TextBox 101"/>
+          <p:cNvSpPr txBox="1"/>
+          <p:nvPr/>
+        </p:nvSpPr>
+        <p:spPr>
+          <a:xfrm>
+            <a:off x="7686903" y="5312664"/>
+            <a:ext cx="1685467" cy="219456"/>
+          </a:xfrm>
+          <a:prstGeom prst="rect">
+            <a:avLst/>
+          </a:prstGeom>
+          <a:noFill/>
+        </p:spPr>
+        <p:txBody>
+          <a:bodyPr wrap="square" anchor="ctr" lIns="0" tIns="0" rIns="0" bIns="0">
+            <a:noAutofit/>
+          </a:bodyPr>
+          <a:lstStyle/>
+          <a:p>
+            <a:pPr algn="l" latinLnBrk="0">
+              <a:lnSpc>
+                <a:spcPct val="100000"/>
+              </a:lnSpc>
+              <a:spcBef>
+                <a:spcPts val="0"/>
+              </a:spcBef>
+              <a:spcAft>
+                <a:spcPts val="0"/>
+              </a:spcAft>
+            </a:pPr>
+            <a:r>
+              <a:rPr sz="1500" b="1">
+                <a:solidFill>
+                  <a:srgbClr val="7FA4BA"/>
+                </a:solidFill>
+                <a:latin typeface="Arial"/>
+                <a:ea typeface="Microsoft YaHei"/>
+                <a:cs typeface="Microsoft YaHei"/>
+              </a:rPr>
+              <a:t>+__%</a:t>
+            </a:r>
+          </a:p>
+        </p:txBody>
+      </p:sp>
+      <p:sp>
+        <p:nvSpPr>
+          <p:cNvPr id="103" name="TextBox 102"/>
+          <p:cNvSpPr txBox="1"/>
+          <p:nvPr/>
+        </p:nvSpPr>
+        <p:spPr>
+          <a:xfrm>
+            <a:off x="7686903" y="5541264"/>
+            <a:ext cx="1685467" cy="146304"/>
+          </a:xfrm>
+          <a:prstGeom prst="rect">
+            <a:avLst/>
+          </a:prstGeom>
+          <a:noFill/>
+        </p:spPr>
+        <p:txBody>
+          <a:bodyPr wrap="square" anchor="ctr" lIns="0" tIns="0" rIns="0" bIns="0">
+            <a:noAutofit/>
+          </a:bodyPr>
+          <a:lstStyle/>
+          <a:p>
+            <a:pPr algn="l" latinLnBrk="0">
+              <a:lnSpc>
+                <a:spcPct val="100000"/>
+              </a:lnSpc>
+              <a:spcBef>
+                <a:spcPts val="0"/>
+              </a:spcBef>
+              <a:spcAft>
+                <a:spcPts val="0"/>
+              </a:spcAft>
+            </a:pPr>
+            <a:r>
+              <a:rPr sz="850" b="0">
+                <a:solidFill>
+                  <a:srgbClr val="7FA4BA"/>
+                </a:solidFill>
+                <a:latin typeface="Consolas"/>
+                <a:ea typeface="Microsoft YaHei"/>
+                <a:cs typeface="Microsoft YaHei"/>
+              </a:rPr>
+              <a:t>__ → __ tok/s</a:t>
+            </a:r>
+          </a:p>
+        </p:txBody>
+      </p:sp>
+      <p:sp>
+        <p:nvSpPr>
+          <p:cNvPr id="104" name="Rectangle 103"/>
           <p:cNvSpPr/>
           <p:nvPr/>
         </p:nvSpPr>
         <p:spPr>
           <a:xfrm>
-            <a:off x="9139732" y="5084064"/>
-            <a:ext cx="2503322" cy="621792"/>
+            <a:off x="9664979" y="5084064"/>
+            <a:ext cx="1978075" cy="621792"/>
           </a:xfrm>
           <a:prstGeom prst="rect">
             <a:avLst/>
@@ -5724,14 +7591,14 @@
       </p:sp>
       <p:sp>
         <p:nvSpPr>
-          <p:cNvPr id="58" name="TextBox 57"/>
-          <p:cNvSpPr txBox="1"/>
-          <p:nvPr/>
-        </p:nvSpPr>
-        <p:spPr>
-          <a:xfrm>
-            <a:off x="9322612" y="5157216"/>
-            <a:ext cx="2137562" cy="201168"/>
+          <p:cNvPr id="105" name="TextBox 104"/>
+          <p:cNvSpPr txBox="1"/>
+          <p:nvPr/>
+        </p:nvSpPr>
+        <p:spPr>
+          <a:xfrm>
+            <a:off x="9811283" y="5120640"/>
+            <a:ext cx="1685467" cy="182880"/>
           </a:xfrm>
           <a:prstGeom prst="rect">
             <a:avLst/>
@@ -5760,25 +7627,25 @@
                 <a:solidFill>
                   <a:srgbClr val="0F62CE"/>
                 </a:solidFill>
-                <a:latin typeface="Microsoft YaHei"/>
-                <a:ea typeface="Microsoft YaHei"/>
-                <a:cs typeface="Microsoft YaHei"/>
-              </a:rPr>
-              <a:t>交付</a:t>
-            </a:r>
-          </a:p>
-        </p:txBody>
-      </p:sp>
-      <p:sp>
-        <p:nvSpPr>
-          <p:cNvPr id="59" name="TextBox 58"/>
-          <p:cNvSpPr txBox="1"/>
-          <p:nvPr/>
-        </p:nvSpPr>
-        <p:spPr>
-          <a:xfrm>
-            <a:off x="9322612" y="5376672"/>
-            <a:ext cx="2137562" cy="274320"/>
+                <a:latin typeface="Consolas"/>
+                <a:ea typeface="Microsoft YaHei"/>
+                <a:cs typeface="Microsoft YaHei"/>
+              </a:rPr>
+              <a:t>c128</a:t>
+            </a:r>
+          </a:p>
+        </p:txBody>
+      </p:sp>
+      <p:sp>
+        <p:nvSpPr>
+          <p:cNvPr id="106" name="TextBox 105"/>
+          <p:cNvSpPr txBox="1"/>
+          <p:nvPr/>
+        </p:nvSpPr>
+        <p:spPr>
+          <a:xfrm>
+            <a:off x="9811283" y="5312664"/>
+            <a:ext cx="1685467" cy="219456"/>
           </a:xfrm>
           <a:prstGeom prst="rect">
             <a:avLst/>
@@ -5803,7 +7670,7 @@
               </a:spcAft>
             </a:pPr>
             <a:r>
-              <a:rPr sz="1600" b="1">
+              <a:rPr sz="1500" b="1">
                 <a:solidFill>
                   <a:srgbClr val="0A2B45"/>
                 </a:solidFill>
@@ -5811,36 +7678,61 @@
                 <a:ea typeface="Microsoft YaHei"/>
                 <a:cs typeface="Microsoft YaHei"/>
               </a:rPr>
-              <a:t>2</a:t>
-            </a:r>
-          </a:p>
-        </p:txBody>
-      </p:sp>
-      <p:cxnSp>
-        <p:nvCxnSpPr>
-          <p:cNvPr id="60" name="Connector 59"/>
-          <p:cNvCxnSpPr/>
-          <p:nvPr/>
-        </p:nvCxnSpPr>
-        <p:spPr>
-          <a:xfrm>
-            <a:off x="8810548" y="5394959"/>
-            <a:ext cx="237744" cy="0"/>
-          </a:xfrm>
-          <a:prstGeom prst="line">
-            <a:avLst/>
-          </a:prstGeom>
-          <a:ln w="15875">
-            <a:solidFill>
-              <a:srgbClr val="7FA4BA"/>
-            </a:solidFill>
-            <a:tailEnd type="triangle" w="med" len="med"/>
-          </a:ln>
-        </p:spPr>
-      </p:cxnSp>
-      <p:sp>
-        <p:nvSpPr>
-          <p:cNvPr id="61" name="Rectangle 60"/>
+              <a:t>+37%</a:t>
+            </a:r>
+          </a:p>
+        </p:txBody>
+      </p:sp>
+      <p:sp>
+        <p:nvSpPr>
+          <p:cNvPr id="107" name="TextBox 106"/>
+          <p:cNvSpPr txBox="1"/>
+          <p:nvPr/>
+        </p:nvSpPr>
+        <p:spPr>
+          <a:xfrm>
+            <a:off x="9811283" y="5541264"/>
+            <a:ext cx="1685467" cy="146304"/>
+          </a:xfrm>
+          <a:prstGeom prst="rect">
+            <a:avLst/>
+          </a:prstGeom>
+          <a:noFill/>
+        </p:spPr>
+        <p:txBody>
+          <a:bodyPr wrap="square" anchor="ctr" lIns="0" tIns="0" rIns="0" bIns="0">
+            <a:noAutofit/>
+          </a:bodyPr>
+          <a:lstStyle/>
+          <a:p>
+            <a:pPr algn="l" latinLnBrk="0">
+              <a:lnSpc>
+                <a:spcPct val="100000"/>
+              </a:lnSpc>
+              <a:spcBef>
+                <a:spcPts val="0"/>
+              </a:spcBef>
+              <a:spcAft>
+                <a:spcPts val="0"/>
+              </a:spcAft>
+            </a:pPr>
+            <a:r>
+              <a:rPr sz="850" b="0">
+                <a:solidFill>
+                  <a:srgbClr val="40708B"/>
+                </a:solidFill>
+                <a:latin typeface="Consolas"/>
+                <a:ea typeface="Microsoft YaHei"/>
+                <a:cs typeface="Microsoft YaHei"/>
+              </a:rPr>
+              <a:t>1370 → 1883 tok/s</a:t>
+            </a:r>
+          </a:p>
+        </p:txBody>
+      </p:sp>
+      <p:sp>
+        <p:nvSpPr>
+          <p:cNvPr id="108" name="Rectangle 107"/>
           <p:cNvSpPr/>
           <p:nvPr/>
         </p:nvSpPr>
@@ -5869,7 +7761,7 @@
       </p:sp>
       <p:sp>
         <p:nvSpPr>
-          <p:cNvPr id="62" name="Rectangle 61"/>
+          <p:cNvPr id="109" name="Rectangle 108"/>
           <p:cNvSpPr/>
           <p:nvPr/>
         </p:nvSpPr>
@@ -5898,7 +7790,7 @@
       </p:sp>
       <p:sp>
         <p:nvSpPr>
-          <p:cNvPr id="63" name="TextBox 62"/>
+          <p:cNvPr id="110" name="TextBox 109"/>
           <p:cNvSpPr txBox="1"/>
           <p:nvPr/>
         </p:nvSpPr>
@@ -5949,14 +7841,14 @@
                 <a:ea typeface="Microsoft YaHei"/>
                 <a:cs typeface="Microsoft YaHei"/>
               </a:rPr>
-              <a:t>两个交付都在替换小核；闭源 grouped-GEMM 的旋钮调不动，占比不到 1% 的核再快也不接线</a:t>
-            </a:r>
-          </a:p>
-        </p:txBody>
-      </p:sp>
-      <p:sp>
-        <p:nvSpPr>
-          <p:cNvPr id="64" name="TextBox 63"/>
+              <a:t>待填：离上界最远、占比又大的是谁——五组候选是不是都打在它上面</a:t>
+            </a:r>
+          </a:p>
+        </p:txBody>
+      </p:sp>
+      <p:sp>
+        <p:nvSpPr>
+          <p:cNvPr id="111" name="TextBox 110"/>
           <p:cNvSpPr txBox="1"/>
           <p:nvPr/>
         </p:nvSpPr>
@@ -5988,6 +7880,17 @@
               </a:spcAft>
             </a:pPr>
             <a:r>
+              <a:rPr sz="1000" b="1">
+                <a:solidFill>
+                  <a:srgbClr val="D4147A"/>
+                </a:solidFill>
+                <a:latin typeface="Microsoft YaHei"/>
+                <a:ea typeface="Microsoft YaHei"/>
+                <a:cs typeface="Microsoft YaHei"/>
+              </a:rPr>
+              <a:t>合并版　</a:t>
+            </a:r>
+            <a:r>
               <a:rPr sz="1000" b="0">
                 <a:solidFill>
                   <a:srgbClr val="40708B"/>
@@ -5996,7 +7899,7 @@
                 <a:ea typeface="Microsoft YaHei"/>
                 <a:cs typeface="Microsoft YaHei"/>
               </a:rPr>
-              <a:t>C 列是内核或微基准读数，D 列是整步或端到端读数，两列口径不同、不能互相换算；表中全部为 M100 单卡 TP1</a:t>
+              <a:t>左图要一次 c128 decode 的 Trace 加每类 FLOP 与访存字节；右表沿用上一版；下排要吞吐全矩阵</a:t>
             </a:r>
           </a:p>
         </p:txBody>
@@ -6010,6 +7913,2936 @@
 </file>
 
 <file path=ppt/slides/slide2.xml><?xml version="1.0" encoding="utf-8"?>
+<p:sld xmlns:a="http://schemas.openxmlformats.org/drawingml/2006/main" xmlns:p="http://schemas.openxmlformats.org/presentationml/2006/main" xmlns:r="http://schemas.openxmlformats.org/officeDocument/2006/relationships">
+  <p:cSld>
+    <p:spTree>
+      <p:nvGrpSpPr>
+        <p:cNvPr id="1" name=""/>
+        <p:cNvGrpSpPr/>
+        <p:nvPr/>
+      </p:nvGrpSpPr>
+      <p:grpSpPr/>
+      <p:pic>
+        <p:nvPicPr>
+          <p:cNvPr id="2" name="Picture 1" descr="tpl_bg.png"/>
+          <p:cNvPicPr>
+            <a:picLocks noChangeAspect="1"/>
+          </p:cNvPicPr>
+          <p:nvPr/>
+        </p:nvPicPr>
+        <p:blipFill>
+          <a:blip r:embed="rId2"/>
+          <a:stretch>
+            <a:fillRect/>
+          </a:stretch>
+        </p:blipFill>
+        <p:spPr>
+          <a:xfrm>
+            <a:off x="0" y="0"/>
+            <a:ext cx="12191695" cy="6858000"/>
+          </a:xfrm>
+          <a:prstGeom prst="rect">
+            <a:avLst/>
+          </a:prstGeom>
+        </p:spPr>
+      </p:pic>
+      <p:sp>
+        <p:nvSpPr>
+          <p:cNvPr id="3" name="Rectangle 2"/>
+          <p:cNvSpPr/>
+          <p:nvPr/>
+        </p:nvSpPr>
+        <p:spPr>
+          <a:xfrm>
+            <a:off x="548640" y="420624"/>
+            <a:ext cx="50292" cy="237744"/>
+          </a:xfrm>
+          <a:prstGeom prst="rect">
+            <a:avLst/>
+          </a:prstGeom>
+          <a:solidFill>
+            <a:srgbClr val="D4147A"/>
+          </a:solidFill>
+          <a:ln>
+            <a:noFill/>
+          </a:ln>
+        </p:spPr>
+        <p:txBody>
+          <a:bodyPr rtlCol="0" anchor="ctr"/>
+          <a:lstStyle/>
+          <a:p>
+            <a:pPr algn="ctr"/>
+          </a:p>
+        </p:txBody>
+      </p:sp>
+      <p:sp>
+        <p:nvSpPr>
+          <p:cNvPr id="4" name="TextBox 3"/>
+          <p:cNvSpPr txBox="1"/>
+          <p:nvPr/>
+        </p:nvSpPr>
+        <p:spPr>
+          <a:xfrm>
+            <a:off x="713232" y="384048"/>
+            <a:ext cx="9427464" cy="292608"/>
+          </a:xfrm>
+          <a:prstGeom prst="rect">
+            <a:avLst/>
+          </a:prstGeom>
+          <a:noFill/>
+        </p:spPr>
+        <p:txBody>
+          <a:bodyPr wrap="square" anchor="ctr" lIns="0" tIns="0" rIns="0" bIns="0">
+            <a:noAutofit/>
+          </a:bodyPr>
+          <a:lstStyle/>
+          <a:p>
+            <a:pPr algn="l" latinLnBrk="0">
+              <a:lnSpc>
+                <a:spcPct val="100000"/>
+              </a:lnSpc>
+              <a:spcBef>
+                <a:spcPts val="0"/>
+              </a:spcBef>
+              <a:spcAft>
+                <a:spcPts val="0"/>
+              </a:spcAft>
+            </a:pPr>
+            <a:r>
+              <a:rPr sz="1100" b="1">
+                <a:solidFill>
+                  <a:srgbClr val="D4147A"/>
+                </a:solidFill>
+                <a:latin typeface="Consolas"/>
+                <a:ea typeface="Microsoft YaHei"/>
+                <a:cs typeface="Microsoft YaHei"/>
+              </a:rPr>
+              <a:t>模型层 · 一次完整的候选迭代</a:t>
+            </a:r>
+          </a:p>
+        </p:txBody>
+      </p:sp>
+      <p:sp>
+        <p:nvSpPr>
+          <p:cNvPr id="5" name="TextBox 4"/>
+          <p:cNvSpPr txBox="1"/>
+          <p:nvPr/>
+        </p:nvSpPr>
+        <p:spPr>
+          <a:xfrm>
+            <a:off x="548640" y="731520"/>
+            <a:ext cx="9592056" cy="530352"/>
+          </a:xfrm>
+          <a:prstGeom prst="rect">
+            <a:avLst/>
+          </a:prstGeom>
+          <a:noFill/>
+        </p:spPr>
+        <p:txBody>
+          <a:bodyPr wrap="square" anchor="ctr" lIns="0" tIns="0" rIns="0" bIns="0">
+            <a:noAutofit/>
+          </a:bodyPr>
+          <a:lstStyle/>
+          <a:p>
+            <a:pPr algn="l" latinLnBrk="0">
+              <a:lnSpc>
+                <a:spcPct val="100000"/>
+              </a:lnSpc>
+              <a:spcBef>
+                <a:spcPts val="0"/>
+              </a:spcBef>
+              <a:spcAft>
+                <a:spcPts val="0"/>
+              </a:spcAft>
+            </a:pPr>
+            <a:r>
+              <a:rPr sz="2500" b="1">
+                <a:solidFill>
+                  <a:srgbClr val="0A2B45"/>
+                </a:solidFill>
+                <a:latin typeface="Microsoft YaHei"/>
+                <a:ea typeface="Microsoft YaHei"/>
+                <a:cs typeface="Microsoft YaHei"/>
+              </a:rPr>
+              <a:t>30B-A3B 单卡：10 个候选，5 个过三道门，峰值吞吐 +37%</a:t>
+            </a:r>
+          </a:p>
+        </p:txBody>
+      </p:sp>
+      <p:sp>
+        <p:nvSpPr>
+          <p:cNvPr id="6" name="TextBox 5"/>
+          <p:cNvSpPr txBox="1"/>
+          <p:nvPr/>
+        </p:nvSpPr>
+        <p:spPr>
+          <a:xfrm>
+            <a:off x="548640" y="1261872"/>
+            <a:ext cx="11094415" cy="329184"/>
+          </a:xfrm>
+          <a:prstGeom prst="rect">
+            <a:avLst/>
+          </a:prstGeom>
+          <a:noFill/>
+        </p:spPr>
+        <p:txBody>
+          <a:bodyPr wrap="square" anchor="ctr" lIns="0" tIns="0" rIns="0" bIns="0">
+            <a:noAutofit/>
+          </a:bodyPr>
+          <a:lstStyle/>
+          <a:p>
+            <a:pPr algn="l" latinLnBrk="0">
+              <a:lnSpc>
+                <a:spcPct val="100000"/>
+              </a:lnSpc>
+              <a:spcBef>
+                <a:spcPts val="0"/>
+              </a:spcBef>
+              <a:spcAft>
+                <a:spcPts val="0"/>
+              </a:spcAft>
+            </a:pPr>
+            <a:r>
+              <a:rPr sz="1300" b="0">
+                <a:solidFill>
+                  <a:srgbClr val="1B4D69"/>
+                </a:solidFill>
+                <a:latin typeface="Microsoft YaHei"/>
+                <a:ea typeface="Microsoft YaHei"/>
+                <a:cs typeface="Microsoft YaHei"/>
+              </a:rPr>
+              <a:t>判定全部来自 M100 真机——数值不对、更慢的当场挡掉，占比太小的不接线</a:t>
+            </a:r>
+          </a:p>
+        </p:txBody>
+      </p:sp>
+      <p:sp>
+        <p:nvSpPr>
+          <p:cNvPr id="7" name="Rectangle 6"/>
+          <p:cNvSpPr/>
+          <p:nvPr/>
+        </p:nvSpPr>
+        <p:spPr>
+          <a:xfrm>
+            <a:off x="548640" y="1627632"/>
+            <a:ext cx="11094415" cy="292608"/>
+          </a:xfrm>
+          <a:prstGeom prst="rect">
+            <a:avLst/>
+          </a:prstGeom>
+          <a:solidFill>
+            <a:srgbClr val="FFFFFF"/>
+          </a:solidFill>
+          <a:ln>
+            <a:noFill/>
+          </a:ln>
+        </p:spPr>
+        <p:txBody>
+          <a:bodyPr rtlCol="0" anchor="ctr"/>
+          <a:lstStyle/>
+          <a:p>
+            <a:pPr algn="ctr"/>
+          </a:p>
+        </p:txBody>
+      </p:sp>
+      <p:sp>
+        <p:nvSpPr>
+          <p:cNvPr id="8" name="TextBox 7"/>
+          <p:cNvSpPr txBox="1"/>
+          <p:nvPr/>
+        </p:nvSpPr>
+        <p:spPr>
+          <a:xfrm>
+            <a:off x="731520" y="1627632"/>
+            <a:ext cx="10728655" cy="292608"/>
+          </a:xfrm>
+          <a:prstGeom prst="rect">
+            <a:avLst/>
+          </a:prstGeom>
+          <a:noFill/>
+        </p:spPr>
+        <p:txBody>
+          <a:bodyPr wrap="square" anchor="ctr" lIns="0" tIns="0" rIns="0" bIns="0">
+            <a:noAutofit/>
+          </a:bodyPr>
+          <a:lstStyle/>
+          <a:p>
+            <a:pPr algn="l" latinLnBrk="0">
+              <a:lnSpc>
+                <a:spcPct val="100000"/>
+              </a:lnSpc>
+              <a:spcBef>
+                <a:spcPts val="0"/>
+              </a:spcBef>
+              <a:spcAft>
+                <a:spcPts val="0"/>
+              </a:spcAft>
+            </a:pPr>
+            <a:r>
+              <a:rPr sz="1000" b="1">
+                <a:solidFill>
+                  <a:srgbClr val="0A2B45"/>
+                </a:solidFill>
+                <a:latin typeface="Microsoft YaHei"/>
+                <a:ea typeface="Microsoft YaHei"/>
+                <a:cs typeface="Microsoft YaHei"/>
+              </a:rPr>
+              <a:t>冻结口径　</a:t>
+            </a:r>
+            <a:r>
+              <a:rPr sz="950" b="1">
+                <a:solidFill>
+                  <a:srgbClr val="0F62CE"/>
+                </a:solidFill>
+                <a:latin typeface="Consolas"/>
+                <a:ea typeface="Microsoft YaHei"/>
+                <a:cs typeface="Microsoft YaHei"/>
+              </a:rPr>
+              <a:t>Qwen3-VL-30B-A3B-Instruct-channel-fp8</a:t>
+            </a:r>
+            <a:r>
+              <a:rPr sz="950" b="0">
+                <a:solidFill>
+                  <a:srgbClr val="1B4D69"/>
+                </a:solidFill>
+                <a:latin typeface="Microsoft YaHei"/>
+                <a:ea typeface="Microsoft YaHei"/>
+                <a:cs typeface="Microsoft YaHei"/>
+              </a:rPr>
+              <a:t>　128 专家 / top-8 · 48 层 · M100 单卡 TP1 · qsx8_lever2 env · 1K/1K · CG-on + overlap-on</a:t>
+            </a:r>
+            <a:r>
+              <a:rPr sz="1000" b="0">
+                <a:solidFill>
+                  <a:srgbClr val="40708B"/>
+                </a:solidFill>
+                <a:latin typeface="Microsoft YaHei"/>
+                <a:ea typeface="Microsoft YaHei"/>
+                <a:cs typeface="Microsoft YaHei"/>
+              </a:rPr>
+              <a:t>　主指标 持续输出 tok/s</a:t>
+            </a:r>
+          </a:p>
+        </p:txBody>
+      </p:sp>
+      <p:sp>
+        <p:nvSpPr>
+          <p:cNvPr id="9" name="Rectangle 8"/>
+          <p:cNvSpPr/>
+          <p:nvPr/>
+        </p:nvSpPr>
+        <p:spPr>
+          <a:xfrm>
+            <a:off x="548640" y="1975104"/>
+            <a:ext cx="2743200" cy="3017520"/>
+          </a:xfrm>
+          <a:prstGeom prst="rect">
+            <a:avLst/>
+          </a:prstGeom>
+          <a:solidFill>
+            <a:srgbClr val="FFFFFF"/>
+          </a:solidFill>
+          <a:ln>
+            <a:noFill/>
+          </a:ln>
+        </p:spPr>
+        <p:txBody>
+          <a:bodyPr rtlCol="0" anchor="ctr"/>
+          <a:lstStyle/>
+          <a:p>
+            <a:pPr algn="ctr"/>
+          </a:p>
+        </p:txBody>
+      </p:sp>
+      <p:sp>
+        <p:nvSpPr>
+          <p:cNvPr id="10" name="TextBox 9"/>
+          <p:cNvSpPr txBox="1"/>
+          <p:nvPr/>
+        </p:nvSpPr>
+        <p:spPr>
+          <a:xfrm>
+            <a:off x="749808" y="2048256"/>
+            <a:ext cx="2340864" cy="256032"/>
+          </a:xfrm>
+          <a:prstGeom prst="rect">
+            <a:avLst/>
+          </a:prstGeom>
+          <a:noFill/>
+        </p:spPr>
+        <p:txBody>
+          <a:bodyPr wrap="square" anchor="ctr" lIns="0" tIns="0" rIns="0" bIns="0">
+            <a:noAutofit/>
+          </a:bodyPr>
+          <a:lstStyle/>
+          <a:p>
+            <a:pPr algn="l" latinLnBrk="0">
+              <a:lnSpc>
+                <a:spcPct val="100000"/>
+              </a:lnSpc>
+              <a:spcBef>
+                <a:spcPts val="0"/>
+              </a:spcBef>
+              <a:spcAft>
+                <a:spcPts val="0"/>
+              </a:spcAft>
+            </a:pPr>
+            <a:r>
+              <a:rPr sz="1250" b="1">
+                <a:solidFill>
+                  <a:srgbClr val="0A2B45"/>
+                </a:solidFill>
+                <a:latin typeface="Microsoft YaHei"/>
+                <a:ea typeface="Microsoft YaHei"/>
+                <a:cs typeface="Microsoft YaHei"/>
+              </a:rPr>
+              <a:t>峰值吞吐</a:t>
+            </a:r>
+            <a:r>
+              <a:rPr sz="1000" b="0">
+                <a:solidFill>
+                  <a:srgbClr val="40708B"/>
+                </a:solidFill>
+                <a:latin typeface="Microsoft YaHei"/>
+                <a:ea typeface="Microsoft YaHei"/>
+                <a:cs typeface="Microsoft YaHei"/>
+              </a:rPr>
+              <a:t>　持续输出 tok/s</a:t>
+            </a:r>
+          </a:p>
+        </p:txBody>
+      </p:sp>
+      <p:sp>
+        <p:nvSpPr>
+          <p:cNvPr id="11" name="TextBox 10"/>
+          <p:cNvSpPr txBox="1"/>
+          <p:nvPr/>
+        </p:nvSpPr>
+        <p:spPr>
+          <a:xfrm>
+            <a:off x="749808" y="2340864"/>
+            <a:ext cx="2340864" cy="475488"/>
+          </a:xfrm>
+          <a:prstGeom prst="rect">
+            <a:avLst/>
+          </a:prstGeom>
+          <a:noFill/>
+        </p:spPr>
+        <p:txBody>
+          <a:bodyPr wrap="square" anchor="ctr" lIns="0" tIns="0" rIns="0" bIns="0">
+            <a:noAutofit/>
+          </a:bodyPr>
+          <a:lstStyle/>
+          <a:p>
+            <a:pPr algn="l" latinLnBrk="0">
+              <a:lnSpc>
+                <a:spcPct val="100000"/>
+              </a:lnSpc>
+              <a:spcBef>
+                <a:spcPts val="0"/>
+              </a:spcBef>
+              <a:spcAft>
+                <a:spcPts val="0"/>
+              </a:spcAft>
+            </a:pPr>
+            <a:r>
+              <a:rPr sz="2800" b="1">
+                <a:solidFill>
+                  <a:srgbClr val="0F62CE"/>
+                </a:solidFill>
+                <a:latin typeface="Arial"/>
+                <a:ea typeface="Microsoft YaHei"/>
+                <a:cs typeface="Microsoft YaHei"/>
+              </a:rPr>
+              <a:t>+37%</a:t>
+            </a:r>
+          </a:p>
+        </p:txBody>
+      </p:sp>
+      <p:sp>
+        <p:nvSpPr>
+          <p:cNvPr id="12" name="Rectangle 11"/>
+          <p:cNvSpPr/>
+          <p:nvPr/>
+        </p:nvSpPr>
+        <p:spPr>
+          <a:xfrm>
+            <a:off x="1005840" y="3416165"/>
+            <a:ext cx="640080" cy="918090"/>
+          </a:xfrm>
+          <a:prstGeom prst="rect">
+            <a:avLst/>
+          </a:prstGeom>
+          <a:solidFill>
+            <a:srgbClr val="AFCEE1"/>
+          </a:solidFill>
+          <a:ln>
+            <a:noFill/>
+          </a:ln>
+        </p:spPr>
+        <p:txBody>
+          <a:bodyPr rtlCol="0" anchor="ctr"/>
+          <a:lstStyle/>
+          <a:p>
+            <a:pPr algn="ctr"/>
+          </a:p>
+        </p:txBody>
+      </p:sp>
+      <p:sp>
+        <p:nvSpPr>
+          <p:cNvPr id="13" name="TextBox 12"/>
+          <p:cNvSpPr txBox="1"/>
+          <p:nvPr/>
+        </p:nvSpPr>
+        <p:spPr>
+          <a:xfrm>
+            <a:off x="777240" y="3160133"/>
+            <a:ext cx="1097280" cy="219456"/>
+          </a:xfrm>
+          <a:prstGeom prst="rect">
+            <a:avLst/>
+          </a:prstGeom>
+          <a:noFill/>
+        </p:spPr>
+        <p:txBody>
+          <a:bodyPr wrap="square" anchor="ctr" lIns="0" tIns="0" rIns="0" bIns="0">
+            <a:noAutofit/>
+          </a:bodyPr>
+          <a:lstStyle/>
+          <a:p>
+            <a:pPr algn="ctr" latinLnBrk="0">
+              <a:lnSpc>
+                <a:spcPct val="100000"/>
+              </a:lnSpc>
+              <a:spcBef>
+                <a:spcPts val="0"/>
+              </a:spcBef>
+              <a:spcAft>
+                <a:spcPts val="0"/>
+              </a:spcAft>
+            </a:pPr>
+            <a:r>
+              <a:rPr sz="1150" b="1">
+                <a:solidFill>
+                  <a:srgbClr val="0A2B45"/>
+                </a:solidFill>
+                <a:latin typeface="Arial"/>
+                <a:ea typeface="Microsoft YaHei"/>
+                <a:cs typeface="Microsoft YaHei"/>
+              </a:rPr>
+              <a:t>1370</a:t>
+            </a:r>
+          </a:p>
+        </p:txBody>
+      </p:sp>
+      <p:sp>
+        <p:nvSpPr>
+          <p:cNvPr id="14" name="TextBox 13"/>
+          <p:cNvSpPr txBox="1"/>
+          <p:nvPr/>
+        </p:nvSpPr>
+        <p:spPr>
+          <a:xfrm>
+            <a:off x="777240" y="4398264"/>
+            <a:ext cx="1097280" cy="201168"/>
+          </a:xfrm>
+          <a:prstGeom prst="rect">
+            <a:avLst/>
+          </a:prstGeom>
+          <a:noFill/>
+        </p:spPr>
+        <p:txBody>
+          <a:bodyPr wrap="square" anchor="ctr" lIns="0" tIns="0" rIns="0" bIns="0">
+            <a:noAutofit/>
+          </a:bodyPr>
+          <a:lstStyle/>
+          <a:p>
+            <a:pPr algn="ctr" latinLnBrk="0">
+              <a:lnSpc>
+                <a:spcPct val="100000"/>
+              </a:lnSpc>
+              <a:spcBef>
+                <a:spcPts val="0"/>
+              </a:spcBef>
+              <a:spcAft>
+                <a:spcPts val="0"/>
+              </a:spcAft>
+            </a:pPr>
+            <a:r>
+              <a:rPr sz="950" b="0">
+                <a:solidFill>
+                  <a:srgbClr val="1B4D69"/>
+                </a:solidFill>
+                <a:latin typeface="Microsoft YaHei"/>
+                <a:ea typeface="Microsoft YaHei"/>
+                <a:cs typeface="Microsoft YaHei"/>
+              </a:rPr>
+              <a:t>基线</a:t>
+            </a:r>
+          </a:p>
+        </p:txBody>
+      </p:sp>
+      <p:sp>
+        <p:nvSpPr>
+          <p:cNvPr id="15" name="Rectangle 14"/>
+          <p:cNvSpPr/>
+          <p:nvPr/>
+        </p:nvSpPr>
+        <p:spPr>
+          <a:xfrm>
+            <a:off x="2194560" y="3072384"/>
+            <a:ext cx="640080" cy="1261872"/>
+          </a:xfrm>
+          <a:prstGeom prst="rect">
+            <a:avLst/>
+          </a:prstGeom>
+          <a:solidFill>
+            <a:srgbClr val="0F62CE"/>
+          </a:solidFill>
+          <a:ln>
+            <a:noFill/>
+          </a:ln>
+        </p:spPr>
+        <p:txBody>
+          <a:bodyPr rtlCol="0" anchor="ctr"/>
+          <a:lstStyle/>
+          <a:p>
+            <a:pPr algn="ctr"/>
+          </a:p>
+        </p:txBody>
+      </p:sp>
+      <p:sp>
+        <p:nvSpPr>
+          <p:cNvPr id="16" name="TextBox 15"/>
+          <p:cNvSpPr txBox="1"/>
+          <p:nvPr/>
+        </p:nvSpPr>
+        <p:spPr>
+          <a:xfrm>
+            <a:off x="1965960" y="2816352"/>
+            <a:ext cx="1097280" cy="219456"/>
+          </a:xfrm>
+          <a:prstGeom prst="rect">
+            <a:avLst/>
+          </a:prstGeom>
+          <a:noFill/>
+        </p:spPr>
+        <p:txBody>
+          <a:bodyPr wrap="square" anchor="ctr" lIns="0" tIns="0" rIns="0" bIns="0">
+            <a:noAutofit/>
+          </a:bodyPr>
+          <a:lstStyle/>
+          <a:p>
+            <a:pPr algn="ctr" latinLnBrk="0">
+              <a:lnSpc>
+                <a:spcPct val="100000"/>
+              </a:lnSpc>
+              <a:spcBef>
+                <a:spcPts val="0"/>
+              </a:spcBef>
+              <a:spcAft>
+                <a:spcPts val="0"/>
+              </a:spcAft>
+            </a:pPr>
+            <a:r>
+              <a:rPr sz="1150" b="1">
+                <a:solidFill>
+                  <a:srgbClr val="0A2B45"/>
+                </a:solidFill>
+                <a:latin typeface="Arial"/>
+                <a:ea typeface="Microsoft YaHei"/>
+                <a:cs typeface="Microsoft YaHei"/>
+              </a:rPr>
+              <a:t>1883</a:t>
+            </a:r>
+          </a:p>
+        </p:txBody>
+      </p:sp>
+      <p:sp>
+        <p:nvSpPr>
+          <p:cNvPr id="17" name="TextBox 16"/>
+          <p:cNvSpPr txBox="1"/>
+          <p:nvPr/>
+        </p:nvSpPr>
+        <p:spPr>
+          <a:xfrm>
+            <a:off x="1965960" y="4398264"/>
+            <a:ext cx="1097280" cy="201168"/>
+          </a:xfrm>
+          <a:prstGeom prst="rect">
+            <a:avLst/>
+          </a:prstGeom>
+          <a:noFill/>
+        </p:spPr>
+        <p:txBody>
+          <a:bodyPr wrap="square" anchor="ctr" lIns="0" tIns="0" rIns="0" bIns="0">
+            <a:noAutofit/>
+          </a:bodyPr>
+          <a:lstStyle/>
+          <a:p>
+            <a:pPr algn="ctr" latinLnBrk="0">
+              <a:lnSpc>
+                <a:spcPct val="100000"/>
+              </a:lnSpc>
+              <a:spcBef>
+                <a:spcPts val="0"/>
+              </a:spcBef>
+              <a:spcAft>
+                <a:spcPts val="0"/>
+              </a:spcAft>
+            </a:pPr>
+            <a:r>
+              <a:rPr sz="950" b="0">
+                <a:solidFill>
+                  <a:srgbClr val="1B4D69"/>
+                </a:solidFill>
+                <a:latin typeface="Microsoft YaHei"/>
+                <a:ea typeface="Microsoft YaHei"/>
+                <a:cs typeface="Microsoft YaHei"/>
+              </a:rPr>
+              <a:t>交付</a:t>
+            </a:r>
+          </a:p>
+        </p:txBody>
+      </p:sp>
+      <p:cxnSp>
+        <p:nvCxnSpPr>
+          <p:cNvPr id="18" name="Connector 17"/>
+          <p:cNvCxnSpPr/>
+          <p:nvPr/>
+        </p:nvCxnSpPr>
+        <p:spPr>
+          <a:xfrm>
+            <a:off x="822959" y="4334256"/>
+            <a:ext cx="2194561" cy="0"/>
+          </a:xfrm>
+          <a:prstGeom prst="line">
+            <a:avLst/>
+          </a:prstGeom>
+          <a:ln w="12700">
+            <a:solidFill>
+              <a:srgbClr val="AFCEE1"/>
+            </a:solidFill>
+          </a:ln>
+        </p:spPr>
+      </p:cxnSp>
+      <p:sp>
+        <p:nvSpPr>
+          <p:cNvPr id="19" name="TextBox 18"/>
+          <p:cNvSpPr txBox="1"/>
+          <p:nvPr/>
+        </p:nvSpPr>
+        <p:spPr>
+          <a:xfrm>
+            <a:off x="749808" y="4681728"/>
+            <a:ext cx="2340864" cy="219456"/>
+          </a:xfrm>
+          <a:prstGeom prst="rect">
+            <a:avLst/>
+          </a:prstGeom>
+          <a:noFill/>
+        </p:spPr>
+        <p:txBody>
+          <a:bodyPr wrap="square" anchor="ctr" lIns="0" tIns="0" rIns="0" bIns="0">
+            <a:noAutofit/>
+          </a:bodyPr>
+          <a:lstStyle/>
+          <a:p>
+            <a:pPr algn="l" latinLnBrk="0">
+              <a:lnSpc>
+                <a:spcPct val="100000"/>
+              </a:lnSpc>
+              <a:spcBef>
+                <a:spcPts val="0"/>
+              </a:spcBef>
+              <a:spcAft>
+                <a:spcPts val="0"/>
+              </a:spcAft>
+            </a:pPr>
+            <a:r>
+              <a:rPr sz="900" b="0">
+                <a:solidFill>
+                  <a:srgbClr val="40708B"/>
+                </a:solidFill>
+                <a:latin typeface="Microsoft YaHei"/>
+                <a:ea typeface="Microsoft YaHei"/>
+                <a:cs typeface="Microsoft YaHei"/>
+              </a:rPr>
+              <a:t>基线峰值在 c128，1K/1K</a:t>
+            </a:r>
+          </a:p>
+        </p:txBody>
+      </p:sp>
+      <p:sp>
+        <p:nvSpPr>
+          <p:cNvPr id="20" name="Rectangle 19"/>
+          <p:cNvSpPr/>
+          <p:nvPr/>
+        </p:nvSpPr>
+        <p:spPr>
+          <a:xfrm>
+            <a:off x="3474720" y="1975104"/>
+            <a:ext cx="8168335" cy="3017520"/>
+          </a:xfrm>
+          <a:prstGeom prst="rect">
+            <a:avLst/>
+          </a:prstGeom>
+          <a:solidFill>
+            <a:srgbClr val="FFFFFF"/>
+          </a:solidFill>
+          <a:ln>
+            <a:noFill/>
+          </a:ln>
+        </p:spPr>
+        <p:txBody>
+          <a:bodyPr rtlCol="0" anchor="ctr"/>
+          <a:lstStyle/>
+          <a:p>
+            <a:pPr algn="ctr"/>
+          </a:p>
+        </p:txBody>
+      </p:sp>
+      <p:sp>
+        <p:nvSpPr>
+          <p:cNvPr id="21" name="TextBox 20"/>
+          <p:cNvSpPr txBox="1"/>
+          <p:nvPr/>
+        </p:nvSpPr>
+        <p:spPr>
+          <a:xfrm>
+            <a:off x="3675888" y="2048256"/>
+            <a:ext cx="7765999" cy="256032"/>
+          </a:xfrm>
+          <a:prstGeom prst="rect">
+            <a:avLst/>
+          </a:prstGeom>
+          <a:noFill/>
+        </p:spPr>
+        <p:txBody>
+          <a:bodyPr wrap="square" anchor="ctr" lIns="0" tIns="0" rIns="0" bIns="0">
+            <a:noAutofit/>
+          </a:bodyPr>
+          <a:lstStyle/>
+          <a:p>
+            <a:pPr algn="l" latinLnBrk="0">
+              <a:lnSpc>
+                <a:spcPct val="100000"/>
+              </a:lnSpc>
+              <a:spcBef>
+                <a:spcPts val="0"/>
+              </a:spcBef>
+              <a:spcAft>
+                <a:spcPts val="0"/>
+              </a:spcAft>
+            </a:pPr>
+            <a:r>
+              <a:rPr sz="1250" b="1">
+                <a:solidFill>
+                  <a:srgbClr val="0A2B45"/>
+                </a:solidFill>
+                <a:latin typeface="Microsoft YaHei"/>
+                <a:ea typeface="Microsoft YaHei"/>
+                <a:cs typeface="Microsoft YaHei"/>
+              </a:rPr>
+              <a:t>候选明细</a:t>
+            </a:r>
+            <a:r>
+              <a:rPr sz="1000" b="0">
+                <a:solidFill>
+                  <a:srgbClr val="40708B"/>
+                </a:solidFill>
+                <a:latin typeface="Microsoft YaHei"/>
+                <a:ea typeface="Microsoft YaHei"/>
+                <a:cs typeface="Microsoft YaHei"/>
+              </a:rPr>
+              <a:t>　五组，全部为单卡 TP1 口径</a:t>
+            </a:r>
+          </a:p>
+        </p:txBody>
+      </p:sp>
+      <p:sp>
+        <p:nvSpPr>
+          <p:cNvPr id="22" name="TextBox 21"/>
+          <p:cNvSpPr txBox="1"/>
+          <p:nvPr/>
+        </p:nvSpPr>
+        <p:spPr>
+          <a:xfrm>
+            <a:off x="3675888" y="2340864"/>
+            <a:ext cx="2651760" cy="219456"/>
+          </a:xfrm>
+          <a:prstGeom prst="rect">
+            <a:avLst/>
+          </a:prstGeom>
+          <a:noFill/>
+        </p:spPr>
+        <p:txBody>
+          <a:bodyPr wrap="square" anchor="ctr" lIns="0" tIns="0" rIns="0" bIns="0">
+            <a:noAutofit/>
+          </a:bodyPr>
+          <a:lstStyle/>
+          <a:p>
+            <a:pPr algn="l" latinLnBrk="0">
+              <a:lnSpc>
+                <a:spcPct val="100000"/>
+              </a:lnSpc>
+              <a:spcBef>
+                <a:spcPts val="0"/>
+              </a:spcBef>
+              <a:spcAft>
+                <a:spcPts val="0"/>
+              </a:spcAft>
+            </a:pPr>
+            <a:r>
+              <a:rPr sz="900" b="0">
+                <a:solidFill>
+                  <a:srgbClr val="7FA4BA"/>
+                </a:solidFill>
+                <a:latin typeface="Microsoft YaHei"/>
+                <a:ea typeface="Microsoft YaHei"/>
+                <a:cs typeface="Microsoft YaHei"/>
+              </a:rPr>
+              <a:t>改动</a:t>
+            </a:r>
+          </a:p>
+        </p:txBody>
+      </p:sp>
+      <p:sp>
+        <p:nvSpPr>
+          <p:cNvPr id="23" name="TextBox 22"/>
+          <p:cNvSpPr txBox="1"/>
+          <p:nvPr/>
+        </p:nvSpPr>
+        <p:spPr>
+          <a:xfrm>
+            <a:off x="6419088" y="2340864"/>
+            <a:ext cx="2002536" cy="219456"/>
+          </a:xfrm>
+          <a:prstGeom prst="rect">
+            <a:avLst/>
+          </a:prstGeom>
+          <a:noFill/>
+        </p:spPr>
+        <p:txBody>
+          <a:bodyPr wrap="square" anchor="ctr" lIns="0" tIns="0" rIns="0" bIns="0">
+            <a:noAutofit/>
+          </a:bodyPr>
+          <a:lstStyle/>
+          <a:p>
+            <a:pPr algn="l" latinLnBrk="0">
+              <a:lnSpc>
+                <a:spcPct val="100000"/>
+              </a:lnSpc>
+              <a:spcBef>
+                <a:spcPts val="0"/>
+              </a:spcBef>
+              <a:spcAft>
+                <a:spcPts val="0"/>
+              </a:spcAft>
+            </a:pPr>
+            <a:r>
+              <a:rPr sz="900" b="0">
+                <a:solidFill>
+                  <a:srgbClr val="7FA4BA"/>
+                </a:solidFill>
+                <a:latin typeface="Microsoft YaHei"/>
+                <a:ea typeface="Microsoft YaHei"/>
+                <a:cs typeface="Microsoft YaHei"/>
+              </a:rPr>
+              <a:t>C 筛选</a:t>
+            </a:r>
+          </a:p>
+        </p:txBody>
+      </p:sp>
+      <p:sp>
+        <p:nvSpPr>
+          <p:cNvPr id="24" name="TextBox 23"/>
+          <p:cNvSpPr txBox="1"/>
+          <p:nvPr/>
+        </p:nvSpPr>
+        <p:spPr>
+          <a:xfrm>
+            <a:off x="8513064" y="2340864"/>
+            <a:ext cx="1280160" cy="219456"/>
+          </a:xfrm>
+          <a:prstGeom prst="rect">
+            <a:avLst/>
+          </a:prstGeom>
+          <a:noFill/>
+        </p:spPr>
+        <p:txBody>
+          <a:bodyPr wrap="square" anchor="ctr" lIns="0" tIns="0" rIns="0" bIns="0">
+            <a:noAutofit/>
+          </a:bodyPr>
+          <a:lstStyle/>
+          <a:p>
+            <a:pPr algn="l" latinLnBrk="0">
+              <a:lnSpc>
+                <a:spcPct val="100000"/>
+              </a:lnSpc>
+              <a:spcBef>
+                <a:spcPts val="0"/>
+              </a:spcBef>
+              <a:spcAft>
+                <a:spcPts val="0"/>
+              </a:spcAft>
+            </a:pPr>
+            <a:r>
+              <a:rPr sz="900" b="0">
+                <a:solidFill>
+                  <a:srgbClr val="7FA4BA"/>
+                </a:solidFill>
+                <a:latin typeface="Microsoft YaHei"/>
+                <a:ea typeface="Microsoft YaHei"/>
+                <a:cs typeface="Microsoft YaHei"/>
+              </a:rPr>
+              <a:t>D 复验</a:t>
+            </a:r>
+          </a:p>
+        </p:txBody>
+      </p:sp>
+      <p:sp>
+        <p:nvSpPr>
+          <p:cNvPr id="25" name="TextBox 24"/>
+          <p:cNvSpPr txBox="1"/>
+          <p:nvPr/>
+        </p:nvSpPr>
+        <p:spPr>
+          <a:xfrm>
+            <a:off x="9884664" y="2340864"/>
+            <a:ext cx="1554480" cy="219456"/>
+          </a:xfrm>
+          <a:prstGeom prst="rect">
+            <a:avLst/>
+          </a:prstGeom>
+          <a:noFill/>
+        </p:spPr>
+        <p:txBody>
+          <a:bodyPr wrap="square" anchor="ctr" lIns="0" tIns="0" rIns="0" bIns="0">
+            <a:noAutofit/>
+          </a:bodyPr>
+          <a:lstStyle/>
+          <a:p>
+            <a:pPr algn="l" latinLnBrk="0">
+              <a:lnSpc>
+                <a:spcPct val="100000"/>
+              </a:lnSpc>
+              <a:spcBef>
+                <a:spcPts val="0"/>
+              </a:spcBef>
+              <a:spcAft>
+                <a:spcPts val="0"/>
+              </a:spcAft>
+            </a:pPr>
+            <a:r>
+              <a:rPr sz="900" b="0">
+                <a:solidFill>
+                  <a:srgbClr val="7FA4BA"/>
+                </a:solidFill>
+                <a:latin typeface="Microsoft YaHei"/>
+                <a:ea typeface="Microsoft YaHei"/>
+                <a:cs typeface="Microsoft YaHei"/>
+              </a:rPr>
+              <a:t>结论</a:t>
+            </a:r>
+          </a:p>
+        </p:txBody>
+      </p:sp>
+      <p:cxnSp>
+        <p:nvCxnSpPr>
+          <p:cNvPr id="26" name="Connector 25"/>
+          <p:cNvCxnSpPr/>
+          <p:nvPr/>
+        </p:nvCxnSpPr>
+        <p:spPr>
+          <a:xfrm>
+            <a:off x="3675888" y="2578608"/>
+            <a:ext cx="7765999" cy="0"/>
+          </a:xfrm>
+          <a:prstGeom prst="line">
+            <a:avLst/>
+          </a:prstGeom>
+          <a:ln w="9525">
+            <a:solidFill>
+              <a:srgbClr val="CFE3F0"/>
+            </a:solidFill>
+          </a:ln>
+        </p:spPr>
+      </p:cxnSp>
+      <p:sp>
+        <p:nvSpPr>
+          <p:cNvPr id="27" name="Rectangle 26"/>
+          <p:cNvSpPr/>
+          <p:nvPr/>
+        </p:nvSpPr>
+        <p:spPr>
+          <a:xfrm>
+            <a:off x="3602736" y="2633472"/>
+            <a:ext cx="7912303" cy="566928"/>
+          </a:xfrm>
+          <a:prstGeom prst="rect">
+            <a:avLst/>
+          </a:prstGeom>
+          <a:solidFill>
+            <a:srgbClr val="C9E1FC"/>
+          </a:solidFill>
+          <a:ln>
+            <a:noFill/>
+          </a:ln>
+        </p:spPr>
+        <p:txBody>
+          <a:bodyPr rtlCol="0" anchor="ctr"/>
+          <a:lstStyle/>
+          <a:p>
+            <a:pPr algn="ctr"/>
+          </a:p>
+        </p:txBody>
+      </p:sp>
+      <p:sp>
+        <p:nvSpPr>
+          <p:cNvPr id="28" name="TextBox 27"/>
+          <p:cNvSpPr txBox="1"/>
+          <p:nvPr/>
+        </p:nvSpPr>
+        <p:spPr>
+          <a:xfrm>
+            <a:off x="3675888" y="2633472"/>
+            <a:ext cx="2651760" cy="566928"/>
+          </a:xfrm>
+          <a:prstGeom prst="rect">
+            <a:avLst/>
+          </a:prstGeom>
+          <a:noFill/>
+        </p:spPr>
+        <p:txBody>
+          <a:bodyPr wrap="square" anchor="ctr" lIns="0" tIns="0" rIns="0" bIns="0">
+            <a:noAutofit/>
+          </a:bodyPr>
+          <a:lstStyle/>
+          <a:p>
+            <a:pPr algn="l" latinLnBrk="0">
+              <a:lnSpc>
+                <a:spcPct val="100000"/>
+              </a:lnSpc>
+              <a:spcBef>
+                <a:spcPts val="0"/>
+              </a:spcBef>
+              <a:spcAft>
+                <a:spcPts val="0"/>
+              </a:spcAft>
+            </a:pPr>
+            <a:r>
+              <a:rPr sz="950" b="0">
+                <a:solidFill>
+                  <a:srgbClr val="0A2B45"/>
+                </a:solidFill>
+                <a:latin typeface="Microsoft YaHei"/>
+                <a:ea typeface="Microsoft YaHei"/>
+                <a:cs typeface="Microsoft YaHei"/>
+              </a:rPr>
+              <a:t>融合 swiglu + 动态量化</a:t>
+            </a:r>
+          </a:p>
+          <a:p>
+            <a:pPr algn="l" latinLnBrk="0">
+              <a:lnSpc>
+                <a:spcPct val="100000"/>
+              </a:lnSpc>
+              <a:spcBef>
+                <a:spcPts val="0"/>
+              </a:spcBef>
+              <a:spcAft>
+                <a:spcPts val="0"/>
+              </a:spcAft>
+            </a:pPr>
+            <a:r>
+              <a:rPr sz="950" b="0">
+                <a:solidFill>
+                  <a:srgbClr val="0A2B45"/>
+                </a:solidFill>
+                <a:latin typeface="Microsoft YaHei"/>
+                <a:ea typeface="Microsoft YaHei"/>
+                <a:cs typeface="Microsoft YaHei"/>
+              </a:rPr>
+              <a:t>替掉散点 elementwise 3.08 ms</a:t>
+            </a:r>
+          </a:p>
+          <a:p>
+            <a:pPr algn="l" latinLnBrk="0">
+              <a:lnSpc>
+                <a:spcPct val="100000"/>
+              </a:lnSpc>
+              <a:spcBef>
+                <a:spcPts val="0"/>
+              </a:spcBef>
+              <a:spcAft>
+                <a:spcPts val="0"/>
+              </a:spcAft>
+            </a:pPr>
+            <a:r>
+              <a:rPr sz="950" b="0">
+                <a:solidFill>
+                  <a:srgbClr val="0A2B45"/>
+                </a:solidFill>
+                <a:latin typeface="Microsoft YaHei"/>
+                <a:ea typeface="Microsoft YaHei"/>
+                <a:cs typeface="Microsoft YaHei"/>
+              </a:rPr>
+              <a:t>+ per-token quant 0.43 ms</a:t>
+            </a:r>
+          </a:p>
+        </p:txBody>
+      </p:sp>
+      <p:sp>
+        <p:nvSpPr>
+          <p:cNvPr id="29" name="TextBox 28"/>
+          <p:cNvSpPr txBox="1"/>
+          <p:nvPr/>
+        </p:nvSpPr>
+        <p:spPr>
+          <a:xfrm>
+            <a:off x="6419088" y="2633472"/>
+            <a:ext cx="2002536" cy="566928"/>
+          </a:xfrm>
+          <a:prstGeom prst="rect">
+            <a:avLst/>
+          </a:prstGeom>
+          <a:noFill/>
+        </p:spPr>
+        <p:txBody>
+          <a:bodyPr wrap="square" anchor="ctr" lIns="0" tIns="0" rIns="0" bIns="0">
+            <a:noAutofit/>
+          </a:bodyPr>
+          <a:lstStyle/>
+          <a:p>
+            <a:pPr algn="l" latinLnBrk="0">
+              <a:lnSpc>
+                <a:spcPct val="100000"/>
+              </a:lnSpc>
+              <a:spcBef>
+                <a:spcPts val="0"/>
+              </a:spcBef>
+              <a:spcAft>
+                <a:spcPts val="0"/>
+              </a:spcAft>
+            </a:pPr>
+            <a:r>
+              <a:rPr sz="950" b="0">
+                <a:solidFill>
+                  <a:srgbClr val="1B4D69"/>
+                </a:solidFill>
+                <a:latin typeface="Microsoft YaHei"/>
+                <a:ea typeface="Microsoft YaHei"/>
+                <a:cs typeface="Microsoft YaHei"/>
+              </a:rPr>
+              <a:t>单核 1.75 ms/步</a:t>
+            </a:r>
+          </a:p>
+        </p:txBody>
+      </p:sp>
+      <p:sp>
+        <p:nvSpPr>
+          <p:cNvPr id="30" name="TextBox 29"/>
+          <p:cNvSpPr txBox="1"/>
+          <p:nvPr/>
+        </p:nvSpPr>
+        <p:spPr>
+          <a:xfrm>
+            <a:off x="8513064" y="2633472"/>
+            <a:ext cx="1280160" cy="566928"/>
+          </a:xfrm>
+          <a:prstGeom prst="rect">
+            <a:avLst/>
+          </a:prstGeom>
+          <a:noFill/>
+        </p:spPr>
+        <p:txBody>
+          <a:bodyPr wrap="square" anchor="ctr" lIns="0" tIns="0" rIns="0" bIns="0">
+            <a:noAutofit/>
+          </a:bodyPr>
+          <a:lstStyle/>
+          <a:p>
+            <a:pPr algn="l" latinLnBrk="0">
+              <a:lnSpc>
+                <a:spcPct val="100000"/>
+              </a:lnSpc>
+              <a:spcBef>
+                <a:spcPts val="0"/>
+              </a:spcBef>
+              <a:spcAft>
+                <a:spcPts val="0"/>
+              </a:spcAft>
+            </a:pPr>
+            <a:r>
+              <a:rPr sz="950" b="0">
+                <a:solidFill>
+                  <a:srgbClr val="1B4D69"/>
+                </a:solidFill>
+                <a:latin typeface="Microsoft YaHei"/>
+                <a:ea typeface="Microsoft YaHei"/>
+                <a:cs typeface="Microsoft YaHei"/>
+              </a:rPr>
+              <a:t>device 单步时间</a:t>
+            </a:r>
+          </a:p>
+          <a:p>
+            <a:pPr algn="l" latinLnBrk="0">
+              <a:lnSpc>
+                <a:spcPct val="100000"/>
+              </a:lnSpc>
+              <a:spcBef>
+                <a:spcPts val="0"/>
+              </a:spcBef>
+              <a:spcAft>
+                <a:spcPts val="0"/>
+              </a:spcAft>
+            </a:pPr>
+            <a:r>
+              <a:rPr sz="950" b="0">
+                <a:solidFill>
+                  <a:srgbClr val="1B4D69"/>
+                </a:solidFill>
+                <a:latin typeface="Microsoft YaHei"/>
+                <a:ea typeface="Microsoft YaHei"/>
+                <a:cs typeface="Microsoft YaHei"/>
+              </a:rPr>
+              <a:t>24.7 → 22.2 ms</a:t>
+            </a:r>
+          </a:p>
+        </p:txBody>
+      </p:sp>
+      <p:sp>
+        <p:nvSpPr>
+          <p:cNvPr id="31" name="TextBox 30"/>
+          <p:cNvSpPr txBox="1"/>
+          <p:nvPr/>
+        </p:nvSpPr>
+        <p:spPr>
+          <a:xfrm>
+            <a:off x="9884664" y="2633472"/>
+            <a:ext cx="1554480" cy="566928"/>
+          </a:xfrm>
+          <a:prstGeom prst="rect">
+            <a:avLst/>
+          </a:prstGeom>
+          <a:noFill/>
+        </p:spPr>
+        <p:txBody>
+          <a:bodyPr wrap="square" anchor="ctr" lIns="0" tIns="0" rIns="0" bIns="0">
+            <a:noAutofit/>
+          </a:bodyPr>
+          <a:lstStyle/>
+          <a:p>
+            <a:pPr algn="l" latinLnBrk="0">
+              <a:lnSpc>
+                <a:spcPct val="100000"/>
+              </a:lnSpc>
+              <a:spcBef>
+                <a:spcPts val="0"/>
+              </a:spcBef>
+              <a:spcAft>
+                <a:spcPts val="0"/>
+              </a:spcAft>
+            </a:pPr>
+            <a:r>
+              <a:rPr sz="950" b="1">
+                <a:solidFill>
+                  <a:srgbClr val="0F62CE"/>
+                </a:solidFill>
+                <a:latin typeface="Microsoft YaHei"/>
+                <a:ea typeface="Microsoft YaHei"/>
+                <a:cs typeface="Microsoft YaHei"/>
+              </a:rPr>
+              <a:t>交付，全矩阵 +22~38%</a:t>
+            </a:r>
+          </a:p>
+        </p:txBody>
+      </p:sp>
+      <p:sp>
+        <p:nvSpPr>
+          <p:cNvPr id="32" name="Rectangle 31"/>
+          <p:cNvSpPr/>
+          <p:nvPr/>
+        </p:nvSpPr>
+        <p:spPr>
+          <a:xfrm>
+            <a:off x="3602736" y="3236976"/>
+            <a:ext cx="7912303" cy="420624"/>
+          </a:xfrm>
+          <a:prstGeom prst="rect">
+            <a:avLst/>
+          </a:prstGeom>
+          <a:solidFill>
+            <a:srgbClr val="C9E1FC"/>
+          </a:solidFill>
+          <a:ln>
+            <a:noFill/>
+          </a:ln>
+        </p:spPr>
+        <p:txBody>
+          <a:bodyPr rtlCol="0" anchor="ctr"/>
+          <a:lstStyle/>
+          <a:p>
+            <a:pPr algn="ctr"/>
+          </a:p>
+        </p:txBody>
+      </p:sp>
+      <p:sp>
+        <p:nvSpPr>
+          <p:cNvPr id="33" name="TextBox 32"/>
+          <p:cNvSpPr txBox="1"/>
+          <p:nvPr/>
+        </p:nvSpPr>
+        <p:spPr>
+          <a:xfrm>
+            <a:off x="3675888" y="3236976"/>
+            <a:ext cx="2651760" cy="420624"/>
+          </a:xfrm>
+          <a:prstGeom prst="rect">
+            <a:avLst/>
+          </a:prstGeom>
+          <a:noFill/>
+        </p:spPr>
+        <p:txBody>
+          <a:bodyPr wrap="square" anchor="ctr" lIns="0" tIns="0" rIns="0" bIns="0">
+            <a:noAutofit/>
+          </a:bodyPr>
+          <a:lstStyle/>
+          <a:p>
+            <a:pPr algn="l" latinLnBrk="0">
+              <a:lnSpc>
+                <a:spcPct val="100000"/>
+              </a:lnSpc>
+              <a:spcBef>
+                <a:spcPts val="0"/>
+              </a:spcBef>
+              <a:spcAft>
+                <a:spcPts val="0"/>
+              </a:spcAft>
+            </a:pPr>
+            <a:r>
+              <a:rPr sz="950" b="0">
+                <a:solidFill>
+                  <a:srgbClr val="0A2B45"/>
+                </a:solidFill>
+                <a:latin typeface="Microsoft YaHei"/>
+                <a:ea typeface="Microsoft YaHei"/>
+                <a:cs typeface="Microsoft YaHei"/>
+              </a:rPr>
+              <a:t>量化 + shuffle 换 SDNN 恒定核</a:t>
+            </a:r>
+          </a:p>
+          <a:p>
+            <a:pPr algn="l" latinLnBrk="0">
+              <a:lnSpc>
+                <a:spcPct val="100000"/>
+              </a:lnSpc>
+              <a:spcBef>
+                <a:spcPts val="0"/>
+              </a:spcBef>
+              <a:spcAft>
+                <a:spcPts val="0"/>
+              </a:spcAft>
+            </a:pPr>
+            <a:r>
+              <a:rPr sz="950" b="0">
+                <a:solidFill>
+                  <a:srgbClr val="0A2B45"/>
+                </a:solidFill>
+                <a:latin typeface="Microsoft YaHei"/>
+                <a:ea typeface="Microsoft YaHei"/>
+                <a:cs typeface="Microsoft YaHei"/>
+              </a:rPr>
+              <a:t>现用核随 rows×hidden 从 20 涨到 141 µs</a:t>
+            </a:r>
+          </a:p>
+        </p:txBody>
+      </p:sp>
+      <p:sp>
+        <p:nvSpPr>
+          <p:cNvPr id="34" name="TextBox 33"/>
+          <p:cNvSpPr txBox="1"/>
+          <p:nvPr/>
+        </p:nvSpPr>
+        <p:spPr>
+          <a:xfrm>
+            <a:off x="6419088" y="3236976"/>
+            <a:ext cx="2002536" cy="420624"/>
+          </a:xfrm>
+          <a:prstGeom prst="rect">
+            <a:avLst/>
+          </a:prstGeom>
+          <a:noFill/>
+        </p:spPr>
+        <p:txBody>
+          <a:bodyPr wrap="square" anchor="ctr" lIns="0" tIns="0" rIns="0" bIns="0">
+            <a:noAutofit/>
+          </a:bodyPr>
+          <a:lstStyle/>
+          <a:p>
+            <a:pPr algn="l" latinLnBrk="0">
+              <a:lnSpc>
+                <a:spcPct val="100000"/>
+              </a:lnSpc>
+              <a:spcBef>
+                <a:spcPts val="0"/>
+              </a:spcBef>
+              <a:spcAft>
+                <a:spcPts val="0"/>
+              </a:spcAft>
+            </a:pPr>
+            <a:r>
+              <a:rPr sz="950" b="0">
+                <a:solidFill>
+                  <a:srgbClr val="1B4D69"/>
+                </a:solidFill>
+                <a:latin typeface="Microsoft YaHei"/>
+                <a:ea typeface="Microsoft YaHei"/>
+                <a:cs typeface="Microsoft YaHei"/>
+              </a:rPr>
+              <a:t>微基准 c128 5.43×，cos = 1.0</a:t>
+            </a:r>
+          </a:p>
+        </p:txBody>
+      </p:sp>
+      <p:sp>
+        <p:nvSpPr>
+          <p:cNvPr id="35" name="TextBox 34"/>
+          <p:cNvSpPr txBox="1"/>
+          <p:nvPr/>
+        </p:nvSpPr>
+        <p:spPr>
+          <a:xfrm>
+            <a:off x="8513064" y="3236976"/>
+            <a:ext cx="1280160" cy="420624"/>
+          </a:xfrm>
+          <a:prstGeom prst="rect">
+            <a:avLst/>
+          </a:prstGeom>
+          <a:noFill/>
+        </p:spPr>
+        <p:txBody>
+          <a:bodyPr wrap="square" anchor="ctr" lIns="0" tIns="0" rIns="0" bIns="0">
+            <a:noAutofit/>
+          </a:bodyPr>
+          <a:lstStyle/>
+          <a:p>
+            <a:pPr algn="l" latinLnBrk="0">
+              <a:lnSpc>
+                <a:spcPct val="100000"/>
+              </a:lnSpc>
+              <a:spcBef>
+                <a:spcPts val="0"/>
+              </a:spcBef>
+              <a:spcAft>
+                <a:spcPts val="0"/>
+              </a:spcAft>
+            </a:pPr>
+            <a:r>
+              <a:rPr sz="950" b="0">
+                <a:solidFill>
+                  <a:srgbClr val="1B4D69"/>
+                </a:solidFill>
+                <a:latin typeface="Microsoft YaHei"/>
+                <a:ea typeface="Microsoft YaHei"/>
+                <a:cs typeface="Microsoft YaHei"/>
+              </a:rPr>
+              <a:t>E2E 吞吐 +3%</a:t>
+            </a:r>
+          </a:p>
+          <a:p>
+            <a:pPr algn="l" latinLnBrk="0">
+              <a:lnSpc>
+                <a:spcPct val="100000"/>
+              </a:lnSpc>
+              <a:spcBef>
+                <a:spcPts val="0"/>
+              </a:spcBef>
+              <a:spcAft>
+                <a:spcPts val="0"/>
+              </a:spcAft>
+            </a:pPr>
+            <a:r>
+              <a:rPr sz="950" b="0">
+                <a:solidFill>
+                  <a:srgbClr val="1B4D69"/>
+                </a:solidFill>
+                <a:latin typeface="Microsoft YaHei"/>
+                <a:ea typeface="Microsoft YaHei"/>
+                <a:cs typeface="Microsoft YaHei"/>
+              </a:rPr>
+              <a:t>TPOT −3.4%</a:t>
+            </a:r>
+          </a:p>
+        </p:txBody>
+      </p:sp>
+      <p:sp>
+        <p:nvSpPr>
+          <p:cNvPr id="36" name="TextBox 35"/>
+          <p:cNvSpPr txBox="1"/>
+          <p:nvPr/>
+        </p:nvSpPr>
+        <p:spPr>
+          <a:xfrm>
+            <a:off x="9884664" y="3236976"/>
+            <a:ext cx="1554480" cy="420624"/>
+          </a:xfrm>
+          <a:prstGeom prst="rect">
+            <a:avLst/>
+          </a:prstGeom>
+          <a:noFill/>
+        </p:spPr>
+        <p:txBody>
+          <a:bodyPr wrap="square" anchor="ctr" lIns="0" tIns="0" rIns="0" bIns="0">
+            <a:noAutofit/>
+          </a:bodyPr>
+          <a:lstStyle/>
+          <a:p>
+            <a:pPr algn="l" latinLnBrk="0">
+              <a:lnSpc>
+                <a:spcPct val="100000"/>
+              </a:lnSpc>
+              <a:spcBef>
+                <a:spcPts val="0"/>
+              </a:spcBef>
+              <a:spcAft>
+                <a:spcPts val="0"/>
+              </a:spcAft>
+            </a:pPr>
+            <a:r>
+              <a:rPr sz="950" b="1">
+                <a:solidFill>
+                  <a:srgbClr val="0F62CE"/>
+                </a:solidFill>
+                <a:latin typeface="Microsoft YaHei"/>
+                <a:ea typeface="Microsoft YaHei"/>
+                <a:cs typeface="Microsoft YaHei"/>
+              </a:rPr>
+              <a:t>交付</a:t>
+            </a:r>
+          </a:p>
+        </p:txBody>
+      </p:sp>
+      <p:sp>
+        <p:nvSpPr>
+          <p:cNvPr id="37" name="TextBox 36"/>
+          <p:cNvSpPr txBox="1"/>
+          <p:nvPr/>
+        </p:nvSpPr>
+        <p:spPr>
+          <a:xfrm>
+            <a:off x="3675888" y="3694176"/>
+            <a:ext cx="2651760" cy="566928"/>
+          </a:xfrm>
+          <a:prstGeom prst="rect">
+            <a:avLst/>
+          </a:prstGeom>
+          <a:noFill/>
+        </p:spPr>
+        <p:txBody>
+          <a:bodyPr wrap="square" anchor="ctr" lIns="0" tIns="0" rIns="0" bIns="0">
+            <a:noAutofit/>
+          </a:bodyPr>
+          <a:lstStyle/>
+          <a:p>
+            <a:pPr algn="l" latinLnBrk="0">
+              <a:lnSpc>
+                <a:spcPct val="100000"/>
+              </a:lnSpc>
+              <a:spcBef>
+                <a:spcPts val="0"/>
+              </a:spcBef>
+              <a:spcAft>
+                <a:spcPts val="0"/>
+              </a:spcAft>
+            </a:pPr>
+            <a:r>
+              <a:rPr sz="950" b="0">
+                <a:solidFill>
+                  <a:srgbClr val="1B4D69"/>
+                </a:solidFill>
+                <a:latin typeface="Microsoft YaHei"/>
+                <a:ea typeface="Microsoft YaHei"/>
+                <a:cs typeface="Microsoft YaHei"/>
+              </a:rPr>
+              <a:t>grouped-GEMM group-mode 四个旋钮</a:t>
+            </a:r>
+          </a:p>
+        </p:txBody>
+      </p:sp>
+      <p:sp>
+        <p:nvSpPr>
+          <p:cNvPr id="38" name="TextBox 37"/>
+          <p:cNvSpPr txBox="1"/>
+          <p:nvPr/>
+        </p:nvSpPr>
+        <p:spPr>
+          <a:xfrm>
+            <a:off x="6419088" y="3694176"/>
+            <a:ext cx="2002536" cy="566928"/>
+          </a:xfrm>
+          <a:prstGeom prst="rect">
+            <a:avLst/>
+          </a:prstGeom>
+          <a:noFill/>
+        </p:spPr>
+        <p:txBody>
+          <a:bodyPr wrap="square" anchor="ctr" lIns="0" tIns="0" rIns="0" bIns="0">
+            <a:noAutofit/>
+          </a:bodyPr>
+          <a:lstStyle/>
+          <a:p>
+            <a:pPr algn="l" latinLnBrk="0">
+              <a:lnSpc>
+                <a:spcPct val="100000"/>
+              </a:lnSpc>
+              <a:spcBef>
+                <a:spcPts val="0"/>
+              </a:spcBef>
+              <a:spcAft>
+                <a:spcPts val="0"/>
+              </a:spcAft>
+            </a:pPr>
+            <a:r>
+              <a:rPr sz="950" b="0">
+                <a:solidFill>
+                  <a:srgbClr val="1B4D69"/>
+                </a:solidFill>
+                <a:latin typeface="Microsoft YaHei"/>
+                <a:ea typeface="Microsoft YaHei"/>
+                <a:cs typeface="Microsoft YaHei"/>
+              </a:rPr>
+              <a:t>四模式完全同速</a:t>
+            </a:r>
+          </a:p>
+          <a:p>
+            <a:pPr algn="l" latinLnBrk="0">
+              <a:lnSpc>
+                <a:spcPct val="100000"/>
+              </a:lnSpc>
+              <a:spcBef>
+                <a:spcPts val="0"/>
+              </a:spcBef>
+              <a:spcAft>
+                <a:spcPts val="0"/>
+              </a:spcAft>
+            </a:pPr>
+            <a:r>
+              <a:rPr sz="950" b="0">
+                <a:solidFill>
+                  <a:srgbClr val="1B4D69"/>
+                </a:solidFill>
+                <a:latin typeface="Microsoft YaHei"/>
+                <a:ea typeface="Microsoft YaHei"/>
+                <a:cs typeface="Microsoft YaHei"/>
+              </a:rPr>
+              <a:t>force_nogroup −20%</a:t>
+            </a:r>
+          </a:p>
+          <a:p>
+            <a:pPr algn="l" latinLnBrk="0">
+              <a:lnSpc>
+                <a:spcPct val="100000"/>
+              </a:lnSpc>
+              <a:spcBef>
+                <a:spcPts val="0"/>
+              </a:spcBef>
+              <a:spcAft>
+                <a:spcPts val="0"/>
+              </a:spcAft>
+            </a:pPr>
+            <a:r>
+              <a:rPr sz="950" b="0">
+                <a:solidFill>
+                  <a:srgbClr val="1B4D69"/>
+                </a:solidFill>
+                <a:latin typeface="Microsoft YaHei"/>
+                <a:ea typeface="Microsoft YaHei"/>
+                <a:cs typeface="Microsoft YaHei"/>
+              </a:rPr>
+              <a:t>no_group cos 0.000</a:t>
+            </a:r>
+          </a:p>
+        </p:txBody>
+      </p:sp>
+      <p:sp>
+        <p:nvSpPr>
+          <p:cNvPr id="39" name="TextBox 38"/>
+          <p:cNvSpPr txBox="1"/>
+          <p:nvPr/>
+        </p:nvSpPr>
+        <p:spPr>
+          <a:xfrm>
+            <a:off x="8513064" y="3694176"/>
+            <a:ext cx="1280160" cy="566928"/>
+          </a:xfrm>
+          <a:prstGeom prst="rect">
+            <a:avLst/>
+          </a:prstGeom>
+          <a:noFill/>
+        </p:spPr>
+        <p:txBody>
+          <a:bodyPr wrap="square" anchor="ctr" lIns="0" tIns="0" rIns="0" bIns="0">
+            <a:noAutofit/>
+          </a:bodyPr>
+          <a:lstStyle/>
+          <a:p>
+            <a:pPr algn="l" latinLnBrk="0">
+              <a:lnSpc>
+                <a:spcPct val="100000"/>
+              </a:lnSpc>
+              <a:spcBef>
+                <a:spcPts val="0"/>
+              </a:spcBef>
+              <a:spcAft>
+                <a:spcPts val="0"/>
+              </a:spcAft>
+            </a:pPr>
+            <a:r>
+              <a:rPr sz="950" b="0">
+                <a:solidFill>
+                  <a:srgbClr val="7FA4BA"/>
+                </a:solidFill>
+                <a:latin typeface="Microsoft YaHei"/>
+                <a:ea typeface="Microsoft YaHei"/>
+                <a:cs typeface="Microsoft YaHei"/>
+              </a:rPr>
+              <a:t>—</a:t>
+            </a:r>
+          </a:p>
+        </p:txBody>
+      </p:sp>
+      <p:sp>
+        <p:nvSpPr>
+          <p:cNvPr id="40" name="TextBox 39"/>
+          <p:cNvSpPr txBox="1"/>
+          <p:nvPr/>
+        </p:nvSpPr>
+        <p:spPr>
+          <a:xfrm>
+            <a:off x="9884664" y="3694176"/>
+            <a:ext cx="1554480" cy="566928"/>
+          </a:xfrm>
+          <a:prstGeom prst="rect">
+            <a:avLst/>
+          </a:prstGeom>
+          <a:noFill/>
+        </p:spPr>
+        <p:txBody>
+          <a:bodyPr wrap="square" anchor="ctr" lIns="0" tIns="0" rIns="0" bIns="0">
+            <a:noAutofit/>
+          </a:bodyPr>
+          <a:lstStyle/>
+          <a:p>
+            <a:pPr algn="l" latinLnBrk="0">
+              <a:lnSpc>
+                <a:spcPct val="100000"/>
+              </a:lnSpc>
+              <a:spcBef>
+                <a:spcPts val="0"/>
+              </a:spcBef>
+              <a:spcAft>
+                <a:spcPts val="0"/>
+              </a:spcAft>
+            </a:pPr>
+            <a:r>
+              <a:rPr sz="950" b="0">
+                <a:solidFill>
+                  <a:srgbClr val="D94A3D"/>
+                </a:solidFill>
+                <a:latin typeface="Microsoft YaHei"/>
+                <a:ea typeface="Microsoft YaHei"/>
+                <a:cs typeface="Microsoft YaHei"/>
+              </a:rPr>
+              <a:t>① 挡掉一个，③ 挡掉其余</a:t>
+            </a:r>
+          </a:p>
+          <a:p>
+            <a:pPr algn="l" latinLnBrk="0">
+              <a:lnSpc>
+                <a:spcPct val="100000"/>
+              </a:lnSpc>
+              <a:spcBef>
+                <a:spcPts val="0"/>
+              </a:spcBef>
+              <a:spcAft>
+                <a:spcPts val="0"/>
+              </a:spcAft>
+            </a:pPr>
+            <a:r>
+              <a:rPr sz="950" b="0">
+                <a:solidFill>
+                  <a:srgbClr val="D94A3D"/>
+                </a:solidFill>
+                <a:latin typeface="Microsoft YaHei"/>
+                <a:ea typeface="Microsoft YaHei"/>
+                <a:cs typeface="Microsoft YaHei"/>
+              </a:rPr>
+              <a:t>判定为闭源核内在开销</a:t>
+            </a:r>
+          </a:p>
+        </p:txBody>
+      </p:sp>
+      <p:sp>
+        <p:nvSpPr>
+          <p:cNvPr id="41" name="TextBox 40"/>
+          <p:cNvSpPr txBox="1"/>
+          <p:nvPr/>
+        </p:nvSpPr>
+        <p:spPr>
+          <a:xfrm>
+            <a:off x="3675888" y="4297680"/>
+            <a:ext cx="2651760" cy="274320"/>
+          </a:xfrm>
+          <a:prstGeom prst="rect">
+            <a:avLst/>
+          </a:prstGeom>
+          <a:noFill/>
+        </p:spPr>
+        <p:txBody>
+          <a:bodyPr wrap="square" anchor="ctr" lIns="0" tIns="0" rIns="0" bIns="0">
+            <a:noAutofit/>
+          </a:bodyPr>
+          <a:lstStyle/>
+          <a:p>
+            <a:pPr algn="l" latinLnBrk="0">
+              <a:lnSpc>
+                <a:spcPct val="100000"/>
+              </a:lnSpc>
+              <a:spcBef>
+                <a:spcPts val="0"/>
+              </a:spcBef>
+              <a:spcAft>
+                <a:spcPts val="0"/>
+              </a:spcAft>
+            </a:pPr>
+            <a:r>
+              <a:rPr sz="950" b="0">
+                <a:solidFill>
+                  <a:srgbClr val="1B4D69"/>
+                </a:solidFill>
+                <a:latin typeface="Microsoft YaHei"/>
+                <a:ea typeface="Microsoft YaHei"/>
+                <a:cs typeface="Microsoft YaHei"/>
+              </a:rPr>
+              <a:t>FFN 输出合并换 shuffle_mul_sum_sdnn</a:t>
+            </a:r>
+          </a:p>
+        </p:txBody>
+      </p:sp>
+      <p:sp>
+        <p:nvSpPr>
+          <p:cNvPr id="42" name="TextBox 41"/>
+          <p:cNvSpPr txBox="1"/>
+          <p:nvPr/>
+        </p:nvSpPr>
+        <p:spPr>
+          <a:xfrm>
+            <a:off x="6419088" y="4297680"/>
+            <a:ext cx="2002536" cy="274320"/>
+          </a:xfrm>
+          <a:prstGeom prst="rect">
+            <a:avLst/>
+          </a:prstGeom>
+          <a:noFill/>
+        </p:spPr>
+        <p:txBody>
+          <a:bodyPr wrap="square" anchor="ctr" lIns="0" tIns="0" rIns="0" bIns="0">
+            <a:noAutofit/>
+          </a:bodyPr>
+          <a:lstStyle/>
+          <a:p>
+            <a:pPr algn="l" latinLnBrk="0">
+              <a:lnSpc>
+                <a:spcPct val="100000"/>
+              </a:lnSpc>
+              <a:spcBef>
+                <a:spcPts val="0"/>
+              </a:spcBef>
+              <a:spcAft>
+                <a:spcPts val="0"/>
+              </a:spcAft>
+            </a:pPr>
+            <a:r>
+              <a:rPr sz="950" b="0">
+                <a:solidFill>
+                  <a:srgbClr val="1B4D69"/>
+                </a:solidFill>
+                <a:latin typeface="Microsoft YaHei"/>
+                <a:ea typeface="Microsoft YaHei"/>
+                <a:cs typeface="Microsoft YaHei"/>
+              </a:rPr>
+              <a:t>0.61×，更慢</a:t>
+            </a:r>
+          </a:p>
+        </p:txBody>
+      </p:sp>
+      <p:sp>
+        <p:nvSpPr>
+          <p:cNvPr id="43" name="TextBox 42"/>
+          <p:cNvSpPr txBox="1"/>
+          <p:nvPr/>
+        </p:nvSpPr>
+        <p:spPr>
+          <a:xfrm>
+            <a:off x="8513064" y="4297680"/>
+            <a:ext cx="1280160" cy="274320"/>
+          </a:xfrm>
+          <a:prstGeom prst="rect">
+            <a:avLst/>
+          </a:prstGeom>
+          <a:noFill/>
+        </p:spPr>
+        <p:txBody>
+          <a:bodyPr wrap="square" anchor="ctr" lIns="0" tIns="0" rIns="0" bIns="0">
+            <a:noAutofit/>
+          </a:bodyPr>
+          <a:lstStyle/>
+          <a:p>
+            <a:pPr algn="l" latinLnBrk="0">
+              <a:lnSpc>
+                <a:spcPct val="100000"/>
+              </a:lnSpc>
+              <a:spcBef>
+                <a:spcPts val="0"/>
+              </a:spcBef>
+              <a:spcAft>
+                <a:spcPts val="0"/>
+              </a:spcAft>
+            </a:pPr>
+            <a:r>
+              <a:rPr sz="950" b="0">
+                <a:solidFill>
+                  <a:srgbClr val="7FA4BA"/>
+                </a:solidFill>
+                <a:latin typeface="Microsoft YaHei"/>
+                <a:ea typeface="Microsoft YaHei"/>
+                <a:cs typeface="Microsoft YaHei"/>
+              </a:rPr>
+              <a:t>—</a:t>
+            </a:r>
+          </a:p>
+        </p:txBody>
+      </p:sp>
+      <p:sp>
+        <p:nvSpPr>
+          <p:cNvPr id="44" name="TextBox 43"/>
+          <p:cNvSpPr txBox="1"/>
+          <p:nvPr/>
+        </p:nvSpPr>
+        <p:spPr>
+          <a:xfrm>
+            <a:off x="9884664" y="4297680"/>
+            <a:ext cx="1554480" cy="274320"/>
+          </a:xfrm>
+          <a:prstGeom prst="rect">
+            <a:avLst/>
+          </a:prstGeom>
+          <a:noFill/>
+        </p:spPr>
+        <p:txBody>
+          <a:bodyPr wrap="square" anchor="ctr" lIns="0" tIns="0" rIns="0" bIns="0">
+            <a:noAutofit/>
+          </a:bodyPr>
+          <a:lstStyle/>
+          <a:p>
+            <a:pPr algn="l" latinLnBrk="0">
+              <a:lnSpc>
+                <a:spcPct val="100000"/>
+              </a:lnSpc>
+              <a:spcBef>
+                <a:spcPts val="0"/>
+              </a:spcBef>
+              <a:spcAft>
+                <a:spcPts val="0"/>
+              </a:spcAft>
+            </a:pPr>
+            <a:r>
+              <a:rPr sz="950" b="0">
+                <a:solidFill>
+                  <a:srgbClr val="D94A3D"/>
+                </a:solidFill>
+                <a:latin typeface="Microsoft YaHei"/>
+                <a:ea typeface="Microsoft YaHei"/>
+                <a:cs typeface="Microsoft YaHei"/>
+              </a:rPr>
+              <a:t>③ 未过</a:t>
+            </a:r>
+          </a:p>
+        </p:txBody>
+      </p:sp>
+      <p:sp>
+        <p:nvSpPr>
+          <p:cNvPr id="45" name="TextBox 44"/>
+          <p:cNvSpPr txBox="1"/>
+          <p:nvPr/>
+        </p:nvSpPr>
+        <p:spPr>
+          <a:xfrm>
+            <a:off x="3675888" y="4608576"/>
+            <a:ext cx="2651760" cy="274320"/>
+          </a:xfrm>
+          <a:prstGeom prst="rect">
+            <a:avLst/>
+          </a:prstGeom>
+          <a:noFill/>
+        </p:spPr>
+        <p:txBody>
+          <a:bodyPr wrap="square" anchor="ctr" lIns="0" tIns="0" rIns="0" bIns="0">
+            <a:noAutofit/>
+          </a:bodyPr>
+          <a:lstStyle/>
+          <a:p>
+            <a:pPr algn="l" latinLnBrk="0">
+              <a:lnSpc>
+                <a:spcPct val="100000"/>
+              </a:lnSpc>
+              <a:spcBef>
+                <a:spcPts val="0"/>
+              </a:spcBef>
+              <a:spcAft>
+                <a:spcPts val="0"/>
+              </a:spcAft>
+            </a:pPr>
+            <a:r>
+              <a:rPr sz="950" b="0">
+                <a:solidFill>
+                  <a:srgbClr val="1B4D69"/>
+                </a:solidFill>
+                <a:latin typeface="Microsoft YaHei"/>
+                <a:ea typeface="Microsoft YaHei"/>
+                <a:cs typeface="Microsoft YaHei"/>
+              </a:rPr>
+              <a:t>路由 softmax + topk + renorm 融合</a:t>
+            </a:r>
+          </a:p>
+        </p:txBody>
+      </p:sp>
+      <p:sp>
+        <p:nvSpPr>
+          <p:cNvPr id="46" name="TextBox 45"/>
+          <p:cNvSpPr txBox="1"/>
+          <p:nvPr/>
+        </p:nvSpPr>
+        <p:spPr>
+          <a:xfrm>
+            <a:off x="6419088" y="4608576"/>
+            <a:ext cx="2002536" cy="274320"/>
+          </a:xfrm>
+          <a:prstGeom prst="rect">
+            <a:avLst/>
+          </a:prstGeom>
+          <a:noFill/>
+        </p:spPr>
+        <p:txBody>
+          <a:bodyPr wrap="square" anchor="ctr" lIns="0" tIns="0" rIns="0" bIns="0">
+            <a:noAutofit/>
+          </a:bodyPr>
+          <a:lstStyle/>
+          <a:p>
+            <a:pPr algn="l" latinLnBrk="0">
+              <a:lnSpc>
+                <a:spcPct val="100000"/>
+              </a:lnSpc>
+              <a:spcBef>
+                <a:spcPts val="0"/>
+              </a:spcBef>
+              <a:spcAft>
+                <a:spcPts val="0"/>
+              </a:spcAft>
+            </a:pPr>
+            <a:r>
+              <a:rPr sz="950" b="0">
+                <a:solidFill>
+                  <a:srgbClr val="1B4D69"/>
+                </a:solidFill>
+                <a:latin typeface="Microsoft YaHei"/>
+                <a:ea typeface="Microsoft YaHei"/>
+                <a:cs typeface="Microsoft YaHei"/>
+              </a:rPr>
+              <a:t>内核 2×，数值对（Δ 3e-8）</a:t>
+            </a:r>
+          </a:p>
+        </p:txBody>
+      </p:sp>
+      <p:sp>
+        <p:nvSpPr>
+          <p:cNvPr id="47" name="TextBox 46"/>
+          <p:cNvSpPr txBox="1"/>
+          <p:nvPr/>
+        </p:nvSpPr>
+        <p:spPr>
+          <a:xfrm>
+            <a:off x="8513064" y="4608576"/>
+            <a:ext cx="1280160" cy="274320"/>
+          </a:xfrm>
+          <a:prstGeom prst="rect">
+            <a:avLst/>
+          </a:prstGeom>
+          <a:noFill/>
+        </p:spPr>
+        <p:txBody>
+          <a:bodyPr wrap="square" anchor="ctr" lIns="0" tIns="0" rIns="0" bIns="0">
+            <a:noAutofit/>
+          </a:bodyPr>
+          <a:lstStyle/>
+          <a:p>
+            <a:pPr algn="l" latinLnBrk="0">
+              <a:lnSpc>
+                <a:spcPct val="100000"/>
+              </a:lnSpc>
+              <a:spcBef>
+                <a:spcPts val="0"/>
+              </a:spcBef>
+              <a:spcAft>
+                <a:spcPts val="0"/>
+              </a:spcAft>
+            </a:pPr>
+            <a:r>
+              <a:rPr sz="950" b="0">
+                <a:solidFill>
+                  <a:srgbClr val="1B4D69"/>
+                </a:solidFill>
+                <a:latin typeface="Microsoft YaHei"/>
+                <a:ea typeface="Microsoft YaHei"/>
+                <a:cs typeface="Microsoft YaHei"/>
+              </a:rPr>
+              <a:t>只占 ~0.9% TPOT</a:t>
+            </a:r>
+          </a:p>
+        </p:txBody>
+      </p:sp>
+      <p:sp>
+        <p:nvSpPr>
+          <p:cNvPr id="48" name="TextBox 47"/>
+          <p:cNvSpPr txBox="1"/>
+          <p:nvPr/>
+        </p:nvSpPr>
+        <p:spPr>
+          <a:xfrm>
+            <a:off x="9884664" y="4608576"/>
+            <a:ext cx="1554480" cy="274320"/>
+          </a:xfrm>
+          <a:prstGeom prst="rect">
+            <a:avLst/>
+          </a:prstGeom>
+          <a:noFill/>
+        </p:spPr>
+        <p:txBody>
+          <a:bodyPr wrap="square" anchor="ctr" lIns="0" tIns="0" rIns="0" bIns="0">
+            <a:noAutofit/>
+          </a:bodyPr>
+          <a:lstStyle/>
+          <a:p>
+            <a:pPr algn="l" latinLnBrk="0">
+              <a:lnSpc>
+                <a:spcPct val="100000"/>
+              </a:lnSpc>
+              <a:spcBef>
+                <a:spcPts val="0"/>
+              </a:spcBef>
+              <a:spcAft>
+                <a:spcPts val="0"/>
+              </a:spcAft>
+            </a:pPr>
+            <a:r>
+              <a:rPr sz="950" b="0">
+                <a:solidFill>
+                  <a:srgbClr val="40708B"/>
+                </a:solidFill>
+                <a:latin typeface="Microsoft YaHei"/>
+                <a:ea typeface="Microsoft YaHei"/>
+                <a:cs typeface="Microsoft YaHei"/>
+              </a:rPr>
+              <a:t>③ 过但不值当，未接线</a:t>
+            </a:r>
+          </a:p>
+        </p:txBody>
+      </p:sp>
+      <p:sp>
+        <p:nvSpPr>
+          <p:cNvPr id="49" name="TextBox 48"/>
+          <p:cNvSpPr txBox="1"/>
+          <p:nvPr/>
+        </p:nvSpPr>
+        <p:spPr>
+          <a:xfrm>
+            <a:off x="548640" y="5084064"/>
+            <a:ext cx="2651760" cy="621792"/>
+          </a:xfrm>
+          <a:prstGeom prst="rect">
+            <a:avLst/>
+          </a:prstGeom>
+          <a:noFill/>
+        </p:spPr>
+        <p:txBody>
+          <a:bodyPr wrap="square" anchor="ctr" lIns="0" tIns="0" rIns="0" bIns="0">
+            <a:noAutofit/>
+          </a:bodyPr>
+          <a:lstStyle/>
+          <a:p>
+            <a:pPr algn="l" latinLnBrk="0">
+              <a:lnSpc>
+                <a:spcPct val="100000"/>
+              </a:lnSpc>
+              <a:spcBef>
+                <a:spcPts val="0"/>
+              </a:spcBef>
+              <a:spcAft>
+                <a:spcPts val="200"/>
+              </a:spcAft>
+            </a:pPr>
+            <a:r>
+              <a:rPr sz="1150" b="1">
+                <a:solidFill>
+                  <a:srgbClr val="0A2B45"/>
+                </a:solidFill>
+                <a:latin typeface="Microsoft YaHei"/>
+                <a:ea typeface="Microsoft YaHei"/>
+                <a:cs typeface="Microsoft YaHei"/>
+              </a:rPr>
+              <a:t>三道门的漏斗</a:t>
+            </a:r>
+          </a:p>
+          <a:p>
+            <a:pPr algn="l" latinLnBrk="0">
+              <a:lnSpc>
+                <a:spcPct val="100000"/>
+              </a:lnSpc>
+              <a:spcBef>
+                <a:spcPts val="0"/>
+              </a:spcBef>
+              <a:spcAft>
+                <a:spcPts val="0"/>
+              </a:spcAft>
+            </a:pPr>
+            <a:r>
+              <a:rPr sz="950" b="0">
+                <a:solidFill>
+                  <a:srgbClr val="40708B"/>
+                </a:solidFill>
+                <a:latin typeface="Microsoft YaHei"/>
+                <a:ea typeface="Microsoft YaHei"/>
+                <a:cs typeface="Microsoft YaHei"/>
+              </a:rPr>
+              <a:t>由便宜到贵，任一道不过即停，</a:t>
+            </a:r>
+          </a:p>
+          <a:p>
+            <a:pPr algn="l" latinLnBrk="0">
+              <a:lnSpc>
+                <a:spcPct val="100000"/>
+              </a:lnSpc>
+              <a:spcBef>
+                <a:spcPts val="0"/>
+              </a:spcBef>
+              <a:spcAft>
+                <a:spcPts val="0"/>
+              </a:spcAft>
+            </a:pPr>
+            <a:r>
+              <a:rPr sz="950" b="0">
+                <a:solidFill>
+                  <a:srgbClr val="40708B"/>
+                </a:solidFill>
+                <a:latin typeface="Microsoft YaHei"/>
+                <a:ea typeface="Microsoft YaHei"/>
+                <a:cs typeface="Microsoft YaHei"/>
+              </a:rPr>
+              <a:t>数值不对、更慢的当场挡掉</a:t>
+            </a:r>
+          </a:p>
+        </p:txBody>
+      </p:sp>
+      <p:sp>
+        <p:nvSpPr>
+          <p:cNvPr id="50" name="Rectangle 49"/>
+          <p:cNvSpPr/>
+          <p:nvPr/>
+        </p:nvSpPr>
+        <p:spPr>
+          <a:xfrm>
+            <a:off x="3291840" y="5084064"/>
+            <a:ext cx="2503322" cy="621792"/>
+          </a:xfrm>
+          <a:prstGeom prst="rect">
+            <a:avLst/>
+          </a:prstGeom>
+          <a:solidFill>
+            <a:srgbClr val="FFFFFF"/>
+          </a:solidFill>
+          <a:ln w="9525">
+            <a:solidFill>
+              <a:srgbClr val="CFE3F0"/>
+            </a:solidFill>
+          </a:ln>
+        </p:spPr>
+        <p:txBody>
+          <a:bodyPr rtlCol="0" anchor="ctr"/>
+          <a:lstStyle/>
+          <a:p>
+            <a:pPr algn="ctr"/>
+          </a:p>
+        </p:txBody>
+      </p:sp>
+      <p:sp>
+        <p:nvSpPr>
+          <p:cNvPr id="51" name="TextBox 50"/>
+          <p:cNvSpPr txBox="1"/>
+          <p:nvPr/>
+        </p:nvSpPr>
+        <p:spPr>
+          <a:xfrm>
+            <a:off x="3474720" y="5157216"/>
+            <a:ext cx="2137562" cy="201168"/>
+          </a:xfrm>
+          <a:prstGeom prst="rect">
+            <a:avLst/>
+          </a:prstGeom>
+          <a:noFill/>
+        </p:spPr>
+        <p:txBody>
+          <a:bodyPr wrap="square" anchor="ctr" lIns="0" tIns="0" rIns="0" bIns="0">
+            <a:noAutofit/>
+          </a:bodyPr>
+          <a:lstStyle/>
+          <a:p>
+            <a:pPr algn="l" latinLnBrk="0">
+              <a:lnSpc>
+                <a:spcPct val="100000"/>
+              </a:lnSpc>
+              <a:spcBef>
+                <a:spcPts val="0"/>
+              </a:spcBef>
+              <a:spcAft>
+                <a:spcPts val="0"/>
+              </a:spcAft>
+            </a:pPr>
+            <a:r>
+              <a:rPr sz="950" b="0">
+                <a:solidFill>
+                  <a:srgbClr val="40708B"/>
+                </a:solidFill>
+                <a:latin typeface="Microsoft YaHei"/>
+                <a:ea typeface="Microsoft YaHei"/>
+                <a:cs typeface="Microsoft YaHei"/>
+              </a:rPr>
+              <a:t>候选</a:t>
+            </a:r>
+          </a:p>
+        </p:txBody>
+      </p:sp>
+      <p:sp>
+        <p:nvSpPr>
+          <p:cNvPr id="52" name="TextBox 51"/>
+          <p:cNvSpPr txBox="1"/>
+          <p:nvPr/>
+        </p:nvSpPr>
+        <p:spPr>
+          <a:xfrm>
+            <a:off x="3474720" y="5376672"/>
+            <a:ext cx="2137562" cy="274320"/>
+          </a:xfrm>
+          <a:prstGeom prst="rect">
+            <a:avLst/>
+          </a:prstGeom>
+          <a:noFill/>
+        </p:spPr>
+        <p:txBody>
+          <a:bodyPr wrap="square" anchor="ctr" lIns="0" tIns="0" rIns="0" bIns="0">
+            <a:noAutofit/>
+          </a:bodyPr>
+          <a:lstStyle/>
+          <a:p>
+            <a:pPr algn="l" latinLnBrk="0">
+              <a:lnSpc>
+                <a:spcPct val="100000"/>
+              </a:lnSpc>
+              <a:spcBef>
+                <a:spcPts val="0"/>
+              </a:spcBef>
+              <a:spcAft>
+                <a:spcPts val="0"/>
+              </a:spcAft>
+            </a:pPr>
+            <a:r>
+              <a:rPr sz="1600" b="1">
+                <a:solidFill>
+                  <a:srgbClr val="0A2B45"/>
+                </a:solidFill>
+                <a:latin typeface="Arial"/>
+                <a:ea typeface="Microsoft YaHei"/>
+                <a:cs typeface="Microsoft YaHei"/>
+              </a:rPr>
+              <a:t>10</a:t>
+            </a:r>
+          </a:p>
+        </p:txBody>
+      </p:sp>
+      <p:sp>
+        <p:nvSpPr>
+          <p:cNvPr id="53" name="Rectangle 52"/>
+          <p:cNvSpPr/>
+          <p:nvPr/>
+        </p:nvSpPr>
+        <p:spPr>
+          <a:xfrm>
+            <a:off x="6215786" y="5084064"/>
+            <a:ext cx="2503322" cy="621792"/>
+          </a:xfrm>
+          <a:prstGeom prst="rect">
+            <a:avLst/>
+          </a:prstGeom>
+          <a:solidFill>
+            <a:srgbClr val="FFFFFF"/>
+          </a:solidFill>
+          <a:ln w="9525">
+            <a:solidFill>
+              <a:srgbClr val="CFE3F0"/>
+            </a:solidFill>
+          </a:ln>
+        </p:spPr>
+        <p:txBody>
+          <a:bodyPr rtlCol="0" anchor="ctr"/>
+          <a:lstStyle/>
+          <a:p>
+            <a:pPr algn="ctr"/>
+          </a:p>
+        </p:txBody>
+      </p:sp>
+      <p:sp>
+        <p:nvSpPr>
+          <p:cNvPr id="54" name="TextBox 53"/>
+          <p:cNvSpPr txBox="1"/>
+          <p:nvPr/>
+        </p:nvSpPr>
+        <p:spPr>
+          <a:xfrm>
+            <a:off x="6398666" y="5157216"/>
+            <a:ext cx="2137562" cy="201168"/>
+          </a:xfrm>
+          <a:prstGeom prst="rect">
+            <a:avLst/>
+          </a:prstGeom>
+          <a:noFill/>
+        </p:spPr>
+        <p:txBody>
+          <a:bodyPr wrap="square" anchor="ctr" lIns="0" tIns="0" rIns="0" bIns="0">
+            <a:noAutofit/>
+          </a:bodyPr>
+          <a:lstStyle/>
+          <a:p>
+            <a:pPr algn="l" latinLnBrk="0">
+              <a:lnSpc>
+                <a:spcPct val="100000"/>
+              </a:lnSpc>
+              <a:spcBef>
+                <a:spcPts val="0"/>
+              </a:spcBef>
+              <a:spcAft>
+                <a:spcPts val="0"/>
+              </a:spcAft>
+            </a:pPr>
+            <a:r>
+              <a:rPr sz="950" b="0">
+                <a:solidFill>
+                  <a:srgbClr val="40708B"/>
+                </a:solidFill>
+                <a:latin typeface="Microsoft YaHei"/>
+                <a:ea typeface="Microsoft YaHei"/>
+                <a:cs typeface="Microsoft YaHei"/>
+              </a:rPr>
+              <a:t>过三道门</a:t>
+            </a:r>
+          </a:p>
+        </p:txBody>
+      </p:sp>
+      <p:sp>
+        <p:nvSpPr>
+          <p:cNvPr id="55" name="TextBox 54"/>
+          <p:cNvSpPr txBox="1"/>
+          <p:nvPr/>
+        </p:nvSpPr>
+        <p:spPr>
+          <a:xfrm>
+            <a:off x="6398666" y="5376672"/>
+            <a:ext cx="2137562" cy="274320"/>
+          </a:xfrm>
+          <a:prstGeom prst="rect">
+            <a:avLst/>
+          </a:prstGeom>
+          <a:noFill/>
+        </p:spPr>
+        <p:txBody>
+          <a:bodyPr wrap="square" anchor="ctr" lIns="0" tIns="0" rIns="0" bIns="0">
+            <a:noAutofit/>
+          </a:bodyPr>
+          <a:lstStyle/>
+          <a:p>
+            <a:pPr algn="l" latinLnBrk="0">
+              <a:lnSpc>
+                <a:spcPct val="100000"/>
+              </a:lnSpc>
+              <a:spcBef>
+                <a:spcPts val="0"/>
+              </a:spcBef>
+              <a:spcAft>
+                <a:spcPts val="0"/>
+              </a:spcAft>
+            </a:pPr>
+            <a:r>
+              <a:rPr sz="1600" b="1">
+                <a:solidFill>
+                  <a:srgbClr val="0A2B45"/>
+                </a:solidFill>
+                <a:latin typeface="Arial"/>
+                <a:ea typeface="Microsoft YaHei"/>
+                <a:cs typeface="Microsoft YaHei"/>
+              </a:rPr>
+              <a:t>5</a:t>
+            </a:r>
+          </a:p>
+        </p:txBody>
+      </p:sp>
+      <p:cxnSp>
+        <p:nvCxnSpPr>
+          <p:cNvPr id="56" name="Connector 55"/>
+          <p:cNvCxnSpPr/>
+          <p:nvPr/>
+        </p:nvCxnSpPr>
+        <p:spPr>
+          <a:xfrm>
+            <a:off x="5886602" y="5394959"/>
+            <a:ext cx="237744" cy="0"/>
+          </a:xfrm>
+          <a:prstGeom prst="line">
+            <a:avLst/>
+          </a:prstGeom>
+          <a:ln w="15875">
+            <a:solidFill>
+              <a:srgbClr val="7FA4BA"/>
+            </a:solidFill>
+            <a:tailEnd type="triangle" w="med" len="med"/>
+          </a:ln>
+        </p:spPr>
+      </p:cxnSp>
+      <p:sp>
+        <p:nvSpPr>
+          <p:cNvPr id="57" name="Rectangle 56"/>
+          <p:cNvSpPr/>
+          <p:nvPr/>
+        </p:nvSpPr>
+        <p:spPr>
+          <a:xfrm>
+            <a:off x="9139732" y="5084064"/>
+            <a:ext cx="2503322" cy="621792"/>
+          </a:xfrm>
+          <a:prstGeom prst="rect">
+            <a:avLst/>
+          </a:prstGeom>
+          <a:solidFill>
+            <a:srgbClr val="C9E1FC"/>
+          </a:solidFill>
+          <a:ln>
+            <a:noFill/>
+          </a:ln>
+        </p:spPr>
+        <p:txBody>
+          <a:bodyPr rtlCol="0" anchor="ctr"/>
+          <a:lstStyle/>
+          <a:p>
+            <a:pPr algn="ctr"/>
+          </a:p>
+        </p:txBody>
+      </p:sp>
+      <p:sp>
+        <p:nvSpPr>
+          <p:cNvPr id="58" name="TextBox 57"/>
+          <p:cNvSpPr txBox="1"/>
+          <p:nvPr/>
+        </p:nvSpPr>
+        <p:spPr>
+          <a:xfrm>
+            <a:off x="9322612" y="5157216"/>
+            <a:ext cx="2137562" cy="201168"/>
+          </a:xfrm>
+          <a:prstGeom prst="rect">
+            <a:avLst/>
+          </a:prstGeom>
+          <a:noFill/>
+        </p:spPr>
+        <p:txBody>
+          <a:bodyPr wrap="square" anchor="ctr" lIns="0" tIns="0" rIns="0" bIns="0">
+            <a:noAutofit/>
+          </a:bodyPr>
+          <a:lstStyle/>
+          <a:p>
+            <a:pPr algn="l" latinLnBrk="0">
+              <a:lnSpc>
+                <a:spcPct val="100000"/>
+              </a:lnSpc>
+              <a:spcBef>
+                <a:spcPts val="0"/>
+              </a:spcBef>
+              <a:spcAft>
+                <a:spcPts val="0"/>
+              </a:spcAft>
+            </a:pPr>
+            <a:r>
+              <a:rPr sz="950" b="1">
+                <a:solidFill>
+                  <a:srgbClr val="0F62CE"/>
+                </a:solidFill>
+                <a:latin typeface="Microsoft YaHei"/>
+                <a:ea typeface="Microsoft YaHei"/>
+                <a:cs typeface="Microsoft YaHei"/>
+              </a:rPr>
+              <a:t>交付</a:t>
+            </a:r>
+          </a:p>
+        </p:txBody>
+      </p:sp>
+      <p:sp>
+        <p:nvSpPr>
+          <p:cNvPr id="59" name="TextBox 58"/>
+          <p:cNvSpPr txBox="1"/>
+          <p:nvPr/>
+        </p:nvSpPr>
+        <p:spPr>
+          <a:xfrm>
+            <a:off x="9322612" y="5376672"/>
+            <a:ext cx="2137562" cy="274320"/>
+          </a:xfrm>
+          <a:prstGeom prst="rect">
+            <a:avLst/>
+          </a:prstGeom>
+          <a:noFill/>
+        </p:spPr>
+        <p:txBody>
+          <a:bodyPr wrap="square" anchor="ctr" lIns="0" tIns="0" rIns="0" bIns="0">
+            <a:noAutofit/>
+          </a:bodyPr>
+          <a:lstStyle/>
+          <a:p>
+            <a:pPr algn="l" latinLnBrk="0">
+              <a:lnSpc>
+                <a:spcPct val="100000"/>
+              </a:lnSpc>
+              <a:spcBef>
+                <a:spcPts val="0"/>
+              </a:spcBef>
+              <a:spcAft>
+                <a:spcPts val="0"/>
+              </a:spcAft>
+            </a:pPr>
+            <a:r>
+              <a:rPr sz="1600" b="1">
+                <a:solidFill>
+                  <a:srgbClr val="0A2B45"/>
+                </a:solidFill>
+                <a:latin typeface="Arial"/>
+                <a:ea typeface="Microsoft YaHei"/>
+                <a:cs typeface="Microsoft YaHei"/>
+              </a:rPr>
+              <a:t>2</a:t>
+            </a:r>
+          </a:p>
+        </p:txBody>
+      </p:sp>
+      <p:cxnSp>
+        <p:nvCxnSpPr>
+          <p:cNvPr id="60" name="Connector 59"/>
+          <p:cNvCxnSpPr/>
+          <p:nvPr/>
+        </p:nvCxnSpPr>
+        <p:spPr>
+          <a:xfrm>
+            <a:off x="8810548" y="5394959"/>
+            <a:ext cx="237744" cy="0"/>
+          </a:xfrm>
+          <a:prstGeom prst="line">
+            <a:avLst/>
+          </a:prstGeom>
+          <a:ln w="15875">
+            <a:solidFill>
+              <a:srgbClr val="7FA4BA"/>
+            </a:solidFill>
+            <a:tailEnd type="triangle" w="med" len="med"/>
+          </a:ln>
+        </p:spPr>
+      </p:cxnSp>
+      <p:sp>
+        <p:nvSpPr>
+          <p:cNvPr id="61" name="Rectangle 60"/>
+          <p:cNvSpPr/>
+          <p:nvPr/>
+        </p:nvSpPr>
+        <p:spPr>
+          <a:xfrm>
+            <a:off x="548640" y="5797296"/>
+            <a:ext cx="11094415" cy="475488"/>
+          </a:xfrm>
+          <a:prstGeom prst="rect">
+            <a:avLst/>
+          </a:prstGeom>
+          <a:solidFill>
+            <a:srgbClr val="C9E1FC"/>
+          </a:solidFill>
+          <a:ln>
+            <a:noFill/>
+          </a:ln>
+        </p:spPr>
+        <p:txBody>
+          <a:bodyPr rtlCol="0" anchor="ctr"/>
+          <a:lstStyle/>
+          <a:p>
+            <a:pPr algn="ctr"/>
+          </a:p>
+        </p:txBody>
+      </p:sp>
+      <p:sp>
+        <p:nvSpPr>
+          <p:cNvPr id="62" name="Rectangle 61"/>
+          <p:cNvSpPr/>
+          <p:nvPr/>
+        </p:nvSpPr>
+        <p:spPr>
+          <a:xfrm>
+            <a:off x="548640" y="5797296"/>
+            <a:ext cx="64008" cy="475488"/>
+          </a:xfrm>
+          <a:prstGeom prst="rect">
+            <a:avLst/>
+          </a:prstGeom>
+          <a:solidFill>
+            <a:srgbClr val="0F62CE"/>
+          </a:solidFill>
+          <a:ln>
+            <a:noFill/>
+          </a:ln>
+        </p:spPr>
+        <p:txBody>
+          <a:bodyPr rtlCol="0" anchor="ctr"/>
+          <a:lstStyle/>
+          <a:p>
+            <a:pPr algn="ctr"/>
+          </a:p>
+        </p:txBody>
+      </p:sp>
+      <p:sp>
+        <p:nvSpPr>
+          <p:cNvPr id="63" name="TextBox 62"/>
+          <p:cNvSpPr txBox="1"/>
+          <p:nvPr/>
+        </p:nvSpPr>
+        <p:spPr>
+          <a:xfrm>
+            <a:off x="859536" y="5797296"/>
+            <a:ext cx="10454335" cy="475488"/>
+          </a:xfrm>
+          <a:prstGeom prst="rect">
+            <a:avLst/>
+          </a:prstGeom>
+          <a:noFill/>
+        </p:spPr>
+        <p:txBody>
+          <a:bodyPr wrap="square" anchor="ctr" lIns="0" tIns="0" rIns="0" bIns="0">
+            <a:noAutofit/>
+          </a:bodyPr>
+          <a:lstStyle/>
+          <a:p>
+            <a:pPr algn="l" latinLnBrk="0">
+              <a:lnSpc>
+                <a:spcPct val="100000"/>
+              </a:lnSpc>
+              <a:spcBef>
+                <a:spcPts val="0"/>
+              </a:spcBef>
+              <a:spcAft>
+                <a:spcPts val="0"/>
+              </a:spcAft>
+            </a:pPr>
+            <a:r>
+              <a:rPr sz="1200" b="1">
+                <a:solidFill>
+                  <a:srgbClr val="0F62CE"/>
+                </a:solidFill>
+                <a:latin typeface="Consolas"/>
+                <a:ea typeface="Microsoft YaHei"/>
+                <a:cs typeface="Microsoft YaHei"/>
+              </a:rPr>
+              <a:t>读数　</a:t>
+            </a:r>
+            <a:r>
+              <a:rPr sz="1600" b="1">
+                <a:solidFill>
+                  <a:srgbClr val="0A2B45"/>
+                </a:solidFill>
+                <a:latin typeface="Microsoft YaHei"/>
+                <a:ea typeface="Microsoft YaHei"/>
+                <a:cs typeface="Microsoft YaHei"/>
+              </a:rPr>
+              <a:t>两个交付都在替换小核；闭源 grouped-GEMM 的旋钮调不动，占比不到 1% 的核再快也不接线</a:t>
+            </a:r>
+          </a:p>
+        </p:txBody>
+      </p:sp>
+      <p:sp>
+        <p:nvSpPr>
+          <p:cNvPr id="64" name="TextBox 63"/>
+          <p:cNvSpPr txBox="1"/>
+          <p:nvPr/>
+        </p:nvSpPr>
+        <p:spPr>
+          <a:xfrm>
+            <a:off x="548640" y="6382512"/>
+            <a:ext cx="11094415" cy="256032"/>
+          </a:xfrm>
+          <a:prstGeom prst="rect">
+            <a:avLst/>
+          </a:prstGeom>
+          <a:noFill/>
+        </p:spPr>
+        <p:txBody>
+          <a:bodyPr wrap="square" anchor="ctr" lIns="0" tIns="0" rIns="0" bIns="0">
+            <a:noAutofit/>
+          </a:bodyPr>
+          <a:lstStyle/>
+          <a:p>
+            <a:pPr algn="l" latinLnBrk="0">
+              <a:lnSpc>
+                <a:spcPct val="100000"/>
+              </a:lnSpc>
+              <a:spcBef>
+                <a:spcPts val="0"/>
+              </a:spcBef>
+              <a:spcAft>
+                <a:spcPts val="0"/>
+              </a:spcAft>
+            </a:pPr>
+            <a:r>
+              <a:rPr sz="1000" b="0">
+                <a:solidFill>
+                  <a:srgbClr val="40708B"/>
+                </a:solidFill>
+                <a:latin typeface="Microsoft YaHei"/>
+                <a:ea typeface="Microsoft YaHei"/>
+                <a:cs typeface="Microsoft YaHei"/>
+              </a:rPr>
+              <a:t>C 列是内核或微基准读数，D 列是整步或端到端读数，两列口径不同、不能互相换算；表中全部为 M100 单卡 TP1</a:t>
+            </a:r>
+          </a:p>
+        </p:txBody>
+      </p:sp>
+    </p:spTree>
+  </p:cSld>
+  <p:clrMapOvr>
+    <a:masterClrMapping/>
+  </p:clrMapOvr>
+</p:sld>
+</file>
+
+<file path=ppt/slides/slide3.xml><?xml version="1.0" encoding="utf-8"?>
 <p:sld xmlns:a="http://schemas.openxmlformats.org/drawingml/2006/main" xmlns:p="http://schemas.openxmlformats.org/presentationml/2006/main" xmlns:r="http://schemas.openxmlformats.org/officeDocument/2006/relationships">
   <p:cSld>
     <p:spTree>
